--- a/docs/presentations/internal-brain-architecture.pptx
+++ b/docs/presentations/internal-brain-architecture.pptx
@@ -18,9 +18,11 @@
     <p:sldId id="266" r:id="rId12"/>
     <p:sldId id="267" r:id="rId13"/>
     <p:sldId id="268" r:id="rId14"/>
+    <p:sldId id="269" r:id="rId15"/>
+    <p:sldId id="270" r:id="rId16"/>
   </p:sldIdLst>
   <p:notesMasterIdLst>
-    <p:notesMasterId r:id="rId15"/>
+    <p:notesMasterId r:id="rId17"/>
   </p:notesMasterIdLst>
   <p:sldSz cx="12192000" cy="6858000"/>
   <p:notesSz cx="6858000" cy="12192000"/>
@@ -119,21 +121,21 @@
   <p:extLst>
     <p:ext uri="{521415D9-36F7-43E2-AB2F-B90AF26B5E84}">
       <p14:sectionLst xmlns:p14="http://schemas.microsoft.com/office/powerpoint/2010/main">
-        <p14:section name="Story" id="{23128095-eb07-5790-af6a-2c1497a8e41e}">
+        <p14:section name="Story" id="{f520bbec-606d-1c50-e252-1d01fc6d35c0}">
           <p14:sldIdLst>
             <p14:sldId id="256"/>
             <p14:sldId id="257"/>
             <p14:sldId id="258"/>
           </p14:sldIdLst>
         </p14:section>
-        <p14:section name="Architecture" id="{2eab49b5-029c-9361-cc44-e8a3194f9440}">
+        <p14:section name="Architecture" id="{b5892f4c-b397-0d6d-6185-c9bb09481ba2}">
           <p14:sldIdLst>
             <p14:sldId id="259"/>
             <p14:sldId id="260"/>
             <p14:sldId id="261"/>
           </p14:sldIdLst>
         </p14:section>
-        <p14:section name="Proof" id="{99c83ebf-4852-b5bc-515a-3a938aa577f4}">
+        <p14:section name="Proof" id="{365c7136-920d-d024-ea8c-6d370e07bbde}">
           <p14:sldIdLst>
             <p14:sldId id="262"/>
             <p14:sldId id="263"/>
@@ -141,11 +143,13 @@
             <p14:sldId id="265"/>
             <p14:sldId id="266"/>
             <p14:sldId id="267"/>
+            <p14:sldId id="268"/>
+            <p14:sldId id="269"/>
           </p14:sldIdLst>
         </p14:section>
-        <p14:section name="Internal" id="{b3c9a5ef-e931-afdb-152d-136fe91e3522}">
+        <p14:section name="Internal" id="{d0484ad6-48e9-2dbe-f0b1-d03079716c69}">
           <p14:sldIdLst>
-            <p14:sldId id="268"/>
+            <p14:sldId id="270"/>
           </p14:sldIdLst>
         </p14:section>
       </p14:sectionLst>
@@ -155,6 +159,286 @@
     </p:ext>
   </p:extLst>
 </p:presentation>
+</file>
+
+<file path=ppt/charts/chart1.xml><?xml version="1.0" encoding="utf-8"?>
+<c:chartSpace xmlns:c="http://schemas.openxmlformats.org/drawingml/2006/chart" xmlns:a="http://schemas.openxmlformats.org/drawingml/2006/main" xmlns:r="http://schemas.openxmlformats.org/officeDocument/2006/relationships">
+  <c:date1904 val="0"/>
+  <c:roundedCorners val="1"/>
+  <c:chart>
+    <c:autoTitleDeleted val="1"/>
+    <c:plotArea>
+      <c:layout/>
+      <c:barChart>
+        <c:barDir val="bar"/>
+        <c:grouping val="clustered"/>
+        <c:varyColors val="0"/>
+        <c:ser>
+          <c:idx val="0"/>
+          <c:order val="0"/>
+          <c:tx>
+            <c:strRef>
+              <c:f>Sheet1!$B$1</c:f>
+              <c:strCache>
+                <c:ptCount val="1"/>
+                <c:pt idx="0">
+                  <c:v>Minutes until a permission change applies</c:v>
+                </c:pt>
+              </c:strCache>
+            </c:strRef>
+          </c:tx>
+          <c:spPr>
+            <a:solidFill>
+              <a:srgbClr val="475569"/>
+            </a:solidFill>
+            <a:effectLst/>
+          </c:spPr>
+          <c:invertIfNegative val="0"/>
+          <c:dLbls>
+            <c:numFmt formatCode="#,##0&quot; min&quot;" sourceLinked="0"/>
+            <c:txPr>
+              <a:bodyPr/>
+              <a:lstStyle/>
+              <a:p>
+                <a:pPr>
+                  <a:defRPr b="1" i="0" strike="noStrike" sz="1300" u="none">
+                    <a:solidFill>
+                      <a:srgbClr val="0F172A"/>
+                    </a:solidFill>
+                    <a:latin typeface="+mn-lt"/>
+                  </a:defRPr>
+                </a:pPr>
+              </a:p>
+            </c:txPr>
+            <c:showLegendKey val="0"/>
+            <c:showVal val="1"/>
+            <c:showCatName val="0"/>
+            <c:showSerName val="0"/>
+            <c:showPercent val="0"/>
+            <c:showBubbleSize val="0"/>
+            <c:showLeaderLines val="0"/>
+          </c:dLbls>
+          <c:dPt>
+            <c:idx val="0"/>
+            <c:invertIfNegative val="0"/>
+            <c:bubble3D val="0"/>
+            <c:spPr>
+              <a:solidFill>
+                <a:srgbClr val="475569"/>
+              </a:solidFill>
+              <a:effectLst/>
+            </c:spPr>
+          </c:dPt>
+          <c:dPt>
+            <c:idx val="1"/>
+            <c:invertIfNegative val="0"/>
+            <c:bubble3D val="0"/>
+            <c:spPr>
+              <a:solidFill>
+                <a:srgbClr val="475569"/>
+              </a:solidFill>
+              <a:effectLst/>
+            </c:spPr>
+          </c:dPt>
+          <c:dPt>
+            <c:idx val="2"/>
+            <c:invertIfNegative val="0"/>
+            <c:bubble3D val="0"/>
+            <c:spPr>
+              <a:solidFill>
+                <a:srgbClr val="475569"/>
+              </a:solidFill>
+              <a:effectLst/>
+            </c:spPr>
+          </c:dPt>
+          <c:dPt>
+            <c:idx val="3"/>
+            <c:invertIfNegative val="0"/>
+            <c:bubble3D val="0"/>
+            <c:spPr>
+              <a:solidFill>
+                <a:srgbClr val="0E9F8E"/>
+              </a:solidFill>
+              <a:effectLst/>
+            </c:spPr>
+          </c:dPt>
+          <c:cat>
+            <c:multiLvlStrRef>
+              <c:f>Sheet1!$A$2:$A$5</c:f>
+              <c:multiLvlStrCache>
+                <c:ptCount val="4"/>
+                <c:lvl>
+                  <c:pt idx="0">
+                    <c:v>Microsoft 365 Copilot, Confluence connector</c:v>
+                  </c:pt>
+                  <c:pt idx="1">
+                    <c:v>Glean, Google Drive identity refresh</c:v>
+                  </c:pt>
+                  <c:pt idx="2">
+                    <c:v>Gemini Enterprise, fastest identity sync</c:v>
+                  </c:pt>
+                  <c:pt idx="3">
+                    <c:v>Internal Brain, confidential documents</c:v>
+                  </c:pt>
+                </c:lvl>
+              </c:multiLvlStrCache>
+            </c:multiLvlStrRef>
+          </c:cat>
+          <c:val>
+            <c:numRef>
+              <c:f>Sheet1!$B$2:$B$5</c:f>
+              <c:numCache>
+                <c:formatCode>General</c:formatCode>
+                <c:ptCount val="4"/>
+                <c:pt idx="0">
+                  <c:v>1440</c:v>
+                </c:pt>
+                <c:pt idx="1">
+                  <c:v>60</c:v>
+                </c:pt>
+                <c:pt idx="2">
+                  <c:v>30</c:v>
+                </c:pt>
+                <c:pt idx="3">
+                  <c:v>5</c:v>
+                </c:pt>
+              </c:numCache>
+            </c:numRef>
+          </c:val>
+        </c:ser>
+        <c:dLbls>
+          <c:numFmt formatCode="#,##0&quot; min&quot;" sourceLinked="0"/>
+          <c:txPr>
+            <a:bodyPr/>
+            <a:lstStyle/>
+            <a:p>
+              <a:pPr>
+                <a:defRPr b="1" i="0" strike="noStrike" sz="1300" u="none">
+                  <a:solidFill>
+                    <a:srgbClr val="0F172A"/>
+                  </a:solidFill>
+                  <a:latin typeface="+mn-lt"/>
+                </a:defRPr>
+              </a:pPr>
+            </a:p>
+          </c:txPr>
+          <c:showLegendKey val="0"/>
+          <c:showVal val="1"/>
+          <c:showCatName val="0"/>
+          <c:showSerName val="0"/>
+          <c:showPercent val="0"/>
+          <c:showBubbleSize val="0"/>
+          <c:showLeaderLines val="0"/>
+        </c:dLbls>
+        <c:gapWidth val="60"/>
+        <c:overlap val="0"/>
+        <c:axId val="2094734554"/>
+        <c:axId val="2094734552"/>
+        <c:axId val="2094734556"/>
+      </c:barChart>
+      <c:catAx>
+        <c:axId val="2094734554"/>
+        <c:scaling>
+          <c:orientation val="maxMin"/>
+        </c:scaling>
+        <c:delete val="0"/>
+        <c:axPos val="l"/>
+        <c:numFmt formatCode="General" sourceLinked="1"/>
+        <c:majorTickMark val="out"/>
+        <c:minorTickMark val="none"/>
+        <c:tickLblPos val="nextTo"/>
+        <c:spPr>
+          <a:ln w="12700" cap="flat">
+            <a:noFill/>
+            <a:prstDash val="solid"/>
+            <a:round/>
+          </a:ln>
+        </c:spPr>
+        <c:txPr>
+          <a:bodyPr/>
+          <a:lstStyle/>
+          <a:p>
+            <a:pPr>
+              <a:defRPr sz="1200" b="0" i="0" u="none" strike="noStrike">
+                <a:solidFill>
+                  <a:srgbClr val="0F172A"/>
+                </a:solidFill>
+                <a:latin typeface="+mn-lt"/>
+              </a:defRPr>
+            </a:pPr>
+            <a:endParaRPr lang="en-US"/>
+          </a:p>
+        </c:txPr>
+        <c:crossAx val="2094734552"/>
+        <c:crosses val="autoZero"/>
+        <c:auto val="1"/>
+        <c:lblAlgn val="ctr"/>
+        <c:noMultiLvlLbl val="1"/>
+      </c:catAx>
+      <c:valAx>
+        <c:axId val="2094734552"/>
+        <c:scaling>
+          <c:logBase val="10"/>
+          <c:orientation val="minMax"/>
+          <c:max val="10000"/>
+          <c:min val="1"/>
+        </c:scaling>
+        <c:delete val="1"/>
+        <c:axPos val="b"/>
+        <c:numFmt formatCode="General" sourceLinked="0"/>
+        <c:majorTickMark val="out"/>
+        <c:minorTickMark val="none"/>
+        <c:tickLblPos val="low"/>
+        <c:spPr>
+          <a:ln w="12700" cap="flat">
+            <a:solidFill>
+              <a:srgbClr val="888888"/>
+            </a:solidFill>
+            <a:prstDash val="solid"/>
+            <a:round/>
+          </a:ln>
+        </c:spPr>
+        <c:txPr>
+          <a:bodyPr/>
+          <a:lstStyle/>
+          <a:p>
+            <a:pPr>
+              <a:defRPr sz="1200" b="0" i="0" u="none" strike="noStrike">
+                <a:solidFill>
+                  <a:srgbClr val="000000"/>
+                </a:solidFill>
+                <a:latin typeface="Arial"/>
+              </a:defRPr>
+            </a:pPr>
+            <a:endParaRPr lang="en-US"/>
+          </a:p>
+        </c:txPr>
+        <c:crossAx val="2094734554"/>
+        <c:crosses val="autoZero"/>
+        <c:crossBetween val="between"/>
+      </c:valAx>
+      <c:spPr>
+        <a:noFill/>
+        <a:ln>
+          <a:noFill/>
+        </a:ln>
+        <a:effectLst/>
+      </c:spPr>
+    </c:plotArea>
+    <c:plotVisOnly val="1"/>
+    <c:dispBlanksAs val="span"/>
+  </c:chart>
+  <c:spPr>
+    <a:noFill/>
+    <a:ln>
+      <a:noFill/>
+    </a:ln>
+    <a:effectLst/>
+  </c:spPr>
+  <c:externalData r:id="rId1">
+    <c:autoUpdate val="0"/>
+  </c:externalData>
+</c:chartSpace>
 </file>
 
 <file path=ppt/notesMasters/notesMaster1.xml><?xml version="1.0" encoding="utf-8"?>
@@ -640,7 +924,7 @@
           <a:p>
             <a:r>
               <a:rPr lang="en-US" dirty="0"/>
-              <a:t/>
+              <a:t>We did not invent a new access model: the foundation is the one Glean, Microsoft and Google document. What we add is accountability: saved answers re-checked, every allow and deny logged in a tamper-evident chain, and a hard five-minute limit on stale permissions. Sources: Glean docs (security principles, crawl refresh rates), Microsoft Learn (Confluence Cloud connector, Purview Copilot audit), Google Cloud (Gemini Enterprise connectors), AWS Amazon Q Business connector concepts.</a:t>
             </a:r>
             <a:endParaRPr lang="en-US" dirty="0"/>
           </a:p>
@@ -928,6 +1212,182 @@
             <a:fld id="{F7021451-1387-4CA6-816F-3879F97B5CBC}" type="slidenum">
               <a:rPr lang="en-US"/>
               <a:t>13</a:t>
+            </a:fld>
+            <a:endParaRPr lang="en-US"/>
+          </a:p>
+        </p:txBody>
+      </p:sp>
+    </p:spTree>
+    <p:extLst>
+      <p:ext uri="{BB962C8B-B14F-4D97-AF65-F5344CB8AC3E}">
+        <p14:creationId xmlns:p14="http://schemas.microsoft.com/office/powerpoint/2010/main" val="1024086991"/>
+      </p:ext>
+    </p:extLst>
+  </p:cSld>
+  <p:clrMapOvr>
+    <a:masterClrMapping/>
+  </p:clrMapOvr>
+</p:notes>
+</file>
+
+<file path=ppt/notesSlides/notesSlide14.xml><?xml version="1.0" encoding="utf-8"?>
+<p:notes xmlns:a="http://schemas.openxmlformats.org/drawingml/2006/main" xmlns:r="http://schemas.openxmlformats.org/officeDocument/2006/relationships" xmlns:p="http://schemas.openxmlformats.org/presentationml/2006/main">
+  <p:cSld>
+    <p:spTree>
+      <p:nvGrpSpPr>
+        <p:cNvPr id="1" name=""/>
+        <p:cNvGrpSpPr/>
+        <p:nvPr/>
+      </p:nvGrpSpPr>
+      <p:grpSpPr>
+        <a:xfrm>
+          <a:off x="0" y="0"/>
+          <a:ext cx="0" cy="0"/>
+          <a:chOff x="0" y="0"/>
+          <a:chExt cx="0" cy="0"/>
+        </a:xfrm>
+      </p:grpSpPr>
+      <p:sp>
+        <p:nvSpPr>
+          <p:cNvPr id="2" name="Slide Image Placeholder 1"/>
+          <p:cNvSpPr>
+            <a:spLocks noGrp="1" noRot="1" noChangeAspect="1"/>
+          </p:cNvSpPr>
+          <p:nvPr>
+            <p:ph type="sldImg"/>
+          </p:nvPr>
+        </p:nvSpPr>
+        <p:spPr/>
+      </p:sp>
+      <p:sp>
+        <p:nvSpPr>
+          <p:cNvPr id="3" name="Notes Placeholder 2"/>
+          <p:cNvSpPr>
+            <a:spLocks noGrp="1"/>
+          </p:cNvSpPr>
+          <p:nvPr>
+            <p:ph type="body" idx="1"/>
+          </p:nvPr>
+        </p:nvSpPr>
+        <p:spPr/>
+        <p:txBody>
+          <a:bodyPr/>
+          <a:lstStyle/>
+          <a:p>
+            <a:r>
+              <a:rPr lang="en-US" dirty="0"/>
+              <a:t/>
+            </a:r>
+            <a:endParaRPr lang="en-US" dirty="0"/>
+          </a:p>
+        </p:txBody>
+      </p:sp>
+      <p:sp>
+        <p:nvSpPr>
+          <p:cNvPr id="4" name="Slide Number Placeholder 3"/>
+          <p:cNvSpPr>
+            <a:spLocks noGrp="1"/>
+          </p:cNvSpPr>
+          <p:nvPr>
+            <p:ph type="sldNum" sz="quarter" idx="10"/>
+          </p:nvPr>
+        </p:nvSpPr>
+        <p:spPr/>
+        <p:txBody>
+          <a:bodyPr/>
+          <a:lstStyle/>
+          <a:p>
+            <a:fld id="{F7021451-1387-4CA6-816F-3879F97B5CBC}" type="slidenum">
+              <a:rPr lang="en-US"/>
+              <a:t>14</a:t>
+            </a:fld>
+            <a:endParaRPr lang="en-US"/>
+          </a:p>
+        </p:txBody>
+      </p:sp>
+    </p:spTree>
+    <p:extLst>
+      <p:ext uri="{BB962C8B-B14F-4D97-AF65-F5344CB8AC3E}">
+        <p14:creationId xmlns:p14="http://schemas.microsoft.com/office/powerpoint/2010/main" val="1024086991"/>
+      </p:ext>
+    </p:extLst>
+  </p:cSld>
+  <p:clrMapOvr>
+    <a:masterClrMapping/>
+  </p:clrMapOvr>
+</p:notes>
+</file>
+
+<file path=ppt/notesSlides/notesSlide15.xml><?xml version="1.0" encoding="utf-8"?>
+<p:notes xmlns:a="http://schemas.openxmlformats.org/drawingml/2006/main" xmlns:r="http://schemas.openxmlformats.org/officeDocument/2006/relationships" xmlns:p="http://schemas.openxmlformats.org/presentationml/2006/main">
+  <p:cSld>
+    <p:spTree>
+      <p:nvGrpSpPr>
+        <p:cNvPr id="1" name=""/>
+        <p:cNvGrpSpPr/>
+        <p:nvPr/>
+      </p:nvGrpSpPr>
+      <p:grpSpPr>
+        <a:xfrm>
+          <a:off x="0" y="0"/>
+          <a:ext cx="0" cy="0"/>
+          <a:chOff x="0" y="0"/>
+          <a:chExt cx="0" cy="0"/>
+        </a:xfrm>
+      </p:grpSpPr>
+      <p:sp>
+        <p:nvSpPr>
+          <p:cNvPr id="2" name="Slide Image Placeholder 1"/>
+          <p:cNvSpPr>
+            <a:spLocks noGrp="1" noRot="1" noChangeAspect="1"/>
+          </p:cNvSpPr>
+          <p:nvPr>
+            <p:ph type="sldImg"/>
+          </p:nvPr>
+        </p:nvSpPr>
+        <p:spPr/>
+      </p:sp>
+      <p:sp>
+        <p:nvSpPr>
+          <p:cNvPr id="3" name="Notes Placeholder 2"/>
+          <p:cNvSpPr>
+            <a:spLocks noGrp="1"/>
+          </p:cNvSpPr>
+          <p:nvPr>
+            <p:ph type="body" idx="1"/>
+          </p:nvPr>
+        </p:nvSpPr>
+        <p:spPr/>
+        <p:txBody>
+          <a:bodyPr/>
+          <a:lstStyle/>
+          <a:p>
+            <a:r>
+              <a:rPr lang="en-US" dirty="0"/>
+              <a:t/>
+            </a:r>
+            <a:endParaRPr lang="en-US" dirty="0"/>
+          </a:p>
+        </p:txBody>
+      </p:sp>
+      <p:sp>
+        <p:nvSpPr>
+          <p:cNvPr id="4" name="Slide Number Placeholder 3"/>
+          <p:cNvSpPr>
+            <a:spLocks noGrp="1"/>
+          </p:cNvSpPr>
+          <p:nvPr>
+            <p:ph type="sldNum" sz="quarter" idx="10"/>
+          </p:nvPr>
+        </p:nvSpPr>
+        <p:spPr/>
+        <p:txBody>
+          <a:bodyPr/>
+          <a:lstStyle/>
+          <a:p>
+            <a:fld id="{F7021451-1387-4CA6-816F-3879F97B5CBC}" type="slidenum">
+              <a:rPr lang="en-US"/>
+              <a:t>15</a:t>
             </a:fld>
             <a:endParaRPr lang="en-US"/>
           </a:p>
@@ -3102,7 +3562,7 @@
                   <a:schemeClr val="tx2"/>
                 </a:solidFill>
               </a:rPr>
-              <a:t>Design trade-offs we chose deliberately</a:t>
+              <a:t>Same foundation as Glean and Copilot, plus what they don't document</a:t>
             </a:r>
             <a:endParaRPr lang="en-US" sz="2800" dirty="0"/>
           </a:p>
@@ -3110,7 +3570,3091 @@
       </p:sp>
       <p:graphicFrame>
         <p:nvGraphicFramePr>
-          <p:cNvPr id="11" name="tradeoff-table-268"/>
+          <p:cNvPr id="11" name="comparison-table-268"/>
+          <p:cNvGraphicFramePr>
+            <a:graphicFrameLocks noGrp="1"/>
+          </p:cNvGraphicFramePr>
+          <p:nvPr>
+            <p:extLst>
+              <p:ext uri="{D42A27DB-BD31-4B8C-83A1-F6EECF244321}">
+                <p14:modId xmlns:p14="http://schemas.microsoft.com/office/powerpoint/2010/main" val="1579011935"/>
+              </p:ext>
+            </p:extLst>
+          </p:nvPr>
+        </p:nvGraphicFramePr>
+        <p:xfrm>
+          <a:off x="548640" y="1325880"/>
+          <a:ext cx="11064240" cy="914400"/>
+        </p:xfrm>
+        <a:graphic>
+          <a:graphicData uri="http://schemas.openxmlformats.org/drawingml/2006/table">
+            <a:tbl>
+              <a:tblPr/>
+              <a:tblGrid>
+                <a:gridCol w="2651760"/>
+                <a:gridCol w="1554480"/>
+                <a:gridCol w="1783080"/>
+                <a:gridCol w="1691640"/>
+                <a:gridCol w="1691640"/>
+                <a:gridCol w="1691640"/>
+              </a:tblGrid>
+              <a:tr h="457200">
+                <a:tc>
+                  <a:txBody>
+                    <a:bodyPr/>
+                    <a:lstStyle/>
+                    <a:p>
+                      <a:pPr indent="0" marL="0">
+                        <a:buNone/>
+                      </a:pPr>
+                      <a:endParaRPr lang="en-US" sz="1150" dirty="0"/>
+                    </a:p>
+                  </a:txBody>
+                  <a:tcPr marL="73152" marR="73152" marT="45720" marB="45720" anchor="ctr">
+                    <a:lnL w="9525" cap="flat" cmpd="sng" algn="ctr">
+                      <a:solidFill>
+                        <a:srgbClr val="CBD5E1"/>
+                      </a:solidFill>
+                      <a:prstDash val="solid"/>
+                      <a:round/>
+                      <a:headEnd type="none" w="med" len="med"/>
+                      <a:tailEnd type="none" w="med" len="med"/>
+                    </a:lnL>
+                    <a:lnR w="9525" cap="flat" cmpd="sng" algn="ctr">
+                      <a:solidFill>
+                        <a:srgbClr val="CBD5E1"/>
+                      </a:solidFill>
+                      <a:prstDash val="solid"/>
+                      <a:round/>
+                      <a:headEnd type="none" w="med" len="med"/>
+                      <a:tailEnd type="none" w="med" len="med"/>
+                    </a:lnR>
+                    <a:lnT w="9525" cap="flat" cmpd="sng" algn="ctr">
+                      <a:solidFill>
+                        <a:srgbClr val="CBD5E1"/>
+                      </a:solidFill>
+                      <a:prstDash val="solid"/>
+                      <a:round/>
+                      <a:headEnd type="none" w="med" len="med"/>
+                      <a:tailEnd type="none" w="med" len="med"/>
+                    </a:lnT>
+                    <a:lnB w="9525" cap="flat" cmpd="sng" algn="ctr">
+                      <a:solidFill>
+                        <a:srgbClr val="CBD5E1"/>
+                      </a:solidFill>
+                      <a:prstDash val="solid"/>
+                      <a:round/>
+                      <a:headEnd type="none" w="med" len="med"/>
+                      <a:tailEnd type="none" w="med" len="med"/>
+                    </a:lnB>
+                    <a:solidFill>
+                      <a:schemeClr val="tx2"/>
+                    </a:solidFill>
+                  </a:tcPr>
+                </a:tc>
+                <a:tc>
+                  <a:txBody>
+                    <a:bodyPr/>
+                    <a:lstStyle/>
+                    <a:p>
+                      <a:pPr algn="ctr" indent="0" marL="0">
+                        <a:buNone/>
+                      </a:pPr>
+                      <a:r>
+                        <a:rPr lang="en-US" sz="1200" b="1" dirty="0">
+                          <a:solidFill>
+                            <a:schemeClr val="bg1"/>
+                          </a:solidFill>
+                        </a:rPr>
+                        <a:t>Glean</a:t>
+                      </a:r>
+                      <a:endParaRPr lang="en-US" sz="1200" dirty="0"/>
+                    </a:p>
+                  </a:txBody>
+                  <a:tcPr marL="73152" marR="73152" marT="45720" marB="45720" anchor="ctr">
+                    <a:lnL w="9525" cap="flat" cmpd="sng" algn="ctr">
+                      <a:solidFill>
+                        <a:srgbClr val="CBD5E1"/>
+                      </a:solidFill>
+                      <a:prstDash val="solid"/>
+                      <a:round/>
+                      <a:headEnd type="none" w="med" len="med"/>
+                      <a:tailEnd type="none" w="med" len="med"/>
+                    </a:lnL>
+                    <a:lnR w="9525" cap="flat" cmpd="sng" algn="ctr">
+                      <a:solidFill>
+                        <a:srgbClr val="CBD5E1"/>
+                      </a:solidFill>
+                      <a:prstDash val="solid"/>
+                      <a:round/>
+                      <a:headEnd type="none" w="med" len="med"/>
+                      <a:tailEnd type="none" w="med" len="med"/>
+                    </a:lnR>
+                    <a:lnT w="9525" cap="flat" cmpd="sng" algn="ctr">
+                      <a:solidFill>
+                        <a:srgbClr val="CBD5E1"/>
+                      </a:solidFill>
+                      <a:prstDash val="solid"/>
+                      <a:round/>
+                      <a:headEnd type="none" w="med" len="med"/>
+                      <a:tailEnd type="none" w="med" len="med"/>
+                    </a:lnT>
+                    <a:lnB w="9525" cap="flat" cmpd="sng" algn="ctr">
+                      <a:solidFill>
+                        <a:srgbClr val="CBD5E1"/>
+                      </a:solidFill>
+                      <a:prstDash val="solid"/>
+                      <a:round/>
+                      <a:headEnd type="none" w="med" len="med"/>
+                      <a:tailEnd type="none" w="med" len="med"/>
+                    </a:lnB>
+                    <a:solidFill>
+                      <a:schemeClr val="tx2"/>
+                    </a:solidFill>
+                  </a:tcPr>
+                </a:tc>
+                <a:tc>
+                  <a:txBody>
+                    <a:bodyPr/>
+                    <a:lstStyle/>
+                    <a:p>
+                      <a:pPr algn="ctr" indent="0" marL="0">
+                        <a:buNone/>
+                      </a:pPr>
+                      <a:r>
+                        <a:rPr lang="en-US" sz="1200" b="1" dirty="0">
+                          <a:solidFill>
+                            <a:schemeClr val="bg1"/>
+                          </a:solidFill>
+                        </a:rPr>
+                        <a:t>Microsoft 365 Copilot</a:t>
+                      </a:r>
+                      <a:endParaRPr lang="en-US" sz="1200" dirty="0"/>
+                    </a:p>
+                  </a:txBody>
+                  <a:tcPr marL="73152" marR="73152" marT="45720" marB="45720" anchor="ctr">
+                    <a:lnL w="9525" cap="flat" cmpd="sng" algn="ctr">
+                      <a:solidFill>
+                        <a:srgbClr val="CBD5E1"/>
+                      </a:solidFill>
+                      <a:prstDash val="solid"/>
+                      <a:round/>
+                      <a:headEnd type="none" w="med" len="med"/>
+                      <a:tailEnd type="none" w="med" len="med"/>
+                    </a:lnL>
+                    <a:lnR w="9525" cap="flat" cmpd="sng" algn="ctr">
+                      <a:solidFill>
+                        <a:srgbClr val="CBD5E1"/>
+                      </a:solidFill>
+                      <a:prstDash val="solid"/>
+                      <a:round/>
+                      <a:headEnd type="none" w="med" len="med"/>
+                      <a:tailEnd type="none" w="med" len="med"/>
+                    </a:lnR>
+                    <a:lnT w="9525" cap="flat" cmpd="sng" algn="ctr">
+                      <a:solidFill>
+                        <a:srgbClr val="CBD5E1"/>
+                      </a:solidFill>
+                      <a:prstDash val="solid"/>
+                      <a:round/>
+                      <a:headEnd type="none" w="med" len="med"/>
+                      <a:tailEnd type="none" w="med" len="med"/>
+                    </a:lnT>
+                    <a:lnB w="9525" cap="flat" cmpd="sng" algn="ctr">
+                      <a:solidFill>
+                        <a:srgbClr val="CBD5E1"/>
+                      </a:solidFill>
+                      <a:prstDash val="solid"/>
+                      <a:round/>
+                      <a:headEnd type="none" w="med" len="med"/>
+                      <a:tailEnd type="none" w="med" len="med"/>
+                    </a:lnB>
+                    <a:solidFill>
+                      <a:schemeClr val="tx2"/>
+                    </a:solidFill>
+                  </a:tcPr>
+                </a:tc>
+                <a:tc>
+                  <a:txBody>
+                    <a:bodyPr/>
+                    <a:lstStyle/>
+                    <a:p>
+                      <a:pPr algn="ctr" indent="0" marL="0">
+                        <a:buNone/>
+                      </a:pPr>
+                      <a:r>
+                        <a:rPr lang="en-US" sz="1200" b="1" dirty="0">
+                          <a:solidFill>
+                            <a:schemeClr val="bg1"/>
+                          </a:solidFill>
+                        </a:rPr>
+                        <a:t>Gemini Enterprise</a:t>
+                      </a:r>
+                      <a:endParaRPr lang="en-US" sz="1200" dirty="0"/>
+                    </a:p>
+                  </a:txBody>
+                  <a:tcPr marL="73152" marR="73152" marT="45720" marB="45720" anchor="ctr">
+                    <a:lnL w="9525" cap="flat" cmpd="sng" algn="ctr">
+                      <a:solidFill>
+                        <a:srgbClr val="CBD5E1"/>
+                      </a:solidFill>
+                      <a:prstDash val="solid"/>
+                      <a:round/>
+                      <a:headEnd type="none" w="med" len="med"/>
+                      <a:tailEnd type="none" w="med" len="med"/>
+                    </a:lnL>
+                    <a:lnR w="9525" cap="flat" cmpd="sng" algn="ctr">
+                      <a:solidFill>
+                        <a:srgbClr val="CBD5E1"/>
+                      </a:solidFill>
+                      <a:prstDash val="solid"/>
+                      <a:round/>
+                      <a:headEnd type="none" w="med" len="med"/>
+                      <a:tailEnd type="none" w="med" len="med"/>
+                    </a:lnR>
+                    <a:lnT w="9525" cap="flat" cmpd="sng" algn="ctr">
+                      <a:solidFill>
+                        <a:srgbClr val="CBD5E1"/>
+                      </a:solidFill>
+                      <a:prstDash val="solid"/>
+                      <a:round/>
+                      <a:headEnd type="none" w="med" len="med"/>
+                      <a:tailEnd type="none" w="med" len="med"/>
+                    </a:lnT>
+                    <a:lnB w="9525" cap="flat" cmpd="sng" algn="ctr">
+                      <a:solidFill>
+                        <a:srgbClr val="CBD5E1"/>
+                      </a:solidFill>
+                      <a:prstDash val="solid"/>
+                      <a:round/>
+                      <a:headEnd type="none" w="med" len="med"/>
+                      <a:tailEnd type="none" w="med" len="med"/>
+                    </a:lnB>
+                    <a:solidFill>
+                      <a:schemeClr val="tx2"/>
+                    </a:solidFill>
+                  </a:tcPr>
+                </a:tc>
+                <a:tc>
+                  <a:txBody>
+                    <a:bodyPr/>
+                    <a:lstStyle/>
+                    <a:p>
+                      <a:pPr algn="ctr" indent="0" marL="0">
+                        <a:buNone/>
+                      </a:pPr>
+                      <a:r>
+                        <a:rPr lang="en-US" sz="1200" b="1" dirty="0">
+                          <a:solidFill>
+                            <a:schemeClr val="bg1"/>
+                          </a:solidFill>
+                        </a:rPr>
+                        <a:t>Amazon Q Business</a:t>
+                      </a:r>
+                      <a:endParaRPr lang="en-US" sz="1200" dirty="0"/>
+                    </a:p>
+                  </a:txBody>
+                  <a:tcPr marL="73152" marR="73152" marT="45720" marB="45720" anchor="ctr">
+                    <a:lnL w="9525" cap="flat" cmpd="sng" algn="ctr">
+                      <a:solidFill>
+                        <a:srgbClr val="CBD5E1"/>
+                      </a:solidFill>
+                      <a:prstDash val="solid"/>
+                      <a:round/>
+                      <a:headEnd type="none" w="med" len="med"/>
+                      <a:tailEnd type="none" w="med" len="med"/>
+                    </a:lnL>
+                    <a:lnR w="9525" cap="flat" cmpd="sng" algn="ctr">
+                      <a:solidFill>
+                        <a:srgbClr val="CBD5E1"/>
+                      </a:solidFill>
+                      <a:prstDash val="solid"/>
+                      <a:round/>
+                      <a:headEnd type="none" w="med" len="med"/>
+                      <a:tailEnd type="none" w="med" len="med"/>
+                    </a:lnR>
+                    <a:lnT w="9525" cap="flat" cmpd="sng" algn="ctr">
+                      <a:solidFill>
+                        <a:srgbClr val="CBD5E1"/>
+                      </a:solidFill>
+                      <a:prstDash val="solid"/>
+                      <a:round/>
+                      <a:headEnd type="none" w="med" len="med"/>
+                      <a:tailEnd type="none" w="med" len="med"/>
+                    </a:lnT>
+                    <a:lnB w="9525" cap="flat" cmpd="sng" algn="ctr">
+                      <a:solidFill>
+                        <a:srgbClr val="CBD5E1"/>
+                      </a:solidFill>
+                      <a:prstDash val="solid"/>
+                      <a:round/>
+                      <a:headEnd type="none" w="med" len="med"/>
+                      <a:tailEnd type="none" w="med" len="med"/>
+                    </a:lnB>
+                    <a:solidFill>
+                      <a:schemeClr val="tx2"/>
+                    </a:solidFill>
+                  </a:tcPr>
+                </a:tc>
+                <a:tc>
+                  <a:txBody>
+                    <a:bodyPr/>
+                    <a:lstStyle/>
+                    <a:p>
+                      <a:pPr algn="ctr" indent="0" marL="0">
+                        <a:buNone/>
+                      </a:pPr>
+                      <a:r>
+                        <a:rPr lang="en-US" sz="1200" b="1" dirty="0">
+                          <a:solidFill>
+                            <a:schemeClr val="bg1"/>
+                          </a:solidFill>
+                        </a:rPr>
+                        <a:t>Internal Brain</a:t>
+                      </a:r>
+                      <a:endParaRPr lang="en-US" sz="1200" dirty="0"/>
+                    </a:p>
+                  </a:txBody>
+                  <a:tcPr marL="73152" marR="73152" marT="45720" marB="45720" anchor="ctr">
+                    <a:lnL w="9525" cap="flat" cmpd="sng" algn="ctr">
+                      <a:solidFill>
+                        <a:srgbClr val="CBD5E1"/>
+                      </a:solidFill>
+                      <a:prstDash val="solid"/>
+                      <a:round/>
+                      <a:headEnd type="none" w="med" len="med"/>
+                      <a:tailEnd type="none" w="med" len="med"/>
+                    </a:lnL>
+                    <a:lnR w="9525" cap="flat" cmpd="sng" algn="ctr">
+                      <a:solidFill>
+                        <a:srgbClr val="CBD5E1"/>
+                      </a:solidFill>
+                      <a:prstDash val="solid"/>
+                      <a:round/>
+                      <a:headEnd type="none" w="med" len="med"/>
+                      <a:tailEnd type="none" w="med" len="med"/>
+                    </a:lnR>
+                    <a:lnT w="9525" cap="flat" cmpd="sng" algn="ctr">
+                      <a:solidFill>
+                        <a:srgbClr val="CBD5E1"/>
+                      </a:solidFill>
+                      <a:prstDash val="solid"/>
+                      <a:round/>
+                      <a:headEnd type="none" w="med" len="med"/>
+                      <a:tailEnd type="none" w="med" len="med"/>
+                    </a:lnT>
+                    <a:lnB w="9525" cap="flat" cmpd="sng" algn="ctr">
+                      <a:solidFill>
+                        <a:srgbClr val="CBD5E1"/>
+                      </a:solidFill>
+                      <a:prstDash val="solid"/>
+                      <a:round/>
+                      <a:headEnd type="none" w="med" len="med"/>
+                      <a:tailEnd type="none" w="med" len="med"/>
+                    </a:lnB>
+                    <a:solidFill>
+                      <a:schemeClr val="accent1"/>
+                    </a:solidFill>
+                  </a:tcPr>
+                </a:tc>
+              </a:tr>
+              <a:tr h="566928">
+                <a:tc>
+                  <a:txBody>
+                    <a:bodyPr/>
+                    <a:lstStyle/>
+                    <a:p>
+                      <a:pPr indent="0" marL="0">
+                        <a:buNone/>
+                      </a:pPr>
+                      <a:r>
+                        <a:rPr lang="en-US" sz="1150" b="1" dirty="0">
+                          <a:solidFill>
+                            <a:schemeClr val="tx2"/>
+                          </a:solidFill>
+                        </a:rPr>
+                        <a:t>Filters evidence before the model</a:t>
+                      </a:r>
+                      <a:endParaRPr lang="en-US" sz="1150" dirty="0"/>
+                    </a:p>
+                  </a:txBody>
+                  <a:tcPr marL="73152" marR="73152" marT="45720" marB="45720" anchor="ctr">
+                    <a:lnL w="9525" cap="flat" cmpd="sng" algn="ctr">
+                      <a:solidFill>
+                        <a:srgbClr val="CBD5E1"/>
+                      </a:solidFill>
+                      <a:prstDash val="solid"/>
+                      <a:round/>
+                      <a:headEnd type="none" w="med" len="med"/>
+                      <a:tailEnd type="none" w="med" len="med"/>
+                    </a:lnL>
+                    <a:lnR w="9525" cap="flat" cmpd="sng" algn="ctr">
+                      <a:solidFill>
+                        <a:srgbClr val="CBD5E1"/>
+                      </a:solidFill>
+                      <a:prstDash val="solid"/>
+                      <a:round/>
+                      <a:headEnd type="none" w="med" len="med"/>
+                      <a:tailEnd type="none" w="med" len="med"/>
+                    </a:lnR>
+                    <a:lnT w="9525" cap="flat" cmpd="sng" algn="ctr">
+                      <a:solidFill>
+                        <a:srgbClr val="CBD5E1"/>
+                      </a:solidFill>
+                      <a:prstDash val="solid"/>
+                      <a:round/>
+                      <a:headEnd type="none" w="med" len="med"/>
+                      <a:tailEnd type="none" w="med" len="med"/>
+                    </a:lnT>
+                    <a:lnB w="9525" cap="flat" cmpd="sng" algn="ctr">
+                      <a:solidFill>
+                        <a:srgbClr val="CBD5E1"/>
+                      </a:solidFill>
+                      <a:prstDash val="solid"/>
+                      <a:round/>
+                      <a:headEnd type="none" w="med" len="med"/>
+                      <a:tailEnd type="none" w="med" len="med"/>
+                    </a:lnB>
+                    <a:solidFill>
+                      <a:schemeClr val="bg1"/>
+                    </a:solidFill>
+                  </a:tcPr>
+                </a:tc>
+                <a:tc>
+                  <a:txBody>
+                    <a:bodyPr/>
+                    <a:lstStyle/>
+                    <a:p>
+                      <a:pPr algn="ctr" indent="0" marL="0">
+                        <a:buNone/>
+                      </a:pPr>
+                      <a:r>
+                        <a:rPr lang="en-US" sz="1150" b="1" dirty="0">
+                          <a:solidFill>
+                            <a:schemeClr val="accent1"/>
+                          </a:solidFill>
+                        </a:rPr>
+                        <a:t>Yes</a:t>
+                      </a:r>
+                      <a:endParaRPr lang="en-US" sz="1150" dirty="0"/>
+                    </a:p>
+                  </a:txBody>
+                  <a:tcPr marL="73152" marR="73152" marT="45720" marB="45720" anchor="ctr">
+                    <a:lnL w="9525" cap="flat" cmpd="sng" algn="ctr">
+                      <a:solidFill>
+                        <a:srgbClr val="CBD5E1"/>
+                      </a:solidFill>
+                      <a:prstDash val="solid"/>
+                      <a:round/>
+                      <a:headEnd type="none" w="med" len="med"/>
+                      <a:tailEnd type="none" w="med" len="med"/>
+                    </a:lnL>
+                    <a:lnR w="9525" cap="flat" cmpd="sng" algn="ctr">
+                      <a:solidFill>
+                        <a:srgbClr val="CBD5E1"/>
+                      </a:solidFill>
+                      <a:prstDash val="solid"/>
+                      <a:round/>
+                      <a:headEnd type="none" w="med" len="med"/>
+                      <a:tailEnd type="none" w="med" len="med"/>
+                    </a:lnR>
+                    <a:lnT w="9525" cap="flat" cmpd="sng" algn="ctr">
+                      <a:solidFill>
+                        <a:srgbClr val="CBD5E1"/>
+                      </a:solidFill>
+                      <a:prstDash val="solid"/>
+                      <a:round/>
+                      <a:headEnd type="none" w="med" len="med"/>
+                      <a:tailEnd type="none" w="med" len="med"/>
+                    </a:lnT>
+                    <a:lnB w="9525" cap="flat" cmpd="sng" algn="ctr">
+                      <a:solidFill>
+                        <a:srgbClr val="CBD5E1"/>
+                      </a:solidFill>
+                      <a:prstDash val="solid"/>
+                      <a:round/>
+                      <a:headEnd type="none" w="med" len="med"/>
+                      <a:tailEnd type="none" w="med" len="med"/>
+                    </a:lnB>
+                    <a:solidFill>
+                      <a:schemeClr val="bg1"/>
+                    </a:solidFill>
+                  </a:tcPr>
+                </a:tc>
+                <a:tc>
+                  <a:txBody>
+                    <a:bodyPr/>
+                    <a:lstStyle/>
+                    <a:p>
+                      <a:pPr algn="ctr" indent="0" marL="0">
+                        <a:buNone/>
+                      </a:pPr>
+                      <a:r>
+                        <a:rPr lang="en-US" sz="1150" b="1" dirty="0">
+                          <a:solidFill>
+                            <a:schemeClr val="accent1"/>
+                          </a:solidFill>
+                        </a:rPr>
+                        <a:t>Yes</a:t>
+                      </a:r>
+                      <a:endParaRPr lang="en-US" sz="1150" dirty="0"/>
+                    </a:p>
+                  </a:txBody>
+                  <a:tcPr marL="73152" marR="73152" marT="45720" marB="45720" anchor="ctr">
+                    <a:lnL w="9525" cap="flat" cmpd="sng" algn="ctr">
+                      <a:solidFill>
+                        <a:srgbClr val="CBD5E1"/>
+                      </a:solidFill>
+                      <a:prstDash val="solid"/>
+                      <a:round/>
+                      <a:headEnd type="none" w="med" len="med"/>
+                      <a:tailEnd type="none" w="med" len="med"/>
+                    </a:lnL>
+                    <a:lnR w="9525" cap="flat" cmpd="sng" algn="ctr">
+                      <a:solidFill>
+                        <a:srgbClr val="CBD5E1"/>
+                      </a:solidFill>
+                      <a:prstDash val="solid"/>
+                      <a:round/>
+                      <a:headEnd type="none" w="med" len="med"/>
+                      <a:tailEnd type="none" w="med" len="med"/>
+                    </a:lnR>
+                    <a:lnT w="9525" cap="flat" cmpd="sng" algn="ctr">
+                      <a:solidFill>
+                        <a:srgbClr val="CBD5E1"/>
+                      </a:solidFill>
+                      <a:prstDash val="solid"/>
+                      <a:round/>
+                      <a:headEnd type="none" w="med" len="med"/>
+                      <a:tailEnd type="none" w="med" len="med"/>
+                    </a:lnT>
+                    <a:lnB w="9525" cap="flat" cmpd="sng" algn="ctr">
+                      <a:solidFill>
+                        <a:srgbClr val="CBD5E1"/>
+                      </a:solidFill>
+                      <a:prstDash val="solid"/>
+                      <a:round/>
+                      <a:headEnd type="none" w="med" len="med"/>
+                      <a:tailEnd type="none" w="med" len="med"/>
+                    </a:lnB>
+                    <a:solidFill>
+                      <a:schemeClr val="bg1"/>
+                    </a:solidFill>
+                  </a:tcPr>
+                </a:tc>
+                <a:tc>
+                  <a:txBody>
+                    <a:bodyPr/>
+                    <a:lstStyle/>
+                    <a:p>
+                      <a:pPr algn="ctr" indent="0" marL="0">
+                        <a:buNone/>
+                      </a:pPr>
+                      <a:r>
+                        <a:rPr lang="en-US" sz="1150" b="1" dirty="0">
+                          <a:solidFill>
+                            <a:schemeClr val="accent1"/>
+                          </a:solidFill>
+                        </a:rPr>
+                        <a:t>Yes</a:t>
+                      </a:r>
+                      <a:endParaRPr lang="en-US" sz="1150" dirty="0"/>
+                    </a:p>
+                  </a:txBody>
+                  <a:tcPr marL="73152" marR="73152" marT="45720" marB="45720" anchor="ctr">
+                    <a:lnL w="9525" cap="flat" cmpd="sng" algn="ctr">
+                      <a:solidFill>
+                        <a:srgbClr val="CBD5E1"/>
+                      </a:solidFill>
+                      <a:prstDash val="solid"/>
+                      <a:round/>
+                      <a:headEnd type="none" w="med" len="med"/>
+                      <a:tailEnd type="none" w="med" len="med"/>
+                    </a:lnL>
+                    <a:lnR w="9525" cap="flat" cmpd="sng" algn="ctr">
+                      <a:solidFill>
+                        <a:srgbClr val="CBD5E1"/>
+                      </a:solidFill>
+                      <a:prstDash val="solid"/>
+                      <a:round/>
+                      <a:headEnd type="none" w="med" len="med"/>
+                      <a:tailEnd type="none" w="med" len="med"/>
+                    </a:lnR>
+                    <a:lnT w="9525" cap="flat" cmpd="sng" algn="ctr">
+                      <a:solidFill>
+                        <a:srgbClr val="CBD5E1"/>
+                      </a:solidFill>
+                      <a:prstDash val="solid"/>
+                      <a:round/>
+                      <a:headEnd type="none" w="med" len="med"/>
+                      <a:tailEnd type="none" w="med" len="med"/>
+                    </a:lnT>
+                    <a:lnB w="9525" cap="flat" cmpd="sng" algn="ctr">
+                      <a:solidFill>
+                        <a:srgbClr val="CBD5E1"/>
+                      </a:solidFill>
+                      <a:prstDash val="solid"/>
+                      <a:round/>
+                      <a:headEnd type="none" w="med" len="med"/>
+                      <a:tailEnd type="none" w="med" len="med"/>
+                    </a:lnB>
+                    <a:solidFill>
+                      <a:schemeClr val="bg1"/>
+                    </a:solidFill>
+                  </a:tcPr>
+                </a:tc>
+                <a:tc>
+                  <a:txBody>
+                    <a:bodyPr/>
+                    <a:lstStyle/>
+                    <a:p>
+                      <a:pPr algn="ctr" indent="0" marL="0">
+                        <a:buNone/>
+                      </a:pPr>
+                      <a:r>
+                        <a:rPr lang="en-US" sz="1150" b="1" dirty="0">
+                          <a:solidFill>
+                            <a:schemeClr val="accent1"/>
+                          </a:solidFill>
+                        </a:rPr>
+                        <a:t>Yes</a:t>
+                      </a:r>
+                      <a:endParaRPr lang="en-US" sz="1150" dirty="0"/>
+                    </a:p>
+                  </a:txBody>
+                  <a:tcPr marL="73152" marR="73152" marT="45720" marB="45720" anchor="ctr">
+                    <a:lnL w="9525" cap="flat" cmpd="sng" algn="ctr">
+                      <a:solidFill>
+                        <a:srgbClr val="CBD5E1"/>
+                      </a:solidFill>
+                      <a:prstDash val="solid"/>
+                      <a:round/>
+                      <a:headEnd type="none" w="med" len="med"/>
+                      <a:tailEnd type="none" w="med" len="med"/>
+                    </a:lnL>
+                    <a:lnR w="9525" cap="flat" cmpd="sng" algn="ctr">
+                      <a:solidFill>
+                        <a:srgbClr val="CBD5E1"/>
+                      </a:solidFill>
+                      <a:prstDash val="solid"/>
+                      <a:round/>
+                      <a:headEnd type="none" w="med" len="med"/>
+                      <a:tailEnd type="none" w="med" len="med"/>
+                    </a:lnR>
+                    <a:lnT w="9525" cap="flat" cmpd="sng" algn="ctr">
+                      <a:solidFill>
+                        <a:srgbClr val="CBD5E1"/>
+                      </a:solidFill>
+                      <a:prstDash val="solid"/>
+                      <a:round/>
+                      <a:headEnd type="none" w="med" len="med"/>
+                      <a:tailEnd type="none" w="med" len="med"/>
+                    </a:lnT>
+                    <a:lnB w="9525" cap="flat" cmpd="sng" algn="ctr">
+                      <a:solidFill>
+                        <a:srgbClr val="CBD5E1"/>
+                      </a:solidFill>
+                      <a:prstDash val="solid"/>
+                      <a:round/>
+                      <a:headEnd type="none" w="med" len="med"/>
+                      <a:tailEnd type="none" w="med" len="med"/>
+                    </a:lnB>
+                    <a:solidFill>
+                      <a:schemeClr val="bg1"/>
+                    </a:solidFill>
+                  </a:tcPr>
+                </a:tc>
+                <a:tc>
+                  <a:txBody>
+                    <a:bodyPr/>
+                    <a:lstStyle/>
+                    <a:p>
+                      <a:pPr algn="ctr" indent="0" marL="0">
+                        <a:buNone/>
+                      </a:pPr>
+                      <a:r>
+                        <a:rPr lang="en-US" sz="1150" b="1" dirty="0">
+                          <a:solidFill>
+                            <a:schemeClr val="accent1"/>
+                          </a:solidFill>
+                        </a:rPr>
+                        <a:t>Yes</a:t>
+                      </a:r>
+                      <a:endParaRPr lang="en-US" sz="1150" dirty="0"/>
+                    </a:p>
+                  </a:txBody>
+                  <a:tcPr marL="73152" marR="73152" marT="45720" marB="45720" anchor="ctr">
+                    <a:lnL w="9525" cap="flat" cmpd="sng" algn="ctr">
+                      <a:solidFill>
+                        <a:srgbClr val="CBD5E1"/>
+                      </a:solidFill>
+                      <a:prstDash val="solid"/>
+                      <a:round/>
+                      <a:headEnd type="none" w="med" len="med"/>
+                      <a:tailEnd type="none" w="med" len="med"/>
+                    </a:lnL>
+                    <a:lnR w="9525" cap="flat" cmpd="sng" algn="ctr">
+                      <a:solidFill>
+                        <a:srgbClr val="CBD5E1"/>
+                      </a:solidFill>
+                      <a:prstDash val="solid"/>
+                      <a:round/>
+                      <a:headEnd type="none" w="med" len="med"/>
+                      <a:tailEnd type="none" w="med" len="med"/>
+                    </a:lnR>
+                    <a:lnT w="9525" cap="flat" cmpd="sng" algn="ctr">
+                      <a:solidFill>
+                        <a:srgbClr val="CBD5E1"/>
+                      </a:solidFill>
+                      <a:prstDash val="solid"/>
+                      <a:round/>
+                      <a:headEnd type="none" w="med" len="med"/>
+                      <a:tailEnd type="none" w="med" len="med"/>
+                    </a:lnT>
+                    <a:lnB w="9525" cap="flat" cmpd="sng" algn="ctr">
+                      <a:solidFill>
+                        <a:srgbClr val="CBD5E1"/>
+                      </a:solidFill>
+                      <a:prstDash val="solid"/>
+                      <a:round/>
+                      <a:headEnd type="none" w="med" len="med"/>
+                      <a:tailEnd type="none" w="med" len="med"/>
+                    </a:lnB>
+                    <a:solidFill>
+                      <a:srgbClr val="E3F5F2"/>
+                    </a:solidFill>
+                  </a:tcPr>
+                </a:tc>
+              </a:tr>
+              <a:tr h="566928">
+                <a:tc>
+                  <a:txBody>
+                    <a:bodyPr/>
+                    <a:lstStyle/>
+                    <a:p>
+                      <a:pPr indent="0" marL="0">
+                        <a:buNone/>
+                      </a:pPr>
+                      <a:r>
+                        <a:rPr lang="en-US" sz="1150" b="1" dirty="0">
+                          <a:solidFill>
+                            <a:schemeClr val="tx2"/>
+                          </a:solidFill>
+                        </a:rPr>
+                        <a:t>Missing permissions mean no access</a:t>
+                      </a:r>
+                      <a:endParaRPr lang="en-US" sz="1150" dirty="0"/>
+                    </a:p>
+                  </a:txBody>
+                  <a:tcPr marL="73152" marR="73152" marT="45720" marB="45720" anchor="ctr">
+                    <a:lnL w="9525" cap="flat" cmpd="sng" algn="ctr">
+                      <a:solidFill>
+                        <a:srgbClr val="CBD5E1"/>
+                      </a:solidFill>
+                      <a:prstDash val="solid"/>
+                      <a:round/>
+                      <a:headEnd type="none" w="med" len="med"/>
+                      <a:tailEnd type="none" w="med" len="med"/>
+                    </a:lnL>
+                    <a:lnR w="9525" cap="flat" cmpd="sng" algn="ctr">
+                      <a:solidFill>
+                        <a:srgbClr val="CBD5E1"/>
+                      </a:solidFill>
+                      <a:prstDash val="solid"/>
+                      <a:round/>
+                      <a:headEnd type="none" w="med" len="med"/>
+                      <a:tailEnd type="none" w="med" len="med"/>
+                    </a:lnR>
+                    <a:lnT w="9525" cap="flat" cmpd="sng" algn="ctr">
+                      <a:solidFill>
+                        <a:srgbClr val="CBD5E1"/>
+                      </a:solidFill>
+                      <a:prstDash val="solid"/>
+                      <a:round/>
+                      <a:headEnd type="none" w="med" len="med"/>
+                      <a:tailEnd type="none" w="med" len="med"/>
+                    </a:lnT>
+                    <a:lnB w="9525" cap="flat" cmpd="sng" algn="ctr">
+                      <a:solidFill>
+                        <a:srgbClr val="CBD5E1"/>
+                      </a:solidFill>
+                      <a:prstDash val="solid"/>
+                      <a:round/>
+                      <a:headEnd type="none" w="med" len="med"/>
+                      <a:tailEnd type="none" w="med" len="med"/>
+                    </a:lnB>
+                    <a:solidFill>
+                      <a:schemeClr val="bg1"/>
+                    </a:solidFill>
+                  </a:tcPr>
+                </a:tc>
+                <a:tc>
+                  <a:txBody>
+                    <a:bodyPr/>
+                    <a:lstStyle/>
+                    <a:p>
+                      <a:pPr algn="ctr" indent="0" marL="0">
+                        <a:buNone/>
+                      </a:pPr>
+                      <a:r>
+                        <a:rPr lang="en-US" sz="1150" dirty="0">
+                          <a:solidFill>
+                            <a:schemeClr val="accent6"/>
+                          </a:solidFill>
+                        </a:rPr>
+                        <a:t>Not documented</a:t>
+                      </a:r>
+                      <a:endParaRPr lang="en-US" sz="1150" dirty="0"/>
+                    </a:p>
+                  </a:txBody>
+                  <a:tcPr marL="73152" marR="73152" marT="45720" marB="45720" anchor="ctr">
+                    <a:lnL w="9525" cap="flat" cmpd="sng" algn="ctr">
+                      <a:solidFill>
+                        <a:srgbClr val="CBD5E1"/>
+                      </a:solidFill>
+                      <a:prstDash val="solid"/>
+                      <a:round/>
+                      <a:headEnd type="none" w="med" len="med"/>
+                      <a:tailEnd type="none" w="med" len="med"/>
+                    </a:lnL>
+                    <a:lnR w="9525" cap="flat" cmpd="sng" algn="ctr">
+                      <a:solidFill>
+                        <a:srgbClr val="CBD5E1"/>
+                      </a:solidFill>
+                      <a:prstDash val="solid"/>
+                      <a:round/>
+                      <a:headEnd type="none" w="med" len="med"/>
+                      <a:tailEnd type="none" w="med" len="med"/>
+                    </a:lnR>
+                    <a:lnT w="9525" cap="flat" cmpd="sng" algn="ctr">
+                      <a:solidFill>
+                        <a:srgbClr val="CBD5E1"/>
+                      </a:solidFill>
+                      <a:prstDash val="solid"/>
+                      <a:round/>
+                      <a:headEnd type="none" w="med" len="med"/>
+                      <a:tailEnd type="none" w="med" len="med"/>
+                    </a:lnT>
+                    <a:lnB w="9525" cap="flat" cmpd="sng" algn="ctr">
+                      <a:solidFill>
+                        <a:srgbClr val="CBD5E1"/>
+                      </a:solidFill>
+                      <a:prstDash val="solid"/>
+                      <a:round/>
+                      <a:headEnd type="none" w="med" len="med"/>
+                      <a:tailEnd type="none" w="med" len="med"/>
+                    </a:lnB>
+                    <a:solidFill>
+                      <a:schemeClr val="bg1"/>
+                    </a:solidFill>
+                  </a:tcPr>
+                </a:tc>
+                <a:tc>
+                  <a:txBody>
+                    <a:bodyPr/>
+                    <a:lstStyle/>
+                    <a:p>
+                      <a:pPr algn="ctr" indent="0" marL="0">
+                        <a:buNone/>
+                      </a:pPr>
+                      <a:r>
+                        <a:rPr lang="en-US" sz="1150" b="1" dirty="0">
+                          <a:solidFill>
+                            <a:schemeClr val="accent1"/>
+                          </a:solidFill>
+                        </a:rPr>
+                        <a:t>Yes (Confluence connector)</a:t>
+                      </a:r>
+                      <a:endParaRPr lang="en-US" sz="1150" dirty="0"/>
+                    </a:p>
+                  </a:txBody>
+                  <a:tcPr marL="73152" marR="73152" marT="45720" marB="45720" anchor="ctr">
+                    <a:lnL w="9525" cap="flat" cmpd="sng" algn="ctr">
+                      <a:solidFill>
+                        <a:srgbClr val="CBD5E1"/>
+                      </a:solidFill>
+                      <a:prstDash val="solid"/>
+                      <a:round/>
+                      <a:headEnd type="none" w="med" len="med"/>
+                      <a:tailEnd type="none" w="med" len="med"/>
+                    </a:lnL>
+                    <a:lnR w="9525" cap="flat" cmpd="sng" algn="ctr">
+                      <a:solidFill>
+                        <a:srgbClr val="CBD5E1"/>
+                      </a:solidFill>
+                      <a:prstDash val="solid"/>
+                      <a:round/>
+                      <a:headEnd type="none" w="med" len="med"/>
+                      <a:tailEnd type="none" w="med" len="med"/>
+                    </a:lnR>
+                    <a:lnT w="9525" cap="flat" cmpd="sng" algn="ctr">
+                      <a:solidFill>
+                        <a:srgbClr val="CBD5E1"/>
+                      </a:solidFill>
+                      <a:prstDash val="solid"/>
+                      <a:round/>
+                      <a:headEnd type="none" w="med" len="med"/>
+                      <a:tailEnd type="none" w="med" len="med"/>
+                    </a:lnT>
+                    <a:lnB w="9525" cap="flat" cmpd="sng" algn="ctr">
+                      <a:solidFill>
+                        <a:srgbClr val="CBD5E1"/>
+                      </a:solidFill>
+                      <a:prstDash val="solid"/>
+                      <a:round/>
+                      <a:headEnd type="none" w="med" len="med"/>
+                      <a:tailEnd type="none" w="med" len="med"/>
+                    </a:lnB>
+                    <a:solidFill>
+                      <a:schemeClr val="bg1"/>
+                    </a:solidFill>
+                  </a:tcPr>
+                </a:tc>
+                <a:tc>
+                  <a:txBody>
+                    <a:bodyPr/>
+                    <a:lstStyle/>
+                    <a:p>
+                      <a:pPr algn="ctr" indent="0" marL="0">
+                        <a:buNone/>
+                      </a:pPr>
+                      <a:r>
+                        <a:rPr lang="en-US" sz="1150" dirty="0">
+                          <a:solidFill>
+                            <a:schemeClr val="accent6"/>
+                          </a:solidFill>
+                        </a:rPr>
+                        <a:t>Not documented</a:t>
+                      </a:r>
+                      <a:endParaRPr lang="en-US" sz="1150" dirty="0"/>
+                    </a:p>
+                  </a:txBody>
+                  <a:tcPr marL="73152" marR="73152" marT="45720" marB="45720" anchor="ctr">
+                    <a:lnL w="9525" cap="flat" cmpd="sng" algn="ctr">
+                      <a:solidFill>
+                        <a:srgbClr val="CBD5E1"/>
+                      </a:solidFill>
+                      <a:prstDash val="solid"/>
+                      <a:round/>
+                      <a:headEnd type="none" w="med" len="med"/>
+                      <a:tailEnd type="none" w="med" len="med"/>
+                    </a:lnL>
+                    <a:lnR w="9525" cap="flat" cmpd="sng" algn="ctr">
+                      <a:solidFill>
+                        <a:srgbClr val="CBD5E1"/>
+                      </a:solidFill>
+                      <a:prstDash val="solid"/>
+                      <a:round/>
+                      <a:headEnd type="none" w="med" len="med"/>
+                      <a:tailEnd type="none" w="med" len="med"/>
+                    </a:lnR>
+                    <a:lnT w="9525" cap="flat" cmpd="sng" algn="ctr">
+                      <a:solidFill>
+                        <a:srgbClr val="CBD5E1"/>
+                      </a:solidFill>
+                      <a:prstDash val="solid"/>
+                      <a:round/>
+                      <a:headEnd type="none" w="med" len="med"/>
+                      <a:tailEnd type="none" w="med" len="med"/>
+                    </a:lnT>
+                    <a:lnB w="9525" cap="flat" cmpd="sng" algn="ctr">
+                      <a:solidFill>
+                        <a:srgbClr val="CBD5E1"/>
+                      </a:solidFill>
+                      <a:prstDash val="solid"/>
+                      <a:round/>
+                      <a:headEnd type="none" w="med" len="med"/>
+                      <a:tailEnd type="none" w="med" len="med"/>
+                    </a:lnB>
+                    <a:solidFill>
+                      <a:schemeClr val="bg1"/>
+                    </a:solidFill>
+                  </a:tcPr>
+                </a:tc>
+                <a:tc>
+                  <a:txBody>
+                    <a:bodyPr/>
+                    <a:lstStyle/>
+                    <a:p>
+                      <a:pPr algn="ctr" indent="0" marL="0">
+                        <a:buNone/>
+                      </a:pPr>
+                      <a:r>
+                        <a:rPr lang="en-US" sz="1150" b="1" dirty="0">
+                          <a:solidFill>
+                            <a:schemeClr val="accent2"/>
+                          </a:solidFill>
+                        </a:rPr>
+                        <a:t>No: treated as public</a:t>
+                      </a:r>
+                      <a:endParaRPr lang="en-US" sz="1150" dirty="0"/>
+                    </a:p>
+                  </a:txBody>
+                  <a:tcPr marL="73152" marR="73152" marT="45720" marB="45720" anchor="ctr">
+                    <a:lnL w="9525" cap="flat" cmpd="sng" algn="ctr">
+                      <a:solidFill>
+                        <a:srgbClr val="CBD5E1"/>
+                      </a:solidFill>
+                      <a:prstDash val="solid"/>
+                      <a:round/>
+                      <a:headEnd type="none" w="med" len="med"/>
+                      <a:tailEnd type="none" w="med" len="med"/>
+                    </a:lnL>
+                    <a:lnR w="9525" cap="flat" cmpd="sng" algn="ctr">
+                      <a:solidFill>
+                        <a:srgbClr val="CBD5E1"/>
+                      </a:solidFill>
+                      <a:prstDash val="solid"/>
+                      <a:round/>
+                      <a:headEnd type="none" w="med" len="med"/>
+                      <a:tailEnd type="none" w="med" len="med"/>
+                    </a:lnR>
+                    <a:lnT w="9525" cap="flat" cmpd="sng" algn="ctr">
+                      <a:solidFill>
+                        <a:srgbClr val="CBD5E1"/>
+                      </a:solidFill>
+                      <a:prstDash val="solid"/>
+                      <a:round/>
+                      <a:headEnd type="none" w="med" len="med"/>
+                      <a:tailEnd type="none" w="med" len="med"/>
+                    </a:lnT>
+                    <a:lnB w="9525" cap="flat" cmpd="sng" algn="ctr">
+                      <a:solidFill>
+                        <a:srgbClr val="CBD5E1"/>
+                      </a:solidFill>
+                      <a:prstDash val="solid"/>
+                      <a:round/>
+                      <a:headEnd type="none" w="med" len="med"/>
+                      <a:tailEnd type="none" w="med" len="med"/>
+                    </a:lnB>
+                    <a:solidFill>
+                      <a:schemeClr val="bg1"/>
+                    </a:solidFill>
+                  </a:tcPr>
+                </a:tc>
+                <a:tc>
+                  <a:txBody>
+                    <a:bodyPr/>
+                    <a:lstStyle/>
+                    <a:p>
+                      <a:pPr algn="ctr" indent="0" marL="0">
+                        <a:buNone/>
+                      </a:pPr>
+                      <a:r>
+                        <a:rPr lang="en-US" sz="1150" b="1" dirty="0">
+                          <a:solidFill>
+                            <a:schemeClr val="accent1"/>
+                          </a:solidFill>
+                        </a:rPr>
+                        <a:t>Yes</a:t>
+                      </a:r>
+                      <a:endParaRPr lang="en-US" sz="1150" dirty="0"/>
+                    </a:p>
+                  </a:txBody>
+                  <a:tcPr marL="73152" marR="73152" marT="45720" marB="45720" anchor="ctr">
+                    <a:lnL w="9525" cap="flat" cmpd="sng" algn="ctr">
+                      <a:solidFill>
+                        <a:srgbClr val="CBD5E1"/>
+                      </a:solidFill>
+                      <a:prstDash val="solid"/>
+                      <a:round/>
+                      <a:headEnd type="none" w="med" len="med"/>
+                      <a:tailEnd type="none" w="med" len="med"/>
+                    </a:lnL>
+                    <a:lnR w="9525" cap="flat" cmpd="sng" algn="ctr">
+                      <a:solidFill>
+                        <a:srgbClr val="CBD5E1"/>
+                      </a:solidFill>
+                      <a:prstDash val="solid"/>
+                      <a:round/>
+                      <a:headEnd type="none" w="med" len="med"/>
+                      <a:tailEnd type="none" w="med" len="med"/>
+                    </a:lnR>
+                    <a:lnT w="9525" cap="flat" cmpd="sng" algn="ctr">
+                      <a:solidFill>
+                        <a:srgbClr val="CBD5E1"/>
+                      </a:solidFill>
+                      <a:prstDash val="solid"/>
+                      <a:round/>
+                      <a:headEnd type="none" w="med" len="med"/>
+                      <a:tailEnd type="none" w="med" len="med"/>
+                    </a:lnT>
+                    <a:lnB w="9525" cap="flat" cmpd="sng" algn="ctr">
+                      <a:solidFill>
+                        <a:srgbClr val="CBD5E1"/>
+                      </a:solidFill>
+                      <a:prstDash val="solid"/>
+                      <a:round/>
+                      <a:headEnd type="none" w="med" len="med"/>
+                      <a:tailEnd type="none" w="med" len="med"/>
+                    </a:lnB>
+                    <a:solidFill>
+                      <a:srgbClr val="E3F5F2"/>
+                    </a:solidFill>
+                  </a:tcPr>
+                </a:tc>
+              </a:tr>
+              <a:tr h="566928">
+                <a:tc>
+                  <a:txBody>
+                    <a:bodyPr/>
+                    <a:lstStyle/>
+                    <a:p>
+                      <a:pPr indent="0" marL="0">
+                        <a:buNone/>
+                      </a:pPr>
+                      <a:r>
+                        <a:rPr lang="en-US" sz="1150" b="1" dirty="0">
+                          <a:solidFill>
+                            <a:schemeClr val="tx2"/>
+                          </a:solidFill>
+                        </a:rPr>
+                        <a:t>Saved answers re-checked after revocation</a:t>
+                      </a:r>
+                      <a:endParaRPr lang="en-US" sz="1150" dirty="0"/>
+                    </a:p>
+                  </a:txBody>
+                  <a:tcPr marL="73152" marR="73152" marT="45720" marB="45720" anchor="ctr">
+                    <a:lnL w="9525" cap="flat" cmpd="sng" algn="ctr">
+                      <a:solidFill>
+                        <a:srgbClr val="CBD5E1"/>
+                      </a:solidFill>
+                      <a:prstDash val="solid"/>
+                      <a:round/>
+                      <a:headEnd type="none" w="med" len="med"/>
+                      <a:tailEnd type="none" w="med" len="med"/>
+                    </a:lnL>
+                    <a:lnR w="9525" cap="flat" cmpd="sng" algn="ctr">
+                      <a:solidFill>
+                        <a:srgbClr val="CBD5E1"/>
+                      </a:solidFill>
+                      <a:prstDash val="solid"/>
+                      <a:round/>
+                      <a:headEnd type="none" w="med" len="med"/>
+                      <a:tailEnd type="none" w="med" len="med"/>
+                    </a:lnR>
+                    <a:lnT w="9525" cap="flat" cmpd="sng" algn="ctr">
+                      <a:solidFill>
+                        <a:srgbClr val="CBD5E1"/>
+                      </a:solidFill>
+                      <a:prstDash val="solid"/>
+                      <a:round/>
+                      <a:headEnd type="none" w="med" len="med"/>
+                      <a:tailEnd type="none" w="med" len="med"/>
+                    </a:lnT>
+                    <a:lnB w="9525" cap="flat" cmpd="sng" algn="ctr">
+                      <a:solidFill>
+                        <a:srgbClr val="CBD5E1"/>
+                      </a:solidFill>
+                      <a:prstDash val="solid"/>
+                      <a:round/>
+                      <a:headEnd type="none" w="med" len="med"/>
+                      <a:tailEnd type="none" w="med" len="med"/>
+                    </a:lnB>
+                    <a:solidFill>
+                      <a:schemeClr val="bg1"/>
+                    </a:solidFill>
+                  </a:tcPr>
+                </a:tc>
+                <a:tc>
+                  <a:txBody>
+                    <a:bodyPr/>
+                    <a:lstStyle/>
+                    <a:p>
+                      <a:pPr algn="ctr" indent="0" marL="0">
+                        <a:buNone/>
+                      </a:pPr>
+                      <a:r>
+                        <a:rPr lang="en-US" sz="1150" dirty="0">
+                          <a:solidFill>
+                            <a:schemeClr val="accent6"/>
+                          </a:solidFill>
+                        </a:rPr>
+                        <a:t>Not documented</a:t>
+                      </a:r>
+                      <a:endParaRPr lang="en-US" sz="1150" dirty="0"/>
+                    </a:p>
+                  </a:txBody>
+                  <a:tcPr marL="73152" marR="73152" marT="45720" marB="45720" anchor="ctr">
+                    <a:lnL w="9525" cap="flat" cmpd="sng" algn="ctr">
+                      <a:solidFill>
+                        <a:srgbClr val="CBD5E1"/>
+                      </a:solidFill>
+                      <a:prstDash val="solid"/>
+                      <a:round/>
+                      <a:headEnd type="none" w="med" len="med"/>
+                      <a:tailEnd type="none" w="med" len="med"/>
+                    </a:lnL>
+                    <a:lnR w="9525" cap="flat" cmpd="sng" algn="ctr">
+                      <a:solidFill>
+                        <a:srgbClr val="CBD5E1"/>
+                      </a:solidFill>
+                      <a:prstDash val="solid"/>
+                      <a:round/>
+                      <a:headEnd type="none" w="med" len="med"/>
+                      <a:tailEnd type="none" w="med" len="med"/>
+                    </a:lnR>
+                    <a:lnT w="9525" cap="flat" cmpd="sng" algn="ctr">
+                      <a:solidFill>
+                        <a:srgbClr val="CBD5E1"/>
+                      </a:solidFill>
+                      <a:prstDash val="solid"/>
+                      <a:round/>
+                      <a:headEnd type="none" w="med" len="med"/>
+                      <a:tailEnd type="none" w="med" len="med"/>
+                    </a:lnT>
+                    <a:lnB w="9525" cap="flat" cmpd="sng" algn="ctr">
+                      <a:solidFill>
+                        <a:srgbClr val="CBD5E1"/>
+                      </a:solidFill>
+                      <a:prstDash val="solid"/>
+                      <a:round/>
+                      <a:headEnd type="none" w="med" len="med"/>
+                      <a:tailEnd type="none" w="med" len="med"/>
+                    </a:lnB>
+                    <a:solidFill>
+                      <a:schemeClr val="bg1"/>
+                    </a:solidFill>
+                  </a:tcPr>
+                </a:tc>
+                <a:tc>
+                  <a:txBody>
+                    <a:bodyPr/>
+                    <a:lstStyle/>
+                    <a:p>
+                      <a:pPr algn="ctr" indent="0" marL="0">
+                        <a:buNone/>
+                      </a:pPr>
+                      <a:r>
+                        <a:rPr lang="en-US" sz="1150" dirty="0">
+                          <a:solidFill>
+                            <a:schemeClr val="accent6"/>
+                          </a:solidFill>
+                        </a:rPr>
+                        <a:t>Not documented</a:t>
+                      </a:r>
+                      <a:endParaRPr lang="en-US" sz="1150" dirty="0"/>
+                    </a:p>
+                  </a:txBody>
+                  <a:tcPr marL="73152" marR="73152" marT="45720" marB="45720" anchor="ctr">
+                    <a:lnL w="9525" cap="flat" cmpd="sng" algn="ctr">
+                      <a:solidFill>
+                        <a:srgbClr val="CBD5E1"/>
+                      </a:solidFill>
+                      <a:prstDash val="solid"/>
+                      <a:round/>
+                      <a:headEnd type="none" w="med" len="med"/>
+                      <a:tailEnd type="none" w="med" len="med"/>
+                    </a:lnL>
+                    <a:lnR w="9525" cap="flat" cmpd="sng" algn="ctr">
+                      <a:solidFill>
+                        <a:srgbClr val="CBD5E1"/>
+                      </a:solidFill>
+                      <a:prstDash val="solid"/>
+                      <a:round/>
+                      <a:headEnd type="none" w="med" len="med"/>
+                      <a:tailEnd type="none" w="med" len="med"/>
+                    </a:lnR>
+                    <a:lnT w="9525" cap="flat" cmpd="sng" algn="ctr">
+                      <a:solidFill>
+                        <a:srgbClr val="CBD5E1"/>
+                      </a:solidFill>
+                      <a:prstDash val="solid"/>
+                      <a:round/>
+                      <a:headEnd type="none" w="med" len="med"/>
+                      <a:tailEnd type="none" w="med" len="med"/>
+                    </a:lnT>
+                    <a:lnB w="9525" cap="flat" cmpd="sng" algn="ctr">
+                      <a:solidFill>
+                        <a:srgbClr val="CBD5E1"/>
+                      </a:solidFill>
+                      <a:prstDash val="solid"/>
+                      <a:round/>
+                      <a:headEnd type="none" w="med" len="med"/>
+                      <a:tailEnd type="none" w="med" len="med"/>
+                    </a:lnB>
+                    <a:solidFill>
+                      <a:schemeClr val="bg1"/>
+                    </a:solidFill>
+                  </a:tcPr>
+                </a:tc>
+                <a:tc>
+                  <a:txBody>
+                    <a:bodyPr/>
+                    <a:lstStyle/>
+                    <a:p>
+                      <a:pPr algn="ctr" indent="0" marL="0">
+                        <a:buNone/>
+                      </a:pPr>
+                      <a:r>
+                        <a:rPr lang="en-US" sz="1150" dirty="0">
+                          <a:solidFill>
+                            <a:schemeClr val="accent6"/>
+                          </a:solidFill>
+                        </a:rPr>
+                        <a:t>Not documented</a:t>
+                      </a:r>
+                      <a:endParaRPr lang="en-US" sz="1150" dirty="0"/>
+                    </a:p>
+                  </a:txBody>
+                  <a:tcPr marL="73152" marR="73152" marT="45720" marB="45720" anchor="ctr">
+                    <a:lnL w="9525" cap="flat" cmpd="sng" algn="ctr">
+                      <a:solidFill>
+                        <a:srgbClr val="CBD5E1"/>
+                      </a:solidFill>
+                      <a:prstDash val="solid"/>
+                      <a:round/>
+                      <a:headEnd type="none" w="med" len="med"/>
+                      <a:tailEnd type="none" w="med" len="med"/>
+                    </a:lnL>
+                    <a:lnR w="9525" cap="flat" cmpd="sng" algn="ctr">
+                      <a:solidFill>
+                        <a:srgbClr val="CBD5E1"/>
+                      </a:solidFill>
+                      <a:prstDash val="solid"/>
+                      <a:round/>
+                      <a:headEnd type="none" w="med" len="med"/>
+                      <a:tailEnd type="none" w="med" len="med"/>
+                    </a:lnR>
+                    <a:lnT w="9525" cap="flat" cmpd="sng" algn="ctr">
+                      <a:solidFill>
+                        <a:srgbClr val="CBD5E1"/>
+                      </a:solidFill>
+                      <a:prstDash val="solid"/>
+                      <a:round/>
+                      <a:headEnd type="none" w="med" len="med"/>
+                      <a:tailEnd type="none" w="med" len="med"/>
+                    </a:lnT>
+                    <a:lnB w="9525" cap="flat" cmpd="sng" algn="ctr">
+                      <a:solidFill>
+                        <a:srgbClr val="CBD5E1"/>
+                      </a:solidFill>
+                      <a:prstDash val="solid"/>
+                      <a:round/>
+                      <a:headEnd type="none" w="med" len="med"/>
+                      <a:tailEnd type="none" w="med" len="med"/>
+                    </a:lnB>
+                    <a:solidFill>
+                      <a:schemeClr val="bg1"/>
+                    </a:solidFill>
+                  </a:tcPr>
+                </a:tc>
+                <a:tc>
+                  <a:txBody>
+                    <a:bodyPr/>
+                    <a:lstStyle/>
+                    <a:p>
+                      <a:pPr algn="ctr" indent="0" marL="0">
+                        <a:buNone/>
+                      </a:pPr>
+                      <a:r>
+                        <a:rPr lang="en-US" sz="1150" dirty="0">
+                          <a:solidFill>
+                            <a:schemeClr val="accent6"/>
+                          </a:solidFill>
+                        </a:rPr>
+                        <a:t>Not documented</a:t>
+                      </a:r>
+                      <a:endParaRPr lang="en-US" sz="1150" dirty="0"/>
+                    </a:p>
+                  </a:txBody>
+                  <a:tcPr marL="73152" marR="73152" marT="45720" marB="45720" anchor="ctr">
+                    <a:lnL w="9525" cap="flat" cmpd="sng" algn="ctr">
+                      <a:solidFill>
+                        <a:srgbClr val="CBD5E1"/>
+                      </a:solidFill>
+                      <a:prstDash val="solid"/>
+                      <a:round/>
+                      <a:headEnd type="none" w="med" len="med"/>
+                      <a:tailEnd type="none" w="med" len="med"/>
+                    </a:lnL>
+                    <a:lnR w="9525" cap="flat" cmpd="sng" algn="ctr">
+                      <a:solidFill>
+                        <a:srgbClr val="CBD5E1"/>
+                      </a:solidFill>
+                      <a:prstDash val="solid"/>
+                      <a:round/>
+                      <a:headEnd type="none" w="med" len="med"/>
+                      <a:tailEnd type="none" w="med" len="med"/>
+                    </a:lnR>
+                    <a:lnT w="9525" cap="flat" cmpd="sng" algn="ctr">
+                      <a:solidFill>
+                        <a:srgbClr val="CBD5E1"/>
+                      </a:solidFill>
+                      <a:prstDash val="solid"/>
+                      <a:round/>
+                      <a:headEnd type="none" w="med" len="med"/>
+                      <a:tailEnd type="none" w="med" len="med"/>
+                    </a:lnT>
+                    <a:lnB w="9525" cap="flat" cmpd="sng" algn="ctr">
+                      <a:solidFill>
+                        <a:srgbClr val="CBD5E1"/>
+                      </a:solidFill>
+                      <a:prstDash val="solid"/>
+                      <a:round/>
+                      <a:headEnd type="none" w="med" len="med"/>
+                      <a:tailEnd type="none" w="med" len="med"/>
+                    </a:lnB>
+                    <a:solidFill>
+                      <a:schemeClr val="bg1"/>
+                    </a:solidFill>
+                  </a:tcPr>
+                </a:tc>
+                <a:tc>
+                  <a:txBody>
+                    <a:bodyPr/>
+                    <a:lstStyle/>
+                    <a:p>
+                      <a:pPr algn="ctr" indent="0" marL="0">
+                        <a:buNone/>
+                      </a:pPr>
+                      <a:r>
+                        <a:rPr lang="en-US" sz="1150" b="1" dirty="0">
+                          <a:solidFill>
+                            <a:schemeClr val="accent1"/>
+                          </a:solidFill>
+                        </a:rPr>
+                        <a:t>Yes</a:t>
+                      </a:r>
+                      <a:endParaRPr lang="en-US" sz="1150" dirty="0"/>
+                    </a:p>
+                  </a:txBody>
+                  <a:tcPr marL="73152" marR="73152" marT="45720" marB="45720" anchor="ctr">
+                    <a:lnL w="9525" cap="flat" cmpd="sng" algn="ctr">
+                      <a:solidFill>
+                        <a:srgbClr val="CBD5E1"/>
+                      </a:solidFill>
+                      <a:prstDash val="solid"/>
+                      <a:round/>
+                      <a:headEnd type="none" w="med" len="med"/>
+                      <a:tailEnd type="none" w="med" len="med"/>
+                    </a:lnL>
+                    <a:lnR w="9525" cap="flat" cmpd="sng" algn="ctr">
+                      <a:solidFill>
+                        <a:srgbClr val="CBD5E1"/>
+                      </a:solidFill>
+                      <a:prstDash val="solid"/>
+                      <a:round/>
+                      <a:headEnd type="none" w="med" len="med"/>
+                      <a:tailEnd type="none" w="med" len="med"/>
+                    </a:lnR>
+                    <a:lnT w="9525" cap="flat" cmpd="sng" algn="ctr">
+                      <a:solidFill>
+                        <a:srgbClr val="CBD5E1"/>
+                      </a:solidFill>
+                      <a:prstDash val="solid"/>
+                      <a:round/>
+                      <a:headEnd type="none" w="med" len="med"/>
+                      <a:tailEnd type="none" w="med" len="med"/>
+                    </a:lnT>
+                    <a:lnB w="9525" cap="flat" cmpd="sng" algn="ctr">
+                      <a:solidFill>
+                        <a:srgbClr val="CBD5E1"/>
+                      </a:solidFill>
+                      <a:prstDash val="solid"/>
+                      <a:round/>
+                      <a:headEnd type="none" w="med" len="med"/>
+                      <a:tailEnd type="none" w="med" len="med"/>
+                    </a:lnB>
+                    <a:solidFill>
+                      <a:srgbClr val="E3F5F2"/>
+                    </a:solidFill>
+                  </a:tcPr>
+                </a:tc>
+              </a:tr>
+              <a:tr h="658368">
+                <a:tc>
+                  <a:txBody>
+                    <a:bodyPr/>
+                    <a:lstStyle/>
+                    <a:p>
+                      <a:pPr indent="0" marL="0">
+                        <a:buNone/>
+                      </a:pPr>
+                      <a:r>
+                        <a:rPr lang="en-US" sz="1150" b="1" dirty="0">
+                          <a:solidFill>
+                            <a:schemeClr val="tx2"/>
+                          </a:solidFill>
+                        </a:rPr>
+                        <a:t>Audit logs every allow/deny, including filtered-out documents</a:t>
+                      </a:r>
+                      <a:endParaRPr lang="en-US" sz="1150" dirty="0"/>
+                    </a:p>
+                  </a:txBody>
+                  <a:tcPr marL="73152" marR="73152" marT="45720" marB="45720" anchor="ctr">
+                    <a:lnL w="9525" cap="flat" cmpd="sng" algn="ctr">
+                      <a:solidFill>
+                        <a:srgbClr val="CBD5E1"/>
+                      </a:solidFill>
+                      <a:prstDash val="solid"/>
+                      <a:round/>
+                      <a:headEnd type="none" w="med" len="med"/>
+                      <a:tailEnd type="none" w="med" len="med"/>
+                    </a:lnL>
+                    <a:lnR w="9525" cap="flat" cmpd="sng" algn="ctr">
+                      <a:solidFill>
+                        <a:srgbClr val="CBD5E1"/>
+                      </a:solidFill>
+                      <a:prstDash val="solid"/>
+                      <a:round/>
+                      <a:headEnd type="none" w="med" len="med"/>
+                      <a:tailEnd type="none" w="med" len="med"/>
+                    </a:lnR>
+                    <a:lnT w="9525" cap="flat" cmpd="sng" algn="ctr">
+                      <a:solidFill>
+                        <a:srgbClr val="CBD5E1"/>
+                      </a:solidFill>
+                      <a:prstDash val="solid"/>
+                      <a:round/>
+                      <a:headEnd type="none" w="med" len="med"/>
+                      <a:tailEnd type="none" w="med" len="med"/>
+                    </a:lnT>
+                    <a:lnB w="9525" cap="flat" cmpd="sng" algn="ctr">
+                      <a:solidFill>
+                        <a:srgbClr val="CBD5E1"/>
+                      </a:solidFill>
+                      <a:prstDash val="solid"/>
+                      <a:round/>
+                      <a:headEnd type="none" w="med" len="med"/>
+                      <a:tailEnd type="none" w="med" len="med"/>
+                    </a:lnB>
+                    <a:solidFill>
+                      <a:schemeClr val="bg1"/>
+                    </a:solidFill>
+                  </a:tcPr>
+                </a:tc>
+                <a:tc>
+                  <a:txBody>
+                    <a:bodyPr/>
+                    <a:lstStyle/>
+                    <a:p>
+                      <a:pPr algn="ctr" indent="0" marL="0">
+                        <a:buNone/>
+                      </a:pPr>
+                      <a:r>
+                        <a:rPr lang="en-US" sz="1150" dirty="0">
+                          <a:solidFill>
+                            <a:schemeClr val="accent6"/>
+                          </a:solidFill>
+                        </a:rPr>
+                        <a:t>Events only</a:t>
+                      </a:r>
+                      <a:endParaRPr lang="en-US" sz="1150" dirty="0"/>
+                    </a:p>
+                  </a:txBody>
+                  <a:tcPr marL="73152" marR="73152" marT="45720" marB="45720" anchor="ctr">
+                    <a:lnL w="9525" cap="flat" cmpd="sng" algn="ctr">
+                      <a:solidFill>
+                        <a:srgbClr val="CBD5E1"/>
+                      </a:solidFill>
+                      <a:prstDash val="solid"/>
+                      <a:round/>
+                      <a:headEnd type="none" w="med" len="med"/>
+                      <a:tailEnd type="none" w="med" len="med"/>
+                    </a:lnL>
+                    <a:lnR w="9525" cap="flat" cmpd="sng" algn="ctr">
+                      <a:solidFill>
+                        <a:srgbClr val="CBD5E1"/>
+                      </a:solidFill>
+                      <a:prstDash val="solid"/>
+                      <a:round/>
+                      <a:headEnd type="none" w="med" len="med"/>
+                      <a:tailEnd type="none" w="med" len="med"/>
+                    </a:lnR>
+                    <a:lnT w="9525" cap="flat" cmpd="sng" algn="ctr">
+                      <a:solidFill>
+                        <a:srgbClr val="CBD5E1"/>
+                      </a:solidFill>
+                      <a:prstDash val="solid"/>
+                      <a:round/>
+                      <a:headEnd type="none" w="med" len="med"/>
+                      <a:tailEnd type="none" w="med" len="med"/>
+                    </a:lnT>
+                    <a:lnB w="9525" cap="flat" cmpd="sng" algn="ctr">
+                      <a:solidFill>
+                        <a:srgbClr val="CBD5E1"/>
+                      </a:solidFill>
+                      <a:prstDash val="solid"/>
+                      <a:round/>
+                      <a:headEnd type="none" w="med" len="med"/>
+                      <a:tailEnd type="none" w="med" len="med"/>
+                    </a:lnB>
+                    <a:solidFill>
+                      <a:schemeClr val="bg1"/>
+                    </a:solidFill>
+                  </a:tcPr>
+                </a:tc>
+                <a:tc>
+                  <a:txBody>
+                    <a:bodyPr/>
+                    <a:lstStyle/>
+                    <a:p>
+                      <a:pPr algn="ctr" indent="0" marL="0">
+                        <a:buNone/>
+                      </a:pPr>
+                      <a:r>
+                        <a:rPr lang="en-US" sz="1150" dirty="0">
+                          <a:solidFill>
+                            <a:schemeClr val="accent6"/>
+                          </a:solidFill>
+                        </a:rPr>
+                        <a:t>Accessed items only</a:t>
+                      </a:r>
+                      <a:endParaRPr lang="en-US" sz="1150" dirty="0"/>
+                    </a:p>
+                  </a:txBody>
+                  <a:tcPr marL="73152" marR="73152" marT="45720" marB="45720" anchor="ctr">
+                    <a:lnL w="9525" cap="flat" cmpd="sng" algn="ctr">
+                      <a:solidFill>
+                        <a:srgbClr val="CBD5E1"/>
+                      </a:solidFill>
+                      <a:prstDash val="solid"/>
+                      <a:round/>
+                      <a:headEnd type="none" w="med" len="med"/>
+                      <a:tailEnd type="none" w="med" len="med"/>
+                    </a:lnL>
+                    <a:lnR w="9525" cap="flat" cmpd="sng" algn="ctr">
+                      <a:solidFill>
+                        <a:srgbClr val="CBD5E1"/>
+                      </a:solidFill>
+                      <a:prstDash val="solid"/>
+                      <a:round/>
+                      <a:headEnd type="none" w="med" len="med"/>
+                      <a:tailEnd type="none" w="med" len="med"/>
+                    </a:lnR>
+                    <a:lnT w="9525" cap="flat" cmpd="sng" algn="ctr">
+                      <a:solidFill>
+                        <a:srgbClr val="CBD5E1"/>
+                      </a:solidFill>
+                      <a:prstDash val="solid"/>
+                      <a:round/>
+                      <a:headEnd type="none" w="med" len="med"/>
+                      <a:tailEnd type="none" w="med" len="med"/>
+                    </a:lnT>
+                    <a:lnB w="9525" cap="flat" cmpd="sng" algn="ctr">
+                      <a:solidFill>
+                        <a:srgbClr val="CBD5E1"/>
+                      </a:solidFill>
+                      <a:prstDash val="solid"/>
+                      <a:round/>
+                      <a:headEnd type="none" w="med" len="med"/>
+                      <a:tailEnd type="none" w="med" len="med"/>
+                    </a:lnB>
+                    <a:solidFill>
+                      <a:schemeClr val="bg1"/>
+                    </a:solidFill>
+                  </a:tcPr>
+                </a:tc>
+                <a:tc>
+                  <a:txBody>
+                    <a:bodyPr/>
+                    <a:lstStyle/>
+                    <a:p>
+                      <a:pPr algn="ctr" indent="0" marL="0">
+                        <a:buNone/>
+                      </a:pPr>
+                      <a:r>
+                        <a:rPr lang="en-US" sz="1150" dirty="0">
+                          <a:solidFill>
+                            <a:schemeClr val="accent6"/>
+                          </a:solidFill>
+                        </a:rPr>
+                        <a:t>Prompts and grounding, opt-in</a:t>
+                      </a:r>
+                      <a:endParaRPr lang="en-US" sz="1150" dirty="0"/>
+                    </a:p>
+                  </a:txBody>
+                  <a:tcPr marL="73152" marR="73152" marT="45720" marB="45720" anchor="ctr">
+                    <a:lnL w="9525" cap="flat" cmpd="sng" algn="ctr">
+                      <a:solidFill>
+                        <a:srgbClr val="CBD5E1"/>
+                      </a:solidFill>
+                      <a:prstDash val="solid"/>
+                      <a:round/>
+                      <a:headEnd type="none" w="med" len="med"/>
+                      <a:tailEnd type="none" w="med" len="med"/>
+                    </a:lnL>
+                    <a:lnR w="9525" cap="flat" cmpd="sng" algn="ctr">
+                      <a:solidFill>
+                        <a:srgbClr val="CBD5E1"/>
+                      </a:solidFill>
+                      <a:prstDash val="solid"/>
+                      <a:round/>
+                      <a:headEnd type="none" w="med" len="med"/>
+                      <a:tailEnd type="none" w="med" len="med"/>
+                    </a:lnR>
+                    <a:lnT w="9525" cap="flat" cmpd="sng" algn="ctr">
+                      <a:solidFill>
+                        <a:srgbClr val="CBD5E1"/>
+                      </a:solidFill>
+                      <a:prstDash val="solid"/>
+                      <a:round/>
+                      <a:headEnd type="none" w="med" len="med"/>
+                      <a:tailEnd type="none" w="med" len="med"/>
+                    </a:lnT>
+                    <a:lnB w="9525" cap="flat" cmpd="sng" algn="ctr">
+                      <a:solidFill>
+                        <a:srgbClr val="CBD5E1"/>
+                      </a:solidFill>
+                      <a:prstDash val="solid"/>
+                      <a:round/>
+                      <a:headEnd type="none" w="med" len="med"/>
+                      <a:tailEnd type="none" w="med" len="med"/>
+                    </a:lnB>
+                    <a:solidFill>
+                      <a:schemeClr val="bg1"/>
+                    </a:solidFill>
+                  </a:tcPr>
+                </a:tc>
+                <a:tc>
+                  <a:txBody>
+                    <a:bodyPr/>
+                    <a:lstStyle/>
+                    <a:p>
+                      <a:pPr algn="ctr" indent="0" marL="0">
+                        <a:buNone/>
+                      </a:pPr>
+                      <a:r>
+                        <a:rPr lang="en-US" sz="1150" dirty="0">
+                          <a:solidFill>
+                            <a:schemeClr val="accent6"/>
+                          </a:solidFill>
+                        </a:rPr>
+                        <a:t>Conversation logs</a:t>
+                      </a:r>
+                      <a:endParaRPr lang="en-US" sz="1150" dirty="0"/>
+                    </a:p>
+                  </a:txBody>
+                  <a:tcPr marL="73152" marR="73152" marT="45720" marB="45720" anchor="ctr">
+                    <a:lnL w="9525" cap="flat" cmpd="sng" algn="ctr">
+                      <a:solidFill>
+                        <a:srgbClr val="CBD5E1"/>
+                      </a:solidFill>
+                      <a:prstDash val="solid"/>
+                      <a:round/>
+                      <a:headEnd type="none" w="med" len="med"/>
+                      <a:tailEnd type="none" w="med" len="med"/>
+                    </a:lnL>
+                    <a:lnR w="9525" cap="flat" cmpd="sng" algn="ctr">
+                      <a:solidFill>
+                        <a:srgbClr val="CBD5E1"/>
+                      </a:solidFill>
+                      <a:prstDash val="solid"/>
+                      <a:round/>
+                      <a:headEnd type="none" w="med" len="med"/>
+                      <a:tailEnd type="none" w="med" len="med"/>
+                    </a:lnR>
+                    <a:lnT w="9525" cap="flat" cmpd="sng" algn="ctr">
+                      <a:solidFill>
+                        <a:srgbClr val="CBD5E1"/>
+                      </a:solidFill>
+                      <a:prstDash val="solid"/>
+                      <a:round/>
+                      <a:headEnd type="none" w="med" len="med"/>
+                      <a:tailEnd type="none" w="med" len="med"/>
+                    </a:lnT>
+                    <a:lnB w="9525" cap="flat" cmpd="sng" algn="ctr">
+                      <a:solidFill>
+                        <a:srgbClr val="CBD5E1"/>
+                      </a:solidFill>
+                      <a:prstDash val="solid"/>
+                      <a:round/>
+                      <a:headEnd type="none" w="med" len="med"/>
+                      <a:tailEnd type="none" w="med" len="med"/>
+                    </a:lnB>
+                    <a:solidFill>
+                      <a:schemeClr val="bg1"/>
+                    </a:solidFill>
+                  </a:tcPr>
+                </a:tc>
+                <a:tc>
+                  <a:txBody>
+                    <a:bodyPr/>
+                    <a:lstStyle/>
+                    <a:p>
+                      <a:pPr algn="ctr" indent="0" marL="0">
+                        <a:buNone/>
+                      </a:pPr>
+                      <a:r>
+                        <a:rPr lang="en-US" sz="1150" b="1" dirty="0">
+                          <a:solidFill>
+                            <a:schemeClr val="accent1"/>
+                          </a:solidFill>
+                        </a:rPr>
+                        <a:t>Yes</a:t>
+                      </a:r>
+                      <a:endParaRPr lang="en-US" sz="1150" dirty="0"/>
+                    </a:p>
+                  </a:txBody>
+                  <a:tcPr marL="73152" marR="73152" marT="45720" marB="45720" anchor="ctr">
+                    <a:lnL w="9525" cap="flat" cmpd="sng" algn="ctr">
+                      <a:solidFill>
+                        <a:srgbClr val="CBD5E1"/>
+                      </a:solidFill>
+                      <a:prstDash val="solid"/>
+                      <a:round/>
+                      <a:headEnd type="none" w="med" len="med"/>
+                      <a:tailEnd type="none" w="med" len="med"/>
+                    </a:lnL>
+                    <a:lnR w="9525" cap="flat" cmpd="sng" algn="ctr">
+                      <a:solidFill>
+                        <a:srgbClr val="CBD5E1"/>
+                      </a:solidFill>
+                      <a:prstDash val="solid"/>
+                      <a:round/>
+                      <a:headEnd type="none" w="med" len="med"/>
+                      <a:tailEnd type="none" w="med" len="med"/>
+                    </a:lnR>
+                    <a:lnT w="9525" cap="flat" cmpd="sng" algn="ctr">
+                      <a:solidFill>
+                        <a:srgbClr val="CBD5E1"/>
+                      </a:solidFill>
+                      <a:prstDash val="solid"/>
+                      <a:round/>
+                      <a:headEnd type="none" w="med" len="med"/>
+                      <a:tailEnd type="none" w="med" len="med"/>
+                    </a:lnT>
+                    <a:lnB w="9525" cap="flat" cmpd="sng" algn="ctr">
+                      <a:solidFill>
+                        <a:srgbClr val="CBD5E1"/>
+                      </a:solidFill>
+                      <a:prstDash val="solid"/>
+                      <a:round/>
+                      <a:headEnd type="none" w="med" len="med"/>
+                      <a:tailEnd type="none" w="med" len="med"/>
+                    </a:lnB>
+                    <a:solidFill>
+                      <a:srgbClr val="E3F5F2"/>
+                    </a:solidFill>
+                  </a:tcPr>
+                </a:tc>
+              </a:tr>
+              <a:tr h="566928">
+                <a:tc>
+                  <a:txBody>
+                    <a:bodyPr/>
+                    <a:lstStyle/>
+                    <a:p>
+                      <a:pPr indent="0" marL="0">
+                        <a:buNone/>
+                      </a:pPr>
+                      <a:r>
+                        <a:rPr lang="en-US" sz="1150" b="1" dirty="0">
+                          <a:solidFill>
+                            <a:schemeClr val="tx2"/>
+                          </a:solidFill>
+                        </a:rPr>
+                        <a:t>Tamper-evident audit log</a:t>
+                      </a:r>
+                      <a:endParaRPr lang="en-US" sz="1150" dirty="0"/>
+                    </a:p>
+                  </a:txBody>
+                  <a:tcPr marL="73152" marR="73152" marT="45720" marB="45720" anchor="ctr">
+                    <a:lnL w="9525" cap="flat" cmpd="sng" algn="ctr">
+                      <a:solidFill>
+                        <a:srgbClr val="CBD5E1"/>
+                      </a:solidFill>
+                      <a:prstDash val="solid"/>
+                      <a:round/>
+                      <a:headEnd type="none" w="med" len="med"/>
+                      <a:tailEnd type="none" w="med" len="med"/>
+                    </a:lnL>
+                    <a:lnR w="9525" cap="flat" cmpd="sng" algn="ctr">
+                      <a:solidFill>
+                        <a:srgbClr val="CBD5E1"/>
+                      </a:solidFill>
+                      <a:prstDash val="solid"/>
+                      <a:round/>
+                      <a:headEnd type="none" w="med" len="med"/>
+                      <a:tailEnd type="none" w="med" len="med"/>
+                    </a:lnR>
+                    <a:lnT w="9525" cap="flat" cmpd="sng" algn="ctr">
+                      <a:solidFill>
+                        <a:srgbClr val="CBD5E1"/>
+                      </a:solidFill>
+                      <a:prstDash val="solid"/>
+                      <a:round/>
+                      <a:headEnd type="none" w="med" len="med"/>
+                      <a:tailEnd type="none" w="med" len="med"/>
+                    </a:lnT>
+                    <a:lnB w="9525" cap="flat" cmpd="sng" algn="ctr">
+                      <a:solidFill>
+                        <a:srgbClr val="CBD5E1"/>
+                      </a:solidFill>
+                      <a:prstDash val="solid"/>
+                      <a:round/>
+                      <a:headEnd type="none" w="med" len="med"/>
+                      <a:tailEnd type="none" w="med" len="med"/>
+                    </a:lnB>
+                    <a:solidFill>
+                      <a:schemeClr val="bg1"/>
+                    </a:solidFill>
+                  </a:tcPr>
+                </a:tc>
+                <a:tc>
+                  <a:txBody>
+                    <a:bodyPr/>
+                    <a:lstStyle/>
+                    <a:p>
+                      <a:pPr algn="ctr" indent="0" marL="0">
+                        <a:buNone/>
+                      </a:pPr>
+                      <a:r>
+                        <a:rPr lang="en-US" sz="1150" dirty="0">
+                          <a:solidFill>
+                            <a:schemeClr val="accent6"/>
+                          </a:solidFill>
+                        </a:rPr>
+                        <a:t>Not documented</a:t>
+                      </a:r>
+                      <a:endParaRPr lang="en-US" sz="1150" dirty="0"/>
+                    </a:p>
+                  </a:txBody>
+                  <a:tcPr marL="73152" marR="73152" marT="45720" marB="45720" anchor="ctr">
+                    <a:lnL w="9525" cap="flat" cmpd="sng" algn="ctr">
+                      <a:solidFill>
+                        <a:srgbClr val="CBD5E1"/>
+                      </a:solidFill>
+                      <a:prstDash val="solid"/>
+                      <a:round/>
+                      <a:headEnd type="none" w="med" len="med"/>
+                      <a:tailEnd type="none" w="med" len="med"/>
+                    </a:lnL>
+                    <a:lnR w="9525" cap="flat" cmpd="sng" algn="ctr">
+                      <a:solidFill>
+                        <a:srgbClr val="CBD5E1"/>
+                      </a:solidFill>
+                      <a:prstDash val="solid"/>
+                      <a:round/>
+                      <a:headEnd type="none" w="med" len="med"/>
+                      <a:tailEnd type="none" w="med" len="med"/>
+                    </a:lnR>
+                    <a:lnT w="9525" cap="flat" cmpd="sng" algn="ctr">
+                      <a:solidFill>
+                        <a:srgbClr val="CBD5E1"/>
+                      </a:solidFill>
+                      <a:prstDash val="solid"/>
+                      <a:round/>
+                      <a:headEnd type="none" w="med" len="med"/>
+                      <a:tailEnd type="none" w="med" len="med"/>
+                    </a:lnT>
+                    <a:lnB w="9525" cap="flat" cmpd="sng" algn="ctr">
+                      <a:solidFill>
+                        <a:srgbClr val="CBD5E1"/>
+                      </a:solidFill>
+                      <a:prstDash val="solid"/>
+                      <a:round/>
+                      <a:headEnd type="none" w="med" len="med"/>
+                      <a:tailEnd type="none" w="med" len="med"/>
+                    </a:lnB>
+                    <a:solidFill>
+                      <a:schemeClr val="bg1"/>
+                    </a:solidFill>
+                  </a:tcPr>
+                </a:tc>
+                <a:tc>
+                  <a:txBody>
+                    <a:bodyPr/>
+                    <a:lstStyle/>
+                    <a:p>
+                      <a:pPr algn="ctr" indent="0" marL="0">
+                        <a:buNone/>
+                      </a:pPr>
+                      <a:r>
+                        <a:rPr lang="en-US" sz="1150" dirty="0">
+                          <a:solidFill>
+                            <a:schemeClr val="accent6"/>
+                          </a:solidFill>
+                        </a:rPr>
+                        <a:t>Not documented</a:t>
+                      </a:r>
+                      <a:endParaRPr lang="en-US" sz="1150" dirty="0"/>
+                    </a:p>
+                  </a:txBody>
+                  <a:tcPr marL="73152" marR="73152" marT="45720" marB="45720" anchor="ctr">
+                    <a:lnL w="9525" cap="flat" cmpd="sng" algn="ctr">
+                      <a:solidFill>
+                        <a:srgbClr val="CBD5E1"/>
+                      </a:solidFill>
+                      <a:prstDash val="solid"/>
+                      <a:round/>
+                      <a:headEnd type="none" w="med" len="med"/>
+                      <a:tailEnd type="none" w="med" len="med"/>
+                    </a:lnL>
+                    <a:lnR w="9525" cap="flat" cmpd="sng" algn="ctr">
+                      <a:solidFill>
+                        <a:srgbClr val="CBD5E1"/>
+                      </a:solidFill>
+                      <a:prstDash val="solid"/>
+                      <a:round/>
+                      <a:headEnd type="none" w="med" len="med"/>
+                      <a:tailEnd type="none" w="med" len="med"/>
+                    </a:lnR>
+                    <a:lnT w="9525" cap="flat" cmpd="sng" algn="ctr">
+                      <a:solidFill>
+                        <a:srgbClr val="CBD5E1"/>
+                      </a:solidFill>
+                      <a:prstDash val="solid"/>
+                      <a:round/>
+                      <a:headEnd type="none" w="med" len="med"/>
+                      <a:tailEnd type="none" w="med" len="med"/>
+                    </a:lnT>
+                    <a:lnB w="9525" cap="flat" cmpd="sng" algn="ctr">
+                      <a:solidFill>
+                        <a:srgbClr val="CBD5E1"/>
+                      </a:solidFill>
+                      <a:prstDash val="solid"/>
+                      <a:round/>
+                      <a:headEnd type="none" w="med" len="med"/>
+                      <a:tailEnd type="none" w="med" len="med"/>
+                    </a:lnB>
+                    <a:solidFill>
+                      <a:schemeClr val="bg1"/>
+                    </a:solidFill>
+                  </a:tcPr>
+                </a:tc>
+                <a:tc>
+                  <a:txBody>
+                    <a:bodyPr/>
+                    <a:lstStyle/>
+                    <a:p>
+                      <a:pPr algn="ctr" indent="0" marL="0">
+                        <a:buNone/>
+                      </a:pPr>
+                      <a:r>
+                        <a:rPr lang="en-US" sz="1150" dirty="0">
+                          <a:solidFill>
+                            <a:schemeClr val="accent6"/>
+                          </a:solidFill>
+                        </a:rPr>
+                        <a:t>Not documented</a:t>
+                      </a:r>
+                      <a:endParaRPr lang="en-US" sz="1150" dirty="0"/>
+                    </a:p>
+                  </a:txBody>
+                  <a:tcPr marL="73152" marR="73152" marT="45720" marB="45720" anchor="ctr">
+                    <a:lnL w="9525" cap="flat" cmpd="sng" algn="ctr">
+                      <a:solidFill>
+                        <a:srgbClr val="CBD5E1"/>
+                      </a:solidFill>
+                      <a:prstDash val="solid"/>
+                      <a:round/>
+                      <a:headEnd type="none" w="med" len="med"/>
+                      <a:tailEnd type="none" w="med" len="med"/>
+                    </a:lnL>
+                    <a:lnR w="9525" cap="flat" cmpd="sng" algn="ctr">
+                      <a:solidFill>
+                        <a:srgbClr val="CBD5E1"/>
+                      </a:solidFill>
+                      <a:prstDash val="solid"/>
+                      <a:round/>
+                      <a:headEnd type="none" w="med" len="med"/>
+                      <a:tailEnd type="none" w="med" len="med"/>
+                    </a:lnR>
+                    <a:lnT w="9525" cap="flat" cmpd="sng" algn="ctr">
+                      <a:solidFill>
+                        <a:srgbClr val="CBD5E1"/>
+                      </a:solidFill>
+                      <a:prstDash val="solid"/>
+                      <a:round/>
+                      <a:headEnd type="none" w="med" len="med"/>
+                      <a:tailEnd type="none" w="med" len="med"/>
+                    </a:lnT>
+                    <a:lnB w="9525" cap="flat" cmpd="sng" algn="ctr">
+                      <a:solidFill>
+                        <a:srgbClr val="CBD5E1"/>
+                      </a:solidFill>
+                      <a:prstDash val="solid"/>
+                      <a:round/>
+                      <a:headEnd type="none" w="med" len="med"/>
+                      <a:tailEnd type="none" w="med" len="med"/>
+                    </a:lnB>
+                    <a:solidFill>
+                      <a:schemeClr val="bg1"/>
+                    </a:solidFill>
+                  </a:tcPr>
+                </a:tc>
+                <a:tc>
+                  <a:txBody>
+                    <a:bodyPr/>
+                    <a:lstStyle/>
+                    <a:p>
+                      <a:pPr algn="ctr" indent="0" marL="0">
+                        <a:buNone/>
+                      </a:pPr>
+                      <a:r>
+                        <a:rPr lang="en-US" sz="1150" dirty="0">
+                          <a:solidFill>
+                            <a:schemeClr val="accent6"/>
+                          </a:solidFill>
+                        </a:rPr>
+                        <a:t>Not documented</a:t>
+                      </a:r>
+                      <a:endParaRPr lang="en-US" sz="1150" dirty="0"/>
+                    </a:p>
+                  </a:txBody>
+                  <a:tcPr marL="73152" marR="73152" marT="45720" marB="45720" anchor="ctr">
+                    <a:lnL w="9525" cap="flat" cmpd="sng" algn="ctr">
+                      <a:solidFill>
+                        <a:srgbClr val="CBD5E1"/>
+                      </a:solidFill>
+                      <a:prstDash val="solid"/>
+                      <a:round/>
+                      <a:headEnd type="none" w="med" len="med"/>
+                      <a:tailEnd type="none" w="med" len="med"/>
+                    </a:lnL>
+                    <a:lnR w="9525" cap="flat" cmpd="sng" algn="ctr">
+                      <a:solidFill>
+                        <a:srgbClr val="CBD5E1"/>
+                      </a:solidFill>
+                      <a:prstDash val="solid"/>
+                      <a:round/>
+                      <a:headEnd type="none" w="med" len="med"/>
+                      <a:tailEnd type="none" w="med" len="med"/>
+                    </a:lnR>
+                    <a:lnT w="9525" cap="flat" cmpd="sng" algn="ctr">
+                      <a:solidFill>
+                        <a:srgbClr val="CBD5E1"/>
+                      </a:solidFill>
+                      <a:prstDash val="solid"/>
+                      <a:round/>
+                      <a:headEnd type="none" w="med" len="med"/>
+                      <a:tailEnd type="none" w="med" len="med"/>
+                    </a:lnT>
+                    <a:lnB w="9525" cap="flat" cmpd="sng" algn="ctr">
+                      <a:solidFill>
+                        <a:srgbClr val="CBD5E1"/>
+                      </a:solidFill>
+                      <a:prstDash val="solid"/>
+                      <a:round/>
+                      <a:headEnd type="none" w="med" len="med"/>
+                      <a:tailEnd type="none" w="med" len="med"/>
+                    </a:lnB>
+                    <a:solidFill>
+                      <a:schemeClr val="bg1"/>
+                    </a:solidFill>
+                  </a:tcPr>
+                </a:tc>
+                <a:tc>
+                  <a:txBody>
+                    <a:bodyPr/>
+                    <a:lstStyle/>
+                    <a:p>
+                      <a:pPr algn="ctr" indent="0" marL="0">
+                        <a:buNone/>
+                      </a:pPr>
+                      <a:r>
+                        <a:rPr lang="en-US" sz="1150" b="1" dirty="0">
+                          <a:solidFill>
+                            <a:schemeClr val="accent1"/>
+                          </a:solidFill>
+                        </a:rPr>
+                        <a:t>Hash chain</a:t>
+                      </a:r>
+                      <a:endParaRPr lang="en-US" sz="1150" dirty="0"/>
+                    </a:p>
+                  </a:txBody>
+                  <a:tcPr marL="73152" marR="73152" marT="45720" marB="45720" anchor="ctr">
+                    <a:lnL w="9525" cap="flat" cmpd="sng" algn="ctr">
+                      <a:solidFill>
+                        <a:srgbClr val="CBD5E1"/>
+                      </a:solidFill>
+                      <a:prstDash val="solid"/>
+                      <a:round/>
+                      <a:headEnd type="none" w="med" len="med"/>
+                      <a:tailEnd type="none" w="med" len="med"/>
+                    </a:lnL>
+                    <a:lnR w="9525" cap="flat" cmpd="sng" algn="ctr">
+                      <a:solidFill>
+                        <a:srgbClr val="CBD5E1"/>
+                      </a:solidFill>
+                      <a:prstDash val="solid"/>
+                      <a:round/>
+                      <a:headEnd type="none" w="med" len="med"/>
+                      <a:tailEnd type="none" w="med" len="med"/>
+                    </a:lnR>
+                    <a:lnT w="9525" cap="flat" cmpd="sng" algn="ctr">
+                      <a:solidFill>
+                        <a:srgbClr val="CBD5E1"/>
+                      </a:solidFill>
+                      <a:prstDash val="solid"/>
+                      <a:round/>
+                      <a:headEnd type="none" w="med" len="med"/>
+                      <a:tailEnd type="none" w="med" len="med"/>
+                    </a:lnT>
+                    <a:lnB w="9525" cap="flat" cmpd="sng" algn="ctr">
+                      <a:solidFill>
+                        <a:srgbClr val="CBD5E1"/>
+                      </a:solidFill>
+                      <a:prstDash val="solid"/>
+                      <a:round/>
+                      <a:headEnd type="none" w="med" len="med"/>
+                      <a:tailEnd type="none" w="med" len="med"/>
+                    </a:lnB>
+                    <a:solidFill>
+                      <a:srgbClr val="E3F5F2"/>
+                    </a:solidFill>
+                  </a:tcPr>
+                </a:tc>
+              </a:tr>
+              <a:tr h="658368">
+                <a:tc>
+                  <a:txBody>
+                    <a:bodyPr/>
+                    <a:lstStyle/>
+                    <a:p>
+                      <a:pPr indent="0" marL="0">
+                        <a:buNone/>
+                      </a:pPr>
+                      <a:r>
+                        <a:rPr lang="en-US" sz="1150" b="1" dirty="0">
+                          <a:solidFill>
+                            <a:schemeClr val="tx2"/>
+                          </a:solidFill>
+                        </a:rPr>
+                        <a:t>Delay before a permission change applies</a:t>
+                      </a:r>
+                      <a:endParaRPr lang="en-US" sz="1150" dirty="0"/>
+                    </a:p>
+                  </a:txBody>
+                  <a:tcPr marL="73152" marR="73152" marT="45720" marB="45720" anchor="ctr">
+                    <a:lnL w="9525" cap="flat" cmpd="sng" algn="ctr">
+                      <a:solidFill>
+                        <a:srgbClr val="CBD5E1"/>
+                      </a:solidFill>
+                      <a:prstDash val="solid"/>
+                      <a:round/>
+                      <a:headEnd type="none" w="med" len="med"/>
+                      <a:tailEnd type="none" w="med" len="med"/>
+                    </a:lnL>
+                    <a:lnR w="9525" cap="flat" cmpd="sng" algn="ctr">
+                      <a:solidFill>
+                        <a:srgbClr val="CBD5E1"/>
+                      </a:solidFill>
+                      <a:prstDash val="solid"/>
+                      <a:round/>
+                      <a:headEnd type="none" w="med" len="med"/>
+                      <a:tailEnd type="none" w="med" len="med"/>
+                    </a:lnR>
+                    <a:lnT w="9525" cap="flat" cmpd="sng" algn="ctr">
+                      <a:solidFill>
+                        <a:srgbClr val="CBD5E1"/>
+                      </a:solidFill>
+                      <a:prstDash val="solid"/>
+                      <a:round/>
+                      <a:headEnd type="none" w="med" len="med"/>
+                      <a:tailEnd type="none" w="med" len="med"/>
+                    </a:lnT>
+                    <a:lnB w="9525" cap="flat" cmpd="sng" algn="ctr">
+                      <a:solidFill>
+                        <a:srgbClr val="CBD5E1"/>
+                      </a:solidFill>
+                      <a:prstDash val="solid"/>
+                      <a:round/>
+                      <a:headEnd type="none" w="med" len="med"/>
+                      <a:tailEnd type="none" w="med" len="med"/>
+                    </a:lnB>
+                    <a:solidFill>
+                      <a:schemeClr val="bg1"/>
+                    </a:solidFill>
+                  </a:tcPr>
+                </a:tc>
+                <a:tc>
+                  <a:txBody>
+                    <a:bodyPr/>
+                    <a:lstStyle/>
+                    <a:p>
+                      <a:pPr algn="ctr" indent="0" marL="0">
+                        <a:buNone/>
+                      </a:pPr>
+                      <a:r>
+                        <a:rPr lang="en-US" sz="1150" dirty="0">
+                          <a:solidFill>
+                            <a:schemeClr val="accent6"/>
+                          </a:solidFill>
+                        </a:rPr>
+                        <a:t>Drive: 1 h default</a:t>
+                      </a:r>
+                      <a:endParaRPr lang="en-US" sz="1150" dirty="0"/>
+                    </a:p>
+                  </a:txBody>
+                  <a:tcPr marL="73152" marR="73152" marT="45720" marB="45720" anchor="ctr">
+                    <a:lnL w="9525" cap="flat" cmpd="sng" algn="ctr">
+                      <a:solidFill>
+                        <a:srgbClr val="CBD5E1"/>
+                      </a:solidFill>
+                      <a:prstDash val="solid"/>
+                      <a:round/>
+                      <a:headEnd type="none" w="med" len="med"/>
+                      <a:tailEnd type="none" w="med" len="med"/>
+                    </a:lnL>
+                    <a:lnR w="9525" cap="flat" cmpd="sng" algn="ctr">
+                      <a:solidFill>
+                        <a:srgbClr val="CBD5E1"/>
+                      </a:solidFill>
+                      <a:prstDash val="solid"/>
+                      <a:round/>
+                      <a:headEnd type="none" w="med" len="med"/>
+                      <a:tailEnd type="none" w="med" len="med"/>
+                    </a:lnR>
+                    <a:lnT w="9525" cap="flat" cmpd="sng" algn="ctr">
+                      <a:solidFill>
+                        <a:srgbClr val="CBD5E1"/>
+                      </a:solidFill>
+                      <a:prstDash val="solid"/>
+                      <a:round/>
+                      <a:headEnd type="none" w="med" len="med"/>
+                      <a:tailEnd type="none" w="med" len="med"/>
+                    </a:lnT>
+                    <a:lnB w="9525" cap="flat" cmpd="sng" algn="ctr">
+                      <a:solidFill>
+                        <a:srgbClr val="CBD5E1"/>
+                      </a:solidFill>
+                      <a:prstDash val="solid"/>
+                      <a:round/>
+                      <a:headEnd type="none" w="med" len="med"/>
+                      <a:tailEnd type="none" w="med" len="med"/>
+                    </a:lnB>
+                    <a:solidFill>
+                      <a:schemeClr val="bg1"/>
+                    </a:solidFill>
+                  </a:tcPr>
+                </a:tc>
+                <a:tc>
+                  <a:txBody>
+                    <a:bodyPr/>
+                    <a:lstStyle/>
+                    <a:p>
+                      <a:pPr algn="ctr" indent="0" marL="0">
+                        <a:buNone/>
+                      </a:pPr>
+                      <a:r>
+                        <a:rPr lang="en-US" sz="1150" dirty="0">
+                          <a:solidFill>
+                            <a:schemeClr val="accent6"/>
+                          </a:solidFill>
+                        </a:rPr>
+                        <a:t>Confluence: daily full crawl</a:t>
+                      </a:r>
+                      <a:endParaRPr lang="en-US" sz="1150" dirty="0"/>
+                    </a:p>
+                  </a:txBody>
+                  <a:tcPr marL="73152" marR="73152" marT="45720" marB="45720" anchor="ctr">
+                    <a:lnL w="9525" cap="flat" cmpd="sng" algn="ctr">
+                      <a:solidFill>
+                        <a:srgbClr val="CBD5E1"/>
+                      </a:solidFill>
+                      <a:prstDash val="solid"/>
+                      <a:round/>
+                      <a:headEnd type="none" w="med" len="med"/>
+                      <a:tailEnd type="none" w="med" len="med"/>
+                    </a:lnL>
+                    <a:lnR w="9525" cap="flat" cmpd="sng" algn="ctr">
+                      <a:solidFill>
+                        <a:srgbClr val="CBD5E1"/>
+                      </a:solidFill>
+                      <a:prstDash val="solid"/>
+                      <a:round/>
+                      <a:headEnd type="none" w="med" len="med"/>
+                      <a:tailEnd type="none" w="med" len="med"/>
+                    </a:lnR>
+                    <a:lnT w="9525" cap="flat" cmpd="sng" algn="ctr">
+                      <a:solidFill>
+                        <a:srgbClr val="CBD5E1"/>
+                      </a:solidFill>
+                      <a:prstDash val="solid"/>
+                      <a:round/>
+                      <a:headEnd type="none" w="med" len="med"/>
+                      <a:tailEnd type="none" w="med" len="med"/>
+                    </a:lnT>
+                    <a:lnB w="9525" cap="flat" cmpd="sng" algn="ctr">
+                      <a:solidFill>
+                        <a:srgbClr val="CBD5E1"/>
+                      </a:solidFill>
+                      <a:prstDash val="solid"/>
+                      <a:round/>
+                      <a:headEnd type="none" w="med" len="med"/>
+                      <a:tailEnd type="none" w="med" len="med"/>
+                    </a:lnB>
+                    <a:solidFill>
+                      <a:schemeClr val="bg1"/>
+                    </a:solidFill>
+                  </a:tcPr>
+                </a:tc>
+                <a:tc>
+                  <a:txBody>
+                    <a:bodyPr/>
+                    <a:lstStyle/>
+                    <a:p>
+                      <a:pPr algn="ctr" indent="0" marL="0">
+                        <a:buNone/>
+                      </a:pPr>
+                      <a:r>
+                        <a:rPr lang="en-US" sz="1150" dirty="0">
+                          <a:solidFill>
+                            <a:schemeClr val="accent6"/>
+                          </a:solidFill>
+                        </a:rPr>
+                        <a:t>Identity sync: 30 min to 7 days</a:t>
+                      </a:r>
+                      <a:endParaRPr lang="en-US" sz="1150" dirty="0"/>
+                    </a:p>
+                  </a:txBody>
+                  <a:tcPr marL="73152" marR="73152" marT="45720" marB="45720" anchor="ctr">
+                    <a:lnL w="9525" cap="flat" cmpd="sng" algn="ctr">
+                      <a:solidFill>
+                        <a:srgbClr val="CBD5E1"/>
+                      </a:solidFill>
+                      <a:prstDash val="solid"/>
+                      <a:round/>
+                      <a:headEnd type="none" w="med" len="med"/>
+                      <a:tailEnd type="none" w="med" len="med"/>
+                    </a:lnL>
+                    <a:lnR w="9525" cap="flat" cmpd="sng" algn="ctr">
+                      <a:solidFill>
+                        <a:srgbClr val="CBD5E1"/>
+                      </a:solidFill>
+                      <a:prstDash val="solid"/>
+                      <a:round/>
+                      <a:headEnd type="none" w="med" len="med"/>
+                      <a:tailEnd type="none" w="med" len="med"/>
+                    </a:lnR>
+                    <a:lnT w="9525" cap="flat" cmpd="sng" algn="ctr">
+                      <a:solidFill>
+                        <a:srgbClr val="CBD5E1"/>
+                      </a:solidFill>
+                      <a:prstDash val="solid"/>
+                      <a:round/>
+                      <a:headEnd type="none" w="med" len="med"/>
+                      <a:tailEnd type="none" w="med" len="med"/>
+                    </a:lnT>
+                    <a:lnB w="9525" cap="flat" cmpd="sng" algn="ctr">
+                      <a:solidFill>
+                        <a:srgbClr val="CBD5E1"/>
+                      </a:solidFill>
+                      <a:prstDash val="solid"/>
+                      <a:round/>
+                      <a:headEnd type="none" w="med" len="med"/>
+                      <a:tailEnd type="none" w="med" len="med"/>
+                    </a:lnB>
+                    <a:solidFill>
+                      <a:schemeClr val="bg1"/>
+                    </a:solidFill>
+                  </a:tcPr>
+                </a:tc>
+                <a:tc>
+                  <a:txBody>
+                    <a:bodyPr/>
+                    <a:lstStyle/>
+                    <a:p>
+                      <a:pPr algn="ctr" indent="0" marL="0">
+                        <a:buNone/>
+                      </a:pPr>
+                      <a:r>
+                        <a:rPr lang="en-US" sz="1150" dirty="0">
+                          <a:solidFill>
+                            <a:schemeClr val="accent6"/>
+                          </a:solidFill>
+                        </a:rPr>
+                        <a:t>Each crawl: hourly or slower</a:t>
+                      </a:r>
+                      <a:endParaRPr lang="en-US" sz="1150" dirty="0"/>
+                    </a:p>
+                  </a:txBody>
+                  <a:tcPr marL="73152" marR="73152" marT="45720" marB="45720" anchor="ctr">
+                    <a:lnL w="9525" cap="flat" cmpd="sng" algn="ctr">
+                      <a:solidFill>
+                        <a:srgbClr val="CBD5E1"/>
+                      </a:solidFill>
+                      <a:prstDash val="solid"/>
+                      <a:round/>
+                      <a:headEnd type="none" w="med" len="med"/>
+                      <a:tailEnd type="none" w="med" len="med"/>
+                    </a:lnL>
+                    <a:lnR w="9525" cap="flat" cmpd="sng" algn="ctr">
+                      <a:solidFill>
+                        <a:srgbClr val="CBD5E1"/>
+                      </a:solidFill>
+                      <a:prstDash val="solid"/>
+                      <a:round/>
+                      <a:headEnd type="none" w="med" len="med"/>
+                      <a:tailEnd type="none" w="med" len="med"/>
+                    </a:lnR>
+                    <a:lnT w="9525" cap="flat" cmpd="sng" algn="ctr">
+                      <a:solidFill>
+                        <a:srgbClr val="CBD5E1"/>
+                      </a:solidFill>
+                      <a:prstDash val="solid"/>
+                      <a:round/>
+                      <a:headEnd type="none" w="med" len="med"/>
+                      <a:tailEnd type="none" w="med" len="med"/>
+                    </a:lnT>
+                    <a:lnB w="9525" cap="flat" cmpd="sng" algn="ctr">
+                      <a:solidFill>
+                        <a:srgbClr val="CBD5E1"/>
+                      </a:solidFill>
+                      <a:prstDash val="solid"/>
+                      <a:round/>
+                      <a:headEnd type="none" w="med" len="med"/>
+                      <a:tailEnd type="none" w="med" len="med"/>
+                    </a:lnB>
+                    <a:solidFill>
+                      <a:schemeClr val="bg1"/>
+                    </a:solidFill>
+                  </a:tcPr>
+                </a:tc>
+                <a:tc>
+                  <a:txBody>
+                    <a:bodyPr/>
+                    <a:lstStyle/>
+                    <a:p>
+                      <a:pPr algn="ctr" indent="0" marL="0">
+                        <a:buNone/>
+                      </a:pPr>
+                      <a:r>
+                        <a:rPr lang="en-US" sz="1150" b="1" dirty="0">
+                          <a:solidFill>
+                            <a:schemeClr val="accent1"/>
+                          </a:solidFill>
+                        </a:rPr>
+                        <a:t>5 min maximum, enforced</a:t>
+                      </a:r>
+                      <a:endParaRPr lang="en-US" sz="1150" dirty="0"/>
+                    </a:p>
+                  </a:txBody>
+                  <a:tcPr marL="73152" marR="73152" marT="45720" marB="45720" anchor="ctr">
+                    <a:lnL w="9525" cap="flat" cmpd="sng" algn="ctr">
+                      <a:solidFill>
+                        <a:srgbClr val="CBD5E1"/>
+                      </a:solidFill>
+                      <a:prstDash val="solid"/>
+                      <a:round/>
+                      <a:headEnd type="none" w="med" len="med"/>
+                      <a:tailEnd type="none" w="med" len="med"/>
+                    </a:lnL>
+                    <a:lnR w="9525" cap="flat" cmpd="sng" algn="ctr">
+                      <a:solidFill>
+                        <a:srgbClr val="CBD5E1"/>
+                      </a:solidFill>
+                      <a:prstDash val="solid"/>
+                      <a:round/>
+                      <a:headEnd type="none" w="med" len="med"/>
+                      <a:tailEnd type="none" w="med" len="med"/>
+                    </a:lnR>
+                    <a:lnT w="9525" cap="flat" cmpd="sng" algn="ctr">
+                      <a:solidFill>
+                        <a:srgbClr val="CBD5E1"/>
+                      </a:solidFill>
+                      <a:prstDash val="solid"/>
+                      <a:round/>
+                      <a:headEnd type="none" w="med" len="med"/>
+                      <a:tailEnd type="none" w="med" len="med"/>
+                    </a:lnT>
+                    <a:lnB w="9525" cap="flat" cmpd="sng" algn="ctr">
+                      <a:solidFill>
+                        <a:srgbClr val="CBD5E1"/>
+                      </a:solidFill>
+                      <a:prstDash val="solid"/>
+                      <a:round/>
+                      <a:headEnd type="none" w="med" len="med"/>
+                      <a:tailEnd type="none" w="med" len="med"/>
+                    </a:lnB>
+                    <a:solidFill>
+                      <a:srgbClr val="E3F5F2"/>
+                    </a:solidFill>
+                  </a:tcPr>
+                </a:tc>
+              </a:tr>
+            </a:tbl>
+          </a:graphicData>
+        </a:graphic>
+      </p:graphicFrame>
+      <p:sp>
+        <p:nvSpPr>
+          <p:cNvPr id="4" name="text-269"/>
+          <p:cNvSpPr txBox="1"/>
+          <p:nvPr/>
+        </p:nvSpPr>
+        <p:spPr>
+          <a:xfrm>
+            <a:off x="548640" y="5623560"/>
+            <a:ext cx="11064240" cy="457200"/>
+          </a:xfrm>
+          <a:prstGeom prst="rect">
+            <a:avLst/>
+          </a:prstGeom>
+          <a:noFill/>
+          <a:ln/>
+        </p:spPr>
+        <p:txBody>
+          <a:bodyPr wrap="square" lIns="0" tIns="0" rIns="0" bIns="0" rtlCol="0" anchor="t"/>
+          <a:lstStyle/>
+          <a:p>
+            <a:pPr algn="l" indent="0" marL="0">
+              <a:buNone/>
+            </a:pPr>
+            <a:r>
+              <a:rPr lang="en-US" sz="1050" i="1" dirty="0">
+                <a:solidFill>
+                  <a:schemeClr val="accent6"/>
+                </a:solidFill>
+              </a:rPr>
+              <a:t>From each vendor's public documentation as of 13 Oct 2026. “Not documented” means we found nothing in their docs, not that the feature is absent. Sources: docs/ACCESS_CONTROL_INDUSTRY_REVIEW.md.</a:t>
+            </a:r>
+            <a:endParaRPr lang="en-US" sz="1050" dirty="0"/>
+          </a:p>
+        </p:txBody>
+      </p:sp>
+      <p:sp>
+        <p:nvSpPr>
+          <p:cNvPr id="25" name="Slide Number Placeholder 0"/>
+          <p:cNvSpPr>
+            <a:spLocks noGrp="1"/>
+          </p:cNvSpPr>
+          <p:nvPr>
+            <p:ph type="sldNum" sz="quarter" idx="4294967295"/>
+          </p:nvPr>
+        </p:nvSpPr>
+        <p:spPr>
+          <a:xfrm>
+            <a:off x="11247120" y="6400800"/>
+            <a:ext cx="411480" cy="274320"/>
+          </a:xfrm>
+          <a:prstGeom prst="rect">
+            <a:avLst/>
+          </a:prstGeom>
+          <a:extLst>
+            <a:ext uri="{C572A759-6A51-4108-AA02-DFA0A04FC94B}">
+              <ma14:wrappingTextBoxFlag xmlns:ma14="http://schemas.microsoft.com/office/mac/drawingml/2011/main" val="0"/>
+            </a:ext>
+          </a:extLst>
+        </p:spPr>
+        <p:txBody>
+          <a:bodyPr/>
+          <a:lstStyle>
+            <a:lvl1pPr>
+              <a:defRPr sz="1000">
+                <a:solidFill>
+                  <a:schemeClr val="accent6"/>
+                </a:solidFill>
+              </a:defRPr>
+            </a:lvl1pPr>
+          </a:lstStyle>
+          <a:p>
+            <a:pPr algn="r"/>
+            <a:fld id="{F7021451-1387-4CA6-816F-3879F97B5CBC}" type="slidenum">
+              <a:rPr b="0" lang="en-US"/>
+              <a:t>10</a:t>
+            </a:fld>
+            <a:endParaRPr lang="en-US"/>
+          </a:p>
+        </p:txBody>
+      </p:sp>
+    </p:spTree>
+  </p:cSld>
+  <p:clrMapOvr>
+    <a:masterClrMapping/>
+  </p:clrMapOvr>
+</p:sld>
+</file>
+
+<file path=ppt/slides/slide11.xml><?xml version="1.0" encoding="utf-8"?>
+<p:sld xmlns:a="http://schemas.openxmlformats.org/drawingml/2006/main" xmlns:r="http://schemas.openxmlformats.org/officeDocument/2006/relationships" xmlns:p="http://schemas.openxmlformats.org/presentationml/2006/main">
+  <p:cSld name="Slide 11">
+    <p:spTree>
+      <p:nvGrpSpPr>
+        <p:cNvPr id="1" name=""/>
+        <p:cNvGrpSpPr/>
+        <p:nvPr/>
+      </p:nvGrpSpPr>
+      <p:grpSpPr>
+        <a:xfrm>
+          <a:off x="0" y="0"/>
+          <a:ext cx="0" cy="0"/>
+          <a:chOff x="0" y="0"/>
+          <a:chExt cx="0" cy="0"/>
+        </a:xfrm>
+      </p:grpSpPr>
+      <p:sp>
+        <p:nvSpPr>
+          <p:cNvPr id="2" name="Text 0"/>
+          <p:cNvSpPr/>
+          <p:nvPr>
+            <p:ph idx="100" type="title" hasCustomPrompt="1"/>
+          </p:nvPr>
+        </p:nvSpPr>
+        <p:spPr>
+          <a:xfrm>
+            <a:off x="548640" y="320040"/>
+            <a:ext cx="11064240" cy="777240"/>
+          </a:xfrm>
+          <a:prstGeom prst="rect">
+            <a:avLst/>
+          </a:prstGeom>
+          <a:noFill/>
+          <a:ln/>
+        </p:spPr>
+        <p:txBody>
+          <a:bodyPr wrap="square" lIns="0" tIns="0" rIns="0" bIns="0" rtlCol="0" anchor="ctr"/>
+          <a:lstStyle/>
+          <a:p>
+            <a:pPr algn="l" indent="0" marL="0">
+              <a:buNone/>
+            </a:pPr>
+            <a:r>
+              <a:rPr lang="en-US" sz="2800" b="1" dirty="0">
+                <a:solidFill>
+                  <a:schemeClr val="tx2"/>
+                </a:solidFill>
+              </a:rPr>
+              <a:t>A revocation at the source is enforced within 5 minutes</a:t>
+            </a:r>
+            <a:endParaRPr lang="en-US" sz="2800" dirty="0"/>
+          </a:p>
+        </p:txBody>
+      </p:sp>
+      <p:graphicFrame>
+        <p:nvGraphicFramePr>
+          <p:cNvPr id="3" name="revocation-chart-270" descr=""/>
+          <p:cNvGraphicFramePr/>
+          <p:nvPr/>
+        </p:nvGraphicFramePr>
+        <p:xfrm>
+          <a:off x="548640" y="1325880"/>
+          <a:ext cx="7040880" cy="4343400"/>
+        </p:xfrm>
+        <a:graphic xmlns:a="http://schemas.openxmlformats.org/drawingml/2006/main">
+          <a:graphicData uri="http://schemas.openxmlformats.org/drawingml/2006/chart">
+            <c:chart xmlns:c="http://schemas.openxmlformats.org/drawingml/2006/chart" r:id="rId1"/>
+          </a:graphicData>
+        </a:graphic>
+      </p:graphicFrame>
+      <p:sp>
+        <p:nvSpPr>
+          <p:cNvPr id="4" name="text-271"/>
+          <p:cNvSpPr txBox="1"/>
+          <p:nvPr/>
+        </p:nvSpPr>
+        <p:spPr>
+          <a:xfrm>
+            <a:off x="548640" y="5669280"/>
+            <a:ext cx="7040880" cy="274320"/>
+          </a:xfrm>
+          <a:prstGeom prst="rect">
+            <a:avLst/>
+          </a:prstGeom>
+          <a:noFill/>
+          <a:ln/>
+        </p:spPr>
+        <p:txBody>
+          <a:bodyPr wrap="square" lIns="0" tIns="0" rIns="0" bIns="0" rtlCol="0" anchor="t"/>
+          <a:lstStyle/>
+          <a:p>
+            <a:pPr algn="l" indent="0" marL="0">
+              <a:buNone/>
+            </a:pPr>
+            <a:r>
+              <a:rPr lang="en-US" sz="1100" dirty="0">
+                <a:solidFill>
+                  <a:schemeClr val="accent6"/>
+                </a:solidFill>
+              </a:rPr>
+              <a:t>Minutes until a permission change applies (log scale)</a:t>
+            </a:r>
+            <a:endParaRPr lang="en-US" sz="1100" dirty="0"/>
+          </a:p>
+        </p:txBody>
+      </p:sp>
+      <p:sp>
+        <p:nvSpPr>
+          <p:cNvPr id="5" name="chart-notes-272"/>
+          <p:cNvSpPr/>
+          <p:nvPr/>
+        </p:nvSpPr>
+        <p:spPr>
+          <a:xfrm>
+            <a:off x="7955280" y="1417320"/>
+            <a:ext cx="3657600" cy="3154680"/>
+          </a:xfrm>
+          <a:prstGeom prst="roundRect">
+            <a:avLst>
+              <a:gd name="adj" fmla="val 2319"/>
+            </a:avLst>
+          </a:prstGeom>
+          <a:solidFill>
+            <a:schemeClr val="bg2"/>
+          </a:solidFill>
+          <a:ln/>
+        </p:spPr>
+      </p:sp>
+      <p:sp>
+        <p:nvSpPr>
+          <p:cNvPr id="6" name="text-273"/>
+          <p:cNvSpPr txBox="1"/>
+          <p:nvPr/>
+        </p:nvSpPr>
+        <p:spPr>
+          <a:xfrm>
+            <a:off x="8183880" y="1645920"/>
+            <a:ext cx="3200400" cy="3840480"/>
+          </a:xfrm>
+          <a:prstGeom prst="rect">
+            <a:avLst/>
+          </a:prstGeom>
+          <a:noFill/>
+          <a:ln/>
+        </p:spPr>
+        <p:txBody>
+          <a:bodyPr wrap="square" lIns="0" tIns="0" rIns="0" bIns="0" rtlCol="0" anchor="t"/>
+          <a:lstStyle/>
+          <a:p>
+            <a:pPr algn="l" indent="0" marL="0">
+              <a:buNone/>
+            </a:pPr>
+            <a:r>
+              <a:rPr lang="en-US" sz="1500" b="1" dirty="0">
+                <a:solidFill>
+                  <a:schemeClr val="tx2"/>
+                </a:solidFill>
+              </a:rPr>
+              <a:t>Their numbers are sync intervals.</a:t>
+            </a:r>
+            <a:endParaRPr lang="en-US" sz="1500" dirty="0"/>
+          </a:p>
+          <a:p>
+            <a:pPr algn="l" indent="0" marL="0">
+              <a:buNone/>
+            </a:pPr>
+            <a:r>
+              <a:rPr lang="en-US" sz="1500" dirty="0">
+                <a:solidFill>
+                  <a:schemeClr val="tx1"/>
+                </a:solidFill>
+              </a:rPr>
+              <a:t>Until the next sync, the old permissions still grant access.</a:t>
+            </a:r>
+            <a:endParaRPr lang="en-US" sz="1500" dirty="0"/>
+          </a:p>
+          <a:p>
+            <a:pPr algn="l" indent="0" marL="0">
+              <a:buNone/>
+            </a:pPr>
+            <a:r>
+              <a:rPr lang="en-US" sz="800" dirty="0">
+                <a:solidFill>
+                  <a:schemeClr val="tx1"/>
+                </a:solidFill>
+              </a:rPr>
+              <a:t> </a:t>
+            </a:r>
+            <a:endParaRPr lang="en-US" sz="1500" dirty="0"/>
+          </a:p>
+          <a:p>
+            <a:pPr algn="l" indent="0" marL="0">
+              <a:buNone/>
+            </a:pPr>
+            <a:r>
+              <a:rPr lang="en-US" sz="1500" b="1" dirty="0">
+                <a:solidFill>
+                  <a:schemeClr val="accent1"/>
+                </a:solidFill>
+              </a:rPr>
+              <a:t>Ours is a hard limit.</a:t>
+            </a:r>
+            <a:endParaRPr lang="en-US" sz="1500" dirty="0"/>
+          </a:p>
+          <a:p>
+            <a:pPr algn="l" indent="0" marL="0">
+              <a:buNone/>
+            </a:pPr>
+            <a:r>
+              <a:rPr lang="en-US" sz="1500" dirty="0">
+                <a:solidFill>
+                  <a:schemeClr val="tx1"/>
+                </a:solidFill>
+              </a:rPr>
+              <a:t>Permissions older than 5 minutes are refused, so access fails closed even if a sync or webhook is missed.</a:t>
+            </a:r>
+            <a:endParaRPr lang="en-US" sz="1500" dirty="0"/>
+          </a:p>
+          <a:p>
+            <a:pPr algn="l" indent="0" marL="0">
+              <a:buNone/>
+            </a:pPr>
+            <a:r>
+              <a:rPr lang="en-US" sz="800" dirty="0">
+                <a:solidFill>
+                  <a:schemeClr val="tx1"/>
+                </a:solidFill>
+              </a:rPr>
+              <a:t> </a:t>
+            </a:r>
+            <a:endParaRPr lang="en-US" sz="1500" dirty="0"/>
+          </a:p>
+          <a:p>
+            <a:pPr algn="l" indent="0" marL="0">
+              <a:buNone/>
+            </a:pPr>
+            <a:r>
+              <a:rPr lang="en-US" sz="1500" b="1" dirty="0">
+                <a:solidFill>
+                  <a:schemeClr val="tx2"/>
+                </a:solidFill>
+              </a:rPr>
+              <a:t>In-app grants apply on the next query.</a:t>
+            </a:r>
+            <a:endParaRPr lang="en-US" sz="1500" dirty="0"/>
+          </a:p>
+        </p:txBody>
+      </p:sp>
+      <p:sp>
+        <p:nvSpPr>
+          <p:cNvPr id="7" name="text-274"/>
+          <p:cNvSpPr txBox="1"/>
+          <p:nvPr/>
+        </p:nvSpPr>
+        <p:spPr>
+          <a:xfrm>
+            <a:off x="548640" y="5943600"/>
+            <a:ext cx="11064240" cy="384048"/>
+          </a:xfrm>
+          <a:prstGeom prst="rect">
+            <a:avLst/>
+          </a:prstGeom>
+          <a:noFill/>
+          <a:ln/>
+        </p:spPr>
+        <p:txBody>
+          <a:bodyPr wrap="square" lIns="0" tIns="0" rIns="0" bIns="0" rtlCol="0" anchor="t"/>
+          <a:lstStyle/>
+          <a:p>
+            <a:pPr algn="l" indent="0" marL="0">
+              <a:buNone/>
+            </a:pPr>
+            <a:r>
+              <a:rPr lang="en-US" sz="950" i="1" dirty="0">
+                <a:solidFill>
+                  <a:schemeClr val="accent6"/>
+                </a:solidFill>
+              </a:rPr>
+              <a:t>Vendor figures are documented defaults or minimums for one connector each (Microsoft Learn, Glean docs, Google Cloud docs, Oct 2026). Ours: DefaultAccessPolicy max age plus a per-minute permission refresh (PR #9).</a:t>
+            </a:r>
+            <a:endParaRPr lang="en-US" sz="950" dirty="0"/>
+          </a:p>
+        </p:txBody>
+      </p:sp>
+      <p:sp>
+        <p:nvSpPr>
+          <p:cNvPr id="25" name="Slide Number Placeholder 0"/>
+          <p:cNvSpPr>
+            <a:spLocks noGrp="1"/>
+          </p:cNvSpPr>
+          <p:nvPr>
+            <p:ph type="sldNum" sz="quarter" idx="4294967295"/>
+          </p:nvPr>
+        </p:nvSpPr>
+        <p:spPr>
+          <a:xfrm>
+            <a:off x="11247120" y="6400800"/>
+            <a:ext cx="411480" cy="274320"/>
+          </a:xfrm>
+          <a:prstGeom prst="rect">
+            <a:avLst/>
+          </a:prstGeom>
+          <a:extLst>
+            <a:ext uri="{C572A759-6A51-4108-AA02-DFA0A04FC94B}">
+              <ma14:wrappingTextBoxFlag xmlns:ma14="http://schemas.microsoft.com/office/mac/drawingml/2011/main" val="0"/>
+            </a:ext>
+          </a:extLst>
+        </p:spPr>
+        <p:txBody>
+          <a:bodyPr/>
+          <a:lstStyle>
+            <a:lvl1pPr>
+              <a:defRPr sz="1000">
+                <a:solidFill>
+                  <a:schemeClr val="accent6"/>
+                </a:solidFill>
+              </a:defRPr>
+            </a:lvl1pPr>
+          </a:lstStyle>
+          <a:p>
+            <a:pPr algn="r"/>
+            <a:fld id="{F7021451-1387-4CA6-816F-3879F97B5CBC}" type="slidenum">
+              <a:rPr b="0" lang="en-US"/>
+              <a:t>11</a:t>
+            </a:fld>
+            <a:endParaRPr lang="en-US"/>
+          </a:p>
+        </p:txBody>
+      </p:sp>
+    </p:spTree>
+  </p:cSld>
+  <p:clrMapOvr>
+    <a:masterClrMapping/>
+  </p:clrMapOvr>
+</p:sld>
+</file>
+
+<file path=ppt/slides/slide12.xml><?xml version="1.0" encoding="utf-8"?>
+<p:sld xmlns:a="http://schemas.openxmlformats.org/drawingml/2006/main" xmlns:r="http://schemas.openxmlformats.org/officeDocument/2006/relationships" xmlns:p="http://schemas.openxmlformats.org/presentationml/2006/main">
+  <p:cSld name="Slide 12">
+    <p:spTree>
+      <p:nvGrpSpPr>
+        <p:cNvPr id="1" name=""/>
+        <p:cNvGrpSpPr/>
+        <p:nvPr/>
+      </p:nvGrpSpPr>
+      <p:grpSpPr>
+        <a:xfrm>
+          <a:off x="0" y="0"/>
+          <a:ext cx="0" cy="0"/>
+          <a:chOff x="0" y="0"/>
+          <a:chExt cx="0" cy="0"/>
+        </a:xfrm>
+      </p:grpSpPr>
+      <p:sp>
+        <p:nvSpPr>
+          <p:cNvPr id="2" name="Text 0"/>
+          <p:cNvSpPr/>
+          <p:nvPr>
+            <p:ph idx="100" type="title" hasCustomPrompt="1"/>
+          </p:nvPr>
+        </p:nvSpPr>
+        <p:spPr>
+          <a:xfrm>
+            <a:off x="548640" y="320040"/>
+            <a:ext cx="11064240" cy="777240"/>
+          </a:xfrm>
+          <a:prstGeom prst="rect">
+            <a:avLst/>
+          </a:prstGeom>
+          <a:noFill/>
+          <a:ln/>
+        </p:spPr>
+        <p:txBody>
+          <a:bodyPr wrap="square" lIns="0" tIns="0" rIns="0" bIns="0" rtlCol="0" anchor="ctr"/>
+          <a:lstStyle/>
+          <a:p>
+            <a:pPr algn="l" indent="0" marL="0">
+              <a:buNone/>
+            </a:pPr>
+            <a:r>
+              <a:rPr lang="en-US" sz="2800" b="1" dirty="0">
+                <a:solidFill>
+                  <a:schemeClr val="tx2"/>
+                </a:solidFill>
+              </a:rPr>
+              <a:t>Design trade-offs we chose deliberately</a:t>
+            </a:r>
+            <a:endParaRPr lang="en-US" sz="2800" dirty="0"/>
+          </a:p>
+        </p:txBody>
+      </p:sp>
+      <p:graphicFrame>
+        <p:nvGraphicFramePr>
+          <p:cNvPr id="13" name="tradeoff-table-275"/>
           <p:cNvGraphicFramePr>
             <a:graphicFrameLocks noGrp="1"/>
           </p:cNvGraphicFramePr>
@@ -3320,7 +6864,7 @@
                   </a:tcPr>
                 </a:tc>
               </a:tr>
-              <a:tr h="713232">
+              <a:tr h="640080">
                 <a:tc>
                   <a:txBody>
                     <a:bodyPr/>
@@ -3505,7 +7049,7 @@
                   </a:tcPr>
                 </a:tc>
               </a:tr>
-              <a:tr h="713232">
+              <a:tr h="640080">
                 <a:tc>
                   <a:txBody>
                     <a:bodyPr/>
@@ -3690,7 +7234,7 @@
                   </a:tcPr>
                 </a:tc>
               </a:tr>
-              <a:tr h="640080">
+              <a:tr h="585216">
                 <a:tc>
                   <a:txBody>
                     <a:bodyPr/>
@@ -3875,7 +7419,7 @@
                   </a:tcPr>
                 </a:tc>
               </a:tr>
-              <a:tr h="640080">
+              <a:tr h="585216">
                 <a:tc>
                   <a:txBody>
                     <a:bodyPr/>
@@ -4060,7 +7604,7 @@
                   </a:tcPr>
                 </a:tc>
               </a:tr>
-              <a:tr h="640080">
+              <a:tr h="585216">
                 <a:tc>
                   <a:txBody>
                     <a:bodyPr/>
@@ -4245,7 +7789,192 @@
                   </a:tcPr>
                 </a:tc>
               </a:tr>
-              <a:tr h="640080">
+              <a:tr h="585216">
+                <a:tc>
+                  <a:txBody>
+                    <a:bodyPr/>
+                    <a:lstStyle/>
+                    <a:p>
+                      <a:pPr indent="0" marL="0">
+                        <a:buNone/>
+                      </a:pPr>
+                      <a:r>
+                        <a:rPr lang="en-US" sz="1300" b="1" dirty="0">
+                          <a:solidFill>
+                            <a:schemeClr val="tx2"/>
+                          </a:solidFill>
+                        </a:rPr>
+                        <a:t>Permission snapshots expire (5 min for confidential)</a:t>
+                      </a:r>
+                      <a:endParaRPr lang="en-US" sz="1300" dirty="0"/>
+                    </a:p>
+                  </a:txBody>
+                  <a:tcPr marL="109728" marR="109728" marT="54864" marB="54864" anchor="ctr">
+                    <a:lnL w="9525" cap="flat" cmpd="sng" algn="ctr">
+                      <a:solidFill>
+                        <a:srgbClr val="CBD5E1"/>
+                      </a:solidFill>
+                      <a:prstDash val="solid"/>
+                      <a:round/>
+                      <a:headEnd type="none" w="med" len="med"/>
+                      <a:tailEnd type="none" w="med" len="med"/>
+                    </a:lnL>
+                    <a:lnR w="9525" cap="flat" cmpd="sng" algn="ctr">
+                      <a:solidFill>
+                        <a:srgbClr val="CBD5E1"/>
+                      </a:solidFill>
+                      <a:prstDash val="solid"/>
+                      <a:round/>
+                      <a:headEnd type="none" w="med" len="med"/>
+                      <a:tailEnd type="none" w="med" len="med"/>
+                    </a:lnR>
+                    <a:lnT w="9525" cap="flat" cmpd="sng" algn="ctr">
+                      <a:solidFill>
+                        <a:srgbClr val="CBD5E1"/>
+                      </a:solidFill>
+                      <a:prstDash val="solid"/>
+                      <a:round/>
+                      <a:headEnd type="none" w="med" len="med"/>
+                      <a:tailEnd type="none" w="med" len="med"/>
+                    </a:lnT>
+                    <a:lnB w="9525" cap="flat" cmpd="sng" algn="ctr">
+                      <a:solidFill>
+                        <a:srgbClr val="CBD5E1"/>
+                      </a:solidFill>
+                      <a:prstDash val="solid"/>
+                      <a:round/>
+                      <a:headEnd type="none" w="med" len="med"/>
+                      <a:tailEnd type="none" w="med" len="med"/>
+                    </a:lnB>
+                    <a:solidFill>
+                      <a:schemeClr val="bg1"/>
+                    </a:solidFill>
+                  </a:tcPr>
+                </a:tc>
+                <a:tc>
+                  <a:txBody>
+                    <a:bodyPr/>
+                    <a:lstStyle/>
+                    <a:p>
+                      <a:pPr indent="0" marL="0">
+                        <a:buNone/>
+                      </a:pPr>
+                      <a:r>
+                        <a:rPr lang="en-US" sz="1300" dirty="0">
+                          <a:solidFill>
+                            <a:schemeClr val="tx1"/>
+                          </a:solidFill>
+                        </a:rPr>
+                        <a:t>A revocation at the source is enforced within 5 minutes</a:t>
+                      </a:r>
+                      <a:endParaRPr lang="en-US" sz="1300" dirty="0"/>
+                    </a:p>
+                  </a:txBody>
+                  <a:tcPr marL="109728" marR="109728" marT="54864" marB="54864" anchor="ctr">
+                    <a:lnL w="9525" cap="flat" cmpd="sng" algn="ctr">
+                      <a:solidFill>
+                        <a:srgbClr val="CBD5E1"/>
+                      </a:solidFill>
+                      <a:prstDash val="solid"/>
+                      <a:round/>
+                      <a:headEnd type="none" w="med" len="med"/>
+                      <a:tailEnd type="none" w="med" len="med"/>
+                    </a:lnL>
+                    <a:lnR w="9525" cap="flat" cmpd="sng" algn="ctr">
+                      <a:solidFill>
+                        <a:srgbClr val="CBD5E1"/>
+                      </a:solidFill>
+                      <a:prstDash val="solid"/>
+                      <a:round/>
+                      <a:headEnd type="none" w="med" len="med"/>
+                      <a:tailEnd type="none" w="med" len="med"/>
+                    </a:lnR>
+                    <a:lnT w="9525" cap="flat" cmpd="sng" algn="ctr">
+                      <a:solidFill>
+                        <a:srgbClr val="CBD5E1"/>
+                      </a:solidFill>
+                      <a:prstDash val="solid"/>
+                      <a:round/>
+                      <a:headEnd type="none" w="med" len="med"/>
+                      <a:tailEnd type="none" w="med" len="med"/>
+                    </a:lnT>
+                    <a:lnB w="9525" cap="flat" cmpd="sng" algn="ctr">
+                      <a:solidFill>
+                        <a:srgbClr val="CBD5E1"/>
+                      </a:solidFill>
+                      <a:prstDash val="solid"/>
+                      <a:round/>
+                      <a:headEnd type="none" w="med" len="med"/>
+                      <a:tailEnd type="none" w="med" len="med"/>
+                    </a:lnB>
+                    <a:solidFill>
+                      <a:schemeClr val="bg1"/>
+                    </a:solidFill>
+                  </a:tcPr>
+                </a:tc>
+                <a:tc>
+                  <a:txBody>
+                    <a:bodyPr/>
+                    <a:lstStyle/>
+                    <a:p>
+                      <a:pPr indent="0" marL="0">
+                        <a:buNone/>
+                      </a:pPr>
+                      <a:r>
+                        <a:rPr lang="en-US" sz="1300" dirty="0">
+                          <a:solidFill>
+                            <a:schemeClr val="accent6"/>
+                          </a:solidFill>
+                        </a:rPr>
+                        <a:t>If syncing stops, confidential documents become unavailable</a:t>
+                      </a:r>
+                      <a:endParaRPr lang="en-US" sz="1300" dirty="0"/>
+                    </a:p>
+                  </a:txBody>
+                  <a:tcPr marL="109728" marR="109728" marT="54864" marB="54864" anchor="ctr">
+                    <a:lnL w="9525" cap="flat" cmpd="sng" algn="ctr">
+                      <a:solidFill>
+                        <a:srgbClr val="CBD5E1"/>
+                      </a:solidFill>
+                      <a:prstDash val="solid"/>
+                      <a:round/>
+                      <a:headEnd type="none" w="med" len="med"/>
+                      <a:tailEnd type="none" w="med" len="med"/>
+                    </a:lnL>
+                    <a:lnR w="9525" cap="flat" cmpd="sng" algn="ctr">
+                      <a:solidFill>
+                        <a:srgbClr val="CBD5E1"/>
+                      </a:solidFill>
+                      <a:prstDash val="solid"/>
+                      <a:round/>
+                      <a:headEnd type="none" w="med" len="med"/>
+                      <a:tailEnd type="none" w="med" len="med"/>
+                    </a:lnR>
+                    <a:lnT w="9525" cap="flat" cmpd="sng" algn="ctr">
+                      <a:solidFill>
+                        <a:srgbClr val="CBD5E1"/>
+                      </a:solidFill>
+                      <a:prstDash val="solid"/>
+                      <a:round/>
+                      <a:headEnd type="none" w="med" len="med"/>
+                      <a:tailEnd type="none" w="med" len="med"/>
+                    </a:lnT>
+                    <a:lnB w="9525" cap="flat" cmpd="sng" algn="ctr">
+                      <a:solidFill>
+                        <a:srgbClr val="CBD5E1"/>
+                      </a:solidFill>
+                      <a:prstDash val="solid"/>
+                      <a:round/>
+                      <a:headEnd type="none" w="med" len="med"/>
+                      <a:tailEnd type="none" w="med" len="med"/>
+                    </a:lnB>
+                    <a:solidFill>
+                      <a:schemeClr val="bg1"/>
+                    </a:solidFill>
+                  </a:tcPr>
+                </a:tc>
+              </a:tr>
+              <a:tr h="585216">
                 <a:tc>
                   <a:txBody>
                     <a:bodyPr/>
@@ -4473,1338 +8202,9 @@
             <a:pPr algn="r"/>
             <a:fld id="{F7021451-1387-4CA6-816F-3879F97B5CBC}" type="slidenum">
               <a:rPr b="0" lang="en-US"/>
-              <a:t>10</a:t>
+              <a:t>12</a:t>
             </a:fld>
             <a:endParaRPr lang="en-US"/>
-          </a:p>
-        </p:txBody>
-      </p:sp>
-    </p:spTree>
-  </p:cSld>
-  <p:clrMapOvr>
-    <a:masterClrMapping/>
-  </p:clrMapOvr>
-</p:sld>
-</file>
-
-<file path=ppt/slides/slide11.xml><?xml version="1.0" encoding="utf-8"?>
-<p:sld xmlns:a="http://schemas.openxmlformats.org/drawingml/2006/main" xmlns:r="http://schemas.openxmlformats.org/officeDocument/2006/relationships" xmlns:p="http://schemas.openxmlformats.org/presentationml/2006/main">
-  <p:cSld name="Slide 11">
-    <p:spTree>
-      <p:nvGrpSpPr>
-        <p:cNvPr id="1" name=""/>
-        <p:cNvGrpSpPr/>
-        <p:nvPr/>
-      </p:nvGrpSpPr>
-      <p:grpSpPr>
-        <a:xfrm>
-          <a:off x="0" y="0"/>
-          <a:ext cx="0" cy="0"/>
-          <a:chOff x="0" y="0"/>
-          <a:chExt cx="0" cy="0"/>
-        </a:xfrm>
-      </p:grpSpPr>
-      <p:sp>
-        <p:nvSpPr>
-          <p:cNvPr id="2" name="Text 0"/>
-          <p:cNvSpPr/>
-          <p:nvPr>
-            <p:ph idx="100" type="title" hasCustomPrompt="1"/>
-          </p:nvPr>
-        </p:nvSpPr>
-        <p:spPr>
-          <a:xfrm>
-            <a:off x="548640" y="320040"/>
-            <a:ext cx="11064240" cy="777240"/>
-          </a:xfrm>
-          <a:prstGeom prst="rect">
-            <a:avLst/>
-          </a:prstGeom>
-          <a:noFill/>
-          <a:ln/>
-        </p:spPr>
-        <p:txBody>
-          <a:bodyPr wrap="square" lIns="0" tIns="0" rIns="0" bIns="0" rtlCol="0" anchor="ctr"/>
-          <a:lstStyle/>
-          <a:p>
-            <a:pPr algn="l" indent="0" marL="0">
-              <a:buNone/>
-            </a:pPr>
-            <a:r>
-              <a:rPr lang="en-US" sz="2800" b="1" dirty="0">
-                <a:solidFill>
-                  <a:schemeClr val="tx2"/>
-                </a:solidFill>
-              </a:rPr>
-              <a:t>Tested offline, built to run on Tencent Cloud</a:t>
-            </a:r>
-            <a:endParaRPr lang="en-US" sz="2800" dirty="0"/>
-          </a:p>
-        </p:txBody>
-      </p:sp>
-      <p:sp>
-        <p:nvSpPr>
-          <p:cNvPr id="3" name="text-269"/>
-          <p:cNvSpPr txBox="1"/>
-          <p:nvPr/>
-        </p:nvSpPr>
-        <p:spPr>
-          <a:xfrm>
-            <a:off x="548640" y="1371600"/>
-            <a:ext cx="5120640" cy="777240"/>
-          </a:xfrm>
-          <a:prstGeom prst="rect">
-            <a:avLst/>
-          </a:prstGeom>
-          <a:noFill/>
-          <a:ln/>
-        </p:spPr>
-        <p:txBody>
-          <a:bodyPr wrap="square" lIns="0" tIns="0" rIns="0" bIns="0" rtlCol="0" anchor="t"/>
-          <a:lstStyle/>
-          <a:p>
-            <a:pPr algn="l" indent="0" marL="0">
-              <a:buNone/>
-            </a:pPr>
-            <a:r>
-              <a:rPr lang="en-US" sz="4800" b="1" dirty="0">
-                <a:solidFill>
-                  <a:schemeClr val="accent1"/>
-                </a:solidFill>
-              </a:rPr>
-              <a:t>555</a:t>
-            </a:r>
-            <a:endParaRPr lang="en-US" sz="4800" dirty="0"/>
-          </a:p>
-        </p:txBody>
-      </p:sp>
-      <p:sp>
-        <p:nvSpPr>
-          <p:cNvPr id="4" name="text-270"/>
-          <p:cNvSpPr txBox="1"/>
-          <p:nvPr/>
-        </p:nvSpPr>
-        <p:spPr>
-          <a:xfrm>
-            <a:off x="548640" y="2148840"/>
-            <a:ext cx="5120640" cy="594360"/>
-          </a:xfrm>
-          <a:prstGeom prst="rect">
-            <a:avLst/>
-          </a:prstGeom>
-          <a:noFill/>
-          <a:ln/>
-        </p:spPr>
-        <p:txBody>
-          <a:bodyPr wrap="square" lIns="0" tIns="0" rIns="0" bIns="0" rtlCol="0" anchor="t"/>
-          <a:lstStyle/>
-          <a:p>
-            <a:pPr algn="l" indent="0" marL="0">
-              <a:buNone/>
-            </a:pPr>
-            <a:r>
-              <a:rPr lang="en-US" sz="1500" dirty="0">
-                <a:solidFill>
-                  <a:schemeClr val="tx1"/>
-                </a:solidFill>
-              </a:rPr>
-              <a:t>automated tests pass with no network, using mock providers and in-memory stores</a:t>
-            </a:r>
-            <a:endParaRPr lang="en-US" sz="1500" dirty="0"/>
-          </a:p>
-        </p:txBody>
-      </p:sp>
-      <p:sp>
-        <p:nvSpPr>
-          <p:cNvPr id="5" name="text-271"/>
-          <p:cNvSpPr txBox="1"/>
-          <p:nvPr/>
-        </p:nvSpPr>
-        <p:spPr>
-          <a:xfrm>
-            <a:off x="548640" y="2926080"/>
-            <a:ext cx="5120640" cy="777240"/>
-          </a:xfrm>
-          <a:prstGeom prst="rect">
-            <a:avLst/>
-          </a:prstGeom>
-          <a:noFill/>
-          <a:ln/>
-        </p:spPr>
-        <p:txBody>
-          <a:bodyPr wrap="square" lIns="0" tIns="0" rIns="0" bIns="0" rtlCol="0" anchor="t"/>
-          <a:lstStyle/>
-          <a:p>
-            <a:pPr algn="l" indent="0" marL="0">
-              <a:buNone/>
-            </a:pPr>
-            <a:r>
-              <a:rPr lang="en-US" sz="4800" b="1" dirty="0">
-                <a:solidFill>
-                  <a:schemeClr val="accent2"/>
-                </a:solidFill>
-              </a:rPr>
-              <a:t>0</a:t>
-            </a:r>
-            <a:endParaRPr lang="en-US" sz="4800" dirty="0"/>
-          </a:p>
-        </p:txBody>
-      </p:sp>
-      <p:sp>
-        <p:nvSpPr>
-          <p:cNvPr id="6" name="text-272"/>
-          <p:cNvSpPr txBox="1"/>
-          <p:nvPr/>
-        </p:nvSpPr>
-        <p:spPr>
-          <a:xfrm>
-            <a:off x="548640" y="3703320"/>
-            <a:ext cx="5120640" cy="594360"/>
-          </a:xfrm>
-          <a:prstGeom prst="rect">
-            <a:avLst/>
-          </a:prstGeom>
-          <a:noFill/>
-          <a:ln/>
-        </p:spPr>
-        <p:txBody>
-          <a:bodyPr wrap="square" lIns="0" tIns="0" rIns="0" bIns="0" rtlCol="0" anchor="t"/>
-          <a:lstStyle/>
-          <a:p>
-            <a:pPr algn="l" indent="0" marL="0">
-              <a:buNone/>
-            </a:pPr>
-            <a:r>
-              <a:rPr lang="en-US" sz="1500" dirty="0">
-                <a:solidFill>
-                  <a:schemeClr val="tx1"/>
-                </a:solidFill>
-              </a:rPr>
-              <a:t>restricted documents in the contractor's model context</a:t>
-            </a:r>
-            <a:endParaRPr lang="en-US" sz="1500" dirty="0"/>
-          </a:p>
-        </p:txBody>
-      </p:sp>
-      <p:sp>
-        <p:nvSpPr>
-          <p:cNvPr id="7" name="text-273"/>
-          <p:cNvSpPr txBox="1"/>
-          <p:nvPr/>
-        </p:nvSpPr>
-        <p:spPr>
-          <a:xfrm>
-            <a:off x="548640" y="4480560"/>
-            <a:ext cx="5120640" cy="777240"/>
-          </a:xfrm>
-          <a:prstGeom prst="rect">
-            <a:avLst/>
-          </a:prstGeom>
-          <a:noFill/>
-          <a:ln/>
-        </p:spPr>
-        <p:txBody>
-          <a:bodyPr wrap="square" lIns="0" tIns="0" rIns="0" bIns="0" rtlCol="0" anchor="t"/>
-          <a:lstStyle/>
-          <a:p>
-            <a:pPr algn="l" indent="0" marL="0">
-              <a:buNone/>
-            </a:pPr>
-            <a:r>
-              <a:rPr lang="en-US" sz="4800" b="1" dirty="0">
-                <a:solidFill>
-                  <a:schemeClr val="accent3"/>
-                </a:solidFill>
-              </a:rPr>
-              <a:t>Next query</a:t>
-            </a:r>
-            <a:endParaRPr lang="en-US" sz="4800" dirty="0"/>
-          </a:p>
-        </p:txBody>
-      </p:sp>
-      <p:sp>
-        <p:nvSpPr>
-          <p:cNvPr id="8" name="text-274"/>
-          <p:cNvSpPr txBox="1"/>
-          <p:nvPr/>
-        </p:nvSpPr>
-        <p:spPr>
-          <a:xfrm>
-            <a:off x="548640" y="5257800"/>
-            <a:ext cx="5120640" cy="594360"/>
-          </a:xfrm>
-          <a:prstGeom prst="rect">
-            <a:avLst/>
-          </a:prstGeom>
-          <a:noFill/>
-          <a:ln/>
-        </p:spPr>
-        <p:txBody>
-          <a:bodyPr wrap="square" lIns="0" tIns="0" rIns="0" bIns="0" rtlCol="0" anchor="t"/>
-          <a:lstStyle/>
-          <a:p>
-            <a:pPr algn="l" indent="0" marL="0">
-              <a:buNone/>
-            </a:pPr>
-            <a:r>
-              <a:rPr lang="en-US" sz="1500" dirty="0">
-                <a:solidFill>
-                  <a:schemeClr val="tx1"/>
-                </a:solidFill>
-              </a:rPr>
-              <a:t>revocation applies on the very next request, including saved answers</a:t>
-            </a:r>
-            <a:endParaRPr lang="en-US" sz="1500" dirty="0"/>
-          </a:p>
-        </p:txBody>
-      </p:sp>
-      <p:sp>
-        <p:nvSpPr>
-          <p:cNvPr id="9" name="stack-275"/>
-          <p:cNvSpPr/>
-          <p:nvPr/>
-        </p:nvSpPr>
-        <p:spPr>
-          <a:xfrm>
-            <a:off x="6263640" y="1371600"/>
-            <a:ext cx="5349240" cy="4754880"/>
-          </a:xfrm>
-          <a:prstGeom prst="roundRect">
-            <a:avLst>
-              <a:gd name="adj" fmla="val 1538"/>
-            </a:avLst>
-          </a:prstGeom>
-          <a:solidFill>
-            <a:schemeClr val="bg2"/>
-          </a:solidFill>
-          <a:ln/>
-        </p:spPr>
-      </p:sp>
-      <p:sp>
-        <p:nvSpPr>
-          <p:cNvPr id="10" name="text-276"/>
-          <p:cNvSpPr txBox="1"/>
-          <p:nvPr/>
-        </p:nvSpPr>
-        <p:spPr>
-          <a:xfrm>
-            <a:off x="6537960" y="1508760"/>
-            <a:ext cx="4572000" cy="411480"/>
-          </a:xfrm>
-          <a:prstGeom prst="rect">
-            <a:avLst/>
-          </a:prstGeom>
-          <a:noFill/>
-          <a:ln/>
-        </p:spPr>
-        <p:txBody>
-          <a:bodyPr wrap="square" lIns="0" tIns="0" rIns="0" bIns="0" rtlCol="0" anchor="t"/>
-          <a:lstStyle/>
-          <a:p>
-            <a:pPr algn="l" indent="0" marL="0">
-              <a:buNone/>
-            </a:pPr>
-            <a:r>
-              <a:rPr lang="en-US" sz="1800" b="1" dirty="0">
-                <a:solidFill>
-                  <a:schemeClr val="tx2"/>
-                </a:solidFill>
-              </a:rPr>
-              <a:t>Stack</a:t>
-            </a:r>
-            <a:endParaRPr lang="en-US" sz="1800" dirty="0"/>
-          </a:p>
-        </p:txBody>
-      </p:sp>
-      <p:sp>
-        <p:nvSpPr>
-          <p:cNvPr id="11" name="pill-277"/>
-          <p:cNvSpPr txBox="1"/>
-          <p:nvPr/>
-        </p:nvSpPr>
-        <p:spPr>
-          <a:xfrm>
-            <a:off x="6537960" y="2112264"/>
-            <a:ext cx="1005840" cy="384048"/>
-          </a:xfrm>
-          <a:prstGeom prst="roundRect">
-            <a:avLst>
-              <a:gd name="adj" fmla="val 50000"/>
-            </a:avLst>
-          </a:prstGeom>
-          <a:solidFill>
-            <a:schemeClr val="tx2"/>
-          </a:solidFill>
-          <a:ln/>
-        </p:spPr>
-        <p:txBody>
-          <a:bodyPr wrap="square" lIns="0" tIns="0" rIns="0" bIns="0" rtlCol="0" anchor="ctr"/>
-          <a:lstStyle/>
-          <a:p>
-            <a:pPr algn="ctr" indent="0" marL="0">
-              <a:buNone/>
-            </a:pPr>
-            <a:r>
-              <a:rPr lang="en-US" sz="1100" b="1" dirty="0">
-                <a:solidFill>
-                  <a:schemeClr val="bg1"/>
-                </a:solidFill>
-              </a:rPr>
-              <a:t>Model</a:t>
-            </a:r>
-            <a:endParaRPr lang="en-US" sz="1100" dirty="0"/>
-          </a:p>
-        </p:txBody>
-      </p:sp>
-      <p:sp>
-        <p:nvSpPr>
-          <p:cNvPr id="12" name="text-278"/>
-          <p:cNvSpPr txBox="1"/>
-          <p:nvPr/>
-        </p:nvSpPr>
-        <p:spPr>
-          <a:xfrm>
-            <a:off x="7726680" y="2057400"/>
-            <a:ext cx="3749040" cy="502920"/>
-          </a:xfrm>
-          <a:prstGeom prst="rect">
-            <a:avLst/>
-          </a:prstGeom>
-          <a:noFill/>
-          <a:ln/>
-        </p:spPr>
-        <p:txBody>
-          <a:bodyPr wrap="square" lIns="0" tIns="0" rIns="0" bIns="0" rtlCol="0" anchor="ctr"/>
-          <a:lstStyle/>
-          <a:p>
-            <a:pPr algn="l" indent="0" marL="0">
-              <a:buNone/>
-            </a:pPr>
-            <a:r>
-              <a:rPr lang="en-US" sz="1350" dirty="0">
-                <a:solidFill>
-                  <a:schemeClr val="tx1"/>
-                </a:solidFill>
-              </a:rPr>
-              <a:t>Tencent Cloud ADP (chat + embeddings) behind a provider factory</a:t>
-            </a:r>
-            <a:endParaRPr lang="en-US" sz="1350" dirty="0"/>
-          </a:p>
-        </p:txBody>
-      </p:sp>
-      <p:sp>
-        <p:nvSpPr>
-          <p:cNvPr id="13" name="pill-279"/>
-          <p:cNvSpPr txBox="1"/>
-          <p:nvPr/>
-        </p:nvSpPr>
-        <p:spPr>
-          <a:xfrm>
-            <a:off x="6537960" y="2770632"/>
-            <a:ext cx="1005840" cy="384048"/>
-          </a:xfrm>
-          <a:prstGeom prst="roundRect">
-            <a:avLst>
-              <a:gd name="adj" fmla="val 50000"/>
-            </a:avLst>
-          </a:prstGeom>
-          <a:solidFill>
-            <a:schemeClr val="tx2"/>
-          </a:solidFill>
-          <a:ln/>
-        </p:spPr>
-        <p:txBody>
-          <a:bodyPr wrap="square" lIns="0" tIns="0" rIns="0" bIns="0" rtlCol="0" anchor="ctr"/>
-          <a:lstStyle/>
-          <a:p>
-            <a:pPr algn="ctr" indent="0" marL="0">
-              <a:buNone/>
-            </a:pPr>
-            <a:r>
-              <a:rPr lang="en-US" sz="1100" b="1" dirty="0">
-                <a:solidFill>
-                  <a:schemeClr val="bg1"/>
-                </a:solidFill>
-              </a:rPr>
-              <a:t>API</a:t>
-            </a:r>
-            <a:endParaRPr lang="en-US" sz="1100" dirty="0"/>
-          </a:p>
-        </p:txBody>
-      </p:sp>
-      <p:sp>
-        <p:nvSpPr>
-          <p:cNvPr id="14" name="text-280"/>
-          <p:cNvSpPr txBox="1"/>
-          <p:nvPr/>
-        </p:nvSpPr>
-        <p:spPr>
-          <a:xfrm>
-            <a:off x="7726680" y="2715768"/>
-            <a:ext cx="3749040" cy="502920"/>
-          </a:xfrm>
-          <a:prstGeom prst="rect">
-            <a:avLst/>
-          </a:prstGeom>
-          <a:noFill/>
-          <a:ln/>
-        </p:spPr>
-        <p:txBody>
-          <a:bodyPr wrap="square" lIns="0" tIns="0" rIns="0" bIns="0" rtlCol="0" anchor="ctr"/>
-          <a:lstStyle/>
-          <a:p>
-            <a:pPr algn="l" indent="0" marL="0">
-              <a:buNone/>
-            </a:pPr>
-            <a:r>
-              <a:rPr lang="en-US" sz="1350" dirty="0">
-                <a:solidFill>
-                  <a:schemeClr val="tx1"/>
-                </a:solidFill>
-              </a:rPr>
-              <a:t>FastAPI + Pydantic v2; MCP server for AI agents</a:t>
-            </a:r>
-            <a:endParaRPr lang="en-US" sz="1350" dirty="0"/>
-          </a:p>
-        </p:txBody>
-      </p:sp>
-      <p:sp>
-        <p:nvSpPr>
-          <p:cNvPr id="15" name="pill-281"/>
-          <p:cNvSpPr txBox="1"/>
-          <p:nvPr/>
-        </p:nvSpPr>
-        <p:spPr>
-          <a:xfrm>
-            <a:off x="6537960" y="3429000"/>
-            <a:ext cx="1005840" cy="384048"/>
-          </a:xfrm>
-          <a:prstGeom prst="roundRect">
-            <a:avLst>
-              <a:gd name="adj" fmla="val 50000"/>
-            </a:avLst>
-          </a:prstGeom>
-          <a:solidFill>
-            <a:schemeClr val="tx2"/>
-          </a:solidFill>
-          <a:ln/>
-        </p:spPr>
-        <p:txBody>
-          <a:bodyPr wrap="square" lIns="0" tIns="0" rIns="0" bIns="0" rtlCol="0" anchor="ctr"/>
-          <a:lstStyle/>
-          <a:p>
-            <a:pPr algn="ctr" indent="0" marL="0">
-              <a:buNone/>
-            </a:pPr>
-            <a:r>
-              <a:rPr lang="en-US" sz="1100" b="1" dirty="0">
-                <a:solidFill>
-                  <a:schemeClr val="bg1"/>
-                </a:solidFill>
-              </a:rPr>
-              <a:t>Data</a:t>
-            </a:r>
-            <a:endParaRPr lang="en-US" sz="1100" dirty="0"/>
-          </a:p>
-        </p:txBody>
-      </p:sp>
-      <p:sp>
-        <p:nvSpPr>
-          <p:cNvPr id="16" name="text-282"/>
-          <p:cNvSpPr txBox="1"/>
-          <p:nvPr/>
-        </p:nvSpPr>
-        <p:spPr>
-          <a:xfrm>
-            <a:off x="7726680" y="3374136"/>
-            <a:ext cx="3749040" cy="502920"/>
-          </a:xfrm>
-          <a:prstGeom prst="rect">
-            <a:avLst/>
-          </a:prstGeom>
-          <a:noFill/>
-          <a:ln/>
-        </p:spPr>
-        <p:txBody>
-          <a:bodyPr wrap="square" lIns="0" tIns="0" rIns="0" bIns="0" rtlCol="0" anchor="ctr"/>
-          <a:lstStyle/>
-          <a:p>
-            <a:pPr algn="l" indent="0" marL="0">
-              <a:buNone/>
-            </a:pPr>
-            <a:r>
-              <a:rPr lang="en-US" sz="1350" dirty="0">
-                <a:solidFill>
-                  <a:schemeClr val="tx1"/>
-                </a:solidFill>
-              </a:rPr>
-              <a:t>Postgres 16 + pgvector hybrid search</a:t>
-            </a:r>
-            <a:endParaRPr lang="en-US" sz="1350" dirty="0"/>
-          </a:p>
-        </p:txBody>
-      </p:sp>
-      <p:sp>
-        <p:nvSpPr>
-          <p:cNvPr id="17" name="pill-283"/>
-          <p:cNvSpPr txBox="1"/>
-          <p:nvPr/>
-        </p:nvSpPr>
-        <p:spPr>
-          <a:xfrm>
-            <a:off x="6537960" y="4087368"/>
-            <a:ext cx="1005840" cy="384048"/>
-          </a:xfrm>
-          <a:prstGeom prst="roundRect">
-            <a:avLst>
-              <a:gd name="adj" fmla="val 50000"/>
-            </a:avLst>
-          </a:prstGeom>
-          <a:solidFill>
-            <a:schemeClr val="tx2"/>
-          </a:solidFill>
-          <a:ln/>
-        </p:spPr>
-        <p:txBody>
-          <a:bodyPr wrap="square" lIns="0" tIns="0" rIns="0" bIns="0" rtlCol="0" anchor="ctr"/>
-          <a:lstStyle/>
-          <a:p>
-            <a:pPr algn="ctr" indent="0" marL="0">
-              <a:buNone/>
-            </a:pPr>
-            <a:r>
-              <a:rPr lang="en-US" sz="1100" b="1" dirty="0">
-                <a:solidFill>
-                  <a:schemeClr val="bg1"/>
-                </a:solidFill>
-              </a:rPr>
-              <a:t>Jobs</a:t>
-            </a:r>
-            <a:endParaRPr lang="en-US" sz="1100" dirty="0"/>
-          </a:p>
-        </p:txBody>
-      </p:sp>
-      <p:sp>
-        <p:nvSpPr>
-          <p:cNvPr id="18" name="text-284"/>
-          <p:cNvSpPr txBox="1"/>
-          <p:nvPr/>
-        </p:nvSpPr>
-        <p:spPr>
-          <a:xfrm>
-            <a:off x="7726680" y="4032504"/>
-            <a:ext cx="3749040" cy="502920"/>
-          </a:xfrm>
-          <a:prstGeom prst="rect">
-            <a:avLst/>
-          </a:prstGeom>
-          <a:noFill/>
-          <a:ln/>
-        </p:spPr>
-        <p:txBody>
-          <a:bodyPr wrap="square" lIns="0" tIns="0" rIns="0" bIns="0" rtlCol="0" anchor="ctr"/>
-          <a:lstStyle/>
-          <a:p>
-            <a:pPr algn="l" indent="0" marL="0">
-              <a:buNone/>
-            </a:pPr>
-            <a:r>
-              <a:rPr lang="en-US" sz="1350" dirty="0">
-                <a:solidFill>
-                  <a:schemeClr val="tx1"/>
-                </a:solidFill>
-              </a:rPr>
-              <a:t>Redis + Celery: ingest, sync, verify, watchdog</a:t>
-            </a:r>
-            <a:endParaRPr lang="en-US" sz="1350" dirty="0"/>
-          </a:p>
-        </p:txBody>
-      </p:sp>
-      <p:sp>
-        <p:nvSpPr>
-          <p:cNvPr id="19" name="pill-285"/>
-          <p:cNvSpPr txBox="1"/>
-          <p:nvPr/>
-        </p:nvSpPr>
-        <p:spPr>
-          <a:xfrm>
-            <a:off x="6537960" y="4745736"/>
-            <a:ext cx="1005840" cy="384048"/>
-          </a:xfrm>
-          <a:prstGeom prst="roundRect">
-            <a:avLst>
-              <a:gd name="adj" fmla="val 50000"/>
-            </a:avLst>
-          </a:prstGeom>
-          <a:solidFill>
-            <a:schemeClr val="tx2"/>
-          </a:solidFill>
-          <a:ln/>
-        </p:spPr>
-        <p:txBody>
-          <a:bodyPr wrap="square" lIns="0" tIns="0" rIns="0" bIns="0" rtlCol="0" anchor="ctr"/>
-          <a:lstStyle/>
-          <a:p>
-            <a:pPr algn="ctr" indent="0" marL="0">
-              <a:buNone/>
-            </a:pPr>
-            <a:r>
-              <a:rPr lang="en-US" sz="1100" b="1" dirty="0">
-                <a:solidFill>
-                  <a:schemeClr val="bg1"/>
-                </a:solidFill>
-              </a:rPr>
-              <a:t>Web</a:t>
-            </a:r>
-            <a:endParaRPr lang="en-US" sz="1100" dirty="0"/>
-          </a:p>
-        </p:txBody>
-      </p:sp>
-      <p:sp>
-        <p:nvSpPr>
-          <p:cNvPr id="20" name="text-286"/>
-          <p:cNvSpPr txBox="1"/>
-          <p:nvPr/>
-        </p:nvSpPr>
-        <p:spPr>
-          <a:xfrm>
-            <a:off x="7726680" y="4690872"/>
-            <a:ext cx="3749040" cy="502920"/>
-          </a:xfrm>
-          <a:prstGeom prst="rect">
-            <a:avLst/>
-          </a:prstGeom>
-          <a:noFill/>
-          <a:ln/>
-        </p:spPr>
-        <p:txBody>
-          <a:bodyPr wrap="square" lIns="0" tIns="0" rIns="0" bIns="0" rtlCol="0" anchor="ctr"/>
-          <a:lstStyle/>
-          <a:p>
-            <a:pPr algn="l" indent="0" marL="0">
-              <a:buNone/>
-            </a:pPr>
-            <a:r>
-              <a:rPr lang="en-US" sz="1350" dirty="0">
-                <a:solidFill>
-                  <a:schemeClr val="tx1"/>
-                </a:solidFill>
-              </a:rPr>
-              <a:t>Next.js 15 + Tailwind</a:t>
-            </a:r>
-            <a:endParaRPr lang="en-US" sz="1350" dirty="0"/>
-          </a:p>
-        </p:txBody>
-      </p:sp>
-      <p:sp>
-        <p:nvSpPr>
-          <p:cNvPr id="21" name="pill-287"/>
-          <p:cNvSpPr txBox="1"/>
-          <p:nvPr/>
-        </p:nvSpPr>
-        <p:spPr>
-          <a:xfrm>
-            <a:off x="6537960" y="5404104"/>
-            <a:ext cx="1005840" cy="384048"/>
-          </a:xfrm>
-          <a:prstGeom prst="roundRect">
-            <a:avLst>
-              <a:gd name="adj" fmla="val 50000"/>
-            </a:avLst>
-          </a:prstGeom>
-          <a:solidFill>
-            <a:schemeClr val="tx2"/>
-          </a:solidFill>
-          <a:ln/>
-        </p:spPr>
-        <p:txBody>
-          <a:bodyPr wrap="square" lIns="0" tIns="0" rIns="0" bIns="0" rtlCol="0" anchor="ctr"/>
-          <a:lstStyle/>
-          <a:p>
-            <a:pPr algn="ctr" indent="0" marL="0">
-              <a:buNone/>
-            </a:pPr>
-            <a:r>
-              <a:rPr lang="en-US" sz="1100" b="1" dirty="0">
-                <a:solidFill>
-                  <a:schemeClr val="bg1"/>
-                </a:solidFill>
-              </a:rPr>
-              <a:t>Deploy</a:t>
-            </a:r>
-            <a:endParaRPr lang="en-US" sz="1100" dirty="0"/>
-          </a:p>
-        </p:txBody>
-      </p:sp>
-      <p:sp>
-        <p:nvSpPr>
-          <p:cNvPr id="22" name="text-288"/>
-          <p:cNvSpPr txBox="1"/>
-          <p:nvPr/>
-        </p:nvSpPr>
-        <p:spPr>
-          <a:xfrm>
-            <a:off x="7726680" y="5349240"/>
-            <a:ext cx="3749040" cy="502920"/>
-          </a:xfrm>
-          <a:prstGeom prst="rect">
-            <a:avLst/>
-          </a:prstGeom>
-          <a:noFill/>
-          <a:ln/>
-        </p:spPr>
-        <p:txBody>
-          <a:bodyPr wrap="square" lIns="0" tIns="0" rIns="0" bIns="0" rtlCol="0" anchor="ctr"/>
-          <a:lstStyle/>
-          <a:p>
-            <a:pPr algn="l" indent="0" marL="0">
-              <a:buNone/>
-            </a:pPr>
-            <a:r>
-              <a:rPr lang="en-US" sz="1350" dirty="0">
-                <a:solidFill>
-                  <a:schemeClr val="tx1"/>
-                </a:solidFill>
-              </a:rPr>
-              <a:t>One Docker Compose stack on a Tencent Cloud server</a:t>
-            </a:r>
-            <a:endParaRPr lang="en-US" sz="1350" dirty="0"/>
-          </a:p>
-        </p:txBody>
-      </p:sp>
-      <p:sp>
-        <p:nvSpPr>
-          <p:cNvPr id="23" name="text-289"/>
-          <p:cNvSpPr txBox="1"/>
-          <p:nvPr/>
-        </p:nvSpPr>
-        <p:spPr>
-          <a:xfrm>
-            <a:off x="548640" y="5989320"/>
-            <a:ext cx="5486400" cy="365760"/>
-          </a:xfrm>
-          <a:prstGeom prst="rect">
-            <a:avLst/>
-          </a:prstGeom>
-          <a:noFill/>
-          <a:ln/>
-        </p:spPr>
-        <p:txBody>
-          <a:bodyPr wrap="square" lIns="0" tIns="0" rIns="0" bIns="0" rtlCol="0" anchor="t"/>
-          <a:lstStyle/>
-          <a:p>
-            <a:pPr algn="l" indent="0" marL="0">
-              <a:buNone/>
-            </a:pPr>
-            <a:r>
-              <a:rPr lang="en-US" sz="1000" i="1" dirty="0">
-                <a:solidFill>
-                  <a:schemeClr val="accent6"/>
-                </a:solidFill>
-              </a:rPr>
-              <a:t>Test count: access-control v2 plus the saved-answer fix, 13 Oct 2026 (11 SQL tests run separately against Postgres).</a:t>
-            </a:r>
-            <a:endParaRPr lang="en-US" sz="1000" dirty="0"/>
-          </a:p>
-        </p:txBody>
-      </p:sp>
-      <p:sp>
-        <p:nvSpPr>
-          <p:cNvPr id="25" name="Slide Number Placeholder 0"/>
-          <p:cNvSpPr>
-            <a:spLocks noGrp="1"/>
-          </p:cNvSpPr>
-          <p:nvPr>
-            <p:ph type="sldNum" sz="quarter" idx="4294967295"/>
-          </p:nvPr>
-        </p:nvSpPr>
-        <p:spPr>
-          <a:xfrm>
-            <a:off x="11247120" y="6400800"/>
-            <a:ext cx="411480" cy="274320"/>
-          </a:xfrm>
-          <a:prstGeom prst="rect">
-            <a:avLst/>
-          </a:prstGeom>
-          <a:extLst>
-            <a:ext uri="{C572A759-6A51-4108-AA02-DFA0A04FC94B}">
-              <ma14:wrappingTextBoxFlag xmlns:ma14="http://schemas.microsoft.com/office/mac/drawingml/2011/main" val="0"/>
-            </a:ext>
-          </a:extLst>
-        </p:spPr>
-        <p:txBody>
-          <a:bodyPr/>
-          <a:lstStyle>
-            <a:lvl1pPr>
-              <a:defRPr sz="1000">
-                <a:solidFill>
-                  <a:schemeClr val="accent6"/>
-                </a:solidFill>
-              </a:defRPr>
-            </a:lvl1pPr>
-          </a:lstStyle>
-          <a:p>
-            <a:pPr algn="r"/>
-            <a:fld id="{F7021451-1387-4CA6-816F-3879F97B5CBC}" type="slidenum">
-              <a:rPr b="0" lang="en-US"/>
-              <a:t>11</a:t>
-            </a:fld>
-            <a:endParaRPr lang="en-US"/>
-          </a:p>
-        </p:txBody>
-      </p:sp>
-    </p:spTree>
-  </p:cSld>
-  <p:clrMapOvr>
-    <a:masterClrMapping/>
-  </p:clrMapOvr>
-</p:sld>
-</file>
-
-<file path=ppt/slides/slide12.xml><?xml version="1.0" encoding="utf-8"?>
-<p:sld xmlns:a="http://schemas.openxmlformats.org/drawingml/2006/main" xmlns:r="http://schemas.openxmlformats.org/officeDocument/2006/relationships" xmlns:p="http://schemas.openxmlformats.org/presentationml/2006/main">
-  <p:cSld name="Slide 12">
-    <p:spTree>
-      <p:nvGrpSpPr>
-        <p:cNvPr id="1" name=""/>
-        <p:cNvGrpSpPr/>
-        <p:nvPr/>
-      </p:nvGrpSpPr>
-      <p:grpSpPr>
-        <a:xfrm>
-          <a:off x="0" y="0"/>
-          <a:ext cx="0" cy="0"/>
-          <a:chOff x="0" y="0"/>
-          <a:chExt cx="0" cy="0"/>
-        </a:xfrm>
-      </p:grpSpPr>
-      <p:sp>
-        <p:nvSpPr>
-          <p:cNvPr id="2" name="Text 0"/>
-          <p:cNvSpPr/>
-          <p:nvPr>
-            <p:ph idx="100" type="title" hasCustomPrompt="1"/>
-          </p:nvPr>
-        </p:nvSpPr>
-        <p:spPr>
-          <a:xfrm>
-            <a:off x="640080" y="1463040"/>
-            <a:ext cx="10881360" cy="1463040"/>
-          </a:xfrm>
-          <a:prstGeom prst="rect">
-            <a:avLst/>
-          </a:prstGeom>
-          <a:noFill/>
-          <a:ln/>
-        </p:spPr>
-        <p:txBody>
-          <a:bodyPr wrap="square" lIns="0" tIns="0" rIns="0" bIns="0" rtlCol="0" anchor="t"/>
-          <a:lstStyle/>
-          <a:p>
-            <a:pPr algn="l" indent="0" marL="0">
-              <a:buNone/>
-            </a:pPr>
-            <a:r>
-              <a:rPr lang="en-US" sz="4000" b="1" dirty="0">
-                <a:solidFill>
-                  <a:schemeClr val="bg1"/>
-                </a:solidFill>
-              </a:rPr>
-              <a:t>Ask anything. See only what you are allowed to. Prove every answer.</a:t>
-            </a:r>
-            <a:endParaRPr lang="en-US" sz="4000" dirty="0"/>
-          </a:p>
-        </p:txBody>
-      </p:sp>
-      <p:sp>
-        <p:nvSpPr>
-          <p:cNvPr id="3" name="icon-bg-290"/>
-          <p:cNvSpPr/>
-          <p:nvPr/>
-        </p:nvSpPr>
-        <p:spPr>
-          <a:xfrm>
-            <a:off x="640080" y="3429000"/>
-            <a:ext cx="731520" cy="731520"/>
-          </a:xfrm>
-          <a:prstGeom prst="ellipse">
-            <a:avLst/>
-          </a:prstGeom>
-          <a:solidFill>
-            <a:schemeClr val="accent1"/>
-          </a:solidFill>
-          <a:ln/>
-        </p:spPr>
-      </p:sp>
-      <p:pic>
-        <p:nvPicPr>
-          <p:cNvPr id="4" name="icon-291" descr="preencoded.png">    </p:cNvPr>
-          <p:cNvPicPr>
-            <a:picLocks noChangeAspect="1"/>
-          </p:cNvPicPr>
-          <p:nvPr/>
-        </p:nvPicPr>
-        <p:blipFill>
-          <a:blip r:embed="rId1"/>
-          <a:stretch>
-            <a:fillRect/>
-          </a:stretch>
-        </p:blipFill>
-        <p:spPr>
-          <a:xfrm>
-            <a:off x="801014" y="3589934"/>
-            <a:ext cx="409651" cy="409651"/>
-          </a:xfrm>
-          <a:prstGeom prst="rect">
-            <a:avLst/>
-          </a:prstGeom>
-        </p:spPr>
-      </p:pic>
-      <p:sp>
-        <p:nvSpPr>
-          <p:cNvPr id="5" name="text-292"/>
-          <p:cNvSpPr txBox="1"/>
-          <p:nvPr/>
-        </p:nvSpPr>
-        <p:spPr>
-          <a:xfrm>
-            <a:off x="1508760" y="3429000"/>
-            <a:ext cx="1463040" cy="731520"/>
-          </a:xfrm>
-          <a:prstGeom prst="rect">
-            <a:avLst/>
-          </a:prstGeom>
-          <a:noFill/>
-          <a:ln/>
-        </p:spPr>
-        <p:txBody>
-          <a:bodyPr wrap="square" lIns="0" tIns="0" rIns="0" bIns="0" rtlCol="0" anchor="ctr"/>
-          <a:lstStyle/>
-          <a:p>
-            <a:pPr algn="l" indent="0" marL="0">
-              <a:buNone/>
-            </a:pPr>
-            <a:r>
-              <a:rPr lang="en-US" sz="2000" b="1" dirty="0">
-                <a:solidFill>
-                  <a:schemeClr val="bg1"/>
-                </a:solidFill>
-              </a:rPr>
-              <a:t>Permitted</a:t>
-            </a:r>
-            <a:endParaRPr lang="en-US" sz="2000" dirty="0"/>
-          </a:p>
-        </p:txBody>
-      </p:sp>
-      <p:sp>
-        <p:nvSpPr>
-          <p:cNvPr id="6" name="icon-bg-293"/>
-          <p:cNvSpPr/>
-          <p:nvPr/>
-        </p:nvSpPr>
-        <p:spPr>
-          <a:xfrm>
-            <a:off x="3291840" y="3429000"/>
-            <a:ext cx="731520" cy="731520"/>
-          </a:xfrm>
-          <a:prstGeom prst="ellipse">
-            <a:avLst/>
-          </a:prstGeom>
-          <a:solidFill>
-            <a:schemeClr val="accent3"/>
-          </a:solidFill>
-          <a:ln/>
-        </p:spPr>
-      </p:sp>
-      <p:pic>
-        <p:nvPicPr>
-          <p:cNvPr id="7" name="icon-294" descr="preencoded.png">    </p:cNvPr>
-          <p:cNvPicPr>
-            <a:picLocks noChangeAspect="1"/>
-          </p:cNvPicPr>
-          <p:nvPr/>
-        </p:nvPicPr>
-        <p:blipFill>
-          <a:blip r:embed="rId2"/>
-          <a:stretch>
-            <a:fillRect/>
-          </a:stretch>
-        </p:blipFill>
-        <p:spPr>
-          <a:xfrm>
-            <a:off x="3452774" y="3589934"/>
-            <a:ext cx="409651" cy="409651"/>
-          </a:xfrm>
-          <a:prstGeom prst="rect">
-            <a:avLst/>
-          </a:prstGeom>
-        </p:spPr>
-      </p:pic>
-      <p:sp>
-        <p:nvSpPr>
-          <p:cNvPr id="8" name="text-295"/>
-          <p:cNvSpPr txBox="1"/>
-          <p:nvPr/>
-        </p:nvSpPr>
-        <p:spPr>
-          <a:xfrm>
-            <a:off x="4160520" y="3429000"/>
-            <a:ext cx="1463040" cy="731520"/>
-          </a:xfrm>
-          <a:prstGeom prst="rect">
-            <a:avLst/>
-          </a:prstGeom>
-          <a:noFill/>
-          <a:ln/>
-        </p:spPr>
-        <p:txBody>
-          <a:bodyPr wrap="square" lIns="0" tIns="0" rIns="0" bIns="0" rtlCol="0" anchor="ctr"/>
-          <a:lstStyle/>
-          <a:p>
-            <a:pPr algn="l" indent="0" marL="0">
-              <a:buNone/>
-            </a:pPr>
-            <a:r>
-              <a:rPr lang="en-US" sz="2000" b="1" dirty="0">
-                <a:solidFill>
-                  <a:schemeClr val="bg1"/>
-                </a:solidFill>
-              </a:rPr>
-              <a:t>Fresh</a:t>
-            </a:r>
-            <a:endParaRPr lang="en-US" sz="2000" dirty="0"/>
-          </a:p>
-        </p:txBody>
-      </p:sp>
-      <p:sp>
-        <p:nvSpPr>
-          <p:cNvPr id="9" name="icon-bg-296"/>
-          <p:cNvSpPr/>
-          <p:nvPr/>
-        </p:nvSpPr>
-        <p:spPr>
-          <a:xfrm>
-            <a:off x="5943600" y="3429000"/>
-            <a:ext cx="731520" cy="731520"/>
-          </a:xfrm>
-          <a:prstGeom prst="ellipse">
-            <a:avLst/>
-          </a:prstGeom>
-          <a:solidFill>
-            <a:schemeClr val="accent4"/>
-          </a:solidFill>
-          <a:ln/>
-        </p:spPr>
-      </p:sp>
-      <p:pic>
-        <p:nvPicPr>
-          <p:cNvPr id="10" name="icon-297" descr="preencoded.png">    </p:cNvPr>
-          <p:cNvPicPr>
-            <a:picLocks noChangeAspect="1"/>
-          </p:cNvPicPr>
-          <p:nvPr/>
-        </p:nvPicPr>
-        <p:blipFill>
-          <a:blip r:embed="rId3"/>
-          <a:stretch>
-            <a:fillRect/>
-          </a:stretch>
-        </p:blipFill>
-        <p:spPr>
-          <a:xfrm>
-            <a:off x="6104534" y="3589934"/>
-            <a:ext cx="409651" cy="409651"/>
-          </a:xfrm>
-          <a:prstGeom prst="rect">
-            <a:avLst/>
-          </a:prstGeom>
-        </p:spPr>
-      </p:pic>
-      <p:sp>
-        <p:nvSpPr>
-          <p:cNvPr id="11" name="text-298"/>
-          <p:cNvSpPr txBox="1"/>
-          <p:nvPr/>
-        </p:nvSpPr>
-        <p:spPr>
-          <a:xfrm>
-            <a:off x="6812280" y="3429000"/>
-            <a:ext cx="1463040" cy="731520"/>
-          </a:xfrm>
-          <a:prstGeom prst="rect">
-            <a:avLst/>
-          </a:prstGeom>
-          <a:noFill/>
-          <a:ln/>
-        </p:spPr>
-        <p:txBody>
-          <a:bodyPr wrap="square" lIns="0" tIns="0" rIns="0" bIns="0" rtlCol="0" anchor="ctr"/>
-          <a:lstStyle/>
-          <a:p>
-            <a:pPr algn="l" indent="0" marL="0">
-              <a:buNone/>
-            </a:pPr>
-            <a:r>
-              <a:rPr lang="en-US" sz="2000" b="1" dirty="0">
-                <a:solidFill>
-                  <a:schemeClr val="bg1"/>
-                </a:solidFill>
-              </a:rPr>
-              <a:t>Grounded</a:t>
-            </a:r>
-            <a:endParaRPr lang="en-US" sz="2000" dirty="0"/>
-          </a:p>
-        </p:txBody>
-      </p:sp>
-      <p:sp>
-        <p:nvSpPr>
-          <p:cNvPr id="12" name="icon-bg-299"/>
-          <p:cNvSpPr/>
-          <p:nvPr/>
-        </p:nvSpPr>
-        <p:spPr>
-          <a:xfrm>
-            <a:off x="8595360" y="3429000"/>
-            <a:ext cx="731520" cy="731520"/>
-          </a:xfrm>
-          <a:prstGeom prst="ellipse">
-            <a:avLst/>
-          </a:prstGeom>
-          <a:solidFill>
-            <a:schemeClr val="accent5"/>
-          </a:solidFill>
-          <a:ln/>
-        </p:spPr>
-      </p:sp>
-      <p:pic>
-        <p:nvPicPr>
-          <p:cNvPr id="13" name="icon-300" descr="preencoded.png">    </p:cNvPr>
-          <p:cNvPicPr>
-            <a:picLocks noChangeAspect="1"/>
-          </p:cNvPicPr>
-          <p:nvPr/>
-        </p:nvPicPr>
-        <p:blipFill>
-          <a:blip r:embed="rId4"/>
-          <a:stretch>
-            <a:fillRect/>
-          </a:stretch>
-        </p:blipFill>
-        <p:spPr>
-          <a:xfrm>
-            <a:off x="8756294" y="3589934"/>
-            <a:ext cx="409651" cy="409651"/>
-          </a:xfrm>
-          <a:prstGeom prst="rect">
-            <a:avLst/>
-          </a:prstGeom>
-        </p:spPr>
-      </p:pic>
-      <p:sp>
-        <p:nvSpPr>
-          <p:cNvPr id="14" name="text-301"/>
-          <p:cNvSpPr txBox="1"/>
-          <p:nvPr/>
-        </p:nvSpPr>
-        <p:spPr>
-          <a:xfrm>
-            <a:off x="9464040" y="3429000"/>
-            <a:ext cx="1463040" cy="731520"/>
-          </a:xfrm>
-          <a:prstGeom prst="rect">
-            <a:avLst/>
-          </a:prstGeom>
-          <a:noFill/>
-          <a:ln/>
-        </p:spPr>
-        <p:txBody>
-          <a:bodyPr wrap="square" lIns="0" tIns="0" rIns="0" bIns="0" rtlCol="0" anchor="ctr"/>
-          <a:lstStyle/>
-          <a:p>
-            <a:pPr algn="l" indent="0" marL="0">
-              <a:buNone/>
-            </a:pPr>
-            <a:r>
-              <a:rPr lang="en-US" sz="2000" b="1" dirty="0">
-                <a:solidFill>
-                  <a:schemeClr val="bg1"/>
-                </a:solidFill>
-              </a:rPr>
-              <a:t>Audited</a:t>
-            </a:r>
-            <a:endParaRPr lang="en-US" sz="2000" dirty="0"/>
-          </a:p>
-        </p:txBody>
-      </p:sp>
-      <p:sp>
-        <p:nvSpPr>
-          <p:cNvPr id="15" name="text-302"/>
-          <p:cNvSpPr txBox="1"/>
-          <p:nvPr/>
-        </p:nvSpPr>
-        <p:spPr>
-          <a:xfrm>
-            <a:off x="640080" y="4937760"/>
-            <a:ext cx="7315200" cy="365760"/>
-          </a:xfrm>
-          <a:prstGeom prst="rect">
-            <a:avLst/>
-          </a:prstGeom>
-          <a:noFill/>
-          <a:ln/>
-        </p:spPr>
-        <p:txBody>
-          <a:bodyPr wrap="square" lIns="0" tIns="0" rIns="0" bIns="0" rtlCol="0" anchor="t"/>
-          <a:lstStyle/>
-          <a:p>
-            <a:pPr algn="l" indent="0" marL="0">
-              <a:buNone/>
-            </a:pPr>
-            <a:r>
-              <a:rPr lang="en-US" sz="1600" dirty="0">
-                <a:solidFill>
-                  <a:srgbClr val="C9D8EE"/>
-                </a:solidFill>
-              </a:rPr>
-              <a:t>github.com/pavan2184/tencent-hack</a:t>
-            </a:r>
-            <a:endParaRPr lang="en-US" sz="1600" dirty="0"/>
-          </a:p>
-        </p:txBody>
-      </p:sp>
-      <p:sp>
-        <p:nvSpPr>
-          <p:cNvPr id="16" name="text-303"/>
-          <p:cNvSpPr txBox="1"/>
-          <p:nvPr/>
-        </p:nvSpPr>
-        <p:spPr>
-          <a:xfrm>
-            <a:off x="640080" y="5989320"/>
-            <a:ext cx="10515600" cy="365760"/>
-          </a:xfrm>
-          <a:prstGeom prst="rect">
-            <a:avLst/>
-          </a:prstGeom>
-          <a:noFill/>
-          <a:ln/>
-        </p:spPr>
-        <p:txBody>
-          <a:bodyPr wrap="square" lIns="0" tIns="0" rIns="0" bIns="0" rtlCol="0" anchor="t"/>
-          <a:lstStyle/>
-          <a:p>
-            <a:pPr algn="l" indent="0" marL="0">
-              <a:buNone/>
-            </a:pPr>
-            <a:r>
-              <a:rPr lang="en-US" sz="1300" dirty="0">
-                <a:solidFill>
-                  <a:srgbClr val="C9D8EE"/>
-                </a:solidFill>
-              </a:rPr>
-              <a:t>Chai · Raphael · Pavan  ·  Tencent Cloud AI CAN DO IT Hackathon Singapore 2026</a:t>
-            </a:r>
-            <a:endParaRPr lang="en-US" sz="1300" dirty="0"/>
           </a:p>
         </p:txBody>
       </p:sp>
@@ -5865,7 +8265,7 @@
                   <a:schemeClr val="tx2"/>
                 </a:solidFill>
               </a:rPr>
-              <a:t>Team status, 13 Oct (internal: remove before submission)</a:t>
+              <a:t>Tested offline, built to run on Tencent Cloud</a:t>
             </a:r>
             <a:endParaRPr lang="en-US" sz="2800" dirty="0"/>
           </a:p>
@@ -5873,36 +8273,252 @@
       </p:sp>
       <p:sp>
         <p:nvSpPr>
-          <p:cNvPr id="3" name="status-col-304"/>
+          <p:cNvPr id="3" name="text-276"/>
+          <p:cNvSpPr txBox="1"/>
+          <p:nvPr/>
+        </p:nvSpPr>
+        <p:spPr>
+          <a:xfrm>
+            <a:off x="548640" y="1371600"/>
+            <a:ext cx="5120640" cy="777240"/>
+          </a:xfrm>
+          <a:prstGeom prst="rect">
+            <a:avLst/>
+          </a:prstGeom>
+          <a:noFill/>
+          <a:ln/>
+        </p:spPr>
+        <p:txBody>
+          <a:bodyPr wrap="square" lIns="0" tIns="0" rIns="0" bIns="0" rtlCol="0" anchor="t"/>
+          <a:lstStyle/>
+          <a:p>
+            <a:pPr algn="l" indent="0" marL="0">
+              <a:buNone/>
+            </a:pPr>
+            <a:r>
+              <a:rPr lang="en-US" sz="4800" b="1" dirty="0">
+                <a:solidFill>
+                  <a:schemeClr val="accent1"/>
+                </a:solidFill>
+              </a:rPr>
+              <a:t>573</a:t>
+            </a:r>
+            <a:endParaRPr lang="en-US" sz="4800" dirty="0"/>
+          </a:p>
+        </p:txBody>
+      </p:sp>
+      <p:sp>
+        <p:nvSpPr>
+          <p:cNvPr id="4" name="text-277"/>
+          <p:cNvSpPr txBox="1"/>
+          <p:nvPr/>
+        </p:nvSpPr>
+        <p:spPr>
+          <a:xfrm>
+            <a:off x="548640" y="2148840"/>
+            <a:ext cx="5120640" cy="594360"/>
+          </a:xfrm>
+          <a:prstGeom prst="rect">
+            <a:avLst/>
+          </a:prstGeom>
+          <a:noFill/>
+          <a:ln/>
+        </p:spPr>
+        <p:txBody>
+          <a:bodyPr wrap="square" lIns="0" tIns="0" rIns="0" bIns="0" rtlCol="0" anchor="t"/>
+          <a:lstStyle/>
+          <a:p>
+            <a:pPr algn="l" indent="0" marL="0">
+              <a:buNone/>
+            </a:pPr>
+            <a:r>
+              <a:rPr lang="en-US" sz="1500" dirty="0">
+                <a:solidFill>
+                  <a:schemeClr val="tx1"/>
+                </a:solidFill>
+              </a:rPr>
+              <a:t>automated tests pass with no network, using mock providers and in-memory stores</a:t>
+            </a:r>
+            <a:endParaRPr lang="en-US" sz="1500" dirty="0"/>
+          </a:p>
+        </p:txBody>
+      </p:sp>
+      <p:sp>
+        <p:nvSpPr>
+          <p:cNvPr id="5" name="text-278"/>
+          <p:cNvSpPr txBox="1"/>
+          <p:nvPr/>
+        </p:nvSpPr>
+        <p:spPr>
+          <a:xfrm>
+            <a:off x="548640" y="2926080"/>
+            <a:ext cx="5120640" cy="777240"/>
+          </a:xfrm>
+          <a:prstGeom prst="rect">
+            <a:avLst/>
+          </a:prstGeom>
+          <a:noFill/>
+          <a:ln/>
+        </p:spPr>
+        <p:txBody>
+          <a:bodyPr wrap="square" lIns="0" tIns="0" rIns="0" bIns="0" rtlCol="0" anchor="t"/>
+          <a:lstStyle/>
+          <a:p>
+            <a:pPr algn="l" indent="0" marL="0">
+              <a:buNone/>
+            </a:pPr>
+            <a:r>
+              <a:rPr lang="en-US" sz="4800" b="1" dirty="0">
+                <a:solidFill>
+                  <a:schemeClr val="accent2"/>
+                </a:solidFill>
+              </a:rPr>
+              <a:t>0</a:t>
+            </a:r>
+            <a:endParaRPr lang="en-US" sz="4800" dirty="0"/>
+          </a:p>
+        </p:txBody>
+      </p:sp>
+      <p:sp>
+        <p:nvSpPr>
+          <p:cNvPr id="6" name="text-279"/>
+          <p:cNvSpPr txBox="1"/>
+          <p:nvPr/>
+        </p:nvSpPr>
+        <p:spPr>
+          <a:xfrm>
+            <a:off x="548640" y="3703320"/>
+            <a:ext cx="5120640" cy="594360"/>
+          </a:xfrm>
+          <a:prstGeom prst="rect">
+            <a:avLst/>
+          </a:prstGeom>
+          <a:noFill/>
+          <a:ln/>
+        </p:spPr>
+        <p:txBody>
+          <a:bodyPr wrap="square" lIns="0" tIns="0" rIns="0" bIns="0" rtlCol="0" anchor="t"/>
+          <a:lstStyle/>
+          <a:p>
+            <a:pPr algn="l" indent="0" marL="0">
+              <a:buNone/>
+            </a:pPr>
+            <a:r>
+              <a:rPr lang="en-US" sz="1500" dirty="0">
+                <a:solidFill>
+                  <a:schemeClr val="tx1"/>
+                </a:solidFill>
+              </a:rPr>
+              <a:t>restricted documents in the contractor's model context</a:t>
+            </a:r>
+            <a:endParaRPr lang="en-US" sz="1500" dirty="0"/>
+          </a:p>
+        </p:txBody>
+      </p:sp>
+      <p:sp>
+        <p:nvSpPr>
+          <p:cNvPr id="7" name="text-280"/>
+          <p:cNvSpPr txBox="1"/>
+          <p:nvPr/>
+        </p:nvSpPr>
+        <p:spPr>
+          <a:xfrm>
+            <a:off x="548640" y="4480560"/>
+            <a:ext cx="5120640" cy="777240"/>
+          </a:xfrm>
+          <a:prstGeom prst="rect">
+            <a:avLst/>
+          </a:prstGeom>
+          <a:noFill/>
+          <a:ln/>
+        </p:spPr>
+        <p:txBody>
+          <a:bodyPr wrap="square" lIns="0" tIns="0" rIns="0" bIns="0" rtlCol="0" anchor="t"/>
+          <a:lstStyle/>
+          <a:p>
+            <a:pPr algn="l" indent="0" marL="0">
+              <a:buNone/>
+            </a:pPr>
+            <a:r>
+              <a:rPr lang="en-US" sz="4800" b="1" dirty="0">
+                <a:solidFill>
+                  <a:schemeClr val="accent3"/>
+                </a:solidFill>
+              </a:rPr>
+              <a:t>5 min</a:t>
+            </a:r>
+            <a:endParaRPr lang="en-US" sz="4800" dirty="0"/>
+          </a:p>
+        </p:txBody>
+      </p:sp>
+      <p:sp>
+        <p:nvSpPr>
+          <p:cNvPr id="8" name="text-281"/>
+          <p:cNvSpPr txBox="1"/>
+          <p:nvPr/>
+        </p:nvSpPr>
+        <p:spPr>
+          <a:xfrm>
+            <a:off x="548640" y="5257800"/>
+            <a:ext cx="5120640" cy="594360"/>
+          </a:xfrm>
+          <a:prstGeom prst="rect">
+            <a:avLst/>
+          </a:prstGeom>
+          <a:noFill/>
+          <a:ln/>
+        </p:spPr>
+        <p:txBody>
+          <a:bodyPr wrap="square" lIns="0" tIns="0" rIns="0" bIns="0" rtlCol="0" anchor="t"/>
+          <a:lstStyle/>
+          <a:p>
+            <a:pPr algn="l" indent="0" marL="0">
+              <a:buNone/>
+            </a:pPr>
+            <a:r>
+              <a:rPr lang="en-US" sz="1500" dirty="0">
+                <a:solidFill>
+                  <a:schemeClr val="tx1"/>
+                </a:solidFill>
+              </a:rPr>
+              <a:t>longest a revocation at the source goes unnoticed for confidential documents; in-app grants apply on the next query</a:t>
+            </a:r>
+            <a:endParaRPr lang="en-US" sz="1500" dirty="0"/>
+          </a:p>
+        </p:txBody>
+      </p:sp>
+      <p:sp>
+        <p:nvSpPr>
+          <p:cNvPr id="9" name="stack-282"/>
           <p:cNvSpPr/>
           <p:nvPr/>
         </p:nvSpPr>
         <p:spPr>
           <a:xfrm>
-            <a:off x="548640" y="1325880"/>
-            <a:ext cx="3520440" cy="3840480"/>
+            <a:off x="6263640" y="1371600"/>
+            <a:ext cx="5349240" cy="4754880"/>
           </a:xfrm>
           <a:prstGeom prst="roundRect">
             <a:avLst>
-              <a:gd name="adj" fmla="val 2078"/>
+              <a:gd name="adj" fmla="val 1538"/>
             </a:avLst>
           </a:prstGeom>
           <a:solidFill>
-            <a:srgbClr val="E3F5F2"/>
+            <a:schemeClr val="bg2"/>
           </a:solidFill>
           <a:ln/>
         </p:spPr>
       </p:sp>
       <p:sp>
         <p:nvSpPr>
-          <p:cNvPr id="4" name="text-305"/>
+          <p:cNvPr id="10" name="text-283"/>
           <p:cNvSpPr txBox="1"/>
           <p:nvPr/>
         </p:nvSpPr>
         <p:spPr>
           <a:xfrm>
-            <a:off x="822960" y="1508760"/>
-            <a:ext cx="3017520" cy="457200"/>
+            <a:off x="6537960" y="1508760"/>
+            <a:ext cx="4572000" cy="411480"/>
           </a:xfrm>
           <a:prstGeom prst="rect">
             <a:avLst/>
@@ -5918,143 +8534,67 @@
               <a:buNone/>
             </a:pPr>
             <a:r>
-              <a:rPr lang="en-US" sz="1900" b="1" dirty="0">
-                <a:solidFill>
-                  <a:schemeClr val="accent1"/>
-                </a:solidFill>
-              </a:rPr>
-              <a:t>Done</a:t>
-            </a:r>
-            <a:endParaRPr lang="en-US" sz="1900" dirty="0"/>
-          </a:p>
-        </p:txBody>
-      </p:sp>
-      <p:sp>
-        <p:nvSpPr>
-          <p:cNvPr id="5" name="status-list-306"/>
+              <a:rPr lang="en-US" sz="1800" b="1" dirty="0">
+                <a:solidFill>
+                  <a:schemeClr val="tx2"/>
+                </a:solidFill>
+              </a:rPr>
+              <a:t>Stack</a:t>
+            </a:r>
+            <a:endParaRPr lang="en-US" sz="1800" dirty="0"/>
+          </a:p>
+        </p:txBody>
+      </p:sp>
+      <p:sp>
+        <p:nvSpPr>
+          <p:cNvPr id="11" name="pill-284"/>
           <p:cNvSpPr txBox="1"/>
           <p:nvPr/>
         </p:nvSpPr>
         <p:spPr>
           <a:xfrm>
-            <a:off x="822960" y="2057400"/>
-            <a:ext cx="3063240" cy="3977640"/>
-          </a:xfrm>
-          <a:prstGeom prst="rect">
-            <a:avLst/>
-          </a:prstGeom>
-          <a:noFill/>
-          <a:ln/>
-        </p:spPr>
-        <p:txBody>
-          <a:bodyPr wrap="square" lIns="0" tIns="0" rIns="0" bIns="0" rtlCol="0" anchor="t"/>
-          <a:lstStyle/>
-          <a:p>
-            <a:pPr marL="342900" indent="-342900">
-              <a:spcAft>
-                <a:spcPts val="900"/>
-              </a:spcAft>
-              <a:buSzPct val="100000"/>
-              <a:buChar char="•"/>
-            </a:pPr>
-            <a:r>
-              <a:rPr lang="en-US" sz="1350" dirty="0">
-                <a:solidFill>
-                  <a:schemeClr val="tx1"/>
-                </a:solidFill>
-              </a:rPr>
-              <a:t>Access-control library v2: native permission ceiling, fail-closed checks, Slack/Drive normalisers</a:t>
-            </a:r>
-            <a:endParaRPr lang="en-US" sz="1350" dirty="0"/>
-          </a:p>
-          <a:p>
-            <a:pPr marL="342900" indent="-342900">
-              <a:spcAft>
-                <a:spcPts val="900"/>
-              </a:spcAft>
-              <a:buSzPct val="100000"/>
-              <a:buChar char="•"/>
-            </a:pPr>
-            <a:r>
-              <a:rPr lang="en-US" sz="1350" dirty="0">
-                <a:solidFill>
-                  <a:schemeClr val="tx1"/>
-                </a:solidFill>
-              </a:rPr>
-              <a:t>Research note with primary sources for all four platforms</a:t>
-            </a:r>
-            <a:endParaRPr lang="en-US" sz="1350" dirty="0"/>
-          </a:p>
-          <a:p>
-            <a:pPr marL="342900" indent="-342900">
-              <a:spcAft>
-                <a:spcPts val="900"/>
-              </a:spcAft>
-              <a:buSzPct val="100000"/>
-              <a:buChar char="•"/>
-            </a:pPr>
-            <a:r>
-              <a:rPr lang="en-US" sz="1350" dirty="0">
-                <a:solidFill>
-                  <a:schemeClr val="tx1"/>
-                </a:solidFill>
-              </a:rPr>
-              <a:t>Saved-answer revocation fix with 6 tests (PR #6)</a:t>
-            </a:r>
-            <a:endParaRPr lang="en-US" sz="1350" dirty="0"/>
-          </a:p>
-          <a:p>
-            <a:pPr marL="342900" indent="-342900">
-              <a:spcAft>
-                <a:spcPts val="900"/>
-              </a:spcAft>
-              <a:buSzPct val="100000"/>
-              <a:buChar char="•"/>
-            </a:pPr>
-            <a:r>
-              <a:rPr lang="en-US" sz="1350" dirty="0">
-                <a:solidFill>
-                  <a:schemeClr val="tx1"/>
-                </a:solidFill>
-              </a:rPr>
-              <a:t>This deck: architecture and trust boundaries</a:t>
-            </a:r>
-            <a:endParaRPr lang="en-US" sz="1350" dirty="0"/>
-          </a:p>
-        </p:txBody>
-      </p:sp>
-      <p:sp>
-        <p:nvSpPr>
-          <p:cNvPr id="6" name="status-col-307"/>
-          <p:cNvSpPr/>
-          <p:nvPr/>
-        </p:nvSpPr>
-        <p:spPr>
-          <a:xfrm>
-            <a:off x="4297680" y="1325880"/>
-            <a:ext cx="3520440" cy="3840480"/>
+            <a:off x="6537960" y="2112264"/>
+            <a:ext cx="1005840" cy="384048"/>
           </a:xfrm>
           <a:prstGeom prst="roundRect">
             <a:avLst>
-              <a:gd name="adj" fmla="val 2078"/>
+              <a:gd name="adj" fmla="val 50000"/>
             </a:avLst>
           </a:prstGeom>
           <a:solidFill>
-            <a:srgbClr val="FDF4E4"/>
+            <a:schemeClr val="tx2"/>
           </a:solidFill>
           <a:ln/>
         </p:spPr>
-      </p:sp>
-      <p:sp>
-        <p:nvSpPr>
-          <p:cNvPr id="7" name="text-308"/>
+        <p:txBody>
+          <a:bodyPr wrap="square" lIns="0" tIns="0" rIns="0" bIns="0" rtlCol="0" anchor="ctr"/>
+          <a:lstStyle/>
+          <a:p>
+            <a:pPr algn="ctr" indent="0" marL="0">
+              <a:buNone/>
+            </a:pPr>
+            <a:r>
+              <a:rPr lang="en-US" sz="1100" b="1" dirty="0">
+                <a:solidFill>
+                  <a:schemeClr val="bg1"/>
+                </a:solidFill>
+              </a:rPr>
+              <a:t>Model</a:t>
+            </a:r>
+            <a:endParaRPr lang="en-US" sz="1100" dirty="0"/>
+          </a:p>
+        </p:txBody>
+      </p:sp>
+      <p:sp>
+        <p:nvSpPr>
+          <p:cNvPr id="12" name="text-285"/>
           <p:cNvSpPr txBox="1"/>
           <p:nvPr/>
         </p:nvSpPr>
         <p:spPr>
           <a:xfrm>
-            <a:off x="4572000" y="1508760"/>
-            <a:ext cx="3017520" cy="457200"/>
+            <a:off x="7726680" y="2057400"/>
+            <a:ext cx="3749040" cy="502920"/>
           </a:xfrm>
           <a:prstGeom prst="rect">
             <a:avLst/>
@@ -6063,132 +8603,74 @@
           <a:ln/>
         </p:spPr>
         <p:txBody>
-          <a:bodyPr wrap="square" lIns="0" tIns="0" rIns="0" bIns="0" rtlCol="0" anchor="t"/>
+          <a:bodyPr wrap="square" lIns="0" tIns="0" rIns="0" bIns="0" rtlCol="0" anchor="ctr"/>
           <a:lstStyle/>
           <a:p>
             <a:pPr algn="l" indent="0" marL="0">
               <a:buNone/>
             </a:pPr>
             <a:r>
-              <a:rPr lang="en-US" sz="1900" b="1" dirty="0">
-                <a:solidFill>
-                  <a:schemeClr val="accent3"/>
-                </a:solidFill>
-              </a:rPr>
-              <a:t>Needs team agreement</a:t>
-            </a:r>
-            <a:endParaRPr lang="en-US" sz="1900" dirty="0"/>
-          </a:p>
-        </p:txBody>
-      </p:sp>
-      <p:sp>
-        <p:nvSpPr>
-          <p:cNvPr id="8" name="status-list-309"/>
+              <a:rPr lang="en-US" sz="1350" dirty="0">
+                <a:solidFill>
+                  <a:schemeClr val="tx1"/>
+                </a:solidFill>
+              </a:rPr>
+              <a:t>Tencent Cloud ADP (chat + embeddings) behind a provider factory</a:t>
+            </a:r>
+            <a:endParaRPr lang="en-US" sz="1350" dirty="0"/>
+          </a:p>
+        </p:txBody>
+      </p:sp>
+      <p:sp>
+        <p:nvSpPr>
+          <p:cNvPr id="13" name="pill-286"/>
           <p:cNvSpPr txBox="1"/>
           <p:nvPr/>
         </p:nvSpPr>
         <p:spPr>
           <a:xfrm>
-            <a:off x="4572000" y="2057400"/>
-            <a:ext cx="3063240" cy="3977640"/>
-          </a:xfrm>
-          <a:prstGeom prst="rect">
-            <a:avLst/>
-          </a:prstGeom>
-          <a:noFill/>
-          <a:ln/>
-        </p:spPr>
-        <p:txBody>
-          <a:bodyPr wrap="square" lIns="0" tIns="0" rIns="0" bIns="0" rtlCol="0" anchor="t"/>
-          <a:lstStyle/>
-          <a:p>
-            <a:pPr marL="342900" indent="-342900">
-              <a:spcAft>
-                <a:spcPts val="900"/>
-              </a:spcAft>
-              <a:buSzPct val="100000"/>
-              <a:buChar char="•"/>
-            </a:pPr>
-            <a:r>
-              <a:rPr lang="en-US" sz="1350" dirty="0">
-                <a:solidFill>
-                  <a:schemeClr val="tx1"/>
-                </a:solidFill>
-              </a:rPr>
-              <a:t>Adopt v2 rules: admins no longer see everything; grants cannot widen source access (Raphael, Pavan)</a:t>
-            </a:r>
-            <a:endParaRPr lang="en-US" sz="1350" dirty="0"/>
-          </a:p>
-          <a:p>
-            <a:pPr marL="342900" indent="-342900">
-              <a:spcAft>
-                <a:spcPts val="900"/>
-              </a:spcAft>
-              <a:buSzPct val="100000"/>
-              <a:buChar char="•"/>
-            </a:pPr>
-            <a:r>
-              <a:rPr lang="en-US" sz="1350" dirty="0">
-                <a:solidFill>
-                  <a:schemeClr val="tx1"/>
-                </a:solidFill>
-              </a:rPr>
-              <a:t>Access-request approval when the source still blocks the requester (Raphael)</a:t>
-            </a:r>
-            <a:endParaRPr lang="en-US" sz="1350" dirty="0"/>
-          </a:p>
-          <a:p>
-            <a:pPr marL="342900" indent="-342900">
-              <a:spcAft>
-                <a:spcPts val="900"/>
-              </a:spcAft>
-              <a:buSzPct val="100000"/>
-              <a:buChar char="•"/>
-            </a:pPr>
-            <a:r>
-              <a:rPr lang="en-US" sz="1350" dirty="0">
-                <a:solidFill>
-                  <a:schemeClr val="tx1"/>
-                </a:solidFill>
-              </a:rPr>
-              <a:t>Wire the query-time access service into the app (Pavan)</a:t>
-            </a:r>
-            <a:endParaRPr lang="en-US" sz="1350" dirty="0"/>
-          </a:p>
-        </p:txBody>
-      </p:sp>
-      <p:sp>
-        <p:nvSpPr>
-          <p:cNvPr id="9" name="status-col-310"/>
-          <p:cNvSpPr/>
-          <p:nvPr/>
-        </p:nvSpPr>
-        <p:spPr>
-          <a:xfrm>
-            <a:off x="8046720" y="1325880"/>
-            <a:ext cx="3520440" cy="3840480"/>
+            <a:off x="6537960" y="2770632"/>
+            <a:ext cx="1005840" cy="384048"/>
           </a:xfrm>
           <a:prstGeom prst="roundRect">
             <a:avLst>
-              <a:gd name="adj" fmla="val 2078"/>
+              <a:gd name="adj" fmla="val 50000"/>
             </a:avLst>
           </a:prstGeom>
           <a:solidFill>
-            <a:srgbClr val="E8F0FC"/>
+            <a:schemeClr val="tx2"/>
           </a:solidFill>
           <a:ln/>
         </p:spPr>
-      </p:sp>
-      <p:sp>
-        <p:nvSpPr>
-          <p:cNvPr id="10" name="text-311"/>
+        <p:txBody>
+          <a:bodyPr wrap="square" lIns="0" tIns="0" rIns="0" bIns="0" rtlCol="0" anchor="ctr"/>
+          <a:lstStyle/>
+          <a:p>
+            <a:pPr algn="ctr" indent="0" marL="0">
+              <a:buNone/>
+            </a:pPr>
+            <a:r>
+              <a:rPr lang="en-US" sz="1100" b="1" dirty="0">
+                <a:solidFill>
+                  <a:schemeClr val="bg1"/>
+                </a:solidFill>
+              </a:rPr>
+              <a:t>API</a:t>
+            </a:r>
+            <a:endParaRPr lang="en-US" sz="1100" dirty="0"/>
+          </a:p>
+        </p:txBody>
+      </p:sp>
+      <p:sp>
+        <p:nvSpPr>
+          <p:cNvPr id="14" name="text-287"/>
           <p:cNvSpPr txBox="1"/>
           <p:nvPr/>
         </p:nvSpPr>
         <p:spPr>
           <a:xfrm>
-            <a:off x="8321040" y="1508760"/>
-            <a:ext cx="3017520" cy="457200"/>
+            <a:off x="7726680" y="2715768"/>
+            <a:ext cx="3749040" cy="502920"/>
           </a:xfrm>
           <a:prstGeom prst="rect">
             <a:avLst/>
@@ -6197,6 +8679,346 @@
           <a:ln/>
         </p:spPr>
         <p:txBody>
+          <a:bodyPr wrap="square" lIns="0" tIns="0" rIns="0" bIns="0" rtlCol="0" anchor="ctr"/>
+          <a:lstStyle/>
+          <a:p>
+            <a:pPr algn="l" indent="0" marL="0">
+              <a:buNone/>
+            </a:pPr>
+            <a:r>
+              <a:rPr lang="en-US" sz="1350" dirty="0">
+                <a:solidFill>
+                  <a:schemeClr val="tx1"/>
+                </a:solidFill>
+              </a:rPr>
+              <a:t>FastAPI + Pydantic v2; MCP server for AI agents</a:t>
+            </a:r>
+            <a:endParaRPr lang="en-US" sz="1350" dirty="0"/>
+          </a:p>
+        </p:txBody>
+      </p:sp>
+      <p:sp>
+        <p:nvSpPr>
+          <p:cNvPr id="15" name="pill-288"/>
+          <p:cNvSpPr txBox="1"/>
+          <p:nvPr/>
+        </p:nvSpPr>
+        <p:spPr>
+          <a:xfrm>
+            <a:off x="6537960" y="3429000"/>
+            <a:ext cx="1005840" cy="384048"/>
+          </a:xfrm>
+          <a:prstGeom prst="roundRect">
+            <a:avLst>
+              <a:gd name="adj" fmla="val 50000"/>
+            </a:avLst>
+          </a:prstGeom>
+          <a:solidFill>
+            <a:schemeClr val="tx2"/>
+          </a:solidFill>
+          <a:ln/>
+        </p:spPr>
+        <p:txBody>
+          <a:bodyPr wrap="square" lIns="0" tIns="0" rIns="0" bIns="0" rtlCol="0" anchor="ctr"/>
+          <a:lstStyle/>
+          <a:p>
+            <a:pPr algn="ctr" indent="0" marL="0">
+              <a:buNone/>
+            </a:pPr>
+            <a:r>
+              <a:rPr lang="en-US" sz="1100" b="1" dirty="0">
+                <a:solidFill>
+                  <a:schemeClr val="bg1"/>
+                </a:solidFill>
+              </a:rPr>
+              <a:t>Data</a:t>
+            </a:r>
+            <a:endParaRPr lang="en-US" sz="1100" dirty="0"/>
+          </a:p>
+        </p:txBody>
+      </p:sp>
+      <p:sp>
+        <p:nvSpPr>
+          <p:cNvPr id="16" name="text-289"/>
+          <p:cNvSpPr txBox="1"/>
+          <p:nvPr/>
+        </p:nvSpPr>
+        <p:spPr>
+          <a:xfrm>
+            <a:off x="7726680" y="3374136"/>
+            <a:ext cx="3749040" cy="502920"/>
+          </a:xfrm>
+          <a:prstGeom prst="rect">
+            <a:avLst/>
+          </a:prstGeom>
+          <a:noFill/>
+          <a:ln/>
+        </p:spPr>
+        <p:txBody>
+          <a:bodyPr wrap="square" lIns="0" tIns="0" rIns="0" bIns="0" rtlCol="0" anchor="ctr"/>
+          <a:lstStyle/>
+          <a:p>
+            <a:pPr algn="l" indent="0" marL="0">
+              <a:buNone/>
+            </a:pPr>
+            <a:r>
+              <a:rPr lang="en-US" sz="1350" dirty="0">
+                <a:solidFill>
+                  <a:schemeClr val="tx1"/>
+                </a:solidFill>
+              </a:rPr>
+              <a:t>Postgres 16 + pgvector hybrid search</a:t>
+            </a:r>
+            <a:endParaRPr lang="en-US" sz="1350" dirty="0"/>
+          </a:p>
+        </p:txBody>
+      </p:sp>
+      <p:sp>
+        <p:nvSpPr>
+          <p:cNvPr id="17" name="pill-290"/>
+          <p:cNvSpPr txBox="1"/>
+          <p:nvPr/>
+        </p:nvSpPr>
+        <p:spPr>
+          <a:xfrm>
+            <a:off x="6537960" y="4087368"/>
+            <a:ext cx="1005840" cy="384048"/>
+          </a:xfrm>
+          <a:prstGeom prst="roundRect">
+            <a:avLst>
+              <a:gd name="adj" fmla="val 50000"/>
+            </a:avLst>
+          </a:prstGeom>
+          <a:solidFill>
+            <a:schemeClr val="tx2"/>
+          </a:solidFill>
+          <a:ln/>
+        </p:spPr>
+        <p:txBody>
+          <a:bodyPr wrap="square" lIns="0" tIns="0" rIns="0" bIns="0" rtlCol="0" anchor="ctr"/>
+          <a:lstStyle/>
+          <a:p>
+            <a:pPr algn="ctr" indent="0" marL="0">
+              <a:buNone/>
+            </a:pPr>
+            <a:r>
+              <a:rPr lang="en-US" sz="1100" b="1" dirty="0">
+                <a:solidFill>
+                  <a:schemeClr val="bg1"/>
+                </a:solidFill>
+              </a:rPr>
+              <a:t>Jobs</a:t>
+            </a:r>
+            <a:endParaRPr lang="en-US" sz="1100" dirty="0"/>
+          </a:p>
+        </p:txBody>
+      </p:sp>
+      <p:sp>
+        <p:nvSpPr>
+          <p:cNvPr id="18" name="text-291"/>
+          <p:cNvSpPr txBox="1"/>
+          <p:nvPr/>
+        </p:nvSpPr>
+        <p:spPr>
+          <a:xfrm>
+            <a:off x="7726680" y="4032504"/>
+            <a:ext cx="3749040" cy="502920"/>
+          </a:xfrm>
+          <a:prstGeom prst="rect">
+            <a:avLst/>
+          </a:prstGeom>
+          <a:noFill/>
+          <a:ln/>
+        </p:spPr>
+        <p:txBody>
+          <a:bodyPr wrap="square" lIns="0" tIns="0" rIns="0" bIns="0" rtlCol="0" anchor="ctr"/>
+          <a:lstStyle/>
+          <a:p>
+            <a:pPr algn="l" indent="0" marL="0">
+              <a:buNone/>
+            </a:pPr>
+            <a:r>
+              <a:rPr lang="en-US" sz="1350" dirty="0">
+                <a:solidFill>
+                  <a:schemeClr val="tx1"/>
+                </a:solidFill>
+              </a:rPr>
+              <a:t>Redis + Celery: ingest, sync, verify, watchdog</a:t>
+            </a:r>
+            <a:endParaRPr lang="en-US" sz="1350" dirty="0"/>
+          </a:p>
+        </p:txBody>
+      </p:sp>
+      <p:sp>
+        <p:nvSpPr>
+          <p:cNvPr id="19" name="pill-292"/>
+          <p:cNvSpPr txBox="1"/>
+          <p:nvPr/>
+        </p:nvSpPr>
+        <p:spPr>
+          <a:xfrm>
+            <a:off x="6537960" y="4745736"/>
+            <a:ext cx="1005840" cy="384048"/>
+          </a:xfrm>
+          <a:prstGeom prst="roundRect">
+            <a:avLst>
+              <a:gd name="adj" fmla="val 50000"/>
+            </a:avLst>
+          </a:prstGeom>
+          <a:solidFill>
+            <a:schemeClr val="tx2"/>
+          </a:solidFill>
+          <a:ln/>
+        </p:spPr>
+        <p:txBody>
+          <a:bodyPr wrap="square" lIns="0" tIns="0" rIns="0" bIns="0" rtlCol="0" anchor="ctr"/>
+          <a:lstStyle/>
+          <a:p>
+            <a:pPr algn="ctr" indent="0" marL="0">
+              <a:buNone/>
+            </a:pPr>
+            <a:r>
+              <a:rPr lang="en-US" sz="1100" b="1" dirty="0">
+                <a:solidFill>
+                  <a:schemeClr val="bg1"/>
+                </a:solidFill>
+              </a:rPr>
+              <a:t>Web</a:t>
+            </a:r>
+            <a:endParaRPr lang="en-US" sz="1100" dirty="0"/>
+          </a:p>
+        </p:txBody>
+      </p:sp>
+      <p:sp>
+        <p:nvSpPr>
+          <p:cNvPr id="20" name="text-293"/>
+          <p:cNvSpPr txBox="1"/>
+          <p:nvPr/>
+        </p:nvSpPr>
+        <p:spPr>
+          <a:xfrm>
+            <a:off x="7726680" y="4690872"/>
+            <a:ext cx="3749040" cy="502920"/>
+          </a:xfrm>
+          <a:prstGeom prst="rect">
+            <a:avLst/>
+          </a:prstGeom>
+          <a:noFill/>
+          <a:ln/>
+        </p:spPr>
+        <p:txBody>
+          <a:bodyPr wrap="square" lIns="0" tIns="0" rIns="0" bIns="0" rtlCol="0" anchor="ctr"/>
+          <a:lstStyle/>
+          <a:p>
+            <a:pPr algn="l" indent="0" marL="0">
+              <a:buNone/>
+            </a:pPr>
+            <a:r>
+              <a:rPr lang="en-US" sz="1350" dirty="0">
+                <a:solidFill>
+                  <a:schemeClr val="tx1"/>
+                </a:solidFill>
+              </a:rPr>
+              <a:t>Next.js 15 + Tailwind</a:t>
+            </a:r>
+            <a:endParaRPr lang="en-US" sz="1350" dirty="0"/>
+          </a:p>
+        </p:txBody>
+      </p:sp>
+      <p:sp>
+        <p:nvSpPr>
+          <p:cNvPr id="21" name="pill-294"/>
+          <p:cNvSpPr txBox="1"/>
+          <p:nvPr/>
+        </p:nvSpPr>
+        <p:spPr>
+          <a:xfrm>
+            <a:off x="6537960" y="5404104"/>
+            <a:ext cx="1005840" cy="384048"/>
+          </a:xfrm>
+          <a:prstGeom prst="roundRect">
+            <a:avLst>
+              <a:gd name="adj" fmla="val 50000"/>
+            </a:avLst>
+          </a:prstGeom>
+          <a:solidFill>
+            <a:schemeClr val="tx2"/>
+          </a:solidFill>
+          <a:ln/>
+        </p:spPr>
+        <p:txBody>
+          <a:bodyPr wrap="square" lIns="0" tIns="0" rIns="0" bIns="0" rtlCol="0" anchor="ctr"/>
+          <a:lstStyle/>
+          <a:p>
+            <a:pPr algn="ctr" indent="0" marL="0">
+              <a:buNone/>
+            </a:pPr>
+            <a:r>
+              <a:rPr lang="en-US" sz="1100" b="1" dirty="0">
+                <a:solidFill>
+                  <a:schemeClr val="bg1"/>
+                </a:solidFill>
+              </a:rPr>
+              <a:t>Deploy</a:t>
+            </a:r>
+            <a:endParaRPr lang="en-US" sz="1100" dirty="0"/>
+          </a:p>
+        </p:txBody>
+      </p:sp>
+      <p:sp>
+        <p:nvSpPr>
+          <p:cNvPr id="22" name="text-295"/>
+          <p:cNvSpPr txBox="1"/>
+          <p:nvPr/>
+        </p:nvSpPr>
+        <p:spPr>
+          <a:xfrm>
+            <a:off x="7726680" y="5349240"/>
+            <a:ext cx="3749040" cy="502920"/>
+          </a:xfrm>
+          <a:prstGeom prst="rect">
+            <a:avLst/>
+          </a:prstGeom>
+          <a:noFill/>
+          <a:ln/>
+        </p:spPr>
+        <p:txBody>
+          <a:bodyPr wrap="square" lIns="0" tIns="0" rIns="0" bIns="0" rtlCol="0" anchor="ctr"/>
+          <a:lstStyle/>
+          <a:p>
+            <a:pPr algn="l" indent="0" marL="0">
+              <a:buNone/>
+            </a:pPr>
+            <a:r>
+              <a:rPr lang="en-US" sz="1350" dirty="0">
+                <a:solidFill>
+                  <a:schemeClr val="tx1"/>
+                </a:solidFill>
+              </a:rPr>
+              <a:t>One Docker Compose stack on a Tencent Cloud server</a:t>
+            </a:r>
+            <a:endParaRPr lang="en-US" sz="1350" dirty="0"/>
+          </a:p>
+        </p:txBody>
+      </p:sp>
+      <p:sp>
+        <p:nvSpPr>
+          <p:cNvPr id="23" name="text-296"/>
+          <p:cNvSpPr txBox="1"/>
+          <p:nvPr/>
+        </p:nvSpPr>
+        <p:spPr>
+          <a:xfrm>
+            <a:off x="548640" y="5989320"/>
+            <a:ext cx="5486400" cy="365760"/>
+          </a:xfrm>
+          <a:prstGeom prst="rect">
+            <a:avLst/>
+          </a:prstGeom>
+          <a:noFill/>
+          <a:ln/>
+        </p:spPr>
+        <p:txBody>
           <a:bodyPr wrap="square" lIns="0" tIns="0" rIns="0" bIns="0" rtlCol="0" anchor="t"/>
           <a:lstStyle/>
           <a:p>
@@ -6204,108 +9026,14 @@
               <a:buNone/>
             </a:pPr>
             <a:r>
-              <a:rPr lang="en-US" sz="1900" b="1" dirty="0">
-                <a:solidFill>
-                  <a:schemeClr val="accent4"/>
-                </a:solidFill>
-              </a:rPr>
-              <a:t>Next, before filming 14 Oct</a:t>
-            </a:r>
-            <a:endParaRPr lang="en-US" sz="1900" dirty="0"/>
-          </a:p>
-        </p:txBody>
-      </p:sp>
-      <p:sp>
-        <p:nvSpPr>
-          <p:cNvPr id="11" name="status-list-312"/>
-          <p:cNvSpPr txBox="1"/>
-          <p:nvPr/>
-        </p:nvSpPr>
-        <p:spPr>
-          <a:xfrm>
-            <a:off x="8321040" y="2057400"/>
-            <a:ext cx="3063240" cy="3977640"/>
-          </a:xfrm>
-          <a:prstGeom prst="rect">
-            <a:avLst/>
-          </a:prstGeom>
-          <a:noFill/>
-          <a:ln/>
-        </p:spPr>
-        <p:txBody>
-          <a:bodyPr wrap="square" lIns="0" tIns="0" rIns="0" bIns="0" rtlCol="0" anchor="t"/>
-          <a:lstStyle/>
-          <a:p>
-            <a:pPr marL="342900" indent="-342900">
-              <a:spcAft>
-                <a:spcPts val="900"/>
-              </a:spcAft>
-              <a:buSzPct val="100000"/>
-              <a:buChar char="•"/>
-            </a:pPr>
-            <a:r>
-              <a:rPr lang="en-US" sz="1350" dirty="0">
-                <a:solidFill>
-                  <a:schemeClr val="tx1"/>
-                </a:solidFill>
-              </a:rPr>
-              <a:t>Demo source-side revocation: remove Priya from the Drive share, sync, ask again</a:t>
-            </a:r>
-            <a:endParaRPr lang="en-US" sz="1350" dirty="0"/>
-          </a:p>
-          <a:p>
-            <a:pPr marL="342900" indent="-342900">
-              <a:spcAft>
-                <a:spcPts val="900"/>
-              </a:spcAft>
-              <a:buSzPct val="100000"/>
-              <a:buChar char="•"/>
-            </a:pPr>
-            <a:r>
-              <a:rPr lang="en-US" sz="1350" dirty="0">
-                <a:solidFill>
-                  <a:schemeClr val="tx1"/>
-                </a:solidFill>
-              </a:rPr>
-              <a:t>Signed demo sessions instead of the spoofable persona header (Raphael)</a:t>
-            </a:r>
-            <a:endParaRPr lang="en-US" sz="1350" dirty="0"/>
-          </a:p>
-          <a:p>
-            <a:pPr marL="342900" indent="-342900">
-              <a:spcAft>
-                <a:spcPts val="900"/>
-              </a:spcAft>
-              <a:buSzPct val="100000"/>
-              <a:buChar char="•"/>
-            </a:pPr>
-            <a:r>
-              <a:rPr lang="en-US" sz="1350" dirty="0">
-                <a:solidFill>
-                  <a:schemeClr val="tx1"/>
-                </a:solidFill>
-              </a:rPr>
-              <a:t>CodeBuddy / WorkBuddy screenshots: at least three (everyone)</a:t>
-            </a:r>
-            <a:endParaRPr lang="en-US" sz="1350" dirty="0"/>
-          </a:p>
-          <a:p>
-            <a:pPr marL="342900" indent="-342900">
-              <a:spcAft>
-                <a:spcPts val="900"/>
-              </a:spcAft>
-              <a:buSzPct val="100000"/>
-              <a:buChar char="•"/>
-            </a:pPr>
-            <a:r>
-              <a:rPr lang="en-US" sz="1350" dirty="0">
-                <a:solidFill>
-                  <a:schemeClr val="tx1"/>
-                </a:solidFill>
-              </a:rPr>
-              <a:t>Submit 16 Oct: URL, video, this PPT, GitHub</a:t>
-            </a:r>
-            <a:endParaRPr lang="en-US" sz="1350" dirty="0"/>
+              <a:rPr lang="en-US" sz="1000" i="1" dirty="0">
+                <a:solidFill>
+                  <a:schemeClr val="accent6"/>
+                </a:solidFill>
+              </a:rPr>
+              <a:t>Test count: PRs #6 and #9 merged locally, 13 Oct 2026 (11 SQL tests run separately against Postgres).</a:t>
+            </a:r>
+            <a:endParaRPr lang="en-US" sz="1000" dirty="0"/>
           </a:p>
         </p:txBody>
       </p:sp>
@@ -6349,6 +9077,1061 @@
             <a:fld id="{F7021451-1387-4CA6-816F-3879F97B5CBC}" type="slidenum">
               <a:rPr b="0" lang="en-US"/>
               <a:t>13</a:t>
+            </a:fld>
+            <a:endParaRPr lang="en-US"/>
+          </a:p>
+        </p:txBody>
+      </p:sp>
+    </p:spTree>
+  </p:cSld>
+  <p:clrMapOvr>
+    <a:masterClrMapping/>
+  </p:clrMapOvr>
+</p:sld>
+</file>
+
+<file path=ppt/slides/slide14.xml><?xml version="1.0" encoding="utf-8"?>
+<p:sld xmlns:a="http://schemas.openxmlformats.org/drawingml/2006/main" xmlns:r="http://schemas.openxmlformats.org/officeDocument/2006/relationships" xmlns:p="http://schemas.openxmlformats.org/presentationml/2006/main">
+  <p:cSld name="Slide 14">
+    <p:spTree>
+      <p:nvGrpSpPr>
+        <p:cNvPr id="1" name=""/>
+        <p:cNvGrpSpPr/>
+        <p:nvPr/>
+      </p:nvGrpSpPr>
+      <p:grpSpPr>
+        <a:xfrm>
+          <a:off x="0" y="0"/>
+          <a:ext cx="0" cy="0"/>
+          <a:chOff x="0" y="0"/>
+          <a:chExt cx="0" cy="0"/>
+        </a:xfrm>
+      </p:grpSpPr>
+      <p:sp>
+        <p:nvSpPr>
+          <p:cNvPr id="2" name="Text 0"/>
+          <p:cNvSpPr/>
+          <p:nvPr>
+            <p:ph idx="100" type="title" hasCustomPrompt="1"/>
+          </p:nvPr>
+        </p:nvSpPr>
+        <p:spPr>
+          <a:xfrm>
+            <a:off x="640080" y="1463040"/>
+            <a:ext cx="10881360" cy="1463040"/>
+          </a:xfrm>
+          <a:prstGeom prst="rect">
+            <a:avLst/>
+          </a:prstGeom>
+          <a:noFill/>
+          <a:ln/>
+        </p:spPr>
+        <p:txBody>
+          <a:bodyPr wrap="square" lIns="0" tIns="0" rIns="0" bIns="0" rtlCol="0" anchor="t"/>
+          <a:lstStyle/>
+          <a:p>
+            <a:pPr algn="l" indent="0" marL="0">
+              <a:buNone/>
+            </a:pPr>
+            <a:r>
+              <a:rPr lang="en-US" sz="4000" b="1" dirty="0">
+                <a:solidFill>
+                  <a:schemeClr val="bg1"/>
+                </a:solidFill>
+              </a:rPr>
+              <a:t>Ask anything. See only what you are allowed to. Prove every answer.</a:t>
+            </a:r>
+            <a:endParaRPr lang="en-US" sz="4000" dirty="0"/>
+          </a:p>
+        </p:txBody>
+      </p:sp>
+      <p:sp>
+        <p:nvSpPr>
+          <p:cNvPr id="3" name="icon-bg-297"/>
+          <p:cNvSpPr/>
+          <p:nvPr/>
+        </p:nvSpPr>
+        <p:spPr>
+          <a:xfrm>
+            <a:off x="640080" y="3429000"/>
+            <a:ext cx="731520" cy="731520"/>
+          </a:xfrm>
+          <a:prstGeom prst="ellipse">
+            <a:avLst/>
+          </a:prstGeom>
+          <a:solidFill>
+            <a:schemeClr val="accent1"/>
+          </a:solidFill>
+          <a:ln/>
+        </p:spPr>
+      </p:sp>
+      <p:pic>
+        <p:nvPicPr>
+          <p:cNvPr id="4" name="icon-298" descr="preencoded.png">    </p:cNvPr>
+          <p:cNvPicPr>
+            <a:picLocks noChangeAspect="1"/>
+          </p:cNvPicPr>
+          <p:nvPr/>
+        </p:nvPicPr>
+        <p:blipFill>
+          <a:blip r:embed="rId1"/>
+          <a:stretch>
+            <a:fillRect/>
+          </a:stretch>
+        </p:blipFill>
+        <p:spPr>
+          <a:xfrm>
+            <a:off x="801014" y="3589934"/>
+            <a:ext cx="409651" cy="409651"/>
+          </a:xfrm>
+          <a:prstGeom prst="rect">
+            <a:avLst/>
+          </a:prstGeom>
+        </p:spPr>
+      </p:pic>
+      <p:sp>
+        <p:nvSpPr>
+          <p:cNvPr id="5" name="text-299"/>
+          <p:cNvSpPr txBox="1"/>
+          <p:nvPr/>
+        </p:nvSpPr>
+        <p:spPr>
+          <a:xfrm>
+            <a:off x="1508760" y="3429000"/>
+            <a:ext cx="1463040" cy="731520"/>
+          </a:xfrm>
+          <a:prstGeom prst="rect">
+            <a:avLst/>
+          </a:prstGeom>
+          <a:noFill/>
+          <a:ln/>
+        </p:spPr>
+        <p:txBody>
+          <a:bodyPr wrap="square" lIns="0" tIns="0" rIns="0" bIns="0" rtlCol="0" anchor="ctr"/>
+          <a:lstStyle/>
+          <a:p>
+            <a:pPr algn="l" indent="0" marL="0">
+              <a:buNone/>
+            </a:pPr>
+            <a:r>
+              <a:rPr lang="en-US" sz="2000" b="1" dirty="0">
+                <a:solidFill>
+                  <a:schemeClr val="bg1"/>
+                </a:solidFill>
+              </a:rPr>
+              <a:t>Permitted</a:t>
+            </a:r>
+            <a:endParaRPr lang="en-US" sz="2000" dirty="0"/>
+          </a:p>
+        </p:txBody>
+      </p:sp>
+      <p:sp>
+        <p:nvSpPr>
+          <p:cNvPr id="6" name="icon-bg-300"/>
+          <p:cNvSpPr/>
+          <p:nvPr/>
+        </p:nvSpPr>
+        <p:spPr>
+          <a:xfrm>
+            <a:off x="3291840" y="3429000"/>
+            <a:ext cx="731520" cy="731520"/>
+          </a:xfrm>
+          <a:prstGeom prst="ellipse">
+            <a:avLst/>
+          </a:prstGeom>
+          <a:solidFill>
+            <a:schemeClr val="accent3"/>
+          </a:solidFill>
+          <a:ln/>
+        </p:spPr>
+      </p:sp>
+      <p:pic>
+        <p:nvPicPr>
+          <p:cNvPr id="7" name="icon-301" descr="preencoded.png">    </p:cNvPr>
+          <p:cNvPicPr>
+            <a:picLocks noChangeAspect="1"/>
+          </p:cNvPicPr>
+          <p:nvPr/>
+        </p:nvPicPr>
+        <p:blipFill>
+          <a:blip r:embed="rId2"/>
+          <a:stretch>
+            <a:fillRect/>
+          </a:stretch>
+        </p:blipFill>
+        <p:spPr>
+          <a:xfrm>
+            <a:off x="3452774" y="3589934"/>
+            <a:ext cx="409651" cy="409651"/>
+          </a:xfrm>
+          <a:prstGeom prst="rect">
+            <a:avLst/>
+          </a:prstGeom>
+        </p:spPr>
+      </p:pic>
+      <p:sp>
+        <p:nvSpPr>
+          <p:cNvPr id="8" name="text-302"/>
+          <p:cNvSpPr txBox="1"/>
+          <p:nvPr/>
+        </p:nvSpPr>
+        <p:spPr>
+          <a:xfrm>
+            <a:off x="4160520" y="3429000"/>
+            <a:ext cx="1463040" cy="731520"/>
+          </a:xfrm>
+          <a:prstGeom prst="rect">
+            <a:avLst/>
+          </a:prstGeom>
+          <a:noFill/>
+          <a:ln/>
+        </p:spPr>
+        <p:txBody>
+          <a:bodyPr wrap="square" lIns="0" tIns="0" rIns="0" bIns="0" rtlCol="0" anchor="ctr"/>
+          <a:lstStyle/>
+          <a:p>
+            <a:pPr algn="l" indent="0" marL="0">
+              <a:buNone/>
+            </a:pPr>
+            <a:r>
+              <a:rPr lang="en-US" sz="2000" b="1" dirty="0">
+                <a:solidFill>
+                  <a:schemeClr val="bg1"/>
+                </a:solidFill>
+              </a:rPr>
+              <a:t>Fresh</a:t>
+            </a:r>
+            <a:endParaRPr lang="en-US" sz="2000" dirty="0"/>
+          </a:p>
+        </p:txBody>
+      </p:sp>
+      <p:sp>
+        <p:nvSpPr>
+          <p:cNvPr id="9" name="icon-bg-303"/>
+          <p:cNvSpPr/>
+          <p:nvPr/>
+        </p:nvSpPr>
+        <p:spPr>
+          <a:xfrm>
+            <a:off x="5943600" y="3429000"/>
+            <a:ext cx="731520" cy="731520"/>
+          </a:xfrm>
+          <a:prstGeom prst="ellipse">
+            <a:avLst/>
+          </a:prstGeom>
+          <a:solidFill>
+            <a:schemeClr val="accent4"/>
+          </a:solidFill>
+          <a:ln/>
+        </p:spPr>
+      </p:sp>
+      <p:pic>
+        <p:nvPicPr>
+          <p:cNvPr id="10" name="icon-304" descr="preencoded.png">    </p:cNvPr>
+          <p:cNvPicPr>
+            <a:picLocks noChangeAspect="1"/>
+          </p:cNvPicPr>
+          <p:nvPr/>
+        </p:nvPicPr>
+        <p:blipFill>
+          <a:blip r:embed="rId3"/>
+          <a:stretch>
+            <a:fillRect/>
+          </a:stretch>
+        </p:blipFill>
+        <p:spPr>
+          <a:xfrm>
+            <a:off x="6104534" y="3589934"/>
+            <a:ext cx="409651" cy="409651"/>
+          </a:xfrm>
+          <a:prstGeom prst="rect">
+            <a:avLst/>
+          </a:prstGeom>
+        </p:spPr>
+      </p:pic>
+      <p:sp>
+        <p:nvSpPr>
+          <p:cNvPr id="11" name="text-305"/>
+          <p:cNvSpPr txBox="1"/>
+          <p:nvPr/>
+        </p:nvSpPr>
+        <p:spPr>
+          <a:xfrm>
+            <a:off x="6812280" y="3429000"/>
+            <a:ext cx="1463040" cy="731520"/>
+          </a:xfrm>
+          <a:prstGeom prst="rect">
+            <a:avLst/>
+          </a:prstGeom>
+          <a:noFill/>
+          <a:ln/>
+        </p:spPr>
+        <p:txBody>
+          <a:bodyPr wrap="square" lIns="0" tIns="0" rIns="0" bIns="0" rtlCol="0" anchor="ctr"/>
+          <a:lstStyle/>
+          <a:p>
+            <a:pPr algn="l" indent="0" marL="0">
+              <a:buNone/>
+            </a:pPr>
+            <a:r>
+              <a:rPr lang="en-US" sz="2000" b="1" dirty="0">
+                <a:solidFill>
+                  <a:schemeClr val="bg1"/>
+                </a:solidFill>
+              </a:rPr>
+              <a:t>Grounded</a:t>
+            </a:r>
+            <a:endParaRPr lang="en-US" sz="2000" dirty="0"/>
+          </a:p>
+        </p:txBody>
+      </p:sp>
+      <p:sp>
+        <p:nvSpPr>
+          <p:cNvPr id="12" name="icon-bg-306"/>
+          <p:cNvSpPr/>
+          <p:nvPr/>
+        </p:nvSpPr>
+        <p:spPr>
+          <a:xfrm>
+            <a:off x="8595360" y="3429000"/>
+            <a:ext cx="731520" cy="731520"/>
+          </a:xfrm>
+          <a:prstGeom prst="ellipse">
+            <a:avLst/>
+          </a:prstGeom>
+          <a:solidFill>
+            <a:schemeClr val="accent5"/>
+          </a:solidFill>
+          <a:ln/>
+        </p:spPr>
+      </p:sp>
+      <p:pic>
+        <p:nvPicPr>
+          <p:cNvPr id="13" name="icon-307" descr="preencoded.png">    </p:cNvPr>
+          <p:cNvPicPr>
+            <a:picLocks noChangeAspect="1"/>
+          </p:cNvPicPr>
+          <p:nvPr/>
+        </p:nvPicPr>
+        <p:blipFill>
+          <a:blip r:embed="rId4"/>
+          <a:stretch>
+            <a:fillRect/>
+          </a:stretch>
+        </p:blipFill>
+        <p:spPr>
+          <a:xfrm>
+            <a:off x="8756294" y="3589934"/>
+            <a:ext cx="409651" cy="409651"/>
+          </a:xfrm>
+          <a:prstGeom prst="rect">
+            <a:avLst/>
+          </a:prstGeom>
+        </p:spPr>
+      </p:pic>
+      <p:sp>
+        <p:nvSpPr>
+          <p:cNvPr id="14" name="text-308"/>
+          <p:cNvSpPr txBox="1"/>
+          <p:nvPr/>
+        </p:nvSpPr>
+        <p:spPr>
+          <a:xfrm>
+            <a:off x="9464040" y="3429000"/>
+            <a:ext cx="1463040" cy="731520"/>
+          </a:xfrm>
+          <a:prstGeom prst="rect">
+            <a:avLst/>
+          </a:prstGeom>
+          <a:noFill/>
+          <a:ln/>
+        </p:spPr>
+        <p:txBody>
+          <a:bodyPr wrap="square" lIns="0" tIns="0" rIns="0" bIns="0" rtlCol="0" anchor="ctr"/>
+          <a:lstStyle/>
+          <a:p>
+            <a:pPr algn="l" indent="0" marL="0">
+              <a:buNone/>
+            </a:pPr>
+            <a:r>
+              <a:rPr lang="en-US" sz="2000" b="1" dirty="0">
+                <a:solidFill>
+                  <a:schemeClr val="bg1"/>
+                </a:solidFill>
+              </a:rPr>
+              <a:t>Audited</a:t>
+            </a:r>
+            <a:endParaRPr lang="en-US" sz="2000" dirty="0"/>
+          </a:p>
+        </p:txBody>
+      </p:sp>
+      <p:sp>
+        <p:nvSpPr>
+          <p:cNvPr id="15" name="text-309"/>
+          <p:cNvSpPr txBox="1"/>
+          <p:nvPr/>
+        </p:nvSpPr>
+        <p:spPr>
+          <a:xfrm>
+            <a:off x="640080" y="4937760"/>
+            <a:ext cx="7315200" cy="365760"/>
+          </a:xfrm>
+          <a:prstGeom prst="rect">
+            <a:avLst/>
+          </a:prstGeom>
+          <a:noFill/>
+          <a:ln/>
+        </p:spPr>
+        <p:txBody>
+          <a:bodyPr wrap="square" lIns="0" tIns="0" rIns="0" bIns="0" rtlCol="0" anchor="t"/>
+          <a:lstStyle/>
+          <a:p>
+            <a:pPr algn="l" indent="0" marL="0">
+              <a:buNone/>
+            </a:pPr>
+            <a:r>
+              <a:rPr lang="en-US" sz="1600" dirty="0">
+                <a:solidFill>
+                  <a:srgbClr val="C9D8EE"/>
+                </a:solidFill>
+              </a:rPr>
+              <a:t>github.com/pavan2184/tencent-hack</a:t>
+            </a:r>
+            <a:endParaRPr lang="en-US" sz="1600" dirty="0"/>
+          </a:p>
+        </p:txBody>
+      </p:sp>
+      <p:sp>
+        <p:nvSpPr>
+          <p:cNvPr id="16" name="text-310"/>
+          <p:cNvSpPr txBox="1"/>
+          <p:nvPr/>
+        </p:nvSpPr>
+        <p:spPr>
+          <a:xfrm>
+            <a:off x="640080" y="5989320"/>
+            <a:ext cx="10515600" cy="365760"/>
+          </a:xfrm>
+          <a:prstGeom prst="rect">
+            <a:avLst/>
+          </a:prstGeom>
+          <a:noFill/>
+          <a:ln/>
+        </p:spPr>
+        <p:txBody>
+          <a:bodyPr wrap="square" lIns="0" tIns="0" rIns="0" bIns="0" rtlCol="0" anchor="t"/>
+          <a:lstStyle/>
+          <a:p>
+            <a:pPr algn="l" indent="0" marL="0">
+              <a:buNone/>
+            </a:pPr>
+            <a:r>
+              <a:rPr lang="en-US" sz="1300" dirty="0">
+                <a:solidFill>
+                  <a:srgbClr val="C9D8EE"/>
+                </a:solidFill>
+              </a:rPr>
+              <a:t>Chai · Raphael · Pavan  ·  Tencent Cloud AI CAN DO IT Hackathon Singapore 2026</a:t>
+            </a:r>
+            <a:endParaRPr lang="en-US" sz="1300" dirty="0"/>
+          </a:p>
+        </p:txBody>
+      </p:sp>
+    </p:spTree>
+  </p:cSld>
+  <p:clrMapOvr>
+    <a:masterClrMapping/>
+  </p:clrMapOvr>
+</p:sld>
+</file>
+
+<file path=ppt/slides/slide15.xml><?xml version="1.0" encoding="utf-8"?>
+<p:sld xmlns:a="http://schemas.openxmlformats.org/drawingml/2006/main" xmlns:r="http://schemas.openxmlformats.org/officeDocument/2006/relationships" xmlns:p="http://schemas.openxmlformats.org/presentationml/2006/main">
+  <p:cSld name="Slide 15">
+    <p:spTree>
+      <p:nvGrpSpPr>
+        <p:cNvPr id="1" name=""/>
+        <p:cNvGrpSpPr/>
+        <p:nvPr/>
+      </p:nvGrpSpPr>
+      <p:grpSpPr>
+        <a:xfrm>
+          <a:off x="0" y="0"/>
+          <a:ext cx="0" cy="0"/>
+          <a:chOff x="0" y="0"/>
+          <a:chExt cx="0" cy="0"/>
+        </a:xfrm>
+      </p:grpSpPr>
+      <p:sp>
+        <p:nvSpPr>
+          <p:cNvPr id="2" name="Text 0"/>
+          <p:cNvSpPr/>
+          <p:nvPr>
+            <p:ph idx="100" type="title" hasCustomPrompt="1"/>
+          </p:nvPr>
+        </p:nvSpPr>
+        <p:spPr>
+          <a:xfrm>
+            <a:off x="548640" y="320040"/>
+            <a:ext cx="11064240" cy="777240"/>
+          </a:xfrm>
+          <a:prstGeom prst="rect">
+            <a:avLst/>
+          </a:prstGeom>
+          <a:noFill/>
+          <a:ln/>
+        </p:spPr>
+        <p:txBody>
+          <a:bodyPr wrap="square" lIns="0" tIns="0" rIns="0" bIns="0" rtlCol="0" anchor="ctr"/>
+          <a:lstStyle/>
+          <a:p>
+            <a:pPr algn="l" indent="0" marL="0">
+              <a:buNone/>
+            </a:pPr>
+            <a:r>
+              <a:rPr lang="en-US" sz="2800" b="1" dirty="0">
+                <a:solidFill>
+                  <a:schemeClr val="tx2"/>
+                </a:solidFill>
+              </a:rPr>
+              <a:t>Team status, 13 Oct (internal: remove before submission)</a:t>
+            </a:r>
+            <a:endParaRPr lang="en-US" sz="2800" dirty="0"/>
+          </a:p>
+        </p:txBody>
+      </p:sp>
+      <p:sp>
+        <p:nvSpPr>
+          <p:cNvPr id="3" name="status-col-311"/>
+          <p:cNvSpPr/>
+          <p:nvPr/>
+        </p:nvSpPr>
+        <p:spPr>
+          <a:xfrm>
+            <a:off x="548640" y="1325880"/>
+            <a:ext cx="3520440" cy="3840480"/>
+          </a:xfrm>
+          <a:prstGeom prst="roundRect">
+            <a:avLst>
+              <a:gd name="adj" fmla="val 2078"/>
+            </a:avLst>
+          </a:prstGeom>
+          <a:solidFill>
+            <a:srgbClr val="E3F5F2"/>
+          </a:solidFill>
+          <a:ln/>
+        </p:spPr>
+      </p:sp>
+      <p:sp>
+        <p:nvSpPr>
+          <p:cNvPr id="4" name="text-312"/>
+          <p:cNvSpPr txBox="1"/>
+          <p:nvPr/>
+        </p:nvSpPr>
+        <p:spPr>
+          <a:xfrm>
+            <a:off x="822960" y="1508760"/>
+            <a:ext cx="3017520" cy="457200"/>
+          </a:xfrm>
+          <a:prstGeom prst="rect">
+            <a:avLst/>
+          </a:prstGeom>
+          <a:noFill/>
+          <a:ln/>
+        </p:spPr>
+        <p:txBody>
+          <a:bodyPr wrap="square" lIns="0" tIns="0" rIns="0" bIns="0" rtlCol="0" anchor="t"/>
+          <a:lstStyle/>
+          <a:p>
+            <a:pPr algn="l" indent="0" marL="0">
+              <a:buNone/>
+            </a:pPr>
+            <a:r>
+              <a:rPr lang="en-US" sz="1900" b="1" dirty="0">
+                <a:solidFill>
+                  <a:schemeClr val="accent1"/>
+                </a:solidFill>
+              </a:rPr>
+              <a:t>Done</a:t>
+            </a:r>
+            <a:endParaRPr lang="en-US" sz="1900" dirty="0"/>
+          </a:p>
+        </p:txBody>
+      </p:sp>
+      <p:sp>
+        <p:nvSpPr>
+          <p:cNvPr id="5" name="status-list-313"/>
+          <p:cNvSpPr txBox="1"/>
+          <p:nvPr/>
+        </p:nvSpPr>
+        <p:spPr>
+          <a:xfrm>
+            <a:off x="822960" y="2057400"/>
+            <a:ext cx="3063240" cy="3977640"/>
+          </a:xfrm>
+          <a:prstGeom prst="rect">
+            <a:avLst/>
+          </a:prstGeom>
+          <a:noFill/>
+          <a:ln/>
+        </p:spPr>
+        <p:txBody>
+          <a:bodyPr wrap="square" lIns="0" tIns="0" rIns="0" bIns="0" rtlCol="0" anchor="t"/>
+          <a:lstStyle/>
+          <a:p>
+            <a:pPr marL="342900" indent="-342900">
+              <a:spcAft>
+                <a:spcPts val="900"/>
+              </a:spcAft>
+              <a:buSzPct val="100000"/>
+              <a:buChar char="•"/>
+            </a:pPr>
+            <a:r>
+              <a:rPr lang="en-US" sz="1350" dirty="0">
+                <a:solidFill>
+                  <a:schemeClr val="tx1"/>
+                </a:solidFill>
+              </a:rPr>
+              <a:t>Access-control library v2: native permission ceiling, fail-closed checks, Slack/Drive normalisers</a:t>
+            </a:r>
+            <a:endParaRPr lang="en-US" sz="1350" dirty="0"/>
+          </a:p>
+          <a:p>
+            <a:pPr marL="342900" indent="-342900">
+              <a:spcAft>
+                <a:spcPts val="900"/>
+              </a:spcAft>
+              <a:buSzPct val="100000"/>
+              <a:buChar char="•"/>
+            </a:pPr>
+            <a:r>
+              <a:rPr lang="en-US" sz="1350" dirty="0">
+                <a:solidFill>
+                  <a:schemeClr val="tx1"/>
+                </a:solidFill>
+              </a:rPr>
+              <a:t>Research note with primary sources for all four platforms</a:t>
+            </a:r>
+            <a:endParaRPr lang="en-US" sz="1350" dirty="0"/>
+          </a:p>
+          <a:p>
+            <a:pPr marL="342900" indent="-342900">
+              <a:spcAft>
+                <a:spcPts val="900"/>
+              </a:spcAft>
+              <a:buSzPct val="100000"/>
+              <a:buChar char="•"/>
+            </a:pPr>
+            <a:r>
+              <a:rPr lang="en-US" sz="1350" dirty="0">
+                <a:solidFill>
+                  <a:schemeClr val="tx1"/>
+                </a:solidFill>
+              </a:rPr>
+              <a:t>Saved-answer revocation fix (PR #6)</a:t>
+            </a:r>
+            <a:endParaRPr lang="en-US" sz="1350" dirty="0"/>
+          </a:p>
+          <a:p>
+            <a:pPr marL="342900" indent="-342900">
+              <a:spcAft>
+                <a:spcPts val="900"/>
+              </a:spcAft>
+              <a:buSzPct val="100000"/>
+              <a:buChar char="•"/>
+            </a:pPr>
+            <a:r>
+              <a:rPr lang="en-US" sz="1350" dirty="0">
+                <a:solidFill>
+                  <a:schemeClr val="tx1"/>
+                </a:solidFill>
+              </a:rPr>
+              <a:t>Permission expiry: source revocation enforced within 5 min (PR #9)</a:t>
+            </a:r>
+            <a:endParaRPr lang="en-US" sz="1350" dirty="0"/>
+          </a:p>
+          <a:p>
+            <a:pPr marL="342900" indent="-342900">
+              <a:spcAft>
+                <a:spcPts val="900"/>
+              </a:spcAft>
+              <a:buSzPct val="100000"/>
+              <a:buChar char="•"/>
+            </a:pPr>
+            <a:r>
+              <a:rPr lang="en-US" sz="1350" dirty="0">
+                <a:solidFill>
+                  <a:schemeClr val="tx1"/>
+                </a:solidFill>
+              </a:rPr>
+              <a:t>Industry review: Glean, Copilot, Gemini, Rovo, MAS rules</a:t>
+            </a:r>
+            <a:endParaRPr lang="en-US" sz="1350" dirty="0"/>
+          </a:p>
+        </p:txBody>
+      </p:sp>
+      <p:sp>
+        <p:nvSpPr>
+          <p:cNvPr id="6" name="status-col-314"/>
+          <p:cNvSpPr/>
+          <p:nvPr/>
+        </p:nvSpPr>
+        <p:spPr>
+          <a:xfrm>
+            <a:off x="4297680" y="1325880"/>
+            <a:ext cx="3520440" cy="3840480"/>
+          </a:xfrm>
+          <a:prstGeom prst="roundRect">
+            <a:avLst>
+              <a:gd name="adj" fmla="val 2078"/>
+            </a:avLst>
+          </a:prstGeom>
+          <a:solidFill>
+            <a:srgbClr val="FDF4E4"/>
+          </a:solidFill>
+          <a:ln/>
+        </p:spPr>
+      </p:sp>
+      <p:sp>
+        <p:nvSpPr>
+          <p:cNvPr id="7" name="text-315"/>
+          <p:cNvSpPr txBox="1"/>
+          <p:nvPr/>
+        </p:nvSpPr>
+        <p:spPr>
+          <a:xfrm>
+            <a:off x="4572000" y="1508760"/>
+            <a:ext cx="3017520" cy="457200"/>
+          </a:xfrm>
+          <a:prstGeom prst="rect">
+            <a:avLst/>
+          </a:prstGeom>
+          <a:noFill/>
+          <a:ln/>
+        </p:spPr>
+        <p:txBody>
+          <a:bodyPr wrap="square" lIns="0" tIns="0" rIns="0" bIns="0" rtlCol="0" anchor="t"/>
+          <a:lstStyle/>
+          <a:p>
+            <a:pPr algn="l" indent="0" marL="0">
+              <a:buNone/>
+            </a:pPr>
+            <a:r>
+              <a:rPr lang="en-US" sz="1900" b="1" dirty="0">
+                <a:solidFill>
+                  <a:schemeClr val="accent3"/>
+                </a:solidFill>
+              </a:rPr>
+              <a:t>Needs team agreement</a:t>
+            </a:r>
+            <a:endParaRPr lang="en-US" sz="1900" dirty="0"/>
+          </a:p>
+        </p:txBody>
+      </p:sp>
+      <p:sp>
+        <p:nvSpPr>
+          <p:cNvPr id="8" name="status-list-316"/>
+          <p:cNvSpPr txBox="1"/>
+          <p:nvPr/>
+        </p:nvSpPr>
+        <p:spPr>
+          <a:xfrm>
+            <a:off x="4572000" y="2057400"/>
+            <a:ext cx="3063240" cy="3977640"/>
+          </a:xfrm>
+          <a:prstGeom prst="rect">
+            <a:avLst/>
+          </a:prstGeom>
+          <a:noFill/>
+          <a:ln/>
+        </p:spPr>
+        <p:txBody>
+          <a:bodyPr wrap="square" lIns="0" tIns="0" rIns="0" bIns="0" rtlCol="0" anchor="t"/>
+          <a:lstStyle/>
+          <a:p>
+            <a:pPr marL="342900" indent="-342900">
+              <a:spcAft>
+                <a:spcPts val="900"/>
+              </a:spcAft>
+              <a:buSzPct val="100000"/>
+              <a:buChar char="•"/>
+            </a:pPr>
+            <a:r>
+              <a:rPr lang="en-US" sz="1350" dirty="0">
+                <a:solidFill>
+                  <a:schemeClr val="tx1"/>
+                </a:solidFill>
+              </a:rPr>
+              <a:t>Adopt v2 rules and permission expiry, PR #9: admins no longer see everything (Raphael, Pavan)</a:t>
+            </a:r>
+            <a:endParaRPr lang="en-US" sz="1350" dirty="0"/>
+          </a:p>
+          <a:p>
+            <a:pPr marL="342900" indent="-342900">
+              <a:spcAft>
+                <a:spcPts val="900"/>
+              </a:spcAft>
+              <a:buSzPct val="100000"/>
+              <a:buChar char="•"/>
+            </a:pPr>
+            <a:r>
+              <a:rPr lang="en-US" sz="1350" dirty="0">
+                <a:solidFill>
+                  <a:schemeClr val="tx1"/>
+                </a:solidFill>
+              </a:rPr>
+              <a:t>Demo stack must run Celery worker and beat, or confidential docs go dark after 5 min (Pavan)</a:t>
+            </a:r>
+            <a:endParaRPr lang="en-US" sz="1350" dirty="0"/>
+          </a:p>
+          <a:p>
+            <a:pPr marL="342900" indent="-342900">
+              <a:spcAft>
+                <a:spcPts val="900"/>
+              </a:spcAft>
+              <a:buSzPct val="100000"/>
+              <a:buChar char="•"/>
+            </a:pPr>
+            <a:r>
+              <a:rPr lang="en-US" sz="1350" dirty="0">
+                <a:solidFill>
+                  <a:schemeClr val="tx1"/>
+                </a:solidFill>
+              </a:rPr>
+              <a:t>Access-request approval when the source still blocks the requester (Raphael)</a:t>
+            </a:r>
+            <a:endParaRPr lang="en-US" sz="1350" dirty="0"/>
+          </a:p>
+          <a:p>
+            <a:pPr marL="342900" indent="-342900">
+              <a:spcAft>
+                <a:spcPts val="900"/>
+              </a:spcAft>
+              <a:buSzPct val="100000"/>
+              <a:buChar char="•"/>
+            </a:pPr>
+            <a:r>
+              <a:rPr lang="en-US" sz="1350" dirty="0">
+                <a:solidFill>
+                  <a:schemeClr val="tx1"/>
+                </a:solidFill>
+              </a:rPr>
+              <a:t>Wire the query-time access service into the app (Pavan)</a:t>
+            </a:r>
+            <a:endParaRPr lang="en-US" sz="1350" dirty="0"/>
+          </a:p>
+        </p:txBody>
+      </p:sp>
+      <p:sp>
+        <p:nvSpPr>
+          <p:cNvPr id="9" name="status-col-317"/>
+          <p:cNvSpPr/>
+          <p:nvPr/>
+        </p:nvSpPr>
+        <p:spPr>
+          <a:xfrm>
+            <a:off x="8046720" y="1325880"/>
+            <a:ext cx="3520440" cy="3840480"/>
+          </a:xfrm>
+          <a:prstGeom prst="roundRect">
+            <a:avLst>
+              <a:gd name="adj" fmla="val 2078"/>
+            </a:avLst>
+          </a:prstGeom>
+          <a:solidFill>
+            <a:srgbClr val="E8F0FC"/>
+          </a:solidFill>
+          <a:ln/>
+        </p:spPr>
+      </p:sp>
+      <p:sp>
+        <p:nvSpPr>
+          <p:cNvPr id="10" name="text-318"/>
+          <p:cNvSpPr txBox="1"/>
+          <p:nvPr/>
+        </p:nvSpPr>
+        <p:spPr>
+          <a:xfrm>
+            <a:off x="8321040" y="1508760"/>
+            <a:ext cx="3017520" cy="457200"/>
+          </a:xfrm>
+          <a:prstGeom prst="rect">
+            <a:avLst/>
+          </a:prstGeom>
+          <a:noFill/>
+          <a:ln/>
+        </p:spPr>
+        <p:txBody>
+          <a:bodyPr wrap="square" lIns="0" tIns="0" rIns="0" bIns="0" rtlCol="0" anchor="t"/>
+          <a:lstStyle/>
+          <a:p>
+            <a:pPr algn="l" indent="0" marL="0">
+              <a:buNone/>
+            </a:pPr>
+            <a:r>
+              <a:rPr lang="en-US" sz="1900" b="1" dirty="0">
+                <a:solidFill>
+                  <a:schemeClr val="accent4"/>
+                </a:solidFill>
+              </a:rPr>
+              <a:t>Next, before filming 14 Oct</a:t>
+            </a:r>
+            <a:endParaRPr lang="en-US" sz="1900" dirty="0"/>
+          </a:p>
+        </p:txBody>
+      </p:sp>
+      <p:sp>
+        <p:nvSpPr>
+          <p:cNvPr id="11" name="status-list-319"/>
+          <p:cNvSpPr txBox="1"/>
+          <p:nvPr/>
+        </p:nvSpPr>
+        <p:spPr>
+          <a:xfrm>
+            <a:off x="8321040" y="2057400"/>
+            <a:ext cx="3063240" cy="3977640"/>
+          </a:xfrm>
+          <a:prstGeom prst="rect">
+            <a:avLst/>
+          </a:prstGeom>
+          <a:noFill/>
+          <a:ln/>
+        </p:spPr>
+        <p:txBody>
+          <a:bodyPr wrap="square" lIns="0" tIns="0" rIns="0" bIns="0" rtlCol="0" anchor="t"/>
+          <a:lstStyle/>
+          <a:p>
+            <a:pPr marL="342900" indent="-342900">
+              <a:spcAft>
+                <a:spcPts val="900"/>
+              </a:spcAft>
+              <a:buSzPct val="100000"/>
+              <a:buChar char="•"/>
+            </a:pPr>
+            <a:r>
+              <a:rPr lang="en-US" sz="1350" dirty="0">
+                <a:solidFill>
+                  <a:schemeClr val="tx1"/>
+                </a:solidFill>
+              </a:rPr>
+              <a:t>Store the audit chain's latest hash outside the app database (Raphael)</a:t>
+            </a:r>
+            <a:endParaRPr lang="en-US" sz="1350" dirty="0"/>
+          </a:p>
+          <a:p>
+            <a:pPr marL="342900" indent="-342900">
+              <a:spcAft>
+                <a:spcPts val="900"/>
+              </a:spcAft>
+              <a:buSzPct val="100000"/>
+              <a:buChar char="•"/>
+            </a:pPr>
+            <a:r>
+              <a:rPr lang="en-US" sz="1350" dirty="0">
+                <a:solidFill>
+                  <a:schemeClr val="tx1"/>
+                </a:solidFill>
+              </a:rPr>
+              <a:t>Log model and prompt-template version per answer (Raphael)</a:t>
+            </a:r>
+            <a:endParaRPr lang="en-US" sz="1350" dirty="0"/>
+          </a:p>
+          <a:p>
+            <a:pPr marL="342900" indent="-342900">
+              <a:spcAft>
+                <a:spcPts val="900"/>
+              </a:spcAft>
+              <a:buSzPct val="100000"/>
+              <a:buChar char="•"/>
+            </a:pPr>
+            <a:r>
+              <a:rPr lang="en-US" sz="1350" dirty="0">
+                <a:solidFill>
+                  <a:schemeClr val="tx1"/>
+                </a:solidFill>
+              </a:rPr>
+              <a:t>Signed demo sessions instead of the spoofable persona header (Raphael)</a:t>
+            </a:r>
+            <a:endParaRPr lang="en-US" sz="1350" dirty="0"/>
+          </a:p>
+          <a:p>
+            <a:pPr marL="342900" indent="-342900">
+              <a:spcAft>
+                <a:spcPts val="900"/>
+              </a:spcAft>
+              <a:buSzPct val="100000"/>
+              <a:buChar char="•"/>
+            </a:pPr>
+            <a:r>
+              <a:rPr lang="en-US" sz="1350" dirty="0">
+                <a:solidFill>
+                  <a:schemeClr val="tx1"/>
+                </a:solidFill>
+              </a:rPr>
+              <a:t>CodeBuddy / WorkBuddy screenshots: at least three (everyone)</a:t>
+            </a:r>
+            <a:endParaRPr lang="en-US" sz="1350" dirty="0"/>
+          </a:p>
+          <a:p>
+            <a:pPr marL="342900" indent="-342900">
+              <a:spcAft>
+                <a:spcPts val="900"/>
+              </a:spcAft>
+              <a:buSzPct val="100000"/>
+              <a:buChar char="•"/>
+            </a:pPr>
+            <a:r>
+              <a:rPr lang="en-US" sz="1350" dirty="0">
+                <a:solidFill>
+                  <a:schemeClr val="tx1"/>
+                </a:solidFill>
+              </a:rPr>
+              <a:t>Submit 16 Oct: URL, video, this PPT, GitHub</a:t>
+            </a:r>
+            <a:endParaRPr lang="en-US" sz="1350" dirty="0"/>
+          </a:p>
+        </p:txBody>
+      </p:sp>
+      <p:sp>
+        <p:nvSpPr>
+          <p:cNvPr id="25" name="Slide Number Placeholder 0"/>
+          <p:cNvSpPr>
+            <a:spLocks noGrp="1"/>
+          </p:cNvSpPr>
+          <p:nvPr>
+            <p:ph type="sldNum" sz="quarter" idx="4294967295"/>
+          </p:nvPr>
+        </p:nvSpPr>
+        <p:spPr>
+          <a:xfrm>
+            <a:off x="11247120" y="6400800"/>
+            <a:ext cx="411480" cy="274320"/>
+          </a:xfrm>
+          <a:prstGeom prst="rect">
+            <a:avLst/>
+          </a:prstGeom>
+          <a:extLst>
+            <a:ext uri="{C572A759-6A51-4108-AA02-DFA0A04FC94B}">
+              <ma14:wrappingTextBoxFlag xmlns:ma14="http://schemas.microsoft.com/office/mac/drawingml/2011/main" val="0"/>
+            </a:ext>
+          </a:extLst>
+        </p:spPr>
+        <p:txBody>
+          <a:bodyPr/>
+          <a:lstStyle>
+            <a:lvl1pPr>
+              <a:defRPr sz="1000">
+                <a:solidFill>
+                  <a:schemeClr val="accent6"/>
+                </a:solidFill>
+              </a:defRPr>
+            </a:lvl1pPr>
+          </a:lstStyle>
+          <a:p>
+            <a:pPr algn="r"/>
+            <a:fld id="{F7021451-1387-4CA6-816F-3879F97B5CBC}" type="slidenum">
+              <a:rPr b="0" lang="en-US"/>
+              <a:t>15</a:t>
             </a:fld>
             <a:endParaRPr lang="en-US"/>
           </a:p>
@@ -8696,7 +12479,7 @@
                   <a:schemeClr val="tx1"/>
                 </a:solidFill>
               </a:rPr>
-              <a:t>Allow/deny per document on native permissions</a:t>
+              <a:t>Allow/deny per document; permissions under 5 min old</a:t>
             </a:r>
             <a:endParaRPr lang="en-US" sz="1100" dirty="0"/>
           </a:p>
@@ -9758,7 +13541,7 @@
                   <a:schemeClr val="tx1"/>
                 </a:solidFill>
               </a:rPr>
-              <a:t>Celery: webhooks, delta sync, reconcile. Captures content and native permissions.</a:t>
+              <a:t>Celery: webhooks and syncs. Re-reads every page's permissions each minute.</a:t>
             </a:r>
             <a:endParaRPr lang="en-US" sz="1100" dirty="0"/>
           </a:p>
@@ -10268,7 +14051,7 @@
                   <a:schemeClr val="accent6"/>
                 </a:solidFill>
               </a:rPr>
-              <a:t>Teal path: only authorised evidence.   Red dashed line: nothing denied crosses it.   Dashed boxes: untrusted or external.   Connectors to live tenants are stubbed; the demo uses a synthetic corpus.</a:t>
+              <a:t>Teal path: only authorised evidence.  Red dashed line: nothing denied crosses it.  Dashed boxes: untrusted or external.  Demo uses a synthetic corpus; in production Slack is searched live as the user and never stored.</a:t>
             </a:r>
             <a:endParaRPr lang="en-US" sz="950" dirty="0"/>
           </a:p>
@@ -10703,7 +14486,7 @@
                   <a:schemeClr val="tx1"/>
                 </a:solidFill>
               </a:rPr>
-              <a:t>Every candidate document is checked against its native platform permissions before any model call.</a:t>
+              <a:t>Every candidate document is checked against its native platform permissions before any model call. Permissions over 5 minutes old no longer count.</a:t>
             </a:r>
             <a:endParaRPr lang="en-US" sz="1400" dirty="0"/>
           </a:p>
@@ -10766,7 +14549,7 @@
                   <a:schemeClr val="accent1"/>
                 </a:solidFill>
               </a:rPr>
-              <a:t>Missing, stale or unreadable permissions: deny</a:t>
+              <a:t>Missing, unreadable or expired permissions: deny</a:t>
             </a:r>
             <a:endParaRPr lang="en-US" sz="1200" dirty="0"/>
           </a:p>
@@ -11870,7 +15653,7 @@
                   <a:schemeClr val="tx1"/>
                 </a:solidFill>
               </a:rPr>
-              <a:t>Channel membership; public channels for full workspace members only</a:t>
+              <a:t>Channel membership; public channels for full members only. In production, searched live as the user; nothing stored</a:t>
             </a:r>
             <a:endParaRPr lang="en-US" sz="1300" dirty="0"/>
           </a:p>
@@ -13168,7 +16951,7 @@
                   <a:schemeClr val="tx2"/>
                 </a:solidFill>
               </a:rPr>
-              <a:t>Access revoked</a:t>
+              <a:t>Revoked at the source</a:t>
             </a:r>
             <a:endParaRPr lang="en-US" sz="1800" dirty="0"/>
           </a:p>
@@ -13248,7 +17031,7 @@
                   <a:schemeClr val="accent6"/>
                 </a:solidFill>
               </a:rPr>
-              <a:t>Admin revokes the Leadership grant</a:t>
+              <a:t>Drive owner removes Leadership from the share</a:t>
             </a:r>
             <a:endParaRPr lang="en-US" sz="1200" dirty="0"/>
           </a:p>
@@ -13347,7 +17130,7 @@
                   <a:schemeClr val="tx1"/>
                 </a:solidFill>
               </a:rPr>
-              <a:t>New answer no longer uses the deck</a:t>
+              <a:t>Next sync (each minute): the deck is gone</a:t>
             </a:r>
             <a:endParaRPr lang="en-US" sz="1300" dirty="0"/>
           </a:p>
@@ -13361,7 +17144,7 @@
                   <a:schemeClr val="accent6"/>
                 </a:solidFill>
               </a:rPr>
-              <a:t>Saved answer: “This answer used sources you can no longer access”</a:t>
+              <a:t>Her saved answer is withheld too</a:t>
             </a:r>
             <a:endParaRPr lang="en-US" sz="1300" dirty="0"/>
           </a:p>
@@ -13424,7 +17207,7 @@
                   <a:schemeClr val="accent3"/>
                 </a:solidFill>
               </a:rPr>
-              <a:t>Enforced on the next query, including saved answers</a:t>
+              <a:t>Enforced within 5 minutes, even if a sync is missed</a:t>
             </a:r>
             <a:endParaRPr lang="en-US" sz="1400" dirty="0"/>
           </a:p>
@@ -13460,7 +17243,7 @@
                   <a:schemeClr val="accent6"/>
                 </a:solidFill>
               </a:rPr>
-              <a:t>Synthetic company and figures. Each scene is an automated test: test_ask_pipeline.py and test_query_history_access.py.</a:t>
+              <a:t>Synthetic company and figures. Each scene is an automated test: test_ask_pipeline.py, test_permission_freshness.py and test_query_history_access.py.</a:t>
             </a:r>
             <a:endParaRPr lang="en-US" sz="1000" dirty="0"/>
           </a:p>
@@ -14715,7 +18498,7 @@
                             <a:schemeClr val="tx1"/>
                           </a:solidFill>
                         </a:rPr>
-                        <a:t>The Leadership grant is revoked; Priya's next answer excludes the board deck and her saved answer is withheld</a:t>
+                        <a:t>Leadership is removed from the Drive share (or the in-app grant revoked): Priya's next answer drops the board deck and her saved answer is withheld</a:t>
                       </a:r>
                       <a:endParaRPr lang="en-US" sz="1300" dirty="0"/>
                     </a:p>
@@ -14776,7 +18559,7 @@
                             <a:schemeClr val="accent6"/>
                           </a:solidFill>
                         </a:rPr>
-                        <a:t>test_live_revocation_changes_next_answer, test_query_history_access</a:t>
+                        <a:t>test_permission_freshness, test_live_revocation_changes_next_answer, test_query_history_access</a:t>
                       </a:r>
                       <a:endParaRPr lang="en-US" sz="1100" dirty="0"/>
                     </a:p>

--- a/docs/presentations/internal-brain-architecture.pptx
+++ b/docs/presentations/internal-brain-architecture.pptx
@@ -121,21 +121,21 @@
   <p:extLst>
     <p:ext uri="{521415D9-36F7-43E2-AB2F-B90AF26B5E84}">
       <p14:sectionLst xmlns:p14="http://schemas.microsoft.com/office/powerpoint/2010/main">
-        <p14:section name="Story" id="{f520bbec-606d-1c50-e252-1d01fc6d35c0}">
+        <p14:section name="Story" id="{6d493d90-7f03-60d8-4626-0f027a7b51af}">
           <p14:sldIdLst>
             <p14:sldId id="256"/>
             <p14:sldId id="257"/>
             <p14:sldId id="258"/>
           </p14:sldIdLst>
         </p14:section>
-        <p14:section name="Architecture" id="{b5892f4c-b397-0d6d-6185-c9bb09481ba2}">
+        <p14:section name="Architecture" id="{10cf7599-0f95-dd5d-3746-77a730cfb8ed}">
           <p14:sldIdLst>
             <p14:sldId id="259"/>
             <p14:sldId id="260"/>
             <p14:sldId id="261"/>
           </p14:sldIdLst>
         </p14:section>
-        <p14:section name="Proof" id="{365c7136-920d-d024-ea8c-6d370e07bbde}">
+        <p14:section name="Proof" id="{081fe7d5-9e61-b198-4b5d-efa5022132a8}">
           <p14:sldIdLst>
             <p14:sldId id="262"/>
             <p14:sldId id="263"/>
@@ -147,7 +147,7 @@
             <p14:sldId id="269"/>
           </p14:sldIdLst>
         </p14:section>
-        <p14:section name="Internal" id="{d0484ad6-48e9-2dbe-f0b1-d03079716c69}">
+        <p14:section name="Internal" id="{ee3001b6-95d9-b36d-4017-7523d35f315e}">
           <p14:sldIdLst>
             <p14:sldId id="270"/>
           </p14:sldIdLst>
@@ -1628,7 +1628,7 @@
           <a:p>
             <a:r>
               <a:rPr lang="en-US" dirty="0"/>
-              <a:t>Walk left to right. Identity is resolved by the server, never trusted from the client. Search over-fetches candidates. The access gate evaluates each document against native permissions reloaded on every query. Only then does anything reach freshness checks, prompt-injection screening and the Tencent ADP model. The red line is the key trust boundary: denied text never crosses it. Verification drops unsupported claims; one hash-chained audit event records the whole decision trail.</a:t>
+              <a:t>Walk left to right. Identity is resolved by the server, never trusted from the client. Search over-fetches candidates. The access gate evaluates each document against native permissions reloaded on every query. Only then does anything reach freshness checks, prompt-injection screening and the Tencent ADP model. The red line is the key trust boundary: denied text never crosses it. Verification drops unsupported claims; one hash-chained audit event records the whole decision trail. Precision for questions: ingestion does embed every document so search works, so the embedding provider processes all content and the vector store is protected like the source data. The gate protects the language model that writes the answer.</a:t>
             </a:r>
             <a:endParaRPr lang="en-US" dirty="0"/>
           </a:p>
@@ -11769,7 +11769,7 @@
                   <a:schemeClr val="tx2"/>
                 </a:solidFill>
               </a:rPr>
-              <a:t>Restricted evidence is removed before the model sees anything</a:t>
+              <a:t>Restricted evidence never reaches the language model</a:t>
             </a:r>
             <a:endParaRPr lang="en-US" sz="2800" dirty="0"/>
           </a:p>

--- a/docs/presentations/internal-brain-architecture.pptx
+++ b/docs/presentations/internal-brain-architecture.pptx
@@ -121,21 +121,21 @@
   <p:extLst>
     <p:ext uri="{521415D9-36F7-43E2-AB2F-B90AF26B5E84}">
       <p14:sectionLst xmlns:p14="http://schemas.microsoft.com/office/powerpoint/2010/main">
-        <p14:section name="Story" id="{6d493d90-7f03-60d8-4626-0f027a7b51af}">
+        <p14:section name="Story" id="{da5b1e92-e5bb-77df-be84-45971ec08958}">
           <p14:sldIdLst>
             <p14:sldId id="256"/>
             <p14:sldId id="257"/>
             <p14:sldId id="258"/>
           </p14:sldIdLst>
         </p14:section>
-        <p14:section name="Architecture" id="{10cf7599-0f95-dd5d-3746-77a730cfb8ed}">
+        <p14:section name="Architecture" id="{bb8ac8b3-c68c-037e-908c-54d6c94b8d8d}">
           <p14:sldIdLst>
             <p14:sldId id="259"/>
             <p14:sldId id="260"/>
             <p14:sldId id="261"/>
           </p14:sldIdLst>
         </p14:section>
-        <p14:section name="Proof" id="{081fe7d5-9e61-b198-4b5d-efa5022132a8}">
+        <p14:section name="Proof" id="{5c4998ae-d3b5-fd09-6d57-2e39e31d51b2}">
           <p14:sldIdLst>
             <p14:sldId id="262"/>
             <p14:sldId id="263"/>
@@ -147,7 +147,7 @@
             <p14:sldId id="269"/>
           </p14:sldIdLst>
         </p14:section>
-        <p14:section name="Internal" id="{ee3001b6-95d9-b36d-4017-7523d35f315e}">
+        <p14:section name="Internal" id="{cbb9f449-7bd0-cccc-0d8c-a121edb47ac6}">
           <p14:sldIdLst>
             <p14:sldId id="270"/>
           </p14:sldIdLst>
@@ -9898,7 +9898,7 @@
                   <a:schemeClr val="tx1"/>
                 </a:solidFill>
               </a:rPr>
-              <a:t>Access-request approval when the source still blocks the requester (Raphael)</a:t>
+              <a:t>Audit need-to-know with recorded reveal, and approval feedback, PR #10 (Raphael)</a:t>
             </a:r>
             <a:endParaRPr lang="en-US" sz="1350" dirty="0"/>
           </a:p>
@@ -18744,7 +18744,7 @@
                             <a:schemeClr val="tx1"/>
                           </a:solidFill>
                         </a:rPr>
-                        <a:t>Sam, an auditor, reconstructs the question, retrieved IDs, each allow/deny and the answer, and verifies the hash chain</a:t>
+                        <a:t>Sam, an auditor, reconstructs the question, retrieved IDs and each allow/deny; the answer needs a recorded reveal with a reason. The hash chain verifies</a:t>
                       </a:r>
                       <a:endParaRPr lang="en-US" sz="1300" dirty="0"/>
                     </a:p>
@@ -18805,7 +18805,7 @@
                             <a:schemeClr val="accent6"/>
                           </a:solidFill>
                         </a:rPr>
-                        <a:t>test_audit_reconstruction</a:t>
+                        <a:t>test_audit_reconstruction, test_audit_need_to_know</a:t>
                       </a:r>
                       <a:endParaRPr lang="en-US" sz="1100" dirty="0"/>
                     </a:p>
@@ -19435,7 +19435,7 @@
                   <a:schemeClr val="accent5"/>
                 </a:solidFill>
               </a:rPr>
-              <a:t>Audit event a3f9…  ·  chain verified</a:t>
+              <a:t>Audit event a3f9…  ·  chain verified  ·  answer by reveal only</a:t>
             </a:r>
             <a:endParaRPr lang="en-US" sz="1200" dirty="0"/>
           </a:p>
@@ -20021,7 +20021,7 @@
                   <a:schemeClr val="tx1"/>
                 </a:solidFill>
               </a:rPr>
-              <a:t>Opens the hash-chained record a compliance officer can replay.</a:t>
+              <a:t>Opens the hash-chained record. Auditors see every decision; answer text they can't open needs a recorded reveal.</a:t>
             </a:r>
             <a:endParaRPr lang="en-US" sz="1250" dirty="0"/>
           </a:p>

--- a/docs/presentations/internal-brain-architecture.pptx
+++ b/docs/presentations/internal-brain-architecture.pptx
@@ -121,21 +121,21 @@
   <p:extLst>
     <p:ext uri="{521415D9-36F7-43E2-AB2F-B90AF26B5E84}">
       <p14:sectionLst xmlns:p14="http://schemas.microsoft.com/office/powerpoint/2010/main">
-        <p14:section name="Story" id="{da5b1e92-e5bb-77df-be84-45971ec08958}">
+        <p14:section name="Story" id="{09dfffb1-4c99-7762-13af-58bf22b77de3}">
           <p14:sldIdLst>
             <p14:sldId id="256"/>
             <p14:sldId id="257"/>
             <p14:sldId id="258"/>
           </p14:sldIdLst>
         </p14:section>
-        <p14:section name="Architecture" id="{bb8ac8b3-c68c-037e-908c-54d6c94b8d8d}">
+        <p14:section name="Architecture" id="{8f8efc84-67be-50ed-a310-72cc81deb925}">
           <p14:sldIdLst>
             <p14:sldId id="259"/>
             <p14:sldId id="260"/>
             <p14:sldId id="261"/>
           </p14:sldIdLst>
         </p14:section>
-        <p14:section name="Proof" id="{5c4998ae-d3b5-fd09-6d57-2e39e31d51b2}">
+        <p14:section name="Proof" id="{4929a9ea-bee4-b567-06a7-60ab7fd6c8f3}">
           <p14:sldIdLst>
             <p14:sldId id="262"/>
             <p14:sldId id="263"/>
@@ -147,7 +147,7 @@
             <p14:sldId id="269"/>
           </p14:sldIdLst>
         </p14:section>
-        <p14:section name="Internal" id="{cbb9f449-7bd0-cccc-0d8c-a121edb47ac6}">
+        <p14:section name="Internal" id="{73bedc8b-da14-cfb5-6b1f-fd2815c97a8a}">
           <p14:sldIdLst>
             <p14:sldId id="270"/>
           </p14:sldIdLst>
@@ -8301,7 +8301,7 @@
                   <a:schemeClr val="accent1"/>
                 </a:solidFill>
               </a:rPr>
-              <a:t>573</a:t>
+              <a:t>674</a:t>
             </a:r>
             <a:endParaRPr lang="en-US" sz="4800" dirty="0"/>
           </a:p>
@@ -8615,7 +8615,7 @@
                   <a:schemeClr val="tx1"/>
                 </a:solidFill>
               </a:rPr>
-              <a:t>Tencent Cloud ADP (chat + embeddings) behind a provider factory</a:t>
+              <a:t>Tencent Cloud ADP chat; the demo uses local vectors, so no text goes to an embedding service</a:t>
             </a:r>
             <a:endParaRPr lang="en-US" sz="1350" dirty="0"/>
           </a:p>
@@ -8995,7 +8995,7 @@
                   <a:schemeClr val="tx1"/>
                 </a:solidFill>
               </a:rPr>
-              <a:t>One Docker Compose stack on a Tencent Cloud server</a:t>
+              <a:t>One Docker Compose stack, ready for a single Tencent Cloud server</a:t>
             </a:r>
             <a:endParaRPr lang="en-US" sz="1350" dirty="0"/>
           </a:p>
@@ -9031,7 +9031,7 @@
                   <a:schemeClr val="accent6"/>
                 </a:solidFill>
               </a:rPr>
-              <a:t>Test count: PRs #6 and #9 merged locally, 13 Oct 2026 (11 SQL tests run separately against Postgres).</a:t>
+              <a:t>Test count: main plus PRs #9 and #10, 15 Oct 2026 (11 SQL tests run separately against Postgres).</a:t>
             </a:r>
             <a:endParaRPr lang="en-US" sz="1000" dirty="0"/>
           </a:p>
@@ -11476,7 +11476,7 @@
                   <a:schemeClr val="tx1"/>
                 </a:solidFill>
               </a:rPr>
-              <a:t>Every claim cites its evidence. Unsupported claims are dropped, and the system abstains rather than guesses.</a:t>
+              <a:t>Every claim is checked against its cited evidence, numbers and dates included. Below the bar, the system abstains rather than guesses.</a:t>
             </a:r>
             <a:endParaRPr lang="en-US" sz="1500" dirty="0"/>
           </a:p>
@@ -12848,7 +12848,7 @@
                   <a:schemeClr val="tx1"/>
                 </a:solidFill>
               </a:rPr>
-              <a:t>Check every claim; cite or abstain</a:t>
+              <a:t>Deterministic check of every claim, numbers included; no LLM judge</a:t>
             </a:r>
             <a:endParaRPr lang="en-US" sz="1100" dirty="0"/>
           </a:p>

--- a/docs/presentations/internal-brain-architecture.pptx
+++ b/docs/presentations/internal-brain-architecture.pptx
@@ -121,21 +121,21 @@
   <p:extLst>
     <p:ext uri="{521415D9-36F7-43E2-AB2F-B90AF26B5E84}">
       <p14:sectionLst xmlns:p14="http://schemas.microsoft.com/office/powerpoint/2010/main">
-        <p14:section name="Story" id="{09dfffb1-4c99-7762-13af-58bf22b77de3}">
+        <p14:section name="Story" id="{1304e12c-70e2-b0fd-8af5-639057923632}">
           <p14:sldIdLst>
             <p14:sldId id="256"/>
             <p14:sldId id="257"/>
             <p14:sldId id="258"/>
           </p14:sldIdLst>
         </p14:section>
-        <p14:section name="Architecture" id="{8f8efc84-67be-50ed-a310-72cc81deb925}">
+        <p14:section name="Architecture" id="{010221a3-4a54-3141-b290-a7025154fb29}">
           <p14:sldIdLst>
             <p14:sldId id="259"/>
             <p14:sldId id="260"/>
             <p14:sldId id="261"/>
           </p14:sldIdLst>
         </p14:section>
-        <p14:section name="Proof" id="{4929a9ea-bee4-b567-06a7-60ab7fd6c8f3}">
+        <p14:section name="Proof" id="{71d345aa-1ebb-aa9b-b7b3-518787380f84}">
           <p14:sldIdLst>
             <p14:sldId id="262"/>
             <p14:sldId id="263"/>
@@ -147,7 +147,7 @@
             <p14:sldId id="269"/>
           </p14:sldIdLst>
         </p14:section>
-        <p14:section name="Internal" id="{73bedc8b-da14-cfb5-6b1f-fd2815c97a8a}">
+        <p14:section name="Internal" id="{4aa4b61b-2977-2ccd-64ea-aeeab830552f}">
           <p14:sldIdLst>
             <p14:sldId id="270"/>
           </p14:sldIdLst>
@@ -16279,7 +16279,7 @@
                   <a:schemeClr val="accent6"/>
                 </a:solidFill>
               </a:rPr>
-              <a:t>Priya Nair · Finance Ops, Leadership</a:t>
+              <a:t>John Tan · Finance Ops, Leadership</a:t>
             </a:r>
             <a:endParaRPr lang="en-US" sz="1200" dirty="0"/>
           </a:p>
@@ -17067,7 +17067,7 @@
                   <a:schemeClr val="tx1"/>
                 </a:solidFill>
               </a:rPr>
-              <a:t>Priya asks again, then reopens her earlier answer</a:t>
+              <a:t>John asks again, then reopens the earlier answer</a:t>
             </a:r>
             <a:endParaRPr lang="en-US" sz="1400" dirty="0"/>
           </a:p>
@@ -17144,7 +17144,7 @@
                   <a:schemeClr val="accent6"/>
                 </a:solidFill>
               </a:rPr>
-              <a:t>Her saved answer is withheld too</a:t>
+              <a:t>The saved answer is withheld too</a:t>
             </a:r>
             <a:endParaRPr lang="en-US" sz="1300" dirty="0"/>
           </a:p>
@@ -17760,7 +17760,7 @@
                             <a:schemeClr val="tx1"/>
                           </a:solidFill>
                         </a:rPr>
-                        <a:t>Priya asks about the Rail-B cutover. The facts are spread across email, Jira, Slack and Drive; she gets one answer citing several of them</a:t>
+                        <a:t>John asks about the Rail-B cutover. The facts are spread across email, Jira, Slack and Drive, and one answer cites several of them</a:t>
                       </a:r>
                       <a:endParaRPr lang="en-US" sz="1300" dirty="0"/>
                     </a:p>
@@ -18498,7 +18498,7 @@
                             <a:schemeClr val="tx1"/>
                           </a:solidFill>
                         </a:rPr>
-                        <a:t>Leadership is removed from the Drive share (or the in-app grant revoked): Priya's next answer drops the board deck and her saved answer is withheld</a:t>
+                        <a:t>Leadership is removed from the Drive share (or the in-app grant revoked): John's next answer drops the board deck and the saved answer is withheld</a:t>
                       </a:r>
                       <a:endParaRPr lang="en-US" sz="1300" dirty="0"/>
                     </a:p>

--- a/docs/presentations/internal-brain-architecture.pptx
+++ b/docs/presentations/internal-brain-architecture.pptx
@@ -121,21 +121,21 @@
   <p:extLst>
     <p:ext uri="{521415D9-36F7-43E2-AB2F-B90AF26B5E84}">
       <p14:sectionLst xmlns:p14="http://schemas.microsoft.com/office/powerpoint/2010/main">
-        <p14:section name="Story" id="{1304e12c-70e2-b0fd-8af5-639057923632}">
+        <p14:section name="Story" id="{4edd82ed-a426-a36d-d985-25add55d00d3}">
           <p14:sldIdLst>
             <p14:sldId id="256"/>
             <p14:sldId id="257"/>
             <p14:sldId id="258"/>
           </p14:sldIdLst>
         </p14:section>
-        <p14:section name="Architecture" id="{010221a3-4a54-3141-b290-a7025154fb29}">
+        <p14:section name="Architecture" id="{c0adac33-a7de-ecf3-a79f-2311f9a98dee}">
           <p14:sldIdLst>
             <p14:sldId id="259"/>
             <p14:sldId id="260"/>
             <p14:sldId id="261"/>
           </p14:sldIdLst>
         </p14:section>
-        <p14:section name="Proof" id="{71d345aa-1ebb-aa9b-b7b3-518787380f84}">
+        <p14:section name="Proof" id="{3eba4c6e-c4b7-74d8-19b6-1205b7af4168}">
           <p14:sldIdLst>
             <p14:sldId id="262"/>
             <p14:sldId id="263"/>
@@ -147,7 +147,7 @@
             <p14:sldId id="269"/>
           </p14:sldIdLst>
         </p14:section>
-        <p14:section name="Internal" id="{4aa4b61b-2977-2ccd-64ea-aeeab830552f}">
+        <p14:section name="Internal" id="{289d311e-2789-beb2-4518-ee0d30f54141}">
           <p14:sldIdLst>
             <p14:sldId id="270"/>
           </p14:sldIdLst>

--- a/docs/presentations/internal-brain-architecture.pptx
+++ b/docs/presentations/internal-brain-architecture.pptx
@@ -121,21 +121,21 @@
   <p:extLst>
     <p:ext uri="{521415D9-36F7-43E2-AB2F-B90AF26B5E84}">
       <p14:sectionLst xmlns:p14="http://schemas.microsoft.com/office/powerpoint/2010/main">
-        <p14:section name="Story" id="{4edd82ed-a426-a36d-d985-25add55d00d3}">
+        <p14:section name="Story" id="{78e1724d-b838-1dbb-94c4-3d8c20805418}">
           <p14:sldIdLst>
             <p14:sldId id="256"/>
             <p14:sldId id="257"/>
             <p14:sldId id="258"/>
           </p14:sldIdLst>
         </p14:section>
-        <p14:section name="Architecture" id="{c0adac33-a7de-ecf3-a79f-2311f9a98dee}">
+        <p14:section name="Architecture" id="{bdc1d8bb-d3dc-8184-7d8b-362e35a4fa66}">
           <p14:sldIdLst>
             <p14:sldId id="259"/>
             <p14:sldId id="260"/>
             <p14:sldId id="261"/>
           </p14:sldIdLst>
         </p14:section>
-        <p14:section name="Proof" id="{3eba4c6e-c4b7-74d8-19b6-1205b7af4168}">
+        <p14:section name="Proof" id="{0f8cfb48-2546-488d-3932-ca7e4b61bba9}">
           <p14:sldIdLst>
             <p14:sldId id="262"/>
             <p14:sldId id="263"/>
@@ -147,7 +147,7 @@
             <p14:sldId id="269"/>
           </p14:sldIdLst>
         </p14:section>
-        <p14:section name="Internal" id="{289d311e-2789-beb2-4518-ee0d30f54141}">
+        <p14:section name="Internal" id="{2fb14f03-7a44-c37b-4637-61ad22b5b16f}">
           <p14:sldIdLst>
             <p14:sldId id="270"/>
           </p14:sldIdLst>
@@ -278,7 +278,7 @@
                     <c:v>Gemini Enterprise, fastest identity sync</c:v>
                   </c:pt>
                   <c:pt idx="3">
-                    <c:v>Internal Brain, confidential documents</c:v>
+                    <c:v>Brain Sauce, confidential documents</c:v>
                   </c:pt>
                 </c:lvl>
               </c:multiLvlStrCache>
@@ -2304,7 +2304,7 @@
                   <a:schemeClr val="accent6"/>
                 </a:solidFill>
               </a:rPr>
-              <a:t>The Internal Brain  ·  Tencent Cloud AI CAN DO IT Hackathon SG 2026  ·  FinTech track, Aspire case study</a:t>
+              <a:t>Brain Sauce  ·  Tencent Cloud AI CAN DO IT Hackathon SG 2026  ·  FinTech track, Aspire case study</a:t>
             </a:r>
             <a:endParaRPr lang="en-US" sz="1000" dirty="0"/>
           </a:p>
@@ -2848,7 +2848,7 @@
                   <a:schemeClr val="bg1"/>
                 </a:solidFill>
               </a:rPr>
-              <a:t>The Internal Brain</a:t>
+              <a:t>Brain Sauce</a:t>
             </a:r>
             <a:endParaRPr lang="en-US" sz="5400" dirty="0"/>
           </a:p>
@@ -3910,7 +3910,7 @@
                             <a:schemeClr val="bg1"/>
                           </a:solidFill>
                         </a:rPr>
-                        <a:t>Internal Brain</a:t>
+                        <a:t>Brain Sauce</a:t>
                       </a:r>
                       <a:endParaRPr lang="en-US" sz="1200" dirty="0"/>
                     </a:p>
@@ -20081,9 +20081,9 @@
 </file>
 
 <file path=ppt/theme/theme1.xml><?xml version="1.0" encoding="utf-8"?>
-<a:theme xmlns:a="http://schemas.openxmlformats.org/drawingml/2006/main" name="Internal Brain">
+<a:theme xmlns:a="http://schemas.openxmlformats.org/drawingml/2006/main" name="Brain Sauce">
   <a:themeElements>
-    <a:clrScheme name="Internal Brain">
+    <a:clrScheme name="Brain Sauce">
       <a:dk1>
         <a:srgbClr val="0F172A"/>
       </a:dk1>
@@ -20121,7 +20121,7 @@
         <a:srgbClr val="7C5CD6"/>
       </a:folHlink>
     </a:clrScheme>
-    <a:fontScheme name="Internal Brain">
+    <a:fontScheme name="Brain Sauce">
       <a:majorFont>
         <a:latin typeface="Calibri"/>
         <a:ea typeface=""/>

--- a/docs/presentations/internal-brain-architecture.pptx
+++ b/docs/presentations/internal-brain-architecture.pptx
@@ -121,21 +121,21 @@
   <p:extLst>
     <p:ext uri="{521415D9-36F7-43E2-AB2F-B90AF26B5E84}">
       <p14:sectionLst xmlns:p14="http://schemas.microsoft.com/office/powerpoint/2010/main">
-        <p14:section name="Story" id="{78e1724d-b838-1dbb-94c4-3d8c20805418}">
+        <p14:section name="Story" id="{5de7c23d-48f0-3475-b68b-5804ee0f4823}">
           <p14:sldIdLst>
             <p14:sldId id="256"/>
             <p14:sldId id="257"/>
             <p14:sldId id="258"/>
           </p14:sldIdLst>
         </p14:section>
-        <p14:section name="Architecture" id="{bdc1d8bb-d3dc-8184-7d8b-362e35a4fa66}">
+        <p14:section name="Architecture" id="{b569bb20-0b5d-39a4-0cb7-3cda96482380}">
           <p14:sldIdLst>
             <p14:sldId id="259"/>
             <p14:sldId id="260"/>
             <p14:sldId id="261"/>
           </p14:sldIdLst>
         </p14:section>
-        <p14:section name="Proof" id="{0f8cfb48-2546-488d-3932-ca7e4b61bba9}">
+        <p14:section name="Proof" id="{fb6a4728-f364-47bc-8cd3-2dba567240c0}">
           <p14:sldIdLst>
             <p14:sldId id="262"/>
             <p14:sldId id="263"/>
@@ -147,7 +147,7 @@
             <p14:sldId id="269"/>
           </p14:sldIdLst>
         </p14:section>
-        <p14:section name="Internal" id="{2fb14f03-7a44-c37b-4637-61ad22b5b16f}">
+        <p14:section name="Internal" id="{284762e1-6fd3-8c74-30b2-1519280a7324}">
           <p14:sldIdLst>
             <p14:sldId id="270"/>
           </p14:sldIdLst>
@@ -189,7 +189,7 @@
           </c:tx>
           <c:spPr>
             <a:solidFill>
-              <a:srgbClr val="475569"/>
+              <a:srgbClr val="A6A6A6"/>
             </a:solidFill>
             <a:effectLst/>
           </c:spPr>
@@ -203,7 +203,7 @@
                 <a:pPr>
                   <a:defRPr b="1" i="0" strike="noStrike" sz="1300" u="none">
                     <a:solidFill>
-                      <a:srgbClr val="0F172A"/>
+                      <a:srgbClr val="1D1D1D"/>
                     </a:solidFill>
                     <a:latin typeface="+mn-lt"/>
                   </a:defRPr>
@@ -224,7 +224,7 @@
             <c:bubble3D val="0"/>
             <c:spPr>
               <a:solidFill>
-                <a:srgbClr val="475569"/>
+                <a:srgbClr val="A6A6A6"/>
               </a:solidFill>
               <a:effectLst/>
             </c:spPr>
@@ -235,7 +235,7 @@
             <c:bubble3D val="0"/>
             <c:spPr>
               <a:solidFill>
-                <a:srgbClr val="475569"/>
+                <a:srgbClr val="A6A6A6"/>
               </a:solidFill>
               <a:effectLst/>
             </c:spPr>
@@ -246,7 +246,7 @@
             <c:bubble3D val="0"/>
             <c:spPr>
               <a:solidFill>
-                <a:srgbClr val="475569"/>
+                <a:srgbClr val="A6A6A6"/>
               </a:solidFill>
               <a:effectLst/>
             </c:spPr>
@@ -257,7 +257,7 @@
             <c:bubble3D val="0"/>
             <c:spPr>
               <a:solidFill>
-                <a:srgbClr val="0E9F8E"/>
+                <a:srgbClr val="549F58"/>
               </a:solidFill>
               <a:effectLst/>
             </c:spPr>
@@ -315,7 +315,7 @@
               <a:pPr>
                 <a:defRPr b="1" i="0" strike="noStrike" sz="1300" u="none">
                   <a:solidFill>
-                    <a:srgbClr val="0F172A"/>
+                    <a:srgbClr val="1D1D1D"/>
                   </a:solidFill>
                   <a:latin typeface="+mn-lt"/>
                 </a:defRPr>
@@ -361,7 +361,7 @@
             <a:pPr>
               <a:defRPr sz="1200" b="0" i="0" u="none" strike="noStrike">
                 <a:solidFill>
-                  <a:srgbClr val="0F172A"/>
+                  <a:srgbClr val="1D1D1D"/>
                 </a:solidFill>
                 <a:latin typeface="+mn-lt"/>
               </a:defRPr>
@@ -2146,7 +2146,7 @@
     <p:bg>
       <p:bgPr>
         <a:solidFill>
-          <a:schemeClr val="tx2"/>
+          <a:schemeClr val="bg1"/>
         </a:solidFill>
       </p:bgPr>
     </p:bg>
@@ -2188,9 +2188,9 @@
           <a:lstStyle>
             <a:lvl1pPr algn="l" indent="0" marL="0">
               <a:buNone/>
-              <a:defRPr lang="en-US" sz="5400" b="1" dirty="0">
-                <a:solidFill>
-                  <a:schemeClr val="bg1"/>
+              <a:defRPr lang="en-US" sz="6000" b="1" dirty="0">
+                <a:solidFill>
+                  <a:schemeClr val="tx2"/>
                 </a:solidFill>
               </a:defRPr>
             </a:lvl1pPr>
@@ -2199,7 +2199,7 @@
             <a:pPr algn="l" indent="0" marL="0">
               <a:buNone/>
             </a:pPr>
-            <a:endParaRPr lang="en-US" sz="5400" dirty="0"/>
+            <a:endParaRPr lang="en-US" sz="6000" dirty="0"/>
           </a:p>
         </p:txBody>
       </p:sp>
@@ -2259,7 +2259,7 @@
           <a:lstStyle>
             <a:lvl1pPr algn="l" indent="0" marL="0">
               <a:buNone/>
-              <a:defRPr lang="en-US" sz="2800" b="1" dirty="0">
+              <a:defRPr lang="en-US" sz="2600" b="1" dirty="0">
                 <a:solidFill>
                   <a:schemeClr val="tx2"/>
                 </a:solidFill>
@@ -2270,7 +2270,7 @@
             <a:pPr algn="l" indent="0" marL="0">
               <a:buNone/>
             </a:pPr>
-            <a:endParaRPr lang="en-US" sz="2800" dirty="0"/>
+            <a:endParaRPr lang="en-US" sz="2600" dirty="0"/>
           </a:p>
         </p:txBody>
       </p:sp>
@@ -2784,7 +2784,7 @@
         </p:nvSpPr>
         <p:spPr>
           <a:xfrm>
-            <a:off x="640080" y="685800"/>
+            <a:off x="640080" y="731520"/>
             <a:ext cx="3566160" cy="384048"/>
           </a:xfrm>
           <a:prstGeom prst="roundRect">
@@ -2793,7 +2793,7 @@
             </a:avLst>
           </a:prstGeom>
           <a:solidFill>
-            <a:schemeClr val="accent1"/>
+            <a:srgbClr val="EAF3EA"/>
           </a:solidFill>
           <a:ln/>
         </p:spPr>
@@ -2807,7 +2807,7 @@
             <a:r>
               <a:rPr lang="en-US" sz="1200" b="1" dirty="0">
                 <a:solidFill>
-                  <a:schemeClr val="bg1"/>
+                  <a:schemeClr val="accent1"/>
                 </a:solidFill>
               </a:rPr>
               <a:t>FINTECH TRACK  ·  ASPIRE CASE STUDY</a:t>
@@ -2843,14 +2843,14 @@
               <a:buNone/>
             </a:pPr>
             <a:r>
-              <a:rPr lang="en-US" sz="5400" b="1" dirty="0">
-                <a:solidFill>
-                  <a:schemeClr val="bg1"/>
-                </a:solidFill>
-              </a:rPr>
-              <a:t>Brain Sauce</a:t>
-            </a:r>
-            <a:endParaRPr lang="en-US" sz="5400" dirty="0"/>
+              <a:rPr lang="en-US" sz="6000" b="1" dirty="0">
+                <a:solidFill>
+                  <a:schemeClr val="tx2"/>
+                </a:solidFill>
+              </a:rPr>
+              <a:t>Brain Sauce.</a:t>
+            </a:r>
+            <a:endParaRPr lang="en-US" sz="6000" dirty="0"/>
           </a:p>
         </p:txBody>
       </p:sp>
@@ -2862,8 +2862,8 @@
         </p:nvSpPr>
         <p:spPr>
           <a:xfrm>
-            <a:off x="640080" y="2606040"/>
-            <a:ext cx="6949440" cy="1097280"/>
+            <a:off x="640080" y="2286000"/>
+            <a:ext cx="7863840" cy="914400"/>
           </a:xfrm>
           <a:prstGeom prst="rect">
             <a:avLst/>
@@ -2879,14 +2879,14 @@
               <a:buNone/>
             </a:pPr>
             <a:r>
-              <a:rPr lang="en-US" sz="2000" dirty="0">
-                <a:solidFill>
-                  <a:schemeClr val="bg2"/>
-                </a:solidFill>
-              </a:rPr>
-              <a:t>Ask one question across Confluence, Jira, Slack and Google Drive. Get an answer built only from what you are allowed to see, with the proof attached.</a:t>
-            </a:r>
-            <a:endParaRPr lang="en-US" sz="2000" dirty="0"/>
+              <a:rPr lang="en-US" sz="5400" b="1" dirty="0">
+                <a:solidFill>
+                  <a:srgbClr val="A6A6A6"/>
+                </a:solidFill>
+              </a:rPr>
+              <a:t>Answers with receipts.</a:t>
+            </a:r>
+            <a:endParaRPr lang="en-US" sz="5400" dirty="0"/>
           </a:p>
         </p:txBody>
       </p:sp>
@@ -2898,8 +2898,8 @@
         </p:nvSpPr>
         <p:spPr>
           <a:xfrm>
-            <a:off x="640080" y="3977640"/>
-            <a:ext cx="6949440" cy="731520"/>
+            <a:off x="640080" y="3520440"/>
+            <a:ext cx="6766560" cy="914400"/>
           </a:xfrm>
           <a:prstGeom prst="rect">
             <a:avLst/>
@@ -2915,25 +2915,14 @@
               <a:buNone/>
             </a:pPr>
             <a:r>
-              <a:rPr lang="en-US" sz="1400" b="1" dirty="0">
-                <a:solidFill>
-                  <a:srgbClr val="C9D8EE"/>
-                </a:solidFill>
-              </a:rPr>
-              <a:t>Challenge: </a:t>
-            </a:r>
-            <a:pPr algn="l" indent="0" marL="0">
-              <a:buNone/>
-            </a:pPr>
-            <a:r>
-              <a:rPr lang="en-US" sz="1400" dirty="0">
-                <a:solidFill>
-                  <a:srgbClr val="C9D8EE"/>
-                </a:solidFill>
-              </a:rPr>
-              <a:t>The Internal Brain: a context-aware enterprise knowledge system with RBAC, security logging and audit trail</a:t>
-            </a:r>
-            <a:endParaRPr lang="en-US" sz="1400" dirty="0"/>
+              <a:rPr lang="en-US" sz="1800" dirty="0">
+                <a:solidFill>
+                  <a:srgbClr val="666666"/>
+                </a:solidFill>
+              </a:rPr>
+              <a:t>Ask one question across Confluence, Jira, Slack and Google Drive. Get an answer built only from what you are allowed to see, with the proof attached.</a:t>
+            </a:r>
+            <a:endParaRPr lang="en-US" sz="1800" dirty="0"/>
           </a:p>
         </p:txBody>
       </p:sp>
@@ -2945,8 +2934,8 @@
         </p:nvSpPr>
         <p:spPr>
           <a:xfrm>
-            <a:off x="640080" y="5989320"/>
-            <a:ext cx="10515600" cy="365760"/>
+            <a:off x="640080" y="4572000"/>
+            <a:ext cx="6766560" cy="640080"/>
           </a:xfrm>
           <a:prstGeom prst="rect">
             <a:avLst/>
@@ -2962,20 +2951,67 @@
               <a:buNone/>
             </a:pPr>
             <a:r>
+              <a:rPr lang="en-US" sz="1300" b="1" dirty="0">
+                <a:solidFill>
+                  <a:schemeClr val="tx2"/>
+                </a:solidFill>
+              </a:rPr>
+              <a:t>Challenge: </a:t>
+            </a:r>
+            <a:pPr algn="l" indent="0" marL="0">
+              <a:buNone/>
+            </a:pPr>
+            <a:r>
               <a:rPr lang="en-US" sz="1300" dirty="0">
                 <a:solidFill>
-                  <a:srgbClr val="C9D8EE"/>
+                  <a:srgbClr val="666666"/>
+                </a:solidFill>
+              </a:rPr>
+              <a:t>The Internal Brain: a context-aware enterprise knowledge system with RBAC, security logging and audit trail</a:t>
+            </a:r>
+            <a:endParaRPr lang="en-US" sz="1300" dirty="0"/>
+          </a:p>
+        </p:txBody>
+      </p:sp>
+      <p:sp>
+        <p:nvSpPr>
+          <p:cNvPr id="7" name="text-5"/>
+          <p:cNvSpPr txBox="1"/>
+          <p:nvPr/>
+        </p:nvSpPr>
+        <p:spPr>
+          <a:xfrm>
+            <a:off x="640080" y="6035040"/>
+            <a:ext cx="10515600" cy="320040"/>
+          </a:xfrm>
+          <a:prstGeom prst="rect">
+            <a:avLst/>
+          </a:prstGeom>
+          <a:noFill/>
+          <a:ln/>
+        </p:spPr>
+        <p:txBody>
+          <a:bodyPr wrap="square" lIns="0" tIns="0" rIns="0" bIns="0" rtlCol="0" anchor="t"/>
+          <a:lstStyle/>
+          <a:p>
+            <a:pPr algn="l" indent="0" marL="0">
+              <a:buNone/>
+            </a:pPr>
+            <a:r>
+              <a:rPr lang="en-US" sz="1200" dirty="0">
+                <a:solidFill>
+                  <a:schemeClr val="accent6"/>
                 </a:solidFill>
               </a:rPr>
               <a:t>Team: Chai · Raphael · Pavan     |     Tencent Cloud AI CAN DO IT Hackathon Singapore 2026</a:t>
             </a:r>
-            <a:endParaRPr lang="en-US" sz="1300" dirty="0"/>
-          </a:p>
-        </p:txBody>
-      </p:sp>
-      <p:sp>
-        <p:nvSpPr>
-          <p:cNvPr id="7" name="icon-bg-5"/>
+            <a:endParaRPr lang="en-US" sz="1200" dirty="0"/>
+          </a:p>
+        </p:txBody>
+      </p:sp>
+      <p:sp>
+        <p:nvSpPr>
+          <p:cNvPr id="8" name="icon-bg-6"/>
           <p:cNvSpPr/>
           <p:nvPr/>
         </p:nvSpPr>
@@ -2988,14 +3024,14 @@
             <a:avLst/>
           </a:prstGeom>
           <a:solidFill>
-            <a:schemeClr val="bg1"/>
+            <a:schemeClr val="bg2"/>
           </a:solidFill>
           <a:ln/>
         </p:spPr>
       </p:sp>
       <p:pic>
         <p:nvPicPr>
-          <p:cNvPr id="8" name="icon-6" descr="preencoded.png">    </p:cNvPr>
+          <p:cNvPr id="9" name="icon-7" descr="preencoded.png">    </p:cNvPr>
           <p:cNvPicPr>
             <a:picLocks noChangeAspect="1"/>
           </p:cNvPicPr>
@@ -3009,8 +3045,8 @@
         </p:blipFill>
         <p:spPr>
           <a:xfrm>
-            <a:off x="8513064" y="1060704"/>
-            <a:ext cx="438912" cy="438912"/>
+            <a:off x="8527694" y="1075334"/>
+            <a:ext cx="409651" cy="409651"/>
           </a:xfrm>
           <a:prstGeom prst="rect">
             <a:avLst/>
@@ -3019,14 +3055,14 @@
       </p:pic>
       <p:sp>
         <p:nvSpPr>
-          <p:cNvPr id="9" name="text-7"/>
+          <p:cNvPr id="10" name="text-8"/>
           <p:cNvSpPr txBox="1"/>
           <p:nvPr/>
         </p:nvSpPr>
         <p:spPr>
           <a:xfrm>
-            <a:off x="8275320" y="1682496"/>
-            <a:ext cx="914400" cy="256032"/>
+            <a:off x="8183880" y="1682496"/>
+            <a:ext cx="1097280" cy="256032"/>
           </a:xfrm>
           <a:prstGeom prst="rect">
             <a:avLst/>
@@ -3044,7 +3080,7 @@
             <a:r>
               <a:rPr lang="en-US" sz="1100" dirty="0">
                 <a:solidFill>
-                  <a:schemeClr val="bg2"/>
+                  <a:schemeClr val="accent6"/>
                 </a:solidFill>
               </a:rPr>
               <a:t>Confluence</a:t>
@@ -3055,7 +3091,7 @@
       </p:sp>
       <p:sp>
         <p:nvSpPr>
-          <p:cNvPr id="10" name="arrow-8"/>
+          <p:cNvPr id="11" name="arrow-9"/>
           <p:cNvSpPr/>
           <p:nvPr/>
         </p:nvSpPr>
@@ -3070,7 +3106,7 @@
           <a:noFill/>
           <a:ln w="15875">
             <a:solidFill>
-              <a:srgbClr val="C9D8EE"/>
+              <a:srgbClr val="D7D7D7"/>
             </a:solidFill>
             <a:prstDash val="solid"/>
             <a:tailEnd type="triangle"/>
@@ -3079,7 +3115,7 @@
       </p:sp>
       <p:sp>
         <p:nvSpPr>
-          <p:cNvPr id="11" name="icon-bg-9"/>
+          <p:cNvPr id="12" name="icon-bg-10"/>
           <p:cNvSpPr/>
           <p:nvPr/>
         </p:nvSpPr>
@@ -3092,14 +3128,14 @@
             <a:avLst/>
           </a:prstGeom>
           <a:solidFill>
-            <a:schemeClr val="bg1"/>
+            <a:schemeClr val="bg2"/>
           </a:solidFill>
           <a:ln/>
         </p:spPr>
       </p:sp>
       <p:pic>
         <p:nvPicPr>
-          <p:cNvPr id="12" name="icon-10" descr="preencoded.png">    </p:cNvPr>
+          <p:cNvPr id="13" name="icon-11" descr="preencoded.png">    </p:cNvPr>
           <p:cNvPicPr>
             <a:picLocks noChangeAspect="1"/>
           </p:cNvPicPr>
@@ -3113,8 +3149,8 @@
         </p:blipFill>
         <p:spPr>
           <a:xfrm>
-            <a:off x="8513064" y="2139696"/>
-            <a:ext cx="438912" cy="438912"/>
+            <a:off x="8527694" y="2154326"/>
+            <a:ext cx="409651" cy="409651"/>
           </a:xfrm>
           <a:prstGeom prst="rect">
             <a:avLst/>
@@ -3123,14 +3159,14 @@
       </p:pic>
       <p:sp>
         <p:nvSpPr>
-          <p:cNvPr id="13" name="text-11"/>
+          <p:cNvPr id="14" name="text-12"/>
           <p:cNvSpPr txBox="1"/>
           <p:nvPr/>
         </p:nvSpPr>
         <p:spPr>
           <a:xfrm>
-            <a:off x="8275320" y="2761488"/>
-            <a:ext cx="914400" cy="256032"/>
+            <a:off x="8183880" y="2761488"/>
+            <a:ext cx="1097280" cy="256032"/>
           </a:xfrm>
           <a:prstGeom prst="rect">
             <a:avLst/>
@@ -3148,7 +3184,7 @@
             <a:r>
               <a:rPr lang="en-US" sz="1100" dirty="0">
                 <a:solidFill>
-                  <a:schemeClr val="bg2"/>
+                  <a:schemeClr val="accent6"/>
                 </a:solidFill>
               </a:rPr>
               <a:t>Jira</a:t>
@@ -3159,7 +3195,7 @@
       </p:sp>
       <p:sp>
         <p:nvSpPr>
-          <p:cNvPr id="14" name="arrow-12"/>
+          <p:cNvPr id="15" name="arrow-13"/>
           <p:cNvSpPr/>
           <p:nvPr/>
         </p:nvSpPr>
@@ -3174,7 +3210,7 @@
           <a:noFill/>
           <a:ln w="15875">
             <a:solidFill>
-              <a:srgbClr val="C9D8EE"/>
+              <a:srgbClr val="D7D7D7"/>
             </a:solidFill>
             <a:prstDash val="solid"/>
             <a:tailEnd type="triangle"/>
@@ -3183,7 +3219,7 @@
       </p:sp>
       <p:sp>
         <p:nvSpPr>
-          <p:cNvPr id="15" name="icon-bg-13"/>
+          <p:cNvPr id="16" name="icon-bg-14"/>
           <p:cNvSpPr/>
           <p:nvPr/>
         </p:nvSpPr>
@@ -3196,14 +3232,14 @@
             <a:avLst/>
           </a:prstGeom>
           <a:solidFill>
-            <a:schemeClr val="bg1"/>
+            <a:schemeClr val="bg2"/>
           </a:solidFill>
           <a:ln/>
         </p:spPr>
       </p:sp>
       <p:pic>
         <p:nvPicPr>
-          <p:cNvPr id="16" name="icon-14" descr="preencoded.png">    </p:cNvPr>
+          <p:cNvPr id="17" name="icon-15" descr="preencoded.png">    </p:cNvPr>
           <p:cNvPicPr>
             <a:picLocks noChangeAspect="1"/>
           </p:cNvPicPr>
@@ -3217,8 +3253,8 @@
         </p:blipFill>
         <p:spPr>
           <a:xfrm>
-            <a:off x="8513064" y="3218688"/>
-            <a:ext cx="438912" cy="438912"/>
+            <a:off x="8527694" y="3233318"/>
+            <a:ext cx="409651" cy="409651"/>
           </a:xfrm>
           <a:prstGeom prst="rect">
             <a:avLst/>
@@ -3227,14 +3263,14 @@
       </p:pic>
       <p:sp>
         <p:nvSpPr>
-          <p:cNvPr id="17" name="text-15"/>
+          <p:cNvPr id="18" name="text-16"/>
           <p:cNvSpPr txBox="1"/>
           <p:nvPr/>
         </p:nvSpPr>
         <p:spPr>
           <a:xfrm>
-            <a:off x="8275320" y="3840480"/>
-            <a:ext cx="914400" cy="256032"/>
+            <a:off x="8183880" y="3840480"/>
+            <a:ext cx="1097280" cy="256032"/>
           </a:xfrm>
           <a:prstGeom prst="rect">
             <a:avLst/>
@@ -3252,7 +3288,7 @@
             <a:r>
               <a:rPr lang="en-US" sz="1100" dirty="0">
                 <a:solidFill>
-                  <a:schemeClr val="bg2"/>
+                  <a:schemeClr val="accent6"/>
                 </a:solidFill>
               </a:rPr>
               <a:t>Slack</a:t>
@@ -3263,7 +3299,7 @@
       </p:sp>
       <p:sp>
         <p:nvSpPr>
-          <p:cNvPr id="18" name="arrow-16"/>
+          <p:cNvPr id="19" name="arrow-17"/>
           <p:cNvSpPr/>
           <p:nvPr/>
         </p:nvSpPr>
@@ -3278,7 +3314,7 @@
           <a:noFill/>
           <a:ln w="15875">
             <a:solidFill>
-              <a:srgbClr val="C9D8EE"/>
+              <a:srgbClr val="D7D7D7"/>
             </a:solidFill>
             <a:prstDash val="solid"/>
             <a:tailEnd type="triangle"/>
@@ -3287,7 +3323,7 @@
       </p:sp>
       <p:sp>
         <p:nvSpPr>
-          <p:cNvPr id="19" name="icon-bg-17"/>
+          <p:cNvPr id="20" name="icon-bg-18"/>
           <p:cNvSpPr/>
           <p:nvPr/>
         </p:nvSpPr>
@@ -3300,14 +3336,14 @@
             <a:avLst/>
           </a:prstGeom>
           <a:solidFill>
-            <a:schemeClr val="bg1"/>
+            <a:schemeClr val="bg2"/>
           </a:solidFill>
           <a:ln/>
         </p:spPr>
       </p:sp>
       <p:pic>
         <p:nvPicPr>
-          <p:cNvPr id="20" name="icon-18" descr="preencoded.png">    </p:cNvPr>
+          <p:cNvPr id="21" name="icon-19" descr="preencoded.png">    </p:cNvPr>
           <p:cNvPicPr>
             <a:picLocks noChangeAspect="1"/>
           </p:cNvPicPr>
@@ -3321,8 +3357,8 @@
         </p:blipFill>
         <p:spPr>
           <a:xfrm>
-            <a:off x="8513064" y="4297680"/>
-            <a:ext cx="438912" cy="438912"/>
+            <a:off x="8527694" y="4312310"/>
+            <a:ext cx="409651" cy="409651"/>
           </a:xfrm>
           <a:prstGeom prst="rect">
             <a:avLst/>
@@ -3331,14 +3367,14 @@
       </p:pic>
       <p:sp>
         <p:nvSpPr>
-          <p:cNvPr id="21" name="text-19"/>
+          <p:cNvPr id="22" name="text-20"/>
           <p:cNvSpPr txBox="1"/>
           <p:nvPr/>
         </p:nvSpPr>
         <p:spPr>
           <a:xfrm>
-            <a:off x="8275320" y="4919472"/>
-            <a:ext cx="914400" cy="256032"/>
+            <a:off x="8183880" y="4919472"/>
+            <a:ext cx="1097280" cy="256032"/>
           </a:xfrm>
           <a:prstGeom prst="rect">
             <a:avLst/>
@@ -3356,7 +3392,7 @@
             <a:r>
               <a:rPr lang="en-US" sz="1100" dirty="0">
                 <a:solidFill>
-                  <a:schemeClr val="bg2"/>
+                  <a:schemeClr val="accent6"/>
                 </a:solidFill>
               </a:rPr>
               <a:t>Google Drive</a:t>
@@ -3367,7 +3403,7 @@
       </p:sp>
       <p:sp>
         <p:nvSpPr>
-          <p:cNvPr id="22" name="arrow-20"/>
+          <p:cNvPr id="23" name="arrow-21"/>
           <p:cNvSpPr/>
           <p:nvPr/>
         </p:nvSpPr>
@@ -3382,7 +3418,7 @@
           <a:noFill/>
           <a:ln w="15875">
             <a:solidFill>
-              <a:srgbClr val="C9D8EE"/>
+              <a:srgbClr val="D7D7D7"/>
             </a:solidFill>
             <a:prstDash val="solid"/>
             <a:tailEnd type="triangle"/>
@@ -3391,7 +3427,7 @@
       </p:sp>
       <p:sp>
         <p:nvSpPr>
-          <p:cNvPr id="23" name="icon-bg-21"/>
+          <p:cNvPr id="24" name="icon-bg-22"/>
           <p:cNvSpPr/>
           <p:nvPr/>
         </p:nvSpPr>
@@ -3404,14 +3440,14 @@
             <a:avLst/>
           </a:prstGeom>
           <a:solidFill>
-            <a:schemeClr val="accent1"/>
+            <a:srgbClr val="549F58"/>
           </a:solidFill>
           <a:ln/>
         </p:spPr>
       </p:sp>
       <p:pic>
         <p:nvPicPr>
-          <p:cNvPr id="24" name="icon-22" descr="preencoded.png">    </p:cNvPr>
+          <p:cNvPr id="25" name="icon-23" descr="preencoded.png">    </p:cNvPr>
           <p:cNvPicPr>
             <a:picLocks noChangeAspect="1"/>
           </p:cNvPicPr>
@@ -3435,7 +3471,7 @@
       </p:pic>
       <p:sp>
         <p:nvSpPr>
-          <p:cNvPr id="25" name="text-23"/>
+          <p:cNvPr id="26" name="text-24"/>
           <p:cNvSpPr txBox="1"/>
           <p:nvPr/>
         </p:nvSpPr>
@@ -3460,7 +3496,7 @@
             <a:r>
               <a:rPr lang="en-US" sz="1200" b="1" dirty="0">
                 <a:solidFill>
-                  <a:schemeClr val="bg1"/>
+                  <a:schemeClr val="tx2"/>
                 </a:solidFill>
               </a:rPr>
               <a:t>Governed answer</a:t>
@@ -3471,7 +3507,7 @@
       </p:sp>
       <p:sp>
         <p:nvSpPr>
-          <p:cNvPr id="26" name="text-24"/>
+          <p:cNvPr id="27" name="text-25"/>
           <p:cNvSpPr txBox="1"/>
           <p:nvPr/>
         </p:nvSpPr>
@@ -3496,7 +3532,7 @@
             <a:r>
               <a:rPr lang="en-US" sz="1000" dirty="0">
                 <a:solidFill>
-                  <a:srgbClr val="C9D8EE"/>
+                  <a:schemeClr val="accent6"/>
                 </a:solidFill>
               </a:rPr>
               <a:t>permitted · fresh · grounded · audited</a:t>
@@ -3557,20 +3593,31 @@
               <a:buNone/>
             </a:pPr>
             <a:r>
-              <a:rPr lang="en-US" sz="2800" b="1" dirty="0">
+              <a:rPr lang="en-US" sz="2600" b="1" dirty="0">
                 <a:solidFill>
                   <a:schemeClr val="tx2"/>
                 </a:solidFill>
               </a:rPr>
-              <a:t>Same foundation as Glean and Copilot, plus what they don't document</a:t>
-            </a:r>
-            <a:endParaRPr lang="en-US" sz="2800" dirty="0"/>
+              <a:t>Glean and Copilot's foundation,</a:t>
+            </a:r>
+            <a:pPr algn="l" indent="0" marL="0">
+              <a:buNone/>
+            </a:pPr>
+            <a:r>
+              <a:rPr lang="en-US" sz="2600" b="1" dirty="0">
+                <a:solidFill>
+                  <a:srgbClr val="8C8C8C"/>
+                </a:solidFill>
+              </a:rPr>
+              <a:t> plus what they don't document</a:t>
+            </a:r>
+            <a:endParaRPr lang="en-US" sz="2600" dirty="0"/>
           </a:p>
         </p:txBody>
       </p:sp>
       <p:graphicFrame>
         <p:nvGraphicFramePr>
-          <p:cNvPr id="11" name="comparison-table-268"/>
+          <p:cNvPr id="11" name="comparison-table-279"/>
           <p:cNvGraphicFramePr>
             <a:graphicFrameLocks noGrp="1"/>
           </p:cNvGraphicFramePr>
@@ -3613,7 +3660,7 @@
                   <a:tcPr marL="73152" marR="73152" marT="45720" marB="45720" anchor="ctr">
                     <a:lnL w="9525" cap="flat" cmpd="sng" algn="ctr">
                       <a:solidFill>
-                        <a:srgbClr val="CBD5E1"/>
+                        <a:srgbClr val="D7D7D7"/>
                       </a:solidFill>
                       <a:prstDash val="solid"/>
                       <a:round/>
@@ -3622,7 +3669,7 @@
                     </a:lnL>
                     <a:lnR w="9525" cap="flat" cmpd="sng" algn="ctr">
                       <a:solidFill>
-                        <a:srgbClr val="CBD5E1"/>
+                        <a:srgbClr val="D7D7D7"/>
                       </a:solidFill>
                       <a:prstDash val="solid"/>
                       <a:round/>
@@ -3631,7 +3678,7 @@
                     </a:lnR>
                     <a:lnT w="9525" cap="flat" cmpd="sng" algn="ctr">
                       <a:solidFill>
-                        <a:srgbClr val="CBD5E1"/>
+                        <a:srgbClr val="D7D7D7"/>
                       </a:solidFill>
                       <a:prstDash val="solid"/>
                       <a:round/>
@@ -3640,7 +3687,7 @@
                     </a:lnT>
                     <a:lnB w="9525" cap="flat" cmpd="sng" algn="ctr">
                       <a:solidFill>
-                        <a:srgbClr val="CBD5E1"/>
+                        <a:srgbClr val="D7D7D7"/>
                       </a:solidFill>
                       <a:prstDash val="solid"/>
                       <a:round/>
@@ -3674,7 +3721,7 @@
                   <a:tcPr marL="73152" marR="73152" marT="45720" marB="45720" anchor="ctr">
                     <a:lnL w="9525" cap="flat" cmpd="sng" algn="ctr">
                       <a:solidFill>
-                        <a:srgbClr val="CBD5E1"/>
+                        <a:srgbClr val="D7D7D7"/>
                       </a:solidFill>
                       <a:prstDash val="solid"/>
                       <a:round/>
@@ -3683,7 +3730,7 @@
                     </a:lnL>
                     <a:lnR w="9525" cap="flat" cmpd="sng" algn="ctr">
                       <a:solidFill>
-                        <a:srgbClr val="CBD5E1"/>
+                        <a:srgbClr val="D7D7D7"/>
                       </a:solidFill>
                       <a:prstDash val="solid"/>
                       <a:round/>
@@ -3692,7 +3739,7 @@
                     </a:lnR>
                     <a:lnT w="9525" cap="flat" cmpd="sng" algn="ctr">
                       <a:solidFill>
-                        <a:srgbClr val="CBD5E1"/>
+                        <a:srgbClr val="D7D7D7"/>
                       </a:solidFill>
                       <a:prstDash val="solid"/>
                       <a:round/>
@@ -3701,7 +3748,7 @@
                     </a:lnT>
                     <a:lnB w="9525" cap="flat" cmpd="sng" algn="ctr">
                       <a:solidFill>
-                        <a:srgbClr val="CBD5E1"/>
+                        <a:srgbClr val="D7D7D7"/>
                       </a:solidFill>
                       <a:prstDash val="solid"/>
                       <a:round/>
@@ -3735,7 +3782,7 @@
                   <a:tcPr marL="73152" marR="73152" marT="45720" marB="45720" anchor="ctr">
                     <a:lnL w="9525" cap="flat" cmpd="sng" algn="ctr">
                       <a:solidFill>
-                        <a:srgbClr val="CBD5E1"/>
+                        <a:srgbClr val="D7D7D7"/>
                       </a:solidFill>
                       <a:prstDash val="solid"/>
                       <a:round/>
@@ -3744,7 +3791,7 @@
                     </a:lnL>
                     <a:lnR w="9525" cap="flat" cmpd="sng" algn="ctr">
                       <a:solidFill>
-                        <a:srgbClr val="CBD5E1"/>
+                        <a:srgbClr val="D7D7D7"/>
                       </a:solidFill>
                       <a:prstDash val="solid"/>
                       <a:round/>
@@ -3753,7 +3800,7 @@
                     </a:lnR>
                     <a:lnT w="9525" cap="flat" cmpd="sng" algn="ctr">
                       <a:solidFill>
-                        <a:srgbClr val="CBD5E1"/>
+                        <a:srgbClr val="D7D7D7"/>
                       </a:solidFill>
                       <a:prstDash val="solid"/>
                       <a:round/>
@@ -3762,7 +3809,7 @@
                     </a:lnT>
                     <a:lnB w="9525" cap="flat" cmpd="sng" algn="ctr">
                       <a:solidFill>
-                        <a:srgbClr val="CBD5E1"/>
+                        <a:srgbClr val="D7D7D7"/>
                       </a:solidFill>
                       <a:prstDash val="solid"/>
                       <a:round/>
@@ -3796,7 +3843,7 @@
                   <a:tcPr marL="73152" marR="73152" marT="45720" marB="45720" anchor="ctr">
                     <a:lnL w="9525" cap="flat" cmpd="sng" algn="ctr">
                       <a:solidFill>
-                        <a:srgbClr val="CBD5E1"/>
+                        <a:srgbClr val="D7D7D7"/>
                       </a:solidFill>
                       <a:prstDash val="solid"/>
                       <a:round/>
@@ -3805,7 +3852,7 @@
                     </a:lnL>
                     <a:lnR w="9525" cap="flat" cmpd="sng" algn="ctr">
                       <a:solidFill>
-                        <a:srgbClr val="CBD5E1"/>
+                        <a:srgbClr val="D7D7D7"/>
                       </a:solidFill>
                       <a:prstDash val="solid"/>
                       <a:round/>
@@ -3814,7 +3861,7 @@
                     </a:lnR>
                     <a:lnT w="9525" cap="flat" cmpd="sng" algn="ctr">
                       <a:solidFill>
-                        <a:srgbClr val="CBD5E1"/>
+                        <a:srgbClr val="D7D7D7"/>
                       </a:solidFill>
                       <a:prstDash val="solid"/>
                       <a:round/>
@@ -3823,7 +3870,7 @@
                     </a:lnT>
                     <a:lnB w="9525" cap="flat" cmpd="sng" algn="ctr">
                       <a:solidFill>
-                        <a:srgbClr val="CBD5E1"/>
+                        <a:srgbClr val="D7D7D7"/>
                       </a:solidFill>
                       <a:prstDash val="solid"/>
                       <a:round/>
@@ -3857,7 +3904,7 @@
                   <a:tcPr marL="73152" marR="73152" marT="45720" marB="45720" anchor="ctr">
                     <a:lnL w="9525" cap="flat" cmpd="sng" algn="ctr">
                       <a:solidFill>
-                        <a:srgbClr val="CBD5E1"/>
+                        <a:srgbClr val="D7D7D7"/>
                       </a:solidFill>
                       <a:prstDash val="solid"/>
                       <a:round/>
@@ -3866,7 +3913,7 @@
                     </a:lnL>
                     <a:lnR w="9525" cap="flat" cmpd="sng" algn="ctr">
                       <a:solidFill>
-                        <a:srgbClr val="CBD5E1"/>
+                        <a:srgbClr val="D7D7D7"/>
                       </a:solidFill>
                       <a:prstDash val="solid"/>
                       <a:round/>
@@ -3875,7 +3922,7 @@
                     </a:lnR>
                     <a:lnT w="9525" cap="flat" cmpd="sng" algn="ctr">
                       <a:solidFill>
-                        <a:srgbClr val="CBD5E1"/>
+                        <a:srgbClr val="D7D7D7"/>
                       </a:solidFill>
                       <a:prstDash val="solid"/>
                       <a:round/>
@@ -3884,7 +3931,7 @@
                     </a:lnT>
                     <a:lnB w="9525" cap="flat" cmpd="sng" algn="ctr">
                       <a:solidFill>
-                        <a:srgbClr val="CBD5E1"/>
+                        <a:srgbClr val="D7D7D7"/>
                       </a:solidFill>
                       <a:prstDash val="solid"/>
                       <a:round/>
@@ -3918,7 +3965,7 @@
                   <a:tcPr marL="73152" marR="73152" marT="45720" marB="45720" anchor="ctr">
                     <a:lnL w="9525" cap="flat" cmpd="sng" algn="ctr">
                       <a:solidFill>
-                        <a:srgbClr val="CBD5E1"/>
+                        <a:srgbClr val="D7D7D7"/>
                       </a:solidFill>
                       <a:prstDash val="solid"/>
                       <a:round/>
@@ -3927,7 +3974,7 @@
                     </a:lnL>
                     <a:lnR w="9525" cap="flat" cmpd="sng" algn="ctr">
                       <a:solidFill>
-                        <a:srgbClr val="CBD5E1"/>
+                        <a:srgbClr val="D7D7D7"/>
                       </a:solidFill>
                       <a:prstDash val="solid"/>
                       <a:round/>
@@ -3936,7 +3983,7 @@
                     </a:lnR>
                     <a:lnT w="9525" cap="flat" cmpd="sng" algn="ctr">
                       <a:solidFill>
-                        <a:srgbClr val="CBD5E1"/>
+                        <a:srgbClr val="D7D7D7"/>
                       </a:solidFill>
                       <a:prstDash val="solid"/>
                       <a:round/>
@@ -3945,7 +3992,7 @@
                     </a:lnT>
                     <a:lnB w="9525" cap="flat" cmpd="sng" algn="ctr">
                       <a:solidFill>
-                        <a:srgbClr val="CBD5E1"/>
+                        <a:srgbClr val="D7D7D7"/>
                       </a:solidFill>
                       <a:prstDash val="solid"/>
                       <a:round/>
@@ -3981,7 +4028,7 @@
                   <a:tcPr marL="73152" marR="73152" marT="45720" marB="45720" anchor="ctr">
                     <a:lnL w="9525" cap="flat" cmpd="sng" algn="ctr">
                       <a:solidFill>
-                        <a:srgbClr val="CBD5E1"/>
+                        <a:srgbClr val="D7D7D7"/>
                       </a:solidFill>
                       <a:prstDash val="solid"/>
                       <a:round/>
@@ -3990,7 +4037,7 @@
                     </a:lnL>
                     <a:lnR w="9525" cap="flat" cmpd="sng" algn="ctr">
                       <a:solidFill>
-                        <a:srgbClr val="CBD5E1"/>
+                        <a:srgbClr val="D7D7D7"/>
                       </a:solidFill>
                       <a:prstDash val="solid"/>
                       <a:round/>
@@ -3999,7 +4046,7 @@
                     </a:lnR>
                     <a:lnT w="9525" cap="flat" cmpd="sng" algn="ctr">
                       <a:solidFill>
-                        <a:srgbClr val="CBD5E1"/>
+                        <a:srgbClr val="D7D7D7"/>
                       </a:solidFill>
                       <a:prstDash val="solid"/>
                       <a:round/>
@@ -4008,7 +4055,7 @@
                     </a:lnT>
                     <a:lnB w="9525" cap="flat" cmpd="sng" algn="ctr">
                       <a:solidFill>
-                        <a:srgbClr val="CBD5E1"/>
+                        <a:srgbClr val="D7D7D7"/>
                       </a:solidFill>
                       <a:prstDash val="solid"/>
                       <a:round/>
@@ -4042,7 +4089,7 @@
                   <a:tcPr marL="73152" marR="73152" marT="45720" marB="45720" anchor="ctr">
                     <a:lnL w="9525" cap="flat" cmpd="sng" algn="ctr">
                       <a:solidFill>
-                        <a:srgbClr val="CBD5E1"/>
+                        <a:srgbClr val="D7D7D7"/>
                       </a:solidFill>
                       <a:prstDash val="solid"/>
                       <a:round/>
@@ -4051,7 +4098,7 @@
                     </a:lnL>
                     <a:lnR w="9525" cap="flat" cmpd="sng" algn="ctr">
                       <a:solidFill>
-                        <a:srgbClr val="CBD5E1"/>
+                        <a:srgbClr val="D7D7D7"/>
                       </a:solidFill>
                       <a:prstDash val="solid"/>
                       <a:round/>
@@ -4060,7 +4107,7 @@
                     </a:lnR>
                     <a:lnT w="9525" cap="flat" cmpd="sng" algn="ctr">
                       <a:solidFill>
-                        <a:srgbClr val="CBD5E1"/>
+                        <a:srgbClr val="D7D7D7"/>
                       </a:solidFill>
                       <a:prstDash val="solid"/>
                       <a:round/>
@@ -4069,7 +4116,7 @@
                     </a:lnT>
                     <a:lnB w="9525" cap="flat" cmpd="sng" algn="ctr">
                       <a:solidFill>
-                        <a:srgbClr val="CBD5E1"/>
+                        <a:srgbClr val="D7D7D7"/>
                       </a:solidFill>
                       <a:prstDash val="solid"/>
                       <a:round/>
@@ -4103,7 +4150,7 @@
                   <a:tcPr marL="73152" marR="73152" marT="45720" marB="45720" anchor="ctr">
                     <a:lnL w="9525" cap="flat" cmpd="sng" algn="ctr">
                       <a:solidFill>
-                        <a:srgbClr val="CBD5E1"/>
+                        <a:srgbClr val="D7D7D7"/>
                       </a:solidFill>
                       <a:prstDash val="solid"/>
                       <a:round/>
@@ -4112,7 +4159,7 @@
                     </a:lnL>
                     <a:lnR w="9525" cap="flat" cmpd="sng" algn="ctr">
                       <a:solidFill>
-                        <a:srgbClr val="CBD5E1"/>
+                        <a:srgbClr val="D7D7D7"/>
                       </a:solidFill>
                       <a:prstDash val="solid"/>
                       <a:round/>
@@ -4121,7 +4168,7 @@
                     </a:lnR>
                     <a:lnT w="9525" cap="flat" cmpd="sng" algn="ctr">
                       <a:solidFill>
-                        <a:srgbClr val="CBD5E1"/>
+                        <a:srgbClr val="D7D7D7"/>
                       </a:solidFill>
                       <a:prstDash val="solid"/>
                       <a:round/>
@@ -4130,7 +4177,7 @@
                     </a:lnT>
                     <a:lnB w="9525" cap="flat" cmpd="sng" algn="ctr">
                       <a:solidFill>
-                        <a:srgbClr val="CBD5E1"/>
+                        <a:srgbClr val="D7D7D7"/>
                       </a:solidFill>
                       <a:prstDash val="solid"/>
                       <a:round/>
@@ -4164,7 +4211,7 @@
                   <a:tcPr marL="73152" marR="73152" marT="45720" marB="45720" anchor="ctr">
                     <a:lnL w="9525" cap="flat" cmpd="sng" algn="ctr">
                       <a:solidFill>
-                        <a:srgbClr val="CBD5E1"/>
+                        <a:srgbClr val="D7D7D7"/>
                       </a:solidFill>
                       <a:prstDash val="solid"/>
                       <a:round/>
@@ -4173,7 +4220,7 @@
                     </a:lnL>
                     <a:lnR w="9525" cap="flat" cmpd="sng" algn="ctr">
                       <a:solidFill>
-                        <a:srgbClr val="CBD5E1"/>
+                        <a:srgbClr val="D7D7D7"/>
                       </a:solidFill>
                       <a:prstDash val="solid"/>
                       <a:round/>
@@ -4182,7 +4229,7 @@
                     </a:lnR>
                     <a:lnT w="9525" cap="flat" cmpd="sng" algn="ctr">
                       <a:solidFill>
-                        <a:srgbClr val="CBD5E1"/>
+                        <a:srgbClr val="D7D7D7"/>
                       </a:solidFill>
                       <a:prstDash val="solid"/>
                       <a:round/>
@@ -4191,7 +4238,7 @@
                     </a:lnT>
                     <a:lnB w="9525" cap="flat" cmpd="sng" algn="ctr">
                       <a:solidFill>
-                        <a:srgbClr val="CBD5E1"/>
+                        <a:srgbClr val="D7D7D7"/>
                       </a:solidFill>
                       <a:prstDash val="solid"/>
                       <a:round/>
@@ -4225,7 +4272,7 @@
                   <a:tcPr marL="73152" marR="73152" marT="45720" marB="45720" anchor="ctr">
                     <a:lnL w="9525" cap="flat" cmpd="sng" algn="ctr">
                       <a:solidFill>
-                        <a:srgbClr val="CBD5E1"/>
+                        <a:srgbClr val="D7D7D7"/>
                       </a:solidFill>
                       <a:prstDash val="solid"/>
                       <a:round/>
@@ -4234,7 +4281,7 @@
                     </a:lnL>
                     <a:lnR w="9525" cap="flat" cmpd="sng" algn="ctr">
                       <a:solidFill>
-                        <a:srgbClr val="CBD5E1"/>
+                        <a:srgbClr val="D7D7D7"/>
                       </a:solidFill>
                       <a:prstDash val="solid"/>
                       <a:round/>
@@ -4243,7 +4290,7 @@
                     </a:lnR>
                     <a:lnT w="9525" cap="flat" cmpd="sng" algn="ctr">
                       <a:solidFill>
-                        <a:srgbClr val="CBD5E1"/>
+                        <a:srgbClr val="D7D7D7"/>
                       </a:solidFill>
                       <a:prstDash val="solid"/>
                       <a:round/>
@@ -4252,7 +4299,7 @@
                     </a:lnT>
                     <a:lnB w="9525" cap="flat" cmpd="sng" algn="ctr">
                       <a:solidFill>
-                        <a:srgbClr val="CBD5E1"/>
+                        <a:srgbClr val="D7D7D7"/>
                       </a:solidFill>
                       <a:prstDash val="solid"/>
                       <a:round/>
@@ -4286,7 +4333,7 @@
                   <a:tcPr marL="73152" marR="73152" marT="45720" marB="45720" anchor="ctr">
                     <a:lnL w="9525" cap="flat" cmpd="sng" algn="ctr">
                       <a:solidFill>
-                        <a:srgbClr val="CBD5E1"/>
+                        <a:srgbClr val="D7D7D7"/>
                       </a:solidFill>
                       <a:prstDash val="solid"/>
                       <a:round/>
@@ -4295,7 +4342,7 @@
                     </a:lnL>
                     <a:lnR w="9525" cap="flat" cmpd="sng" algn="ctr">
                       <a:solidFill>
-                        <a:srgbClr val="CBD5E1"/>
+                        <a:srgbClr val="D7D7D7"/>
                       </a:solidFill>
                       <a:prstDash val="solid"/>
                       <a:round/>
@@ -4304,7 +4351,7 @@
                     </a:lnR>
                     <a:lnT w="9525" cap="flat" cmpd="sng" algn="ctr">
                       <a:solidFill>
-                        <a:srgbClr val="CBD5E1"/>
+                        <a:srgbClr val="D7D7D7"/>
                       </a:solidFill>
                       <a:prstDash val="solid"/>
                       <a:round/>
@@ -4313,7 +4360,7 @@
                     </a:lnT>
                     <a:lnB w="9525" cap="flat" cmpd="sng" algn="ctr">
                       <a:solidFill>
-                        <a:srgbClr val="CBD5E1"/>
+                        <a:srgbClr val="D7D7D7"/>
                       </a:solidFill>
                       <a:prstDash val="solid"/>
                       <a:round/>
@@ -4321,7 +4368,7 @@
                       <a:tailEnd type="none" w="med" len="med"/>
                     </a:lnB>
                     <a:solidFill>
-                      <a:srgbClr val="E3F5F2"/>
+                      <a:srgbClr val="EAF3EA"/>
                     </a:solidFill>
                   </a:tcPr>
                 </a:tc>
@@ -4349,7 +4396,7 @@
                   <a:tcPr marL="73152" marR="73152" marT="45720" marB="45720" anchor="ctr">
                     <a:lnL w="9525" cap="flat" cmpd="sng" algn="ctr">
                       <a:solidFill>
-                        <a:srgbClr val="CBD5E1"/>
+                        <a:srgbClr val="D7D7D7"/>
                       </a:solidFill>
                       <a:prstDash val="solid"/>
                       <a:round/>
@@ -4358,7 +4405,7 @@
                     </a:lnL>
                     <a:lnR w="9525" cap="flat" cmpd="sng" algn="ctr">
                       <a:solidFill>
-                        <a:srgbClr val="CBD5E1"/>
+                        <a:srgbClr val="D7D7D7"/>
                       </a:solidFill>
                       <a:prstDash val="solid"/>
                       <a:round/>
@@ -4367,7 +4414,7 @@
                     </a:lnR>
                     <a:lnT w="9525" cap="flat" cmpd="sng" algn="ctr">
                       <a:solidFill>
-                        <a:srgbClr val="CBD5E1"/>
+                        <a:srgbClr val="D7D7D7"/>
                       </a:solidFill>
                       <a:prstDash val="solid"/>
                       <a:round/>
@@ -4376,7 +4423,7 @@
                     </a:lnT>
                     <a:lnB w="9525" cap="flat" cmpd="sng" algn="ctr">
                       <a:solidFill>
-                        <a:srgbClr val="CBD5E1"/>
+                        <a:srgbClr val="D7D7D7"/>
                       </a:solidFill>
                       <a:prstDash val="solid"/>
                       <a:round/>
@@ -4410,7 +4457,7 @@
                   <a:tcPr marL="73152" marR="73152" marT="45720" marB="45720" anchor="ctr">
                     <a:lnL w="9525" cap="flat" cmpd="sng" algn="ctr">
                       <a:solidFill>
-                        <a:srgbClr val="CBD5E1"/>
+                        <a:srgbClr val="D7D7D7"/>
                       </a:solidFill>
                       <a:prstDash val="solid"/>
                       <a:round/>
@@ -4419,7 +4466,7 @@
                     </a:lnL>
                     <a:lnR w="9525" cap="flat" cmpd="sng" algn="ctr">
                       <a:solidFill>
-                        <a:srgbClr val="CBD5E1"/>
+                        <a:srgbClr val="D7D7D7"/>
                       </a:solidFill>
                       <a:prstDash val="solid"/>
                       <a:round/>
@@ -4428,7 +4475,7 @@
                     </a:lnR>
                     <a:lnT w="9525" cap="flat" cmpd="sng" algn="ctr">
                       <a:solidFill>
-                        <a:srgbClr val="CBD5E1"/>
+                        <a:srgbClr val="D7D7D7"/>
                       </a:solidFill>
                       <a:prstDash val="solid"/>
                       <a:round/>
@@ -4437,7 +4484,7 @@
                     </a:lnT>
                     <a:lnB w="9525" cap="flat" cmpd="sng" algn="ctr">
                       <a:solidFill>
-                        <a:srgbClr val="CBD5E1"/>
+                        <a:srgbClr val="D7D7D7"/>
                       </a:solidFill>
                       <a:prstDash val="solid"/>
                       <a:round/>
@@ -4471,7 +4518,7 @@
                   <a:tcPr marL="73152" marR="73152" marT="45720" marB="45720" anchor="ctr">
                     <a:lnL w="9525" cap="flat" cmpd="sng" algn="ctr">
                       <a:solidFill>
-                        <a:srgbClr val="CBD5E1"/>
+                        <a:srgbClr val="D7D7D7"/>
                       </a:solidFill>
                       <a:prstDash val="solid"/>
                       <a:round/>
@@ -4480,7 +4527,7 @@
                     </a:lnL>
                     <a:lnR w="9525" cap="flat" cmpd="sng" algn="ctr">
                       <a:solidFill>
-                        <a:srgbClr val="CBD5E1"/>
+                        <a:srgbClr val="D7D7D7"/>
                       </a:solidFill>
                       <a:prstDash val="solid"/>
                       <a:round/>
@@ -4489,7 +4536,7 @@
                     </a:lnR>
                     <a:lnT w="9525" cap="flat" cmpd="sng" algn="ctr">
                       <a:solidFill>
-                        <a:srgbClr val="CBD5E1"/>
+                        <a:srgbClr val="D7D7D7"/>
                       </a:solidFill>
                       <a:prstDash val="solid"/>
                       <a:round/>
@@ -4498,7 +4545,7 @@
                     </a:lnT>
                     <a:lnB w="9525" cap="flat" cmpd="sng" algn="ctr">
                       <a:solidFill>
-                        <a:srgbClr val="CBD5E1"/>
+                        <a:srgbClr val="D7D7D7"/>
                       </a:solidFill>
                       <a:prstDash val="solid"/>
                       <a:round/>
@@ -4532,7 +4579,7 @@
                   <a:tcPr marL="73152" marR="73152" marT="45720" marB="45720" anchor="ctr">
                     <a:lnL w="9525" cap="flat" cmpd="sng" algn="ctr">
                       <a:solidFill>
-                        <a:srgbClr val="CBD5E1"/>
+                        <a:srgbClr val="D7D7D7"/>
                       </a:solidFill>
                       <a:prstDash val="solid"/>
                       <a:round/>
@@ -4541,7 +4588,7 @@
                     </a:lnL>
                     <a:lnR w="9525" cap="flat" cmpd="sng" algn="ctr">
                       <a:solidFill>
-                        <a:srgbClr val="CBD5E1"/>
+                        <a:srgbClr val="D7D7D7"/>
                       </a:solidFill>
                       <a:prstDash val="solid"/>
                       <a:round/>
@@ -4550,7 +4597,7 @@
                     </a:lnR>
                     <a:lnT w="9525" cap="flat" cmpd="sng" algn="ctr">
                       <a:solidFill>
-                        <a:srgbClr val="CBD5E1"/>
+                        <a:srgbClr val="D7D7D7"/>
                       </a:solidFill>
                       <a:prstDash val="solid"/>
                       <a:round/>
@@ -4559,7 +4606,7 @@
                     </a:lnT>
                     <a:lnB w="9525" cap="flat" cmpd="sng" algn="ctr">
                       <a:solidFill>
-                        <a:srgbClr val="CBD5E1"/>
+                        <a:srgbClr val="D7D7D7"/>
                       </a:solidFill>
                       <a:prstDash val="solid"/>
                       <a:round/>
@@ -4593,7 +4640,7 @@
                   <a:tcPr marL="73152" marR="73152" marT="45720" marB="45720" anchor="ctr">
                     <a:lnL w="9525" cap="flat" cmpd="sng" algn="ctr">
                       <a:solidFill>
-                        <a:srgbClr val="CBD5E1"/>
+                        <a:srgbClr val="D7D7D7"/>
                       </a:solidFill>
                       <a:prstDash val="solid"/>
                       <a:round/>
@@ -4602,7 +4649,7 @@
                     </a:lnL>
                     <a:lnR w="9525" cap="flat" cmpd="sng" algn="ctr">
                       <a:solidFill>
-                        <a:srgbClr val="CBD5E1"/>
+                        <a:srgbClr val="D7D7D7"/>
                       </a:solidFill>
                       <a:prstDash val="solid"/>
                       <a:round/>
@@ -4611,7 +4658,7 @@
                     </a:lnR>
                     <a:lnT w="9525" cap="flat" cmpd="sng" algn="ctr">
                       <a:solidFill>
-                        <a:srgbClr val="CBD5E1"/>
+                        <a:srgbClr val="D7D7D7"/>
                       </a:solidFill>
                       <a:prstDash val="solid"/>
                       <a:round/>
@@ -4620,7 +4667,7 @@
                     </a:lnT>
                     <a:lnB w="9525" cap="flat" cmpd="sng" algn="ctr">
                       <a:solidFill>
-                        <a:srgbClr val="CBD5E1"/>
+                        <a:srgbClr val="D7D7D7"/>
                       </a:solidFill>
                       <a:prstDash val="solid"/>
                       <a:round/>
@@ -4654,7 +4701,7 @@
                   <a:tcPr marL="73152" marR="73152" marT="45720" marB="45720" anchor="ctr">
                     <a:lnL w="9525" cap="flat" cmpd="sng" algn="ctr">
                       <a:solidFill>
-                        <a:srgbClr val="CBD5E1"/>
+                        <a:srgbClr val="D7D7D7"/>
                       </a:solidFill>
                       <a:prstDash val="solid"/>
                       <a:round/>
@@ -4663,7 +4710,7 @@
                     </a:lnL>
                     <a:lnR w="9525" cap="flat" cmpd="sng" algn="ctr">
                       <a:solidFill>
-                        <a:srgbClr val="CBD5E1"/>
+                        <a:srgbClr val="D7D7D7"/>
                       </a:solidFill>
                       <a:prstDash val="solid"/>
                       <a:round/>
@@ -4672,7 +4719,7 @@
                     </a:lnR>
                     <a:lnT w="9525" cap="flat" cmpd="sng" algn="ctr">
                       <a:solidFill>
-                        <a:srgbClr val="CBD5E1"/>
+                        <a:srgbClr val="D7D7D7"/>
                       </a:solidFill>
                       <a:prstDash val="solid"/>
                       <a:round/>
@@ -4681,7 +4728,7 @@
                     </a:lnT>
                     <a:lnB w="9525" cap="flat" cmpd="sng" algn="ctr">
                       <a:solidFill>
-                        <a:srgbClr val="CBD5E1"/>
+                        <a:srgbClr val="D7D7D7"/>
                       </a:solidFill>
                       <a:prstDash val="solid"/>
                       <a:round/>
@@ -4689,7 +4736,7 @@
                       <a:tailEnd type="none" w="med" len="med"/>
                     </a:lnB>
                     <a:solidFill>
-                      <a:srgbClr val="E3F5F2"/>
+                      <a:srgbClr val="EAF3EA"/>
                     </a:solidFill>
                   </a:tcPr>
                 </a:tc>
@@ -4717,7 +4764,7 @@
                   <a:tcPr marL="73152" marR="73152" marT="45720" marB="45720" anchor="ctr">
                     <a:lnL w="9525" cap="flat" cmpd="sng" algn="ctr">
                       <a:solidFill>
-                        <a:srgbClr val="CBD5E1"/>
+                        <a:srgbClr val="D7D7D7"/>
                       </a:solidFill>
                       <a:prstDash val="solid"/>
                       <a:round/>
@@ -4726,7 +4773,7 @@
                     </a:lnL>
                     <a:lnR w="9525" cap="flat" cmpd="sng" algn="ctr">
                       <a:solidFill>
-                        <a:srgbClr val="CBD5E1"/>
+                        <a:srgbClr val="D7D7D7"/>
                       </a:solidFill>
                       <a:prstDash val="solid"/>
                       <a:round/>
@@ -4735,7 +4782,7 @@
                     </a:lnR>
                     <a:lnT w="9525" cap="flat" cmpd="sng" algn="ctr">
                       <a:solidFill>
-                        <a:srgbClr val="CBD5E1"/>
+                        <a:srgbClr val="D7D7D7"/>
                       </a:solidFill>
                       <a:prstDash val="solid"/>
                       <a:round/>
@@ -4744,7 +4791,7 @@
                     </a:lnT>
                     <a:lnB w="9525" cap="flat" cmpd="sng" algn="ctr">
                       <a:solidFill>
-                        <a:srgbClr val="CBD5E1"/>
+                        <a:srgbClr val="D7D7D7"/>
                       </a:solidFill>
                       <a:prstDash val="solid"/>
                       <a:round/>
@@ -4778,7 +4825,7 @@
                   <a:tcPr marL="73152" marR="73152" marT="45720" marB="45720" anchor="ctr">
                     <a:lnL w="9525" cap="flat" cmpd="sng" algn="ctr">
                       <a:solidFill>
-                        <a:srgbClr val="CBD5E1"/>
+                        <a:srgbClr val="D7D7D7"/>
                       </a:solidFill>
                       <a:prstDash val="solid"/>
                       <a:round/>
@@ -4787,7 +4834,7 @@
                     </a:lnL>
                     <a:lnR w="9525" cap="flat" cmpd="sng" algn="ctr">
                       <a:solidFill>
-                        <a:srgbClr val="CBD5E1"/>
+                        <a:srgbClr val="D7D7D7"/>
                       </a:solidFill>
                       <a:prstDash val="solid"/>
                       <a:round/>
@@ -4796,7 +4843,7 @@
                     </a:lnR>
                     <a:lnT w="9525" cap="flat" cmpd="sng" algn="ctr">
                       <a:solidFill>
-                        <a:srgbClr val="CBD5E1"/>
+                        <a:srgbClr val="D7D7D7"/>
                       </a:solidFill>
                       <a:prstDash val="solid"/>
                       <a:round/>
@@ -4805,7 +4852,7 @@
                     </a:lnT>
                     <a:lnB w="9525" cap="flat" cmpd="sng" algn="ctr">
                       <a:solidFill>
-                        <a:srgbClr val="CBD5E1"/>
+                        <a:srgbClr val="D7D7D7"/>
                       </a:solidFill>
                       <a:prstDash val="solid"/>
                       <a:round/>
@@ -4839,7 +4886,7 @@
                   <a:tcPr marL="73152" marR="73152" marT="45720" marB="45720" anchor="ctr">
                     <a:lnL w="9525" cap="flat" cmpd="sng" algn="ctr">
                       <a:solidFill>
-                        <a:srgbClr val="CBD5E1"/>
+                        <a:srgbClr val="D7D7D7"/>
                       </a:solidFill>
                       <a:prstDash val="solid"/>
                       <a:round/>
@@ -4848,7 +4895,7 @@
                     </a:lnL>
                     <a:lnR w="9525" cap="flat" cmpd="sng" algn="ctr">
                       <a:solidFill>
-                        <a:srgbClr val="CBD5E1"/>
+                        <a:srgbClr val="D7D7D7"/>
                       </a:solidFill>
                       <a:prstDash val="solid"/>
                       <a:round/>
@@ -4857,7 +4904,7 @@
                     </a:lnR>
                     <a:lnT w="9525" cap="flat" cmpd="sng" algn="ctr">
                       <a:solidFill>
-                        <a:srgbClr val="CBD5E1"/>
+                        <a:srgbClr val="D7D7D7"/>
                       </a:solidFill>
                       <a:prstDash val="solid"/>
                       <a:round/>
@@ -4866,7 +4913,7 @@
                     </a:lnT>
                     <a:lnB w="9525" cap="flat" cmpd="sng" algn="ctr">
                       <a:solidFill>
-                        <a:srgbClr val="CBD5E1"/>
+                        <a:srgbClr val="D7D7D7"/>
                       </a:solidFill>
                       <a:prstDash val="solid"/>
                       <a:round/>
@@ -4900,7 +4947,7 @@
                   <a:tcPr marL="73152" marR="73152" marT="45720" marB="45720" anchor="ctr">
                     <a:lnL w="9525" cap="flat" cmpd="sng" algn="ctr">
                       <a:solidFill>
-                        <a:srgbClr val="CBD5E1"/>
+                        <a:srgbClr val="D7D7D7"/>
                       </a:solidFill>
                       <a:prstDash val="solid"/>
                       <a:round/>
@@ -4909,7 +4956,7 @@
                     </a:lnL>
                     <a:lnR w="9525" cap="flat" cmpd="sng" algn="ctr">
                       <a:solidFill>
-                        <a:srgbClr val="CBD5E1"/>
+                        <a:srgbClr val="D7D7D7"/>
                       </a:solidFill>
                       <a:prstDash val="solid"/>
                       <a:round/>
@@ -4918,7 +4965,7 @@
                     </a:lnR>
                     <a:lnT w="9525" cap="flat" cmpd="sng" algn="ctr">
                       <a:solidFill>
-                        <a:srgbClr val="CBD5E1"/>
+                        <a:srgbClr val="D7D7D7"/>
                       </a:solidFill>
                       <a:prstDash val="solid"/>
                       <a:round/>
@@ -4927,7 +4974,7 @@
                     </a:lnT>
                     <a:lnB w="9525" cap="flat" cmpd="sng" algn="ctr">
                       <a:solidFill>
-                        <a:srgbClr val="CBD5E1"/>
+                        <a:srgbClr val="D7D7D7"/>
                       </a:solidFill>
                       <a:prstDash val="solid"/>
                       <a:round/>
@@ -4961,7 +5008,7 @@
                   <a:tcPr marL="73152" marR="73152" marT="45720" marB="45720" anchor="ctr">
                     <a:lnL w="9525" cap="flat" cmpd="sng" algn="ctr">
                       <a:solidFill>
-                        <a:srgbClr val="CBD5E1"/>
+                        <a:srgbClr val="D7D7D7"/>
                       </a:solidFill>
                       <a:prstDash val="solid"/>
                       <a:round/>
@@ -4970,7 +5017,7 @@
                     </a:lnL>
                     <a:lnR w="9525" cap="flat" cmpd="sng" algn="ctr">
                       <a:solidFill>
-                        <a:srgbClr val="CBD5E1"/>
+                        <a:srgbClr val="D7D7D7"/>
                       </a:solidFill>
                       <a:prstDash val="solid"/>
                       <a:round/>
@@ -4979,7 +5026,7 @@
                     </a:lnR>
                     <a:lnT w="9525" cap="flat" cmpd="sng" algn="ctr">
                       <a:solidFill>
-                        <a:srgbClr val="CBD5E1"/>
+                        <a:srgbClr val="D7D7D7"/>
                       </a:solidFill>
                       <a:prstDash val="solid"/>
                       <a:round/>
@@ -4988,7 +5035,7 @@
                     </a:lnT>
                     <a:lnB w="9525" cap="flat" cmpd="sng" algn="ctr">
                       <a:solidFill>
-                        <a:srgbClr val="CBD5E1"/>
+                        <a:srgbClr val="D7D7D7"/>
                       </a:solidFill>
                       <a:prstDash val="solid"/>
                       <a:round/>
@@ -5022,7 +5069,7 @@
                   <a:tcPr marL="73152" marR="73152" marT="45720" marB="45720" anchor="ctr">
                     <a:lnL w="9525" cap="flat" cmpd="sng" algn="ctr">
                       <a:solidFill>
-                        <a:srgbClr val="CBD5E1"/>
+                        <a:srgbClr val="D7D7D7"/>
                       </a:solidFill>
                       <a:prstDash val="solid"/>
                       <a:round/>
@@ -5031,7 +5078,7 @@
                     </a:lnL>
                     <a:lnR w="9525" cap="flat" cmpd="sng" algn="ctr">
                       <a:solidFill>
-                        <a:srgbClr val="CBD5E1"/>
+                        <a:srgbClr val="D7D7D7"/>
                       </a:solidFill>
                       <a:prstDash val="solid"/>
                       <a:round/>
@@ -5040,7 +5087,7 @@
                     </a:lnR>
                     <a:lnT w="9525" cap="flat" cmpd="sng" algn="ctr">
                       <a:solidFill>
-                        <a:srgbClr val="CBD5E1"/>
+                        <a:srgbClr val="D7D7D7"/>
                       </a:solidFill>
                       <a:prstDash val="solid"/>
                       <a:round/>
@@ -5049,7 +5096,7 @@
                     </a:lnT>
                     <a:lnB w="9525" cap="flat" cmpd="sng" algn="ctr">
                       <a:solidFill>
-                        <a:srgbClr val="CBD5E1"/>
+                        <a:srgbClr val="D7D7D7"/>
                       </a:solidFill>
                       <a:prstDash val="solid"/>
                       <a:round/>
@@ -5057,7 +5104,7 @@
                       <a:tailEnd type="none" w="med" len="med"/>
                     </a:lnB>
                     <a:solidFill>
-                      <a:srgbClr val="E3F5F2"/>
+                      <a:srgbClr val="EAF3EA"/>
                     </a:solidFill>
                   </a:tcPr>
                 </a:tc>
@@ -5085,7 +5132,7 @@
                   <a:tcPr marL="73152" marR="73152" marT="45720" marB="45720" anchor="ctr">
                     <a:lnL w="9525" cap="flat" cmpd="sng" algn="ctr">
                       <a:solidFill>
-                        <a:srgbClr val="CBD5E1"/>
+                        <a:srgbClr val="D7D7D7"/>
                       </a:solidFill>
                       <a:prstDash val="solid"/>
                       <a:round/>
@@ -5094,7 +5141,7 @@
                     </a:lnL>
                     <a:lnR w="9525" cap="flat" cmpd="sng" algn="ctr">
                       <a:solidFill>
-                        <a:srgbClr val="CBD5E1"/>
+                        <a:srgbClr val="D7D7D7"/>
                       </a:solidFill>
                       <a:prstDash val="solid"/>
                       <a:round/>
@@ -5103,7 +5150,7 @@
                     </a:lnR>
                     <a:lnT w="9525" cap="flat" cmpd="sng" algn="ctr">
                       <a:solidFill>
-                        <a:srgbClr val="CBD5E1"/>
+                        <a:srgbClr val="D7D7D7"/>
                       </a:solidFill>
                       <a:prstDash val="solid"/>
                       <a:round/>
@@ -5112,7 +5159,7 @@
                     </a:lnT>
                     <a:lnB w="9525" cap="flat" cmpd="sng" algn="ctr">
                       <a:solidFill>
-                        <a:srgbClr val="CBD5E1"/>
+                        <a:srgbClr val="D7D7D7"/>
                       </a:solidFill>
                       <a:prstDash val="solid"/>
                       <a:round/>
@@ -5146,7 +5193,7 @@
                   <a:tcPr marL="73152" marR="73152" marT="45720" marB="45720" anchor="ctr">
                     <a:lnL w="9525" cap="flat" cmpd="sng" algn="ctr">
                       <a:solidFill>
-                        <a:srgbClr val="CBD5E1"/>
+                        <a:srgbClr val="D7D7D7"/>
                       </a:solidFill>
                       <a:prstDash val="solid"/>
                       <a:round/>
@@ -5155,7 +5202,7 @@
                     </a:lnL>
                     <a:lnR w="9525" cap="flat" cmpd="sng" algn="ctr">
                       <a:solidFill>
-                        <a:srgbClr val="CBD5E1"/>
+                        <a:srgbClr val="D7D7D7"/>
                       </a:solidFill>
                       <a:prstDash val="solid"/>
                       <a:round/>
@@ -5164,7 +5211,7 @@
                     </a:lnR>
                     <a:lnT w="9525" cap="flat" cmpd="sng" algn="ctr">
                       <a:solidFill>
-                        <a:srgbClr val="CBD5E1"/>
+                        <a:srgbClr val="D7D7D7"/>
                       </a:solidFill>
                       <a:prstDash val="solid"/>
                       <a:round/>
@@ -5173,7 +5220,7 @@
                     </a:lnT>
                     <a:lnB w="9525" cap="flat" cmpd="sng" algn="ctr">
                       <a:solidFill>
-                        <a:srgbClr val="CBD5E1"/>
+                        <a:srgbClr val="D7D7D7"/>
                       </a:solidFill>
                       <a:prstDash val="solid"/>
                       <a:round/>
@@ -5207,7 +5254,7 @@
                   <a:tcPr marL="73152" marR="73152" marT="45720" marB="45720" anchor="ctr">
                     <a:lnL w="9525" cap="flat" cmpd="sng" algn="ctr">
                       <a:solidFill>
-                        <a:srgbClr val="CBD5E1"/>
+                        <a:srgbClr val="D7D7D7"/>
                       </a:solidFill>
                       <a:prstDash val="solid"/>
                       <a:round/>
@@ -5216,7 +5263,7 @@
                     </a:lnL>
                     <a:lnR w="9525" cap="flat" cmpd="sng" algn="ctr">
                       <a:solidFill>
-                        <a:srgbClr val="CBD5E1"/>
+                        <a:srgbClr val="D7D7D7"/>
                       </a:solidFill>
                       <a:prstDash val="solid"/>
                       <a:round/>
@@ -5225,7 +5272,7 @@
                     </a:lnR>
                     <a:lnT w="9525" cap="flat" cmpd="sng" algn="ctr">
                       <a:solidFill>
-                        <a:srgbClr val="CBD5E1"/>
+                        <a:srgbClr val="D7D7D7"/>
                       </a:solidFill>
                       <a:prstDash val="solid"/>
                       <a:round/>
@@ -5234,7 +5281,7 @@
                     </a:lnT>
                     <a:lnB w="9525" cap="flat" cmpd="sng" algn="ctr">
                       <a:solidFill>
-                        <a:srgbClr val="CBD5E1"/>
+                        <a:srgbClr val="D7D7D7"/>
                       </a:solidFill>
                       <a:prstDash val="solid"/>
                       <a:round/>
@@ -5268,7 +5315,7 @@
                   <a:tcPr marL="73152" marR="73152" marT="45720" marB="45720" anchor="ctr">
                     <a:lnL w="9525" cap="flat" cmpd="sng" algn="ctr">
                       <a:solidFill>
-                        <a:srgbClr val="CBD5E1"/>
+                        <a:srgbClr val="D7D7D7"/>
                       </a:solidFill>
                       <a:prstDash val="solid"/>
                       <a:round/>
@@ -5277,7 +5324,7 @@
                     </a:lnL>
                     <a:lnR w="9525" cap="flat" cmpd="sng" algn="ctr">
                       <a:solidFill>
-                        <a:srgbClr val="CBD5E1"/>
+                        <a:srgbClr val="D7D7D7"/>
                       </a:solidFill>
                       <a:prstDash val="solid"/>
                       <a:round/>
@@ -5286,7 +5333,7 @@
                     </a:lnR>
                     <a:lnT w="9525" cap="flat" cmpd="sng" algn="ctr">
                       <a:solidFill>
-                        <a:srgbClr val="CBD5E1"/>
+                        <a:srgbClr val="D7D7D7"/>
                       </a:solidFill>
                       <a:prstDash val="solid"/>
                       <a:round/>
@@ -5295,7 +5342,7 @@
                     </a:lnT>
                     <a:lnB w="9525" cap="flat" cmpd="sng" algn="ctr">
                       <a:solidFill>
-                        <a:srgbClr val="CBD5E1"/>
+                        <a:srgbClr val="D7D7D7"/>
                       </a:solidFill>
                       <a:prstDash val="solid"/>
                       <a:round/>
@@ -5329,7 +5376,7 @@
                   <a:tcPr marL="73152" marR="73152" marT="45720" marB="45720" anchor="ctr">
                     <a:lnL w="9525" cap="flat" cmpd="sng" algn="ctr">
                       <a:solidFill>
-                        <a:srgbClr val="CBD5E1"/>
+                        <a:srgbClr val="D7D7D7"/>
                       </a:solidFill>
                       <a:prstDash val="solid"/>
                       <a:round/>
@@ -5338,7 +5385,7 @@
                     </a:lnL>
                     <a:lnR w="9525" cap="flat" cmpd="sng" algn="ctr">
                       <a:solidFill>
-                        <a:srgbClr val="CBD5E1"/>
+                        <a:srgbClr val="D7D7D7"/>
                       </a:solidFill>
                       <a:prstDash val="solid"/>
                       <a:round/>
@@ -5347,7 +5394,7 @@
                     </a:lnR>
                     <a:lnT w="9525" cap="flat" cmpd="sng" algn="ctr">
                       <a:solidFill>
-                        <a:srgbClr val="CBD5E1"/>
+                        <a:srgbClr val="D7D7D7"/>
                       </a:solidFill>
                       <a:prstDash val="solid"/>
                       <a:round/>
@@ -5356,7 +5403,7 @@
                     </a:lnT>
                     <a:lnB w="9525" cap="flat" cmpd="sng" algn="ctr">
                       <a:solidFill>
-                        <a:srgbClr val="CBD5E1"/>
+                        <a:srgbClr val="D7D7D7"/>
                       </a:solidFill>
                       <a:prstDash val="solid"/>
                       <a:round/>
@@ -5390,7 +5437,7 @@
                   <a:tcPr marL="73152" marR="73152" marT="45720" marB="45720" anchor="ctr">
                     <a:lnL w="9525" cap="flat" cmpd="sng" algn="ctr">
                       <a:solidFill>
-                        <a:srgbClr val="CBD5E1"/>
+                        <a:srgbClr val="D7D7D7"/>
                       </a:solidFill>
                       <a:prstDash val="solid"/>
                       <a:round/>
@@ -5399,7 +5446,7 @@
                     </a:lnL>
                     <a:lnR w="9525" cap="flat" cmpd="sng" algn="ctr">
                       <a:solidFill>
-                        <a:srgbClr val="CBD5E1"/>
+                        <a:srgbClr val="D7D7D7"/>
                       </a:solidFill>
                       <a:prstDash val="solid"/>
                       <a:round/>
@@ -5408,7 +5455,7 @@
                     </a:lnR>
                     <a:lnT w="9525" cap="flat" cmpd="sng" algn="ctr">
                       <a:solidFill>
-                        <a:srgbClr val="CBD5E1"/>
+                        <a:srgbClr val="D7D7D7"/>
                       </a:solidFill>
                       <a:prstDash val="solid"/>
                       <a:round/>
@@ -5417,7 +5464,7 @@
                     </a:lnT>
                     <a:lnB w="9525" cap="flat" cmpd="sng" algn="ctr">
                       <a:solidFill>
-                        <a:srgbClr val="CBD5E1"/>
+                        <a:srgbClr val="D7D7D7"/>
                       </a:solidFill>
                       <a:prstDash val="solid"/>
                       <a:round/>
@@ -5425,7 +5472,7 @@
                       <a:tailEnd type="none" w="med" len="med"/>
                     </a:lnB>
                     <a:solidFill>
-                      <a:srgbClr val="E3F5F2"/>
+                      <a:srgbClr val="EAF3EA"/>
                     </a:solidFill>
                   </a:tcPr>
                 </a:tc>
@@ -5453,7 +5500,7 @@
                   <a:tcPr marL="73152" marR="73152" marT="45720" marB="45720" anchor="ctr">
                     <a:lnL w="9525" cap="flat" cmpd="sng" algn="ctr">
                       <a:solidFill>
-                        <a:srgbClr val="CBD5E1"/>
+                        <a:srgbClr val="D7D7D7"/>
                       </a:solidFill>
                       <a:prstDash val="solid"/>
                       <a:round/>
@@ -5462,7 +5509,7 @@
                     </a:lnL>
                     <a:lnR w="9525" cap="flat" cmpd="sng" algn="ctr">
                       <a:solidFill>
-                        <a:srgbClr val="CBD5E1"/>
+                        <a:srgbClr val="D7D7D7"/>
                       </a:solidFill>
                       <a:prstDash val="solid"/>
                       <a:round/>
@@ -5471,7 +5518,7 @@
                     </a:lnR>
                     <a:lnT w="9525" cap="flat" cmpd="sng" algn="ctr">
                       <a:solidFill>
-                        <a:srgbClr val="CBD5E1"/>
+                        <a:srgbClr val="D7D7D7"/>
                       </a:solidFill>
                       <a:prstDash val="solid"/>
                       <a:round/>
@@ -5480,7 +5527,7 @@
                     </a:lnT>
                     <a:lnB w="9525" cap="flat" cmpd="sng" algn="ctr">
                       <a:solidFill>
-                        <a:srgbClr val="CBD5E1"/>
+                        <a:srgbClr val="D7D7D7"/>
                       </a:solidFill>
                       <a:prstDash val="solid"/>
                       <a:round/>
@@ -5514,7 +5561,7 @@
                   <a:tcPr marL="73152" marR="73152" marT="45720" marB="45720" anchor="ctr">
                     <a:lnL w="9525" cap="flat" cmpd="sng" algn="ctr">
                       <a:solidFill>
-                        <a:srgbClr val="CBD5E1"/>
+                        <a:srgbClr val="D7D7D7"/>
                       </a:solidFill>
                       <a:prstDash val="solid"/>
                       <a:round/>
@@ -5523,7 +5570,7 @@
                     </a:lnL>
                     <a:lnR w="9525" cap="flat" cmpd="sng" algn="ctr">
                       <a:solidFill>
-                        <a:srgbClr val="CBD5E1"/>
+                        <a:srgbClr val="D7D7D7"/>
                       </a:solidFill>
                       <a:prstDash val="solid"/>
                       <a:round/>
@@ -5532,7 +5579,7 @@
                     </a:lnR>
                     <a:lnT w="9525" cap="flat" cmpd="sng" algn="ctr">
                       <a:solidFill>
-                        <a:srgbClr val="CBD5E1"/>
+                        <a:srgbClr val="D7D7D7"/>
                       </a:solidFill>
                       <a:prstDash val="solid"/>
                       <a:round/>
@@ -5541,7 +5588,7 @@
                     </a:lnT>
                     <a:lnB w="9525" cap="flat" cmpd="sng" algn="ctr">
                       <a:solidFill>
-                        <a:srgbClr val="CBD5E1"/>
+                        <a:srgbClr val="D7D7D7"/>
                       </a:solidFill>
                       <a:prstDash val="solid"/>
                       <a:round/>
@@ -5575,7 +5622,7 @@
                   <a:tcPr marL="73152" marR="73152" marT="45720" marB="45720" anchor="ctr">
                     <a:lnL w="9525" cap="flat" cmpd="sng" algn="ctr">
                       <a:solidFill>
-                        <a:srgbClr val="CBD5E1"/>
+                        <a:srgbClr val="D7D7D7"/>
                       </a:solidFill>
                       <a:prstDash val="solid"/>
                       <a:round/>
@@ -5584,7 +5631,7 @@
                     </a:lnL>
                     <a:lnR w="9525" cap="flat" cmpd="sng" algn="ctr">
                       <a:solidFill>
-                        <a:srgbClr val="CBD5E1"/>
+                        <a:srgbClr val="D7D7D7"/>
                       </a:solidFill>
                       <a:prstDash val="solid"/>
                       <a:round/>
@@ -5593,7 +5640,7 @@
                     </a:lnR>
                     <a:lnT w="9525" cap="flat" cmpd="sng" algn="ctr">
                       <a:solidFill>
-                        <a:srgbClr val="CBD5E1"/>
+                        <a:srgbClr val="D7D7D7"/>
                       </a:solidFill>
                       <a:prstDash val="solid"/>
                       <a:round/>
@@ -5602,7 +5649,7 @@
                     </a:lnT>
                     <a:lnB w="9525" cap="flat" cmpd="sng" algn="ctr">
                       <a:solidFill>
-                        <a:srgbClr val="CBD5E1"/>
+                        <a:srgbClr val="D7D7D7"/>
                       </a:solidFill>
                       <a:prstDash val="solid"/>
                       <a:round/>
@@ -5636,7 +5683,7 @@
                   <a:tcPr marL="73152" marR="73152" marT="45720" marB="45720" anchor="ctr">
                     <a:lnL w="9525" cap="flat" cmpd="sng" algn="ctr">
                       <a:solidFill>
-                        <a:srgbClr val="CBD5E1"/>
+                        <a:srgbClr val="D7D7D7"/>
                       </a:solidFill>
                       <a:prstDash val="solid"/>
                       <a:round/>
@@ -5645,7 +5692,7 @@
                     </a:lnL>
                     <a:lnR w="9525" cap="flat" cmpd="sng" algn="ctr">
                       <a:solidFill>
-                        <a:srgbClr val="CBD5E1"/>
+                        <a:srgbClr val="D7D7D7"/>
                       </a:solidFill>
                       <a:prstDash val="solid"/>
                       <a:round/>
@@ -5654,7 +5701,7 @@
                     </a:lnR>
                     <a:lnT w="9525" cap="flat" cmpd="sng" algn="ctr">
                       <a:solidFill>
-                        <a:srgbClr val="CBD5E1"/>
+                        <a:srgbClr val="D7D7D7"/>
                       </a:solidFill>
                       <a:prstDash val="solid"/>
                       <a:round/>
@@ -5663,7 +5710,7 @@
                     </a:lnT>
                     <a:lnB w="9525" cap="flat" cmpd="sng" algn="ctr">
                       <a:solidFill>
-                        <a:srgbClr val="CBD5E1"/>
+                        <a:srgbClr val="D7D7D7"/>
                       </a:solidFill>
                       <a:prstDash val="solid"/>
                       <a:round/>
@@ -5697,7 +5744,7 @@
                   <a:tcPr marL="73152" marR="73152" marT="45720" marB="45720" anchor="ctr">
                     <a:lnL w="9525" cap="flat" cmpd="sng" algn="ctr">
                       <a:solidFill>
-                        <a:srgbClr val="CBD5E1"/>
+                        <a:srgbClr val="D7D7D7"/>
                       </a:solidFill>
                       <a:prstDash val="solid"/>
                       <a:round/>
@@ -5706,7 +5753,7 @@
                     </a:lnL>
                     <a:lnR w="9525" cap="flat" cmpd="sng" algn="ctr">
                       <a:solidFill>
-                        <a:srgbClr val="CBD5E1"/>
+                        <a:srgbClr val="D7D7D7"/>
                       </a:solidFill>
                       <a:prstDash val="solid"/>
                       <a:round/>
@@ -5715,7 +5762,7 @@
                     </a:lnR>
                     <a:lnT w="9525" cap="flat" cmpd="sng" algn="ctr">
                       <a:solidFill>
-                        <a:srgbClr val="CBD5E1"/>
+                        <a:srgbClr val="D7D7D7"/>
                       </a:solidFill>
                       <a:prstDash val="solid"/>
                       <a:round/>
@@ -5724,7 +5771,7 @@
                     </a:lnT>
                     <a:lnB w="9525" cap="flat" cmpd="sng" algn="ctr">
                       <a:solidFill>
-                        <a:srgbClr val="CBD5E1"/>
+                        <a:srgbClr val="D7D7D7"/>
                       </a:solidFill>
                       <a:prstDash val="solid"/>
                       <a:round/>
@@ -5758,7 +5805,7 @@
                   <a:tcPr marL="73152" marR="73152" marT="45720" marB="45720" anchor="ctr">
                     <a:lnL w="9525" cap="flat" cmpd="sng" algn="ctr">
                       <a:solidFill>
-                        <a:srgbClr val="CBD5E1"/>
+                        <a:srgbClr val="D7D7D7"/>
                       </a:solidFill>
                       <a:prstDash val="solid"/>
                       <a:round/>
@@ -5767,7 +5814,7 @@
                     </a:lnL>
                     <a:lnR w="9525" cap="flat" cmpd="sng" algn="ctr">
                       <a:solidFill>
-                        <a:srgbClr val="CBD5E1"/>
+                        <a:srgbClr val="D7D7D7"/>
                       </a:solidFill>
                       <a:prstDash val="solid"/>
                       <a:round/>
@@ -5776,7 +5823,7 @@
                     </a:lnR>
                     <a:lnT w="9525" cap="flat" cmpd="sng" algn="ctr">
                       <a:solidFill>
-                        <a:srgbClr val="CBD5E1"/>
+                        <a:srgbClr val="D7D7D7"/>
                       </a:solidFill>
                       <a:prstDash val="solid"/>
                       <a:round/>
@@ -5785,7 +5832,7 @@
                     </a:lnT>
                     <a:lnB w="9525" cap="flat" cmpd="sng" algn="ctr">
                       <a:solidFill>
-                        <a:srgbClr val="CBD5E1"/>
+                        <a:srgbClr val="D7D7D7"/>
                       </a:solidFill>
                       <a:prstDash val="solid"/>
                       <a:round/>
@@ -5793,7 +5840,7 @@
                       <a:tailEnd type="none" w="med" len="med"/>
                     </a:lnB>
                     <a:solidFill>
-                      <a:srgbClr val="E3F5F2"/>
+                      <a:srgbClr val="EAF3EA"/>
                     </a:solidFill>
                   </a:tcPr>
                 </a:tc>
@@ -5821,7 +5868,7 @@
                   <a:tcPr marL="73152" marR="73152" marT="45720" marB="45720" anchor="ctr">
                     <a:lnL w="9525" cap="flat" cmpd="sng" algn="ctr">
                       <a:solidFill>
-                        <a:srgbClr val="CBD5E1"/>
+                        <a:srgbClr val="D7D7D7"/>
                       </a:solidFill>
                       <a:prstDash val="solid"/>
                       <a:round/>
@@ -5830,7 +5877,7 @@
                     </a:lnL>
                     <a:lnR w="9525" cap="flat" cmpd="sng" algn="ctr">
                       <a:solidFill>
-                        <a:srgbClr val="CBD5E1"/>
+                        <a:srgbClr val="D7D7D7"/>
                       </a:solidFill>
                       <a:prstDash val="solid"/>
                       <a:round/>
@@ -5839,7 +5886,7 @@
                     </a:lnR>
                     <a:lnT w="9525" cap="flat" cmpd="sng" algn="ctr">
                       <a:solidFill>
-                        <a:srgbClr val="CBD5E1"/>
+                        <a:srgbClr val="D7D7D7"/>
                       </a:solidFill>
                       <a:prstDash val="solid"/>
                       <a:round/>
@@ -5848,7 +5895,7 @@
                     </a:lnT>
                     <a:lnB w="9525" cap="flat" cmpd="sng" algn="ctr">
                       <a:solidFill>
-                        <a:srgbClr val="CBD5E1"/>
+                        <a:srgbClr val="D7D7D7"/>
                       </a:solidFill>
                       <a:prstDash val="solid"/>
                       <a:round/>
@@ -5882,7 +5929,7 @@
                   <a:tcPr marL="73152" marR="73152" marT="45720" marB="45720" anchor="ctr">
                     <a:lnL w="9525" cap="flat" cmpd="sng" algn="ctr">
                       <a:solidFill>
-                        <a:srgbClr val="CBD5E1"/>
+                        <a:srgbClr val="D7D7D7"/>
                       </a:solidFill>
                       <a:prstDash val="solid"/>
                       <a:round/>
@@ -5891,7 +5938,7 @@
                     </a:lnL>
                     <a:lnR w="9525" cap="flat" cmpd="sng" algn="ctr">
                       <a:solidFill>
-                        <a:srgbClr val="CBD5E1"/>
+                        <a:srgbClr val="D7D7D7"/>
                       </a:solidFill>
                       <a:prstDash val="solid"/>
                       <a:round/>
@@ -5900,7 +5947,7 @@
                     </a:lnR>
                     <a:lnT w="9525" cap="flat" cmpd="sng" algn="ctr">
                       <a:solidFill>
-                        <a:srgbClr val="CBD5E1"/>
+                        <a:srgbClr val="D7D7D7"/>
                       </a:solidFill>
                       <a:prstDash val="solid"/>
                       <a:round/>
@@ -5909,7 +5956,7 @@
                     </a:lnT>
                     <a:lnB w="9525" cap="flat" cmpd="sng" algn="ctr">
                       <a:solidFill>
-                        <a:srgbClr val="CBD5E1"/>
+                        <a:srgbClr val="D7D7D7"/>
                       </a:solidFill>
                       <a:prstDash val="solid"/>
                       <a:round/>
@@ -5943,7 +5990,7 @@
                   <a:tcPr marL="73152" marR="73152" marT="45720" marB="45720" anchor="ctr">
                     <a:lnL w="9525" cap="flat" cmpd="sng" algn="ctr">
                       <a:solidFill>
-                        <a:srgbClr val="CBD5E1"/>
+                        <a:srgbClr val="D7D7D7"/>
                       </a:solidFill>
                       <a:prstDash val="solid"/>
                       <a:round/>
@@ -5952,7 +5999,7 @@
                     </a:lnL>
                     <a:lnR w="9525" cap="flat" cmpd="sng" algn="ctr">
                       <a:solidFill>
-                        <a:srgbClr val="CBD5E1"/>
+                        <a:srgbClr val="D7D7D7"/>
                       </a:solidFill>
                       <a:prstDash val="solid"/>
                       <a:round/>
@@ -5961,7 +6008,7 @@
                     </a:lnR>
                     <a:lnT w="9525" cap="flat" cmpd="sng" algn="ctr">
                       <a:solidFill>
-                        <a:srgbClr val="CBD5E1"/>
+                        <a:srgbClr val="D7D7D7"/>
                       </a:solidFill>
                       <a:prstDash val="solid"/>
                       <a:round/>
@@ -5970,7 +6017,7 @@
                     </a:lnT>
                     <a:lnB w="9525" cap="flat" cmpd="sng" algn="ctr">
                       <a:solidFill>
-                        <a:srgbClr val="CBD5E1"/>
+                        <a:srgbClr val="D7D7D7"/>
                       </a:solidFill>
                       <a:prstDash val="solid"/>
                       <a:round/>
@@ -6004,7 +6051,7 @@
                   <a:tcPr marL="73152" marR="73152" marT="45720" marB="45720" anchor="ctr">
                     <a:lnL w="9525" cap="flat" cmpd="sng" algn="ctr">
                       <a:solidFill>
-                        <a:srgbClr val="CBD5E1"/>
+                        <a:srgbClr val="D7D7D7"/>
                       </a:solidFill>
                       <a:prstDash val="solid"/>
                       <a:round/>
@@ -6013,7 +6060,7 @@
                     </a:lnL>
                     <a:lnR w="9525" cap="flat" cmpd="sng" algn="ctr">
                       <a:solidFill>
-                        <a:srgbClr val="CBD5E1"/>
+                        <a:srgbClr val="D7D7D7"/>
                       </a:solidFill>
                       <a:prstDash val="solid"/>
                       <a:round/>
@@ -6022,7 +6069,7 @@
                     </a:lnR>
                     <a:lnT w="9525" cap="flat" cmpd="sng" algn="ctr">
                       <a:solidFill>
-                        <a:srgbClr val="CBD5E1"/>
+                        <a:srgbClr val="D7D7D7"/>
                       </a:solidFill>
                       <a:prstDash val="solid"/>
                       <a:round/>
@@ -6031,7 +6078,7 @@
                     </a:lnT>
                     <a:lnB w="9525" cap="flat" cmpd="sng" algn="ctr">
                       <a:solidFill>
-                        <a:srgbClr val="CBD5E1"/>
+                        <a:srgbClr val="D7D7D7"/>
                       </a:solidFill>
                       <a:prstDash val="solid"/>
                       <a:round/>
@@ -6065,7 +6112,7 @@
                   <a:tcPr marL="73152" marR="73152" marT="45720" marB="45720" anchor="ctr">
                     <a:lnL w="9525" cap="flat" cmpd="sng" algn="ctr">
                       <a:solidFill>
-                        <a:srgbClr val="CBD5E1"/>
+                        <a:srgbClr val="D7D7D7"/>
                       </a:solidFill>
                       <a:prstDash val="solid"/>
                       <a:round/>
@@ -6074,7 +6121,7 @@
                     </a:lnL>
                     <a:lnR w="9525" cap="flat" cmpd="sng" algn="ctr">
                       <a:solidFill>
-                        <a:srgbClr val="CBD5E1"/>
+                        <a:srgbClr val="D7D7D7"/>
                       </a:solidFill>
                       <a:prstDash val="solid"/>
                       <a:round/>
@@ -6083,7 +6130,7 @@
                     </a:lnR>
                     <a:lnT w="9525" cap="flat" cmpd="sng" algn="ctr">
                       <a:solidFill>
-                        <a:srgbClr val="CBD5E1"/>
+                        <a:srgbClr val="D7D7D7"/>
                       </a:solidFill>
                       <a:prstDash val="solid"/>
                       <a:round/>
@@ -6092,7 +6139,7 @@
                     </a:lnT>
                     <a:lnB w="9525" cap="flat" cmpd="sng" algn="ctr">
                       <a:solidFill>
-                        <a:srgbClr val="CBD5E1"/>
+                        <a:srgbClr val="D7D7D7"/>
                       </a:solidFill>
                       <a:prstDash val="solid"/>
                       <a:round/>
@@ -6126,7 +6173,7 @@
                   <a:tcPr marL="73152" marR="73152" marT="45720" marB="45720" anchor="ctr">
                     <a:lnL w="9525" cap="flat" cmpd="sng" algn="ctr">
                       <a:solidFill>
-                        <a:srgbClr val="CBD5E1"/>
+                        <a:srgbClr val="D7D7D7"/>
                       </a:solidFill>
                       <a:prstDash val="solid"/>
                       <a:round/>
@@ -6135,7 +6182,7 @@
                     </a:lnL>
                     <a:lnR w="9525" cap="flat" cmpd="sng" algn="ctr">
                       <a:solidFill>
-                        <a:srgbClr val="CBD5E1"/>
+                        <a:srgbClr val="D7D7D7"/>
                       </a:solidFill>
                       <a:prstDash val="solid"/>
                       <a:round/>
@@ -6144,7 +6191,7 @@
                     </a:lnR>
                     <a:lnT w="9525" cap="flat" cmpd="sng" algn="ctr">
                       <a:solidFill>
-                        <a:srgbClr val="CBD5E1"/>
+                        <a:srgbClr val="D7D7D7"/>
                       </a:solidFill>
                       <a:prstDash val="solid"/>
                       <a:round/>
@@ -6153,7 +6200,7 @@
                     </a:lnT>
                     <a:lnB w="9525" cap="flat" cmpd="sng" algn="ctr">
                       <a:solidFill>
-                        <a:srgbClr val="CBD5E1"/>
+                        <a:srgbClr val="D7D7D7"/>
                       </a:solidFill>
                       <a:prstDash val="solid"/>
                       <a:round/>
@@ -6161,7 +6208,7 @@
                       <a:tailEnd type="none" w="med" len="med"/>
                     </a:lnB>
                     <a:solidFill>
-                      <a:srgbClr val="E3F5F2"/>
+                      <a:srgbClr val="EAF3EA"/>
                     </a:solidFill>
                   </a:tcPr>
                 </a:tc>
@@ -6172,7 +6219,7 @@
       </p:graphicFrame>
       <p:sp>
         <p:nvSpPr>
-          <p:cNvPr id="4" name="text-269"/>
+          <p:cNvPr id="4" name="text-280"/>
           <p:cNvSpPr txBox="1"/>
           <p:nvPr/>
         </p:nvSpPr>
@@ -6303,20 +6350,31 @@
               <a:buNone/>
             </a:pPr>
             <a:r>
-              <a:rPr lang="en-US" sz="2800" b="1" dirty="0">
+              <a:rPr lang="en-US" sz="2600" b="1" dirty="0">
                 <a:solidFill>
                   <a:schemeClr val="tx2"/>
                 </a:solidFill>
               </a:rPr>
-              <a:t>A revocation at the source is enforced within 5 minutes</a:t>
-            </a:r>
-            <a:endParaRPr lang="en-US" sz="2800" dirty="0"/>
+              <a:t>A revocation at the source</a:t>
+            </a:r>
+            <a:pPr algn="l" indent="0" marL="0">
+              <a:buNone/>
+            </a:pPr>
+            <a:r>
+              <a:rPr lang="en-US" sz="2600" b="1" dirty="0">
+                <a:solidFill>
+                  <a:srgbClr val="8C8C8C"/>
+                </a:solidFill>
+              </a:rPr>
+              <a:t> is enforced within 5 minutes</a:t>
+            </a:r>
+            <a:endParaRPr lang="en-US" sz="2600" dirty="0"/>
           </a:p>
         </p:txBody>
       </p:sp>
       <p:graphicFrame>
         <p:nvGraphicFramePr>
-          <p:cNvPr id="3" name="revocation-chart-270" descr=""/>
+          <p:cNvPr id="3" name="revocation-chart-281" descr=""/>
           <p:cNvGraphicFramePr/>
           <p:nvPr/>
         </p:nvGraphicFramePr>
@@ -6332,7 +6390,7 @@
       </p:graphicFrame>
       <p:sp>
         <p:nvSpPr>
-          <p:cNvPr id="4" name="text-271"/>
+          <p:cNvPr id="4" name="text-282"/>
           <p:cNvSpPr txBox="1"/>
           <p:nvPr/>
         </p:nvSpPr>
@@ -6368,7 +6426,7 @@
       </p:sp>
       <p:sp>
         <p:nvSpPr>
-          <p:cNvPr id="5" name="chart-notes-272"/>
+          <p:cNvPr id="5" name="chart-notes-283"/>
           <p:cNvSpPr/>
           <p:nvPr/>
         </p:nvSpPr>
@@ -6379,7 +6437,7 @@
           </a:xfrm>
           <a:prstGeom prst="roundRect">
             <a:avLst>
-              <a:gd name="adj" fmla="val 2319"/>
+              <a:gd name="adj" fmla="val 1449"/>
             </a:avLst>
           </a:prstGeom>
           <a:solidFill>
@@ -6390,7 +6448,7 @@
       </p:sp>
       <p:sp>
         <p:nvSpPr>
-          <p:cNvPr id="6" name="text-273"/>
+          <p:cNvPr id="6" name="text-284"/>
           <p:cNvSpPr txBox="1"/>
           <p:nvPr/>
         </p:nvSpPr>
@@ -6510,7 +6568,7 @@
       </p:sp>
       <p:sp>
         <p:nvSpPr>
-          <p:cNvPr id="7" name="text-274"/>
+          <p:cNvPr id="7" name="text-285"/>
           <p:cNvSpPr txBox="1"/>
           <p:nvPr/>
         </p:nvSpPr>
@@ -6641,20 +6699,31 @@
               <a:buNone/>
             </a:pPr>
             <a:r>
-              <a:rPr lang="en-US" sz="2800" b="1" dirty="0">
+              <a:rPr lang="en-US" sz="2600" b="1" dirty="0">
                 <a:solidFill>
                   <a:schemeClr val="tx2"/>
                 </a:solidFill>
               </a:rPr>
-              <a:t>Design trade-offs we chose deliberately</a:t>
-            </a:r>
-            <a:endParaRPr lang="en-US" sz="2800" dirty="0"/>
+              <a:t>Design trade-offs</a:t>
+            </a:r>
+            <a:pPr algn="l" indent="0" marL="0">
+              <a:buNone/>
+            </a:pPr>
+            <a:r>
+              <a:rPr lang="en-US" sz="2600" b="1" dirty="0">
+                <a:solidFill>
+                  <a:srgbClr val="8C8C8C"/>
+                </a:solidFill>
+              </a:rPr>
+              <a:t> we chose deliberately</a:t>
+            </a:r>
+            <a:endParaRPr lang="en-US" sz="2600" dirty="0"/>
           </a:p>
         </p:txBody>
       </p:sp>
       <p:graphicFrame>
         <p:nvGraphicFramePr>
-          <p:cNvPr id="13" name="tradeoff-table-275"/>
+          <p:cNvPr id="13" name="tradeoff-table-286"/>
           <p:cNvGraphicFramePr>
             <a:graphicFrameLocks noGrp="1"/>
           </p:cNvGraphicFramePr>
@@ -6702,7 +6771,7 @@
                   <a:tcPr marL="109728" marR="109728" marT="54864" marB="54864" anchor="ctr">
                     <a:lnL w="9525" cap="flat" cmpd="sng" algn="ctr">
                       <a:solidFill>
-                        <a:srgbClr val="CBD5E1"/>
+                        <a:srgbClr val="D7D7D7"/>
                       </a:solidFill>
                       <a:prstDash val="solid"/>
                       <a:round/>
@@ -6711,7 +6780,7 @@
                     </a:lnL>
                     <a:lnR w="9525" cap="flat" cmpd="sng" algn="ctr">
                       <a:solidFill>
-                        <a:srgbClr val="CBD5E1"/>
+                        <a:srgbClr val="D7D7D7"/>
                       </a:solidFill>
                       <a:prstDash val="solid"/>
                       <a:round/>
@@ -6720,7 +6789,7 @@
                     </a:lnR>
                     <a:lnT w="9525" cap="flat" cmpd="sng" algn="ctr">
                       <a:solidFill>
-                        <a:srgbClr val="CBD5E1"/>
+                        <a:srgbClr val="D7D7D7"/>
                       </a:solidFill>
                       <a:prstDash val="solid"/>
                       <a:round/>
@@ -6729,7 +6798,7 @@
                     </a:lnT>
                     <a:lnB w="9525" cap="flat" cmpd="sng" algn="ctr">
                       <a:solidFill>
-                        <a:srgbClr val="CBD5E1"/>
+                        <a:srgbClr val="D7D7D7"/>
                       </a:solidFill>
                       <a:prstDash val="solid"/>
                       <a:round/>
@@ -6763,7 +6832,7 @@
                   <a:tcPr marL="109728" marR="109728" marT="54864" marB="54864" anchor="ctr">
                     <a:lnL w="9525" cap="flat" cmpd="sng" algn="ctr">
                       <a:solidFill>
-                        <a:srgbClr val="CBD5E1"/>
+                        <a:srgbClr val="D7D7D7"/>
                       </a:solidFill>
                       <a:prstDash val="solid"/>
                       <a:round/>
@@ -6772,7 +6841,7 @@
                     </a:lnL>
                     <a:lnR w="9525" cap="flat" cmpd="sng" algn="ctr">
                       <a:solidFill>
-                        <a:srgbClr val="CBD5E1"/>
+                        <a:srgbClr val="D7D7D7"/>
                       </a:solidFill>
                       <a:prstDash val="solid"/>
                       <a:round/>
@@ -6781,7 +6850,7 @@
                     </a:lnR>
                     <a:lnT w="9525" cap="flat" cmpd="sng" algn="ctr">
                       <a:solidFill>
-                        <a:srgbClr val="CBD5E1"/>
+                        <a:srgbClr val="D7D7D7"/>
                       </a:solidFill>
                       <a:prstDash val="solid"/>
                       <a:round/>
@@ -6790,7 +6859,7 @@
                     </a:lnT>
                     <a:lnB w="9525" cap="flat" cmpd="sng" algn="ctr">
                       <a:solidFill>
-                        <a:srgbClr val="CBD5E1"/>
+                        <a:srgbClr val="D7D7D7"/>
                       </a:solidFill>
                       <a:prstDash val="solid"/>
                       <a:round/>
@@ -6824,7 +6893,7 @@
                   <a:tcPr marL="109728" marR="109728" marT="54864" marB="54864" anchor="ctr">
                     <a:lnL w="9525" cap="flat" cmpd="sng" algn="ctr">
                       <a:solidFill>
-                        <a:srgbClr val="CBD5E1"/>
+                        <a:srgbClr val="D7D7D7"/>
                       </a:solidFill>
                       <a:prstDash val="solid"/>
                       <a:round/>
@@ -6833,7 +6902,7 @@
                     </a:lnL>
                     <a:lnR w="9525" cap="flat" cmpd="sng" algn="ctr">
                       <a:solidFill>
-                        <a:srgbClr val="CBD5E1"/>
+                        <a:srgbClr val="D7D7D7"/>
                       </a:solidFill>
                       <a:prstDash val="solid"/>
                       <a:round/>
@@ -6842,7 +6911,7 @@
                     </a:lnR>
                     <a:lnT w="9525" cap="flat" cmpd="sng" algn="ctr">
                       <a:solidFill>
-                        <a:srgbClr val="CBD5E1"/>
+                        <a:srgbClr val="D7D7D7"/>
                       </a:solidFill>
                       <a:prstDash val="solid"/>
                       <a:round/>
@@ -6851,7 +6920,7 @@
                     </a:lnT>
                     <a:lnB w="9525" cap="flat" cmpd="sng" algn="ctr">
                       <a:solidFill>
-                        <a:srgbClr val="CBD5E1"/>
+                        <a:srgbClr val="D7D7D7"/>
                       </a:solidFill>
                       <a:prstDash val="solid"/>
                       <a:round/>
@@ -6887,7 +6956,7 @@
                   <a:tcPr marL="109728" marR="109728" marT="54864" marB="54864" anchor="ctr">
                     <a:lnL w="9525" cap="flat" cmpd="sng" algn="ctr">
                       <a:solidFill>
-                        <a:srgbClr val="CBD5E1"/>
+                        <a:srgbClr val="D7D7D7"/>
                       </a:solidFill>
                       <a:prstDash val="solid"/>
                       <a:round/>
@@ -6896,7 +6965,7 @@
                     </a:lnL>
                     <a:lnR w="9525" cap="flat" cmpd="sng" algn="ctr">
                       <a:solidFill>
-                        <a:srgbClr val="CBD5E1"/>
+                        <a:srgbClr val="D7D7D7"/>
                       </a:solidFill>
                       <a:prstDash val="solid"/>
                       <a:round/>
@@ -6905,7 +6974,7 @@
                     </a:lnR>
                     <a:lnT w="9525" cap="flat" cmpd="sng" algn="ctr">
                       <a:solidFill>
-                        <a:srgbClr val="CBD5E1"/>
+                        <a:srgbClr val="D7D7D7"/>
                       </a:solidFill>
                       <a:prstDash val="solid"/>
                       <a:round/>
@@ -6914,7 +6983,7 @@
                     </a:lnT>
                     <a:lnB w="9525" cap="flat" cmpd="sng" algn="ctr">
                       <a:solidFill>
-                        <a:srgbClr val="CBD5E1"/>
+                        <a:srgbClr val="D7D7D7"/>
                       </a:solidFill>
                       <a:prstDash val="solid"/>
                       <a:round/>
@@ -6948,7 +7017,7 @@
                   <a:tcPr marL="109728" marR="109728" marT="54864" marB="54864" anchor="ctr">
                     <a:lnL w="9525" cap="flat" cmpd="sng" algn="ctr">
                       <a:solidFill>
-                        <a:srgbClr val="CBD5E1"/>
+                        <a:srgbClr val="D7D7D7"/>
                       </a:solidFill>
                       <a:prstDash val="solid"/>
                       <a:round/>
@@ -6957,7 +7026,7 @@
                     </a:lnL>
                     <a:lnR w="9525" cap="flat" cmpd="sng" algn="ctr">
                       <a:solidFill>
-                        <a:srgbClr val="CBD5E1"/>
+                        <a:srgbClr val="D7D7D7"/>
                       </a:solidFill>
                       <a:prstDash val="solid"/>
                       <a:round/>
@@ -6966,7 +7035,7 @@
                     </a:lnR>
                     <a:lnT w="9525" cap="flat" cmpd="sng" algn="ctr">
                       <a:solidFill>
-                        <a:srgbClr val="CBD5E1"/>
+                        <a:srgbClr val="D7D7D7"/>
                       </a:solidFill>
                       <a:prstDash val="solid"/>
                       <a:round/>
@@ -6975,7 +7044,7 @@
                     </a:lnT>
                     <a:lnB w="9525" cap="flat" cmpd="sng" algn="ctr">
                       <a:solidFill>
-                        <a:srgbClr val="CBD5E1"/>
+                        <a:srgbClr val="D7D7D7"/>
                       </a:solidFill>
                       <a:prstDash val="solid"/>
                       <a:round/>
@@ -7009,7 +7078,7 @@
                   <a:tcPr marL="109728" marR="109728" marT="54864" marB="54864" anchor="ctr">
                     <a:lnL w="9525" cap="flat" cmpd="sng" algn="ctr">
                       <a:solidFill>
-                        <a:srgbClr val="CBD5E1"/>
+                        <a:srgbClr val="D7D7D7"/>
                       </a:solidFill>
                       <a:prstDash val="solid"/>
                       <a:round/>
@@ -7018,7 +7087,7 @@
                     </a:lnL>
                     <a:lnR w="9525" cap="flat" cmpd="sng" algn="ctr">
                       <a:solidFill>
-                        <a:srgbClr val="CBD5E1"/>
+                        <a:srgbClr val="D7D7D7"/>
                       </a:solidFill>
                       <a:prstDash val="solid"/>
                       <a:round/>
@@ -7027,7 +7096,7 @@
                     </a:lnR>
                     <a:lnT w="9525" cap="flat" cmpd="sng" algn="ctr">
                       <a:solidFill>
-                        <a:srgbClr val="CBD5E1"/>
+                        <a:srgbClr val="D7D7D7"/>
                       </a:solidFill>
                       <a:prstDash val="solid"/>
                       <a:round/>
@@ -7036,7 +7105,7 @@
                     </a:lnT>
                     <a:lnB w="9525" cap="flat" cmpd="sng" algn="ctr">
                       <a:solidFill>
-                        <a:srgbClr val="CBD5E1"/>
+                        <a:srgbClr val="D7D7D7"/>
                       </a:solidFill>
                       <a:prstDash val="solid"/>
                       <a:round/>
@@ -7072,7 +7141,7 @@
                   <a:tcPr marL="109728" marR="109728" marT="54864" marB="54864" anchor="ctr">
                     <a:lnL w="9525" cap="flat" cmpd="sng" algn="ctr">
                       <a:solidFill>
-                        <a:srgbClr val="CBD5E1"/>
+                        <a:srgbClr val="D7D7D7"/>
                       </a:solidFill>
                       <a:prstDash val="solid"/>
                       <a:round/>
@@ -7081,7 +7150,7 @@
                     </a:lnL>
                     <a:lnR w="9525" cap="flat" cmpd="sng" algn="ctr">
                       <a:solidFill>
-                        <a:srgbClr val="CBD5E1"/>
+                        <a:srgbClr val="D7D7D7"/>
                       </a:solidFill>
                       <a:prstDash val="solid"/>
                       <a:round/>
@@ -7090,7 +7159,7 @@
                     </a:lnR>
                     <a:lnT w="9525" cap="flat" cmpd="sng" algn="ctr">
                       <a:solidFill>
-                        <a:srgbClr val="CBD5E1"/>
+                        <a:srgbClr val="D7D7D7"/>
                       </a:solidFill>
                       <a:prstDash val="solid"/>
                       <a:round/>
@@ -7099,7 +7168,7 @@
                     </a:lnT>
                     <a:lnB w="9525" cap="flat" cmpd="sng" algn="ctr">
                       <a:solidFill>
-                        <a:srgbClr val="CBD5E1"/>
+                        <a:srgbClr val="D7D7D7"/>
                       </a:solidFill>
                       <a:prstDash val="solid"/>
                       <a:round/>
@@ -7133,7 +7202,7 @@
                   <a:tcPr marL="109728" marR="109728" marT="54864" marB="54864" anchor="ctr">
                     <a:lnL w="9525" cap="flat" cmpd="sng" algn="ctr">
                       <a:solidFill>
-                        <a:srgbClr val="CBD5E1"/>
+                        <a:srgbClr val="D7D7D7"/>
                       </a:solidFill>
                       <a:prstDash val="solid"/>
                       <a:round/>
@@ -7142,7 +7211,7 @@
                     </a:lnL>
                     <a:lnR w="9525" cap="flat" cmpd="sng" algn="ctr">
                       <a:solidFill>
-                        <a:srgbClr val="CBD5E1"/>
+                        <a:srgbClr val="D7D7D7"/>
                       </a:solidFill>
                       <a:prstDash val="solid"/>
                       <a:round/>
@@ -7151,7 +7220,7 @@
                     </a:lnR>
                     <a:lnT w="9525" cap="flat" cmpd="sng" algn="ctr">
                       <a:solidFill>
-                        <a:srgbClr val="CBD5E1"/>
+                        <a:srgbClr val="D7D7D7"/>
                       </a:solidFill>
                       <a:prstDash val="solid"/>
                       <a:round/>
@@ -7160,7 +7229,7 @@
                     </a:lnT>
                     <a:lnB w="9525" cap="flat" cmpd="sng" algn="ctr">
                       <a:solidFill>
-                        <a:srgbClr val="CBD5E1"/>
+                        <a:srgbClr val="D7D7D7"/>
                       </a:solidFill>
                       <a:prstDash val="solid"/>
                       <a:round/>
@@ -7194,7 +7263,7 @@
                   <a:tcPr marL="109728" marR="109728" marT="54864" marB="54864" anchor="ctr">
                     <a:lnL w="9525" cap="flat" cmpd="sng" algn="ctr">
                       <a:solidFill>
-                        <a:srgbClr val="CBD5E1"/>
+                        <a:srgbClr val="D7D7D7"/>
                       </a:solidFill>
                       <a:prstDash val="solid"/>
                       <a:round/>
@@ -7203,7 +7272,7 @@
                     </a:lnL>
                     <a:lnR w="9525" cap="flat" cmpd="sng" algn="ctr">
                       <a:solidFill>
-                        <a:srgbClr val="CBD5E1"/>
+                        <a:srgbClr val="D7D7D7"/>
                       </a:solidFill>
                       <a:prstDash val="solid"/>
                       <a:round/>
@@ -7212,7 +7281,7 @@
                     </a:lnR>
                     <a:lnT w="9525" cap="flat" cmpd="sng" algn="ctr">
                       <a:solidFill>
-                        <a:srgbClr val="CBD5E1"/>
+                        <a:srgbClr val="D7D7D7"/>
                       </a:solidFill>
                       <a:prstDash val="solid"/>
                       <a:round/>
@@ -7221,7 +7290,7 @@
                     </a:lnT>
                     <a:lnB w="9525" cap="flat" cmpd="sng" algn="ctr">
                       <a:solidFill>
-                        <a:srgbClr val="CBD5E1"/>
+                        <a:srgbClr val="D7D7D7"/>
                       </a:solidFill>
                       <a:prstDash val="solid"/>
                       <a:round/>
@@ -7257,7 +7326,7 @@
                   <a:tcPr marL="109728" marR="109728" marT="54864" marB="54864" anchor="ctr">
                     <a:lnL w="9525" cap="flat" cmpd="sng" algn="ctr">
                       <a:solidFill>
-                        <a:srgbClr val="CBD5E1"/>
+                        <a:srgbClr val="D7D7D7"/>
                       </a:solidFill>
                       <a:prstDash val="solid"/>
                       <a:round/>
@@ -7266,7 +7335,7 @@
                     </a:lnL>
                     <a:lnR w="9525" cap="flat" cmpd="sng" algn="ctr">
                       <a:solidFill>
-                        <a:srgbClr val="CBD5E1"/>
+                        <a:srgbClr val="D7D7D7"/>
                       </a:solidFill>
                       <a:prstDash val="solid"/>
                       <a:round/>
@@ -7275,7 +7344,7 @@
                     </a:lnR>
                     <a:lnT w="9525" cap="flat" cmpd="sng" algn="ctr">
                       <a:solidFill>
-                        <a:srgbClr val="CBD5E1"/>
+                        <a:srgbClr val="D7D7D7"/>
                       </a:solidFill>
                       <a:prstDash val="solid"/>
                       <a:round/>
@@ -7284,7 +7353,7 @@
                     </a:lnT>
                     <a:lnB w="9525" cap="flat" cmpd="sng" algn="ctr">
                       <a:solidFill>
-                        <a:srgbClr val="CBD5E1"/>
+                        <a:srgbClr val="D7D7D7"/>
                       </a:solidFill>
                       <a:prstDash val="solid"/>
                       <a:round/>
@@ -7318,7 +7387,7 @@
                   <a:tcPr marL="109728" marR="109728" marT="54864" marB="54864" anchor="ctr">
                     <a:lnL w="9525" cap="flat" cmpd="sng" algn="ctr">
                       <a:solidFill>
-                        <a:srgbClr val="CBD5E1"/>
+                        <a:srgbClr val="D7D7D7"/>
                       </a:solidFill>
                       <a:prstDash val="solid"/>
                       <a:round/>
@@ -7327,7 +7396,7 @@
                     </a:lnL>
                     <a:lnR w="9525" cap="flat" cmpd="sng" algn="ctr">
                       <a:solidFill>
-                        <a:srgbClr val="CBD5E1"/>
+                        <a:srgbClr val="D7D7D7"/>
                       </a:solidFill>
                       <a:prstDash val="solid"/>
                       <a:round/>
@@ -7336,7 +7405,7 @@
                     </a:lnR>
                     <a:lnT w="9525" cap="flat" cmpd="sng" algn="ctr">
                       <a:solidFill>
-                        <a:srgbClr val="CBD5E1"/>
+                        <a:srgbClr val="D7D7D7"/>
                       </a:solidFill>
                       <a:prstDash val="solid"/>
                       <a:round/>
@@ -7345,7 +7414,7 @@
                     </a:lnT>
                     <a:lnB w="9525" cap="flat" cmpd="sng" algn="ctr">
                       <a:solidFill>
-                        <a:srgbClr val="CBD5E1"/>
+                        <a:srgbClr val="D7D7D7"/>
                       </a:solidFill>
                       <a:prstDash val="solid"/>
                       <a:round/>
@@ -7379,7 +7448,7 @@
                   <a:tcPr marL="109728" marR="109728" marT="54864" marB="54864" anchor="ctr">
                     <a:lnL w="9525" cap="flat" cmpd="sng" algn="ctr">
                       <a:solidFill>
-                        <a:srgbClr val="CBD5E1"/>
+                        <a:srgbClr val="D7D7D7"/>
                       </a:solidFill>
                       <a:prstDash val="solid"/>
                       <a:round/>
@@ -7388,7 +7457,7 @@
                     </a:lnL>
                     <a:lnR w="9525" cap="flat" cmpd="sng" algn="ctr">
                       <a:solidFill>
-                        <a:srgbClr val="CBD5E1"/>
+                        <a:srgbClr val="D7D7D7"/>
                       </a:solidFill>
                       <a:prstDash val="solid"/>
                       <a:round/>
@@ -7397,7 +7466,7 @@
                     </a:lnR>
                     <a:lnT w="9525" cap="flat" cmpd="sng" algn="ctr">
                       <a:solidFill>
-                        <a:srgbClr val="CBD5E1"/>
+                        <a:srgbClr val="D7D7D7"/>
                       </a:solidFill>
                       <a:prstDash val="solid"/>
                       <a:round/>
@@ -7406,7 +7475,7 @@
                     </a:lnT>
                     <a:lnB w="9525" cap="flat" cmpd="sng" algn="ctr">
                       <a:solidFill>
-                        <a:srgbClr val="CBD5E1"/>
+                        <a:srgbClr val="D7D7D7"/>
                       </a:solidFill>
                       <a:prstDash val="solid"/>
                       <a:round/>
@@ -7442,7 +7511,7 @@
                   <a:tcPr marL="109728" marR="109728" marT="54864" marB="54864" anchor="ctr">
                     <a:lnL w="9525" cap="flat" cmpd="sng" algn="ctr">
                       <a:solidFill>
-                        <a:srgbClr val="CBD5E1"/>
+                        <a:srgbClr val="D7D7D7"/>
                       </a:solidFill>
                       <a:prstDash val="solid"/>
                       <a:round/>
@@ -7451,7 +7520,7 @@
                     </a:lnL>
                     <a:lnR w="9525" cap="flat" cmpd="sng" algn="ctr">
                       <a:solidFill>
-                        <a:srgbClr val="CBD5E1"/>
+                        <a:srgbClr val="D7D7D7"/>
                       </a:solidFill>
                       <a:prstDash val="solid"/>
                       <a:round/>
@@ -7460,7 +7529,7 @@
                     </a:lnR>
                     <a:lnT w="9525" cap="flat" cmpd="sng" algn="ctr">
                       <a:solidFill>
-                        <a:srgbClr val="CBD5E1"/>
+                        <a:srgbClr val="D7D7D7"/>
                       </a:solidFill>
                       <a:prstDash val="solid"/>
                       <a:round/>
@@ -7469,7 +7538,7 @@
                     </a:lnT>
                     <a:lnB w="9525" cap="flat" cmpd="sng" algn="ctr">
                       <a:solidFill>
-                        <a:srgbClr val="CBD5E1"/>
+                        <a:srgbClr val="D7D7D7"/>
                       </a:solidFill>
                       <a:prstDash val="solid"/>
                       <a:round/>
@@ -7503,7 +7572,7 @@
                   <a:tcPr marL="109728" marR="109728" marT="54864" marB="54864" anchor="ctr">
                     <a:lnL w="9525" cap="flat" cmpd="sng" algn="ctr">
                       <a:solidFill>
-                        <a:srgbClr val="CBD5E1"/>
+                        <a:srgbClr val="D7D7D7"/>
                       </a:solidFill>
                       <a:prstDash val="solid"/>
                       <a:round/>
@@ -7512,7 +7581,7 @@
                     </a:lnL>
                     <a:lnR w="9525" cap="flat" cmpd="sng" algn="ctr">
                       <a:solidFill>
-                        <a:srgbClr val="CBD5E1"/>
+                        <a:srgbClr val="D7D7D7"/>
                       </a:solidFill>
                       <a:prstDash val="solid"/>
                       <a:round/>
@@ -7521,7 +7590,7 @@
                     </a:lnR>
                     <a:lnT w="9525" cap="flat" cmpd="sng" algn="ctr">
                       <a:solidFill>
-                        <a:srgbClr val="CBD5E1"/>
+                        <a:srgbClr val="D7D7D7"/>
                       </a:solidFill>
                       <a:prstDash val="solid"/>
                       <a:round/>
@@ -7530,7 +7599,7 @@
                     </a:lnT>
                     <a:lnB w="9525" cap="flat" cmpd="sng" algn="ctr">
                       <a:solidFill>
-                        <a:srgbClr val="CBD5E1"/>
+                        <a:srgbClr val="D7D7D7"/>
                       </a:solidFill>
                       <a:prstDash val="solid"/>
                       <a:round/>
@@ -7564,7 +7633,7 @@
                   <a:tcPr marL="109728" marR="109728" marT="54864" marB="54864" anchor="ctr">
                     <a:lnL w="9525" cap="flat" cmpd="sng" algn="ctr">
                       <a:solidFill>
-                        <a:srgbClr val="CBD5E1"/>
+                        <a:srgbClr val="D7D7D7"/>
                       </a:solidFill>
                       <a:prstDash val="solid"/>
                       <a:round/>
@@ -7573,7 +7642,7 @@
                     </a:lnL>
                     <a:lnR w="9525" cap="flat" cmpd="sng" algn="ctr">
                       <a:solidFill>
-                        <a:srgbClr val="CBD5E1"/>
+                        <a:srgbClr val="D7D7D7"/>
                       </a:solidFill>
                       <a:prstDash val="solid"/>
                       <a:round/>
@@ -7582,7 +7651,7 @@
                     </a:lnR>
                     <a:lnT w="9525" cap="flat" cmpd="sng" algn="ctr">
                       <a:solidFill>
-                        <a:srgbClr val="CBD5E1"/>
+                        <a:srgbClr val="D7D7D7"/>
                       </a:solidFill>
                       <a:prstDash val="solid"/>
                       <a:round/>
@@ -7591,7 +7660,7 @@
                     </a:lnT>
                     <a:lnB w="9525" cap="flat" cmpd="sng" algn="ctr">
                       <a:solidFill>
-                        <a:srgbClr val="CBD5E1"/>
+                        <a:srgbClr val="D7D7D7"/>
                       </a:solidFill>
                       <a:prstDash val="solid"/>
                       <a:round/>
@@ -7627,7 +7696,7 @@
                   <a:tcPr marL="109728" marR="109728" marT="54864" marB="54864" anchor="ctr">
                     <a:lnL w="9525" cap="flat" cmpd="sng" algn="ctr">
                       <a:solidFill>
-                        <a:srgbClr val="CBD5E1"/>
+                        <a:srgbClr val="D7D7D7"/>
                       </a:solidFill>
                       <a:prstDash val="solid"/>
                       <a:round/>
@@ -7636,7 +7705,7 @@
                     </a:lnL>
                     <a:lnR w="9525" cap="flat" cmpd="sng" algn="ctr">
                       <a:solidFill>
-                        <a:srgbClr val="CBD5E1"/>
+                        <a:srgbClr val="D7D7D7"/>
                       </a:solidFill>
                       <a:prstDash val="solid"/>
                       <a:round/>
@@ -7645,7 +7714,7 @@
                     </a:lnR>
                     <a:lnT w="9525" cap="flat" cmpd="sng" algn="ctr">
                       <a:solidFill>
-                        <a:srgbClr val="CBD5E1"/>
+                        <a:srgbClr val="D7D7D7"/>
                       </a:solidFill>
                       <a:prstDash val="solid"/>
                       <a:round/>
@@ -7654,7 +7723,7 @@
                     </a:lnT>
                     <a:lnB w="9525" cap="flat" cmpd="sng" algn="ctr">
                       <a:solidFill>
-                        <a:srgbClr val="CBD5E1"/>
+                        <a:srgbClr val="D7D7D7"/>
                       </a:solidFill>
                       <a:prstDash val="solid"/>
                       <a:round/>
@@ -7688,7 +7757,7 @@
                   <a:tcPr marL="109728" marR="109728" marT="54864" marB="54864" anchor="ctr">
                     <a:lnL w="9525" cap="flat" cmpd="sng" algn="ctr">
                       <a:solidFill>
-                        <a:srgbClr val="CBD5E1"/>
+                        <a:srgbClr val="D7D7D7"/>
                       </a:solidFill>
                       <a:prstDash val="solid"/>
                       <a:round/>
@@ -7697,7 +7766,7 @@
                     </a:lnL>
                     <a:lnR w="9525" cap="flat" cmpd="sng" algn="ctr">
                       <a:solidFill>
-                        <a:srgbClr val="CBD5E1"/>
+                        <a:srgbClr val="D7D7D7"/>
                       </a:solidFill>
                       <a:prstDash val="solid"/>
                       <a:round/>
@@ -7706,7 +7775,7 @@
                     </a:lnR>
                     <a:lnT w="9525" cap="flat" cmpd="sng" algn="ctr">
                       <a:solidFill>
-                        <a:srgbClr val="CBD5E1"/>
+                        <a:srgbClr val="D7D7D7"/>
                       </a:solidFill>
                       <a:prstDash val="solid"/>
                       <a:round/>
@@ -7715,7 +7784,7 @@
                     </a:lnT>
                     <a:lnB w="9525" cap="flat" cmpd="sng" algn="ctr">
                       <a:solidFill>
-                        <a:srgbClr val="CBD5E1"/>
+                        <a:srgbClr val="D7D7D7"/>
                       </a:solidFill>
                       <a:prstDash val="solid"/>
                       <a:round/>
@@ -7749,7 +7818,7 @@
                   <a:tcPr marL="109728" marR="109728" marT="54864" marB="54864" anchor="ctr">
                     <a:lnL w="9525" cap="flat" cmpd="sng" algn="ctr">
                       <a:solidFill>
-                        <a:srgbClr val="CBD5E1"/>
+                        <a:srgbClr val="D7D7D7"/>
                       </a:solidFill>
                       <a:prstDash val="solid"/>
                       <a:round/>
@@ -7758,7 +7827,7 @@
                     </a:lnL>
                     <a:lnR w="9525" cap="flat" cmpd="sng" algn="ctr">
                       <a:solidFill>
-                        <a:srgbClr val="CBD5E1"/>
+                        <a:srgbClr val="D7D7D7"/>
                       </a:solidFill>
                       <a:prstDash val="solid"/>
                       <a:round/>
@@ -7767,7 +7836,7 @@
                     </a:lnR>
                     <a:lnT w="9525" cap="flat" cmpd="sng" algn="ctr">
                       <a:solidFill>
-                        <a:srgbClr val="CBD5E1"/>
+                        <a:srgbClr val="D7D7D7"/>
                       </a:solidFill>
                       <a:prstDash val="solid"/>
                       <a:round/>
@@ -7776,7 +7845,7 @@
                     </a:lnT>
                     <a:lnB w="9525" cap="flat" cmpd="sng" algn="ctr">
                       <a:solidFill>
-                        <a:srgbClr val="CBD5E1"/>
+                        <a:srgbClr val="D7D7D7"/>
                       </a:solidFill>
                       <a:prstDash val="solid"/>
                       <a:round/>
@@ -7812,7 +7881,7 @@
                   <a:tcPr marL="109728" marR="109728" marT="54864" marB="54864" anchor="ctr">
                     <a:lnL w="9525" cap="flat" cmpd="sng" algn="ctr">
                       <a:solidFill>
-                        <a:srgbClr val="CBD5E1"/>
+                        <a:srgbClr val="D7D7D7"/>
                       </a:solidFill>
                       <a:prstDash val="solid"/>
                       <a:round/>
@@ -7821,7 +7890,7 @@
                     </a:lnL>
                     <a:lnR w="9525" cap="flat" cmpd="sng" algn="ctr">
                       <a:solidFill>
-                        <a:srgbClr val="CBD5E1"/>
+                        <a:srgbClr val="D7D7D7"/>
                       </a:solidFill>
                       <a:prstDash val="solid"/>
                       <a:round/>
@@ -7830,7 +7899,7 @@
                     </a:lnR>
                     <a:lnT w="9525" cap="flat" cmpd="sng" algn="ctr">
                       <a:solidFill>
-                        <a:srgbClr val="CBD5E1"/>
+                        <a:srgbClr val="D7D7D7"/>
                       </a:solidFill>
                       <a:prstDash val="solid"/>
                       <a:round/>
@@ -7839,7 +7908,7 @@
                     </a:lnT>
                     <a:lnB w="9525" cap="flat" cmpd="sng" algn="ctr">
                       <a:solidFill>
-                        <a:srgbClr val="CBD5E1"/>
+                        <a:srgbClr val="D7D7D7"/>
                       </a:solidFill>
                       <a:prstDash val="solid"/>
                       <a:round/>
@@ -7873,7 +7942,7 @@
                   <a:tcPr marL="109728" marR="109728" marT="54864" marB="54864" anchor="ctr">
                     <a:lnL w="9525" cap="flat" cmpd="sng" algn="ctr">
                       <a:solidFill>
-                        <a:srgbClr val="CBD5E1"/>
+                        <a:srgbClr val="D7D7D7"/>
                       </a:solidFill>
                       <a:prstDash val="solid"/>
                       <a:round/>
@@ -7882,7 +7951,7 @@
                     </a:lnL>
                     <a:lnR w="9525" cap="flat" cmpd="sng" algn="ctr">
                       <a:solidFill>
-                        <a:srgbClr val="CBD5E1"/>
+                        <a:srgbClr val="D7D7D7"/>
                       </a:solidFill>
                       <a:prstDash val="solid"/>
                       <a:round/>
@@ -7891,7 +7960,7 @@
                     </a:lnR>
                     <a:lnT w="9525" cap="flat" cmpd="sng" algn="ctr">
                       <a:solidFill>
-                        <a:srgbClr val="CBD5E1"/>
+                        <a:srgbClr val="D7D7D7"/>
                       </a:solidFill>
                       <a:prstDash val="solid"/>
                       <a:round/>
@@ -7900,7 +7969,7 @@
                     </a:lnT>
                     <a:lnB w="9525" cap="flat" cmpd="sng" algn="ctr">
                       <a:solidFill>
-                        <a:srgbClr val="CBD5E1"/>
+                        <a:srgbClr val="D7D7D7"/>
                       </a:solidFill>
                       <a:prstDash val="solid"/>
                       <a:round/>
@@ -7934,7 +8003,7 @@
                   <a:tcPr marL="109728" marR="109728" marT="54864" marB="54864" anchor="ctr">
                     <a:lnL w="9525" cap="flat" cmpd="sng" algn="ctr">
                       <a:solidFill>
-                        <a:srgbClr val="CBD5E1"/>
+                        <a:srgbClr val="D7D7D7"/>
                       </a:solidFill>
                       <a:prstDash val="solid"/>
                       <a:round/>
@@ -7943,7 +8012,7 @@
                     </a:lnL>
                     <a:lnR w="9525" cap="flat" cmpd="sng" algn="ctr">
                       <a:solidFill>
-                        <a:srgbClr val="CBD5E1"/>
+                        <a:srgbClr val="D7D7D7"/>
                       </a:solidFill>
                       <a:prstDash val="solid"/>
                       <a:round/>
@@ -7952,7 +8021,7 @@
                     </a:lnR>
                     <a:lnT w="9525" cap="flat" cmpd="sng" algn="ctr">
                       <a:solidFill>
-                        <a:srgbClr val="CBD5E1"/>
+                        <a:srgbClr val="D7D7D7"/>
                       </a:solidFill>
                       <a:prstDash val="solid"/>
                       <a:round/>
@@ -7961,7 +8030,7 @@
                     </a:lnT>
                     <a:lnB w="9525" cap="flat" cmpd="sng" algn="ctr">
                       <a:solidFill>
-                        <a:srgbClr val="CBD5E1"/>
+                        <a:srgbClr val="D7D7D7"/>
                       </a:solidFill>
                       <a:prstDash val="solid"/>
                       <a:round/>
@@ -7997,7 +8066,7 @@
                   <a:tcPr marL="109728" marR="109728" marT="54864" marB="54864" anchor="ctr">
                     <a:lnL w="9525" cap="flat" cmpd="sng" algn="ctr">
                       <a:solidFill>
-                        <a:srgbClr val="CBD5E1"/>
+                        <a:srgbClr val="D7D7D7"/>
                       </a:solidFill>
                       <a:prstDash val="solid"/>
                       <a:round/>
@@ -8006,7 +8075,7 @@
                     </a:lnL>
                     <a:lnR w="9525" cap="flat" cmpd="sng" algn="ctr">
                       <a:solidFill>
-                        <a:srgbClr val="CBD5E1"/>
+                        <a:srgbClr val="D7D7D7"/>
                       </a:solidFill>
                       <a:prstDash val="solid"/>
                       <a:round/>
@@ -8015,7 +8084,7 @@
                     </a:lnR>
                     <a:lnT w="9525" cap="flat" cmpd="sng" algn="ctr">
                       <a:solidFill>
-                        <a:srgbClr val="CBD5E1"/>
+                        <a:srgbClr val="D7D7D7"/>
                       </a:solidFill>
                       <a:prstDash val="solid"/>
                       <a:round/>
@@ -8024,7 +8093,7 @@
                     </a:lnT>
                     <a:lnB w="9525" cap="flat" cmpd="sng" algn="ctr">
                       <a:solidFill>
-                        <a:srgbClr val="CBD5E1"/>
+                        <a:srgbClr val="D7D7D7"/>
                       </a:solidFill>
                       <a:prstDash val="solid"/>
                       <a:round/>
@@ -8058,7 +8127,7 @@
                   <a:tcPr marL="109728" marR="109728" marT="54864" marB="54864" anchor="ctr">
                     <a:lnL w="9525" cap="flat" cmpd="sng" algn="ctr">
                       <a:solidFill>
-                        <a:srgbClr val="CBD5E1"/>
+                        <a:srgbClr val="D7D7D7"/>
                       </a:solidFill>
                       <a:prstDash val="solid"/>
                       <a:round/>
@@ -8067,7 +8136,7 @@
                     </a:lnL>
                     <a:lnR w="9525" cap="flat" cmpd="sng" algn="ctr">
                       <a:solidFill>
-                        <a:srgbClr val="CBD5E1"/>
+                        <a:srgbClr val="D7D7D7"/>
                       </a:solidFill>
                       <a:prstDash val="solid"/>
                       <a:round/>
@@ -8076,7 +8145,7 @@
                     </a:lnR>
                     <a:lnT w="9525" cap="flat" cmpd="sng" algn="ctr">
                       <a:solidFill>
-                        <a:srgbClr val="CBD5E1"/>
+                        <a:srgbClr val="D7D7D7"/>
                       </a:solidFill>
                       <a:prstDash val="solid"/>
                       <a:round/>
@@ -8085,7 +8154,7 @@
                     </a:lnT>
                     <a:lnB w="9525" cap="flat" cmpd="sng" algn="ctr">
                       <a:solidFill>
-                        <a:srgbClr val="CBD5E1"/>
+                        <a:srgbClr val="D7D7D7"/>
                       </a:solidFill>
                       <a:prstDash val="solid"/>
                       <a:round/>
@@ -8119,7 +8188,7 @@
                   <a:tcPr marL="109728" marR="109728" marT="54864" marB="54864" anchor="ctr">
                     <a:lnL w="9525" cap="flat" cmpd="sng" algn="ctr">
                       <a:solidFill>
-                        <a:srgbClr val="CBD5E1"/>
+                        <a:srgbClr val="D7D7D7"/>
                       </a:solidFill>
                       <a:prstDash val="solid"/>
                       <a:round/>
@@ -8128,7 +8197,7 @@
                     </a:lnL>
                     <a:lnR w="9525" cap="flat" cmpd="sng" algn="ctr">
                       <a:solidFill>
-                        <a:srgbClr val="CBD5E1"/>
+                        <a:srgbClr val="D7D7D7"/>
                       </a:solidFill>
                       <a:prstDash val="solid"/>
                       <a:round/>
@@ -8137,7 +8206,7 @@
                     </a:lnR>
                     <a:lnT w="9525" cap="flat" cmpd="sng" algn="ctr">
                       <a:solidFill>
-                        <a:srgbClr val="CBD5E1"/>
+                        <a:srgbClr val="D7D7D7"/>
                       </a:solidFill>
                       <a:prstDash val="solid"/>
                       <a:round/>
@@ -8146,7 +8215,7 @@
                     </a:lnT>
                     <a:lnB w="9525" cap="flat" cmpd="sng" algn="ctr">
                       <a:solidFill>
-                        <a:srgbClr val="CBD5E1"/>
+                        <a:srgbClr val="D7D7D7"/>
                       </a:solidFill>
                       <a:prstDash val="solid"/>
                       <a:round/>
@@ -8260,20 +8329,31 @@
               <a:buNone/>
             </a:pPr>
             <a:r>
-              <a:rPr lang="en-US" sz="2800" b="1" dirty="0">
+              <a:rPr lang="en-US" sz="2600" b="1" dirty="0">
                 <a:solidFill>
                   <a:schemeClr val="tx2"/>
                 </a:solidFill>
               </a:rPr>
-              <a:t>Tested offline, built to run on Tencent Cloud</a:t>
-            </a:r>
-            <a:endParaRPr lang="en-US" sz="2800" dirty="0"/>
-          </a:p>
-        </p:txBody>
-      </p:sp>
-      <p:sp>
-        <p:nvSpPr>
-          <p:cNvPr id="3" name="text-276"/>
+              <a:t>Tested offline,</a:t>
+            </a:r>
+            <a:pPr algn="l" indent="0" marL="0">
+              <a:buNone/>
+            </a:pPr>
+            <a:r>
+              <a:rPr lang="en-US" sz="2600" b="1" dirty="0">
+                <a:solidFill>
+                  <a:srgbClr val="8C8C8C"/>
+                </a:solidFill>
+              </a:rPr>
+              <a:t> built to run on Tencent Cloud</a:t>
+            </a:r>
+            <a:endParaRPr lang="en-US" sz="2600" dirty="0"/>
+          </a:p>
+        </p:txBody>
+      </p:sp>
+      <p:sp>
+        <p:nvSpPr>
+          <p:cNvPr id="3" name="text-287"/>
           <p:cNvSpPr txBox="1"/>
           <p:nvPr/>
         </p:nvSpPr>
@@ -8301,7 +8381,7 @@
                   <a:schemeClr val="accent1"/>
                 </a:solidFill>
               </a:rPr>
-              <a:t>674</a:t>
+              <a:t>676</a:t>
             </a:r>
             <a:endParaRPr lang="en-US" sz="4800" dirty="0"/>
           </a:p>
@@ -8309,7 +8389,7 @@
       </p:sp>
       <p:sp>
         <p:nvSpPr>
-          <p:cNvPr id="4" name="text-277"/>
+          <p:cNvPr id="4" name="text-288"/>
           <p:cNvSpPr txBox="1"/>
           <p:nvPr/>
         </p:nvSpPr>
@@ -8345,7 +8425,7 @@
       </p:sp>
       <p:sp>
         <p:nvSpPr>
-          <p:cNvPr id="5" name="text-278"/>
+          <p:cNvPr id="5" name="text-289"/>
           <p:cNvSpPr txBox="1"/>
           <p:nvPr/>
         </p:nvSpPr>
@@ -8381,7 +8461,7 @@
       </p:sp>
       <p:sp>
         <p:nvSpPr>
-          <p:cNvPr id="6" name="text-279"/>
+          <p:cNvPr id="6" name="text-290"/>
           <p:cNvSpPr txBox="1"/>
           <p:nvPr/>
         </p:nvSpPr>
@@ -8417,7 +8497,7 @@
       </p:sp>
       <p:sp>
         <p:nvSpPr>
-          <p:cNvPr id="7" name="text-280"/>
+          <p:cNvPr id="7" name="text-291"/>
           <p:cNvSpPr txBox="1"/>
           <p:nvPr/>
         </p:nvSpPr>
@@ -8453,7 +8533,7 @@
       </p:sp>
       <p:sp>
         <p:nvSpPr>
-          <p:cNvPr id="8" name="text-281"/>
+          <p:cNvPr id="8" name="text-292"/>
           <p:cNvSpPr txBox="1"/>
           <p:nvPr/>
         </p:nvSpPr>
@@ -8481,7 +8561,7 @@
                   <a:schemeClr val="tx1"/>
                 </a:solidFill>
               </a:rPr>
-              <a:t>longest a revocation at the source goes unnoticed for confidential documents; in-app grants apply on the next query</a:t>
+              <a:t>max time a source revocation goes unnoticed (confidential); in-app grants: next query</a:t>
             </a:r>
             <a:endParaRPr lang="en-US" sz="1500" dirty="0"/>
           </a:p>
@@ -8489,7 +8569,7 @@
       </p:sp>
       <p:sp>
         <p:nvSpPr>
-          <p:cNvPr id="9" name="stack-282"/>
+          <p:cNvPr id="9" name="stack-293"/>
           <p:cNvSpPr/>
           <p:nvPr/>
         </p:nvSpPr>
@@ -8500,7 +8580,7 @@
           </a:xfrm>
           <a:prstGeom prst="roundRect">
             <a:avLst>
-              <a:gd name="adj" fmla="val 1538"/>
+              <a:gd name="adj" fmla="val 962"/>
             </a:avLst>
           </a:prstGeom>
           <a:solidFill>
@@ -8511,7 +8591,7 @@
       </p:sp>
       <p:sp>
         <p:nvSpPr>
-          <p:cNvPr id="10" name="text-283"/>
+          <p:cNvPr id="10" name="text-294"/>
           <p:cNvSpPr txBox="1"/>
           <p:nvPr/>
         </p:nvSpPr>
@@ -8547,7 +8627,7 @@
       </p:sp>
       <p:sp>
         <p:nvSpPr>
-          <p:cNvPr id="11" name="pill-284"/>
+          <p:cNvPr id="11" name="pill-295"/>
           <p:cNvSpPr txBox="1"/>
           <p:nvPr/>
         </p:nvSpPr>
@@ -8587,7 +8667,7 @@
       </p:sp>
       <p:sp>
         <p:nvSpPr>
-          <p:cNvPr id="12" name="text-285"/>
+          <p:cNvPr id="12" name="text-296"/>
           <p:cNvSpPr txBox="1"/>
           <p:nvPr/>
         </p:nvSpPr>
@@ -8623,7 +8703,7 @@
       </p:sp>
       <p:sp>
         <p:nvSpPr>
-          <p:cNvPr id="13" name="pill-286"/>
+          <p:cNvPr id="13" name="pill-297"/>
           <p:cNvSpPr txBox="1"/>
           <p:nvPr/>
         </p:nvSpPr>
@@ -8663,7 +8743,7 @@
       </p:sp>
       <p:sp>
         <p:nvSpPr>
-          <p:cNvPr id="14" name="text-287"/>
+          <p:cNvPr id="14" name="text-298"/>
           <p:cNvSpPr txBox="1"/>
           <p:nvPr/>
         </p:nvSpPr>
@@ -8699,7 +8779,7 @@
       </p:sp>
       <p:sp>
         <p:nvSpPr>
-          <p:cNvPr id="15" name="pill-288"/>
+          <p:cNvPr id="15" name="pill-299"/>
           <p:cNvSpPr txBox="1"/>
           <p:nvPr/>
         </p:nvSpPr>
@@ -8739,7 +8819,7 @@
       </p:sp>
       <p:sp>
         <p:nvSpPr>
-          <p:cNvPr id="16" name="text-289"/>
+          <p:cNvPr id="16" name="text-300"/>
           <p:cNvSpPr txBox="1"/>
           <p:nvPr/>
         </p:nvSpPr>
@@ -8775,7 +8855,7 @@
       </p:sp>
       <p:sp>
         <p:nvSpPr>
-          <p:cNvPr id="17" name="pill-290"/>
+          <p:cNvPr id="17" name="pill-301"/>
           <p:cNvSpPr txBox="1"/>
           <p:nvPr/>
         </p:nvSpPr>
@@ -8815,7 +8895,7 @@
       </p:sp>
       <p:sp>
         <p:nvSpPr>
-          <p:cNvPr id="18" name="text-291"/>
+          <p:cNvPr id="18" name="text-302"/>
           <p:cNvSpPr txBox="1"/>
           <p:nvPr/>
         </p:nvSpPr>
@@ -8851,7 +8931,7 @@
       </p:sp>
       <p:sp>
         <p:nvSpPr>
-          <p:cNvPr id="19" name="pill-292"/>
+          <p:cNvPr id="19" name="pill-303"/>
           <p:cNvSpPr txBox="1"/>
           <p:nvPr/>
         </p:nvSpPr>
@@ -8891,7 +8971,7 @@
       </p:sp>
       <p:sp>
         <p:nvSpPr>
-          <p:cNvPr id="20" name="text-293"/>
+          <p:cNvPr id="20" name="text-304"/>
           <p:cNvSpPr txBox="1"/>
           <p:nvPr/>
         </p:nvSpPr>
@@ -8927,7 +9007,7 @@
       </p:sp>
       <p:sp>
         <p:nvSpPr>
-          <p:cNvPr id="21" name="pill-294"/>
+          <p:cNvPr id="21" name="pill-305"/>
           <p:cNvSpPr txBox="1"/>
           <p:nvPr/>
         </p:nvSpPr>
@@ -8967,7 +9047,7 @@
       </p:sp>
       <p:sp>
         <p:nvSpPr>
-          <p:cNvPr id="22" name="text-295"/>
+          <p:cNvPr id="22" name="text-306"/>
           <p:cNvSpPr txBox="1"/>
           <p:nvPr/>
         </p:nvSpPr>
@@ -9003,7 +9083,7 @@
       </p:sp>
       <p:sp>
         <p:nvSpPr>
-          <p:cNvPr id="23" name="text-296"/>
+          <p:cNvPr id="23" name="text-307"/>
           <p:cNvSpPr txBox="1"/>
           <p:nvPr/>
         </p:nvSpPr>
@@ -9031,7 +9111,7 @@
                   <a:schemeClr val="accent6"/>
                 </a:solidFill>
               </a:rPr>
-              <a:t>Test count: main plus PRs #9 and #10, 15 Oct 2026 (11 SQL tests run separately against Postgres).</a:t>
+              <a:t>Test count: main, 16 Oct 2026 (11 SQL tests run separately against Postgres).</a:t>
             </a:r>
             <a:endParaRPr lang="en-US" sz="1000" dirty="0"/>
           </a:p>
@@ -9139,7 +9219,18 @@
                   <a:schemeClr val="bg1"/>
                 </a:solidFill>
               </a:rPr>
-              <a:t>Ask anything. See only what you are allowed to. Prove every answer.</a:t>
+              <a:t>Ask anything. See only what you are allowed to.</a:t>
+            </a:r>
+            <a:pPr algn="l" indent="0" marL="0">
+              <a:buNone/>
+            </a:pPr>
+            <a:r>
+              <a:rPr lang="en-US" sz="4000" b="1" dirty="0">
+                <a:solidFill>
+                  <a:srgbClr val="549F58"/>
+                </a:solidFill>
+              </a:rPr>
+              <a:t> Prove every answer.</a:t>
             </a:r>
             <a:endParaRPr lang="en-US" sz="4000" dirty="0"/>
           </a:p>
@@ -9147,7 +9238,7 @@
       </p:sp>
       <p:sp>
         <p:nvSpPr>
-          <p:cNvPr id="3" name="icon-bg-297"/>
+          <p:cNvPr id="3" name="icon-bg-308"/>
           <p:cNvSpPr/>
           <p:nvPr/>
         </p:nvSpPr>
@@ -9167,7 +9258,7 @@
       </p:sp>
       <p:pic>
         <p:nvPicPr>
-          <p:cNvPr id="4" name="icon-298" descr="preencoded.png">    </p:cNvPr>
+          <p:cNvPr id="4" name="icon-309" descr="preencoded.png">    </p:cNvPr>
           <p:cNvPicPr>
             <a:picLocks noChangeAspect="1"/>
           </p:cNvPicPr>
@@ -9191,7 +9282,7 @@
       </p:pic>
       <p:sp>
         <p:nvSpPr>
-          <p:cNvPr id="5" name="text-299"/>
+          <p:cNvPr id="5" name="text-310"/>
           <p:cNvSpPr txBox="1"/>
           <p:nvPr/>
         </p:nvSpPr>
@@ -9227,7 +9318,7 @@
       </p:sp>
       <p:sp>
         <p:nvSpPr>
-          <p:cNvPr id="6" name="icon-bg-300"/>
+          <p:cNvPr id="6" name="icon-bg-311"/>
           <p:cNvSpPr/>
           <p:nvPr/>
         </p:nvSpPr>
@@ -9247,7 +9338,7 @@
       </p:sp>
       <p:pic>
         <p:nvPicPr>
-          <p:cNvPr id="7" name="icon-301" descr="preencoded.png">    </p:cNvPr>
+          <p:cNvPr id="7" name="icon-312" descr="preencoded.png">    </p:cNvPr>
           <p:cNvPicPr>
             <a:picLocks noChangeAspect="1"/>
           </p:cNvPicPr>
@@ -9271,7 +9362,7 @@
       </p:pic>
       <p:sp>
         <p:nvSpPr>
-          <p:cNvPr id="8" name="text-302"/>
+          <p:cNvPr id="8" name="text-313"/>
           <p:cNvSpPr txBox="1"/>
           <p:nvPr/>
         </p:nvSpPr>
@@ -9307,7 +9398,7 @@
       </p:sp>
       <p:sp>
         <p:nvSpPr>
-          <p:cNvPr id="9" name="icon-bg-303"/>
+          <p:cNvPr id="9" name="icon-bg-314"/>
           <p:cNvSpPr/>
           <p:nvPr/>
         </p:nvSpPr>
@@ -9327,7 +9418,7 @@
       </p:sp>
       <p:pic>
         <p:nvPicPr>
-          <p:cNvPr id="10" name="icon-304" descr="preencoded.png">    </p:cNvPr>
+          <p:cNvPr id="10" name="icon-315" descr="preencoded.png">    </p:cNvPr>
           <p:cNvPicPr>
             <a:picLocks noChangeAspect="1"/>
           </p:cNvPicPr>
@@ -9351,7 +9442,7 @@
       </p:pic>
       <p:sp>
         <p:nvSpPr>
-          <p:cNvPr id="11" name="text-305"/>
+          <p:cNvPr id="11" name="text-316"/>
           <p:cNvSpPr txBox="1"/>
           <p:nvPr/>
         </p:nvSpPr>
@@ -9387,7 +9478,7 @@
       </p:sp>
       <p:sp>
         <p:nvSpPr>
-          <p:cNvPr id="12" name="icon-bg-306"/>
+          <p:cNvPr id="12" name="icon-bg-317"/>
           <p:cNvSpPr/>
           <p:nvPr/>
         </p:nvSpPr>
@@ -9407,7 +9498,7 @@
       </p:sp>
       <p:pic>
         <p:nvPicPr>
-          <p:cNvPr id="13" name="icon-307" descr="preencoded.png">    </p:cNvPr>
+          <p:cNvPr id="13" name="icon-318" descr="preencoded.png">    </p:cNvPr>
           <p:cNvPicPr>
             <a:picLocks noChangeAspect="1"/>
           </p:cNvPicPr>
@@ -9431,7 +9522,7 @@
       </p:pic>
       <p:sp>
         <p:nvSpPr>
-          <p:cNvPr id="14" name="text-308"/>
+          <p:cNvPr id="14" name="text-319"/>
           <p:cNvSpPr txBox="1"/>
           <p:nvPr/>
         </p:nvSpPr>
@@ -9467,7 +9558,7 @@
       </p:sp>
       <p:sp>
         <p:nvSpPr>
-          <p:cNvPr id="15" name="text-309"/>
+          <p:cNvPr id="15" name="text-320"/>
           <p:cNvSpPr txBox="1"/>
           <p:nvPr/>
         </p:nvSpPr>
@@ -9492,7 +9583,7 @@
             <a:r>
               <a:rPr lang="en-US" sz="1600" dirty="0">
                 <a:solidFill>
-                  <a:srgbClr val="C9D8EE"/>
+                  <a:srgbClr val="A6A6A6"/>
                 </a:solidFill>
               </a:rPr>
               <a:t>github.com/pavan2184/tencent-hack</a:t>
@@ -9503,7 +9594,7 @@
       </p:sp>
       <p:sp>
         <p:nvSpPr>
-          <p:cNvPr id="16" name="text-310"/>
+          <p:cNvPr id="16" name="text-321"/>
           <p:cNvSpPr txBox="1"/>
           <p:nvPr/>
         </p:nvSpPr>
@@ -9528,7 +9619,7 @@
             <a:r>
               <a:rPr lang="en-US" sz="1300" dirty="0">
                 <a:solidFill>
-                  <a:srgbClr val="C9D8EE"/>
+                  <a:srgbClr val="A6A6A6"/>
                 </a:solidFill>
               </a:rPr>
               <a:t>Chai · Raphael · Pavan  ·  Tencent Cloud AI CAN DO IT Hackathon Singapore 2026</a:t>
@@ -9589,20 +9680,31 @@
               <a:buNone/>
             </a:pPr>
             <a:r>
-              <a:rPr lang="en-US" sz="2800" b="1" dirty="0">
+              <a:rPr lang="en-US" sz="2600" b="1" dirty="0">
                 <a:solidFill>
                   <a:schemeClr val="tx2"/>
                 </a:solidFill>
               </a:rPr>
-              <a:t>Team status, 13 Oct (internal: remove before submission)</a:t>
-            </a:r>
-            <a:endParaRPr lang="en-US" sz="2800" dirty="0"/>
-          </a:p>
-        </p:txBody>
-      </p:sp>
-      <p:sp>
-        <p:nvSpPr>
-          <p:cNvPr id="3" name="status-col-311"/>
+              <a:t>Team status, 13 Oct</a:t>
+            </a:r>
+            <a:pPr algn="l" indent="0" marL="0">
+              <a:buNone/>
+            </a:pPr>
+            <a:r>
+              <a:rPr lang="en-US" sz="2600" b="1" dirty="0">
+                <a:solidFill>
+                  <a:srgbClr val="8C8C8C"/>
+                </a:solidFill>
+              </a:rPr>
+              <a:t> (internal: remove before submission)</a:t>
+            </a:r>
+            <a:endParaRPr lang="en-US" sz="2600" dirty="0"/>
+          </a:p>
+        </p:txBody>
+      </p:sp>
+      <p:sp>
+        <p:nvSpPr>
+          <p:cNvPr id="3" name="status-col-322"/>
           <p:cNvSpPr/>
           <p:nvPr/>
         </p:nvSpPr>
@@ -9613,18 +9715,18 @@
           </a:xfrm>
           <a:prstGeom prst="roundRect">
             <a:avLst>
-              <a:gd name="adj" fmla="val 2078"/>
+              <a:gd name="adj" fmla="val 1299"/>
             </a:avLst>
           </a:prstGeom>
           <a:solidFill>
-            <a:srgbClr val="E3F5F2"/>
+            <a:srgbClr val="EAF3EA"/>
           </a:solidFill>
           <a:ln/>
         </p:spPr>
       </p:sp>
       <p:sp>
         <p:nvSpPr>
-          <p:cNvPr id="4" name="text-312"/>
+          <p:cNvPr id="4" name="text-323"/>
           <p:cNvSpPr txBox="1"/>
           <p:nvPr/>
         </p:nvSpPr>
@@ -9660,7 +9762,7 @@
       </p:sp>
       <p:sp>
         <p:nvSpPr>
-          <p:cNvPr id="5" name="status-list-313"/>
+          <p:cNvPr id="5" name="status-list-324"/>
           <p:cNvSpPr txBox="1"/>
           <p:nvPr/>
         </p:nvSpPr>
@@ -9772,7 +9874,7 @@
       </p:sp>
       <p:sp>
         <p:nvSpPr>
-          <p:cNvPr id="6" name="status-col-314"/>
+          <p:cNvPr id="6" name="status-col-325"/>
           <p:cNvSpPr/>
           <p:nvPr/>
         </p:nvSpPr>
@@ -9783,18 +9885,18 @@
           </a:xfrm>
           <a:prstGeom prst="roundRect">
             <a:avLst>
-              <a:gd name="adj" fmla="val 2078"/>
+              <a:gd name="adj" fmla="val 1299"/>
             </a:avLst>
           </a:prstGeom>
           <a:solidFill>
-            <a:srgbClr val="FDF4E4"/>
+            <a:srgbClr val="FCF3E3"/>
           </a:solidFill>
           <a:ln/>
         </p:spPr>
       </p:sp>
       <p:sp>
         <p:nvSpPr>
-          <p:cNvPr id="7" name="text-315"/>
+          <p:cNvPr id="7" name="text-326"/>
           <p:cNvSpPr txBox="1"/>
           <p:nvPr/>
         </p:nvSpPr>
@@ -9830,7 +9932,7 @@
       </p:sp>
       <p:sp>
         <p:nvSpPr>
-          <p:cNvPr id="8" name="status-list-316"/>
+          <p:cNvPr id="8" name="status-list-327"/>
           <p:cNvSpPr txBox="1"/>
           <p:nvPr/>
         </p:nvSpPr>
@@ -9924,7 +10026,7 @@
       </p:sp>
       <p:sp>
         <p:nvSpPr>
-          <p:cNvPr id="9" name="status-col-317"/>
+          <p:cNvPr id="9" name="status-col-328"/>
           <p:cNvSpPr/>
           <p:nvPr/>
         </p:nvSpPr>
@@ -9935,18 +10037,18 @@
           </a:xfrm>
           <a:prstGeom prst="roundRect">
             <a:avLst>
-              <a:gd name="adj" fmla="val 2078"/>
+              <a:gd name="adj" fmla="val 1299"/>
             </a:avLst>
           </a:prstGeom>
           <a:solidFill>
-            <a:srgbClr val="E8F0FC"/>
+            <a:srgbClr val="F5F5F5"/>
           </a:solidFill>
           <a:ln/>
         </p:spPr>
       </p:sp>
       <p:sp>
         <p:nvSpPr>
-          <p:cNvPr id="10" name="text-318"/>
+          <p:cNvPr id="10" name="text-329"/>
           <p:cNvSpPr txBox="1"/>
           <p:nvPr/>
         </p:nvSpPr>
@@ -9974,7 +10076,7 @@
                   <a:schemeClr val="accent4"/>
                 </a:solidFill>
               </a:rPr>
-              <a:t>Next, before filming 14 Oct</a:t>
+              <a:t>Next</a:t>
             </a:r>
             <a:endParaRPr lang="en-US" sz="1900" dirty="0"/>
           </a:p>
@@ -9982,7 +10084,7 @@
       </p:sp>
       <p:sp>
         <p:nvSpPr>
-          <p:cNvPr id="11" name="status-list-319"/>
+          <p:cNvPr id="11" name="status-list-330"/>
           <p:cNvSpPr txBox="1"/>
           <p:nvPr/>
         </p:nvSpPr>
@@ -10189,20 +10291,31 @@
               <a:buNone/>
             </a:pPr>
             <a:r>
-              <a:rPr lang="en-US" sz="2800" b="1" dirty="0">
+              <a:rPr lang="en-US" sz="2600" b="1" dirty="0">
                 <a:solidFill>
                   <a:schemeClr val="tx2"/>
                 </a:solidFill>
               </a:rPr>
-              <a:t>A chatbot on top of search fails a fintech in three ways</a:t>
-            </a:r>
-            <a:endParaRPr lang="en-US" sz="2800" dirty="0"/>
-          </a:p>
-        </p:txBody>
-      </p:sp>
-      <p:sp>
-        <p:nvSpPr>
-          <p:cNvPr id="3" name="problem-card-25"/>
+              <a:t>A chatbot on top of search fails a fintech</a:t>
+            </a:r>
+            <a:pPr algn="l" indent="0" marL="0">
+              <a:buNone/>
+            </a:pPr>
+            <a:r>
+              <a:rPr lang="en-US" sz="2600" b="1" dirty="0">
+                <a:solidFill>
+                  <a:srgbClr val="8C8C8C"/>
+                </a:solidFill>
+              </a:rPr>
+              <a:t> in three ways</a:t>
+            </a:r>
+            <a:endParaRPr lang="en-US" sz="2600" dirty="0"/>
+          </a:p>
+        </p:txBody>
+      </p:sp>
+      <p:sp>
+        <p:nvSpPr>
+          <p:cNvPr id="3" name="problem-card-26"/>
           <p:cNvSpPr/>
           <p:nvPr/>
         </p:nvSpPr>
@@ -10213,7 +10326,7 @@
           </a:xfrm>
           <a:prstGeom prst="roundRect">
             <a:avLst>
-              <a:gd name="adj" fmla="val 2254"/>
+              <a:gd name="adj" fmla="val 1408"/>
             </a:avLst>
           </a:prstGeom>
           <a:solidFill>
@@ -10224,7 +10337,7 @@
       </p:sp>
       <p:sp>
         <p:nvSpPr>
-          <p:cNvPr id="4" name="icon-bg-26"/>
+          <p:cNvPr id="4" name="icon-bg-27"/>
           <p:cNvSpPr/>
           <p:nvPr/>
         </p:nvSpPr>
@@ -10244,7 +10357,7 @@
       </p:sp>
       <p:pic>
         <p:nvPicPr>
-          <p:cNvPr id="5" name="icon-27" descr="preencoded.png">    </p:cNvPr>
+          <p:cNvPr id="5" name="icon-28" descr="preencoded.png">    </p:cNvPr>
           <p:cNvPicPr>
             <a:picLocks noChangeAspect="1"/>
           </p:cNvPicPr>
@@ -10268,7 +10381,7 @@
       </p:pic>
       <p:sp>
         <p:nvSpPr>
-          <p:cNvPr id="6" name="text-28"/>
+          <p:cNvPr id="6" name="text-29"/>
           <p:cNvSpPr txBox="1"/>
           <p:nvPr/>
         </p:nvSpPr>
@@ -10304,7 +10417,7 @@
       </p:sp>
       <p:sp>
         <p:nvSpPr>
-          <p:cNvPr id="7" name="text-29"/>
+          <p:cNvPr id="7" name="text-30"/>
           <p:cNvSpPr txBox="1"/>
           <p:nvPr/>
         </p:nvSpPr>
@@ -10340,7 +10453,7 @@
       </p:sp>
       <p:sp>
         <p:nvSpPr>
-          <p:cNvPr id="8" name="problem-card-30"/>
+          <p:cNvPr id="8" name="problem-card-31"/>
           <p:cNvSpPr/>
           <p:nvPr/>
         </p:nvSpPr>
@@ -10351,7 +10464,7 @@
           </a:xfrm>
           <a:prstGeom prst="roundRect">
             <a:avLst>
-              <a:gd name="adj" fmla="val 2254"/>
+              <a:gd name="adj" fmla="val 1408"/>
             </a:avLst>
           </a:prstGeom>
           <a:solidFill>
@@ -10362,7 +10475,7 @@
       </p:sp>
       <p:sp>
         <p:nvSpPr>
-          <p:cNvPr id="9" name="icon-bg-31"/>
+          <p:cNvPr id="9" name="icon-bg-32"/>
           <p:cNvSpPr/>
           <p:nvPr/>
         </p:nvSpPr>
@@ -10382,7 +10495,7 @@
       </p:sp>
       <p:pic>
         <p:nvPicPr>
-          <p:cNvPr id="10" name="icon-32" descr="preencoded.png">    </p:cNvPr>
+          <p:cNvPr id="10" name="icon-33" descr="preencoded.png">    </p:cNvPr>
           <p:cNvPicPr>
             <a:picLocks noChangeAspect="1"/>
           </p:cNvPicPr>
@@ -10406,7 +10519,7 @@
       </p:pic>
       <p:sp>
         <p:nvSpPr>
-          <p:cNvPr id="11" name="text-33"/>
+          <p:cNvPr id="11" name="text-34"/>
           <p:cNvSpPr txBox="1"/>
           <p:nvPr/>
         </p:nvSpPr>
@@ -10442,7 +10555,7 @@
       </p:sp>
       <p:sp>
         <p:nvSpPr>
-          <p:cNvPr id="12" name="text-34"/>
+          <p:cNvPr id="12" name="text-35"/>
           <p:cNvSpPr txBox="1"/>
           <p:nvPr/>
         </p:nvSpPr>
@@ -10478,7 +10591,7 @@
       </p:sp>
       <p:sp>
         <p:nvSpPr>
-          <p:cNvPr id="13" name="problem-card-35"/>
+          <p:cNvPr id="13" name="problem-card-36"/>
           <p:cNvSpPr/>
           <p:nvPr/>
         </p:nvSpPr>
@@ -10489,7 +10602,7 @@
           </a:xfrm>
           <a:prstGeom prst="roundRect">
             <a:avLst>
-              <a:gd name="adj" fmla="val 2254"/>
+              <a:gd name="adj" fmla="val 1408"/>
             </a:avLst>
           </a:prstGeom>
           <a:solidFill>
@@ -10500,7 +10613,7 @@
       </p:sp>
       <p:sp>
         <p:nvSpPr>
-          <p:cNvPr id="14" name="icon-bg-36"/>
+          <p:cNvPr id="14" name="icon-bg-37"/>
           <p:cNvSpPr/>
           <p:nvPr/>
         </p:nvSpPr>
@@ -10520,7 +10633,7 @@
       </p:sp>
       <p:pic>
         <p:nvPicPr>
-          <p:cNvPr id="15" name="icon-37" descr="preencoded.png">    </p:cNvPr>
+          <p:cNvPr id="15" name="icon-38" descr="preencoded.png">    </p:cNvPr>
           <p:cNvPicPr>
             <a:picLocks noChangeAspect="1"/>
           </p:cNvPicPr>
@@ -10544,7 +10657,7 @@
       </p:pic>
       <p:sp>
         <p:nvSpPr>
-          <p:cNvPr id="16" name="text-38"/>
+          <p:cNvPr id="16" name="text-39"/>
           <p:cNvSpPr txBox="1"/>
           <p:nvPr/>
         </p:nvSpPr>
@@ -10580,7 +10693,7 @@
       </p:sp>
       <p:sp>
         <p:nvSpPr>
-          <p:cNvPr id="17" name="text-39"/>
+          <p:cNvPr id="17" name="text-40"/>
           <p:cNvSpPr txBox="1"/>
           <p:nvPr/>
         </p:nvSpPr>
@@ -10616,7 +10729,7 @@
       </p:sp>
       <p:sp>
         <p:nvSpPr>
-          <p:cNvPr id="18" name="context-band-40"/>
+          <p:cNvPr id="18" name="context-band-41"/>
           <p:cNvSpPr/>
           <p:nvPr/>
         </p:nvSpPr>
@@ -10627,7 +10740,7 @@
           </a:xfrm>
           <a:prstGeom prst="roundRect">
             <a:avLst>
-              <a:gd name="adj" fmla="val 6667"/>
+              <a:gd name="adj" fmla="val 4167"/>
             </a:avLst>
           </a:prstGeom>
           <a:solidFill>
@@ -10638,7 +10751,7 @@
       </p:sp>
       <p:sp>
         <p:nvSpPr>
-          <p:cNvPr id="19" name="text-41"/>
+          <p:cNvPr id="19" name="text-42"/>
           <p:cNvSpPr txBox="1"/>
           <p:nvPr/>
         </p:nvSpPr>
@@ -10674,7 +10787,7 @@
       </p:sp>
       <p:sp>
         <p:nvSpPr>
-          <p:cNvPr id="20" name="text-42"/>
+          <p:cNvPr id="20" name="text-43"/>
           <p:cNvSpPr txBox="1"/>
           <p:nvPr/>
         </p:nvSpPr>
@@ -10699,7 +10812,7 @@
             <a:r>
               <a:rPr lang="en-US" sz="1300" dirty="0">
                 <a:solidFill>
-                  <a:srgbClr val="C9D8EE"/>
+                  <a:srgbClr val="A6A6A6"/>
                 </a:solidFill>
               </a:rPr>
               <a:t>employees</a:t>
@@ -10710,7 +10823,7 @@
       </p:sp>
       <p:sp>
         <p:nvSpPr>
-          <p:cNvPr id="21" name="text-43"/>
+          <p:cNvPr id="21" name="text-44"/>
           <p:cNvSpPr txBox="1"/>
           <p:nvPr/>
         </p:nvSpPr>
@@ -10746,7 +10859,7 @@
       </p:sp>
       <p:sp>
         <p:nvSpPr>
-          <p:cNvPr id="22" name="text-44"/>
+          <p:cNvPr id="22" name="text-45"/>
           <p:cNvSpPr txBox="1"/>
           <p:nvPr/>
         </p:nvSpPr>
@@ -10771,7 +10884,7 @@
             <a:r>
               <a:rPr lang="en-US" sz="1300" dirty="0">
                 <a:solidFill>
-                  <a:srgbClr val="C9D8EE"/>
+                  <a:srgbClr val="A6A6A6"/>
                 </a:solidFill>
               </a:rPr>
               <a:t>countries</a:t>
@@ -10782,7 +10895,7 @@
       </p:sp>
       <p:sp>
         <p:nvSpPr>
-          <p:cNvPr id="23" name="text-45"/>
+          <p:cNvPr id="23" name="text-46"/>
           <p:cNvSpPr txBox="1"/>
           <p:nvPr/>
         </p:nvSpPr>
@@ -10818,7 +10931,7 @@
       </p:sp>
       <p:sp>
         <p:nvSpPr>
-          <p:cNvPr id="24" name="text-46"/>
+          <p:cNvPr id="24" name="text-47"/>
           <p:cNvSpPr txBox="1"/>
           <p:nvPr/>
         </p:nvSpPr>
@@ -10843,7 +10956,7 @@
             <a:r>
               <a:rPr lang="en-US" sz="1300" dirty="0">
                 <a:solidFill>
-                  <a:srgbClr val="C9D8EE"/>
+                  <a:srgbClr val="A6A6A6"/>
                 </a:solidFill>
               </a:rPr>
               <a:t>client markets</a:t>
@@ -10854,7 +10967,7 @@
       </p:sp>
       <p:sp>
         <p:nvSpPr>
-          <p:cNvPr id="25" name="text-47"/>
+          <p:cNvPr id="25" name="text-48"/>
           <p:cNvSpPr txBox="1"/>
           <p:nvPr/>
         </p:nvSpPr>
@@ -10890,7 +11003,7 @@
       </p:sp>
       <p:sp>
         <p:nvSpPr>
-          <p:cNvPr id="26" name="text-48"/>
+          <p:cNvPr id="26" name="text-49"/>
           <p:cNvSpPr txBox="1"/>
           <p:nvPr/>
         </p:nvSpPr>
@@ -10915,7 +11028,7 @@
             <a:r>
               <a:rPr lang="en-US" sz="1300" dirty="0">
                 <a:solidFill>
-                  <a:srgbClr val="C9D8EE"/>
+                  <a:srgbClr val="A6A6A6"/>
                 </a:solidFill>
               </a:rPr>
               <a:t>platforms, 4 permission models</a:t>
@@ -10926,7 +11039,7 @@
       </p:sp>
       <p:sp>
         <p:nvSpPr>
-          <p:cNvPr id="27" name="text-49"/>
+          <p:cNvPr id="27" name="text-50"/>
           <p:cNvSpPr txBox="1"/>
           <p:nvPr/>
         </p:nvSpPr>
@@ -10951,7 +11064,7 @@
             <a:r>
               <a:rPr lang="en-US" sz="1100" i="1" dirty="0">
                 <a:solidFill>
-                  <a:srgbClr val="C9D8EE"/>
+                  <a:srgbClr val="A6A6A6"/>
                 </a:solidFill>
               </a:rPr>
               <a:t>Aspire, per the challenge brief</a:t>
@@ -11057,42 +11170,53 @@
               <a:buNone/>
             </a:pPr>
             <a:r>
-              <a:rPr lang="en-US" sz="2800" b="1" dirty="0">
+              <a:rPr lang="en-US" sz="2600" b="1" dirty="0">
                 <a:solidFill>
                   <a:schemeClr val="tx2"/>
                 </a:solidFill>
               </a:rPr>
-              <a:t>Our answer: one governed pipeline, four guarantees on every response</a:t>
-            </a:r>
-            <a:endParaRPr lang="en-US" sz="2800" dirty="0"/>
-          </a:p>
-        </p:txBody>
-      </p:sp>
-      <p:sp>
-        <p:nvSpPr>
-          <p:cNvPr id="3" name="pillar-50"/>
+              <a:t>One governed pipeline,</a:t>
+            </a:r>
+            <a:pPr algn="l" indent="0" marL="0">
+              <a:buNone/>
+            </a:pPr>
+            <a:r>
+              <a:rPr lang="en-US" sz="2600" b="1" dirty="0">
+                <a:solidFill>
+                  <a:srgbClr val="8C8C8C"/>
+                </a:solidFill>
+              </a:rPr>
+              <a:t> four guarantees on every answer</a:t>
+            </a:r>
+            <a:endParaRPr lang="en-US" sz="2600" dirty="0"/>
+          </a:p>
+        </p:txBody>
+      </p:sp>
+      <p:sp>
+        <p:nvSpPr>
+          <p:cNvPr id="3" name="pillar-51"/>
           <p:cNvSpPr/>
           <p:nvPr/>
         </p:nvSpPr>
         <p:spPr>
           <a:xfrm>
             <a:off x="548640" y="1417320"/>
-            <a:ext cx="2606040" cy="3429000"/>
+            <a:ext cx="2606040" cy="3657600"/>
           </a:xfrm>
           <a:prstGeom prst="roundRect">
             <a:avLst>
-              <a:gd name="adj" fmla="val 2807"/>
+              <a:gd name="adj" fmla="val 1754"/>
             </a:avLst>
           </a:prstGeom>
           <a:solidFill>
-            <a:srgbClr val="E3F5F2"/>
+            <a:srgbClr val="EAF3EA"/>
           </a:solidFill>
           <a:ln/>
         </p:spPr>
       </p:sp>
       <p:sp>
         <p:nvSpPr>
-          <p:cNvPr id="4" name="icon-bg-51"/>
+          <p:cNvPr id="4" name="icon-bg-52"/>
           <p:cNvSpPr/>
           <p:nvPr/>
         </p:nvSpPr>
@@ -11112,7 +11236,7 @@
       </p:sp>
       <p:pic>
         <p:nvPicPr>
-          <p:cNvPr id="5" name="icon-52" descr="preencoded.png">    </p:cNvPr>
+          <p:cNvPr id="5" name="icon-53" descr="preencoded.png">    </p:cNvPr>
           <p:cNvPicPr>
             <a:picLocks noChangeAspect="1"/>
           </p:cNvPicPr>
@@ -11136,7 +11260,7 @@
       </p:pic>
       <p:sp>
         <p:nvSpPr>
-          <p:cNvPr id="6" name="text-53"/>
+          <p:cNvPr id="6" name="text-54"/>
           <p:cNvSpPr txBox="1"/>
           <p:nvPr/>
         </p:nvSpPr>
@@ -11172,7 +11296,7 @@
       </p:sp>
       <p:sp>
         <p:nvSpPr>
-          <p:cNvPr id="7" name="text-54"/>
+          <p:cNvPr id="7" name="text-55"/>
           <p:cNvSpPr txBox="1"/>
           <p:nvPr/>
         </p:nvSpPr>
@@ -11208,29 +11332,29 @@
       </p:sp>
       <p:sp>
         <p:nvSpPr>
-          <p:cNvPr id="8" name="pillar-55"/>
+          <p:cNvPr id="8" name="pillar-56"/>
           <p:cNvSpPr/>
           <p:nvPr/>
         </p:nvSpPr>
         <p:spPr>
           <a:xfrm>
             <a:off x="3364992" y="1417320"/>
-            <a:ext cx="2606040" cy="3429000"/>
+            <a:ext cx="2606040" cy="3657600"/>
           </a:xfrm>
           <a:prstGeom prst="roundRect">
             <a:avLst>
-              <a:gd name="adj" fmla="val 2807"/>
+              <a:gd name="adj" fmla="val 1754"/>
             </a:avLst>
           </a:prstGeom>
           <a:solidFill>
-            <a:srgbClr val="FDF4E4"/>
+            <a:srgbClr val="FCF3E3"/>
           </a:solidFill>
           <a:ln/>
         </p:spPr>
       </p:sp>
       <p:sp>
         <p:nvSpPr>
-          <p:cNvPr id="9" name="icon-bg-56"/>
+          <p:cNvPr id="9" name="icon-bg-57"/>
           <p:cNvSpPr/>
           <p:nvPr/>
         </p:nvSpPr>
@@ -11250,7 +11374,7 @@
       </p:sp>
       <p:pic>
         <p:nvPicPr>
-          <p:cNvPr id="10" name="icon-57" descr="preencoded.png">    </p:cNvPr>
+          <p:cNvPr id="10" name="icon-58" descr="preencoded.png">    </p:cNvPr>
           <p:cNvPicPr>
             <a:picLocks noChangeAspect="1"/>
           </p:cNvPicPr>
@@ -11274,7 +11398,7 @@
       </p:pic>
       <p:sp>
         <p:nvSpPr>
-          <p:cNvPr id="11" name="text-58"/>
+          <p:cNvPr id="11" name="text-59"/>
           <p:cNvSpPr txBox="1"/>
           <p:nvPr/>
         </p:nvSpPr>
@@ -11310,7 +11434,7 @@
       </p:sp>
       <p:sp>
         <p:nvSpPr>
-          <p:cNvPr id="12" name="text-59"/>
+          <p:cNvPr id="12" name="text-60"/>
           <p:cNvSpPr txBox="1"/>
           <p:nvPr/>
         </p:nvSpPr>
@@ -11346,29 +11470,29 @@
       </p:sp>
       <p:sp>
         <p:nvSpPr>
-          <p:cNvPr id="13" name="pillar-60"/>
+          <p:cNvPr id="13" name="pillar-61"/>
           <p:cNvSpPr/>
           <p:nvPr/>
         </p:nvSpPr>
         <p:spPr>
           <a:xfrm>
             <a:off x="6181344" y="1417320"/>
-            <a:ext cx="2606040" cy="3429000"/>
+            <a:ext cx="2606040" cy="3657600"/>
           </a:xfrm>
           <a:prstGeom prst="roundRect">
             <a:avLst>
-              <a:gd name="adj" fmla="val 2807"/>
+              <a:gd name="adj" fmla="val 1754"/>
             </a:avLst>
           </a:prstGeom>
           <a:solidFill>
-            <a:srgbClr val="E8F0FC"/>
+            <a:srgbClr val="F5F5F5"/>
           </a:solidFill>
           <a:ln/>
         </p:spPr>
       </p:sp>
       <p:sp>
         <p:nvSpPr>
-          <p:cNvPr id="14" name="icon-bg-61"/>
+          <p:cNvPr id="14" name="icon-bg-62"/>
           <p:cNvSpPr/>
           <p:nvPr/>
         </p:nvSpPr>
@@ -11388,7 +11512,7 @@
       </p:sp>
       <p:pic>
         <p:nvPicPr>
-          <p:cNvPr id="15" name="icon-62" descr="preencoded.png">    </p:cNvPr>
+          <p:cNvPr id="15" name="icon-63" descr="preencoded.png">    </p:cNvPr>
           <p:cNvPicPr>
             <a:picLocks noChangeAspect="1"/>
           </p:cNvPicPr>
@@ -11412,7 +11536,7 @@
       </p:pic>
       <p:sp>
         <p:nvSpPr>
-          <p:cNvPr id="16" name="text-63"/>
+          <p:cNvPr id="16" name="text-64"/>
           <p:cNvSpPr txBox="1"/>
           <p:nvPr/>
         </p:nvSpPr>
@@ -11448,7 +11572,7 @@
       </p:sp>
       <p:sp>
         <p:nvSpPr>
-          <p:cNvPr id="17" name="text-64"/>
+          <p:cNvPr id="17" name="text-65"/>
           <p:cNvSpPr txBox="1"/>
           <p:nvPr/>
         </p:nvSpPr>
@@ -11484,29 +11608,29 @@
       </p:sp>
       <p:sp>
         <p:nvSpPr>
-          <p:cNvPr id="18" name="pillar-65"/>
+          <p:cNvPr id="18" name="pillar-66"/>
           <p:cNvSpPr/>
           <p:nvPr/>
         </p:nvSpPr>
         <p:spPr>
           <a:xfrm>
             <a:off x="8997696" y="1417320"/>
-            <a:ext cx="2606040" cy="3429000"/>
+            <a:ext cx="2606040" cy="3657600"/>
           </a:xfrm>
           <a:prstGeom prst="roundRect">
             <a:avLst>
-              <a:gd name="adj" fmla="val 2807"/>
+              <a:gd name="adj" fmla="val 1754"/>
             </a:avLst>
           </a:prstGeom>
           <a:solidFill>
-            <a:srgbClr val="EFEBFB"/>
+            <a:srgbClr val="F5F5F5"/>
           </a:solidFill>
           <a:ln/>
         </p:spPr>
       </p:sp>
       <p:sp>
         <p:nvSpPr>
-          <p:cNvPr id="19" name="icon-bg-66"/>
+          <p:cNvPr id="19" name="icon-bg-67"/>
           <p:cNvSpPr/>
           <p:nvPr/>
         </p:nvSpPr>
@@ -11526,7 +11650,7 @@
       </p:sp>
       <p:pic>
         <p:nvPicPr>
-          <p:cNvPr id="20" name="icon-67" descr="preencoded.png">    </p:cNvPr>
+          <p:cNvPr id="20" name="icon-68" descr="preencoded.png">    </p:cNvPr>
           <p:cNvPicPr>
             <a:picLocks noChangeAspect="1"/>
           </p:cNvPicPr>
@@ -11550,7 +11674,7 @@
       </p:pic>
       <p:sp>
         <p:nvSpPr>
-          <p:cNvPr id="21" name="text-68"/>
+          <p:cNvPr id="21" name="text-69"/>
           <p:cNvSpPr txBox="1"/>
           <p:nvPr/>
         </p:nvSpPr>
@@ -11586,7 +11710,7 @@
       </p:sp>
       <p:sp>
         <p:nvSpPr>
-          <p:cNvPr id="22" name="text-69"/>
+          <p:cNvPr id="22" name="text-70"/>
           <p:cNvSpPr txBox="1"/>
           <p:nvPr/>
         </p:nvSpPr>
@@ -11622,13 +11746,13 @@
       </p:sp>
       <p:sp>
         <p:nvSpPr>
-          <p:cNvPr id="23" name="text-70"/>
+          <p:cNvPr id="23" name="text-71"/>
           <p:cNvSpPr txBox="1"/>
           <p:nvPr/>
         </p:nvSpPr>
         <p:spPr>
           <a:xfrm>
-            <a:off x="548640" y="5074920"/>
+            <a:off x="548640" y="5257800"/>
             <a:ext cx="11064240" cy="548640"/>
           </a:xfrm>
           <a:prstGeom prst="rect">
@@ -11764,20 +11888,31 @@
               <a:buNone/>
             </a:pPr>
             <a:r>
-              <a:rPr lang="en-US" sz="2800" b="1" dirty="0">
+              <a:rPr lang="en-US" sz="2600" b="1" dirty="0">
                 <a:solidFill>
                   <a:schemeClr val="tx2"/>
                 </a:solidFill>
               </a:rPr>
-              <a:t>Restricted evidence never reaches the language model</a:t>
-            </a:r>
-            <a:endParaRPr lang="en-US" sz="2800" dirty="0"/>
-          </a:p>
-        </p:txBody>
-      </p:sp>
-      <p:sp>
-        <p:nvSpPr>
-          <p:cNvPr id="3" name="zone-untrusted-71"/>
+              <a:t>Restricted evidence never reaches</a:t>
+            </a:r>
+            <a:pPr algn="l" indent="0" marL="0">
+              <a:buNone/>
+            </a:pPr>
+            <a:r>
+              <a:rPr lang="en-US" sz="2600" b="1" dirty="0">
+                <a:solidFill>
+                  <a:srgbClr val="8C8C8C"/>
+                </a:solidFill>
+              </a:rPr>
+              <a:t> the language model</a:t>
+            </a:r>
+            <a:endParaRPr lang="en-US" sz="2600" dirty="0"/>
+          </a:p>
+        </p:txBody>
+      </p:sp>
+      <p:sp>
+        <p:nvSpPr>
+          <p:cNvPr id="3" name="zone-untrusted-72"/>
           <p:cNvSpPr/>
           <p:nvPr/>
         </p:nvSpPr>
@@ -11804,7 +11939,7 @@
       </p:sp>
       <p:sp>
         <p:nvSpPr>
-          <p:cNvPr id="4" name="text-72"/>
+          <p:cNvPr id="4" name="text-73"/>
           <p:cNvSpPr txBox="1"/>
           <p:nvPr/>
         </p:nvSpPr>
@@ -11840,7 +11975,7 @@
       </p:sp>
       <p:sp>
         <p:nvSpPr>
-          <p:cNvPr id="5" name="zone-server-73"/>
+          <p:cNvPr id="5" name="zone-server-74"/>
           <p:cNvSpPr/>
           <p:nvPr/>
         </p:nvSpPr>
@@ -11855,14 +11990,14 @@
             </a:avLst>
           </a:prstGeom>
           <a:solidFill>
-            <a:srgbClr val="EEF3F8"/>
+            <a:srgbClr val="F5F5F5"/>
           </a:solidFill>
           <a:ln/>
         </p:spPr>
       </p:sp>
       <p:sp>
         <p:nvSpPr>
-          <p:cNvPr id="6" name="text-74"/>
+          <p:cNvPr id="6" name="text-75"/>
           <p:cNvSpPr txBox="1"/>
           <p:nvPr/>
         </p:nvSpPr>
@@ -11898,7 +12033,7 @@
       </p:sp>
       <p:sp>
         <p:nvSpPr>
-          <p:cNvPr id="7" name="zone-model-75"/>
+          <p:cNvPr id="7" name="zone-model-76"/>
           <p:cNvSpPr/>
           <p:nvPr/>
         </p:nvSpPr>
@@ -11913,7 +12048,7 @@
             </a:avLst>
           </a:prstGeom>
           <a:solidFill>
-            <a:srgbClr val="EFEBFB"/>
+            <a:srgbClr val="F5F5F5"/>
           </a:solidFill>
           <a:ln w="12700">
             <a:solidFill>
@@ -11925,7 +12060,7 @@
       </p:sp>
       <p:sp>
         <p:nvSpPr>
-          <p:cNvPr id="8" name="text-76"/>
+          <p:cNvPr id="8" name="text-77"/>
           <p:cNvSpPr txBox="1"/>
           <p:nvPr/>
         </p:nvSpPr>
@@ -11961,7 +12096,7 @@
       </p:sp>
       <p:sp>
         <p:nvSpPr>
-          <p:cNvPr id="9" name="zone-server-2-77"/>
+          <p:cNvPr id="9" name="zone-server-2-78"/>
           <p:cNvSpPr/>
           <p:nvPr/>
         </p:nvSpPr>
@@ -11976,14 +12111,14 @@
             </a:avLst>
           </a:prstGeom>
           <a:solidFill>
-            <a:srgbClr val="EEF3F8"/>
+            <a:srgbClr val="F5F5F5"/>
           </a:solidFill>
           <a:ln/>
         </p:spPr>
       </p:sp>
       <p:sp>
         <p:nvSpPr>
-          <p:cNvPr id="10" name="text-78"/>
+          <p:cNvPr id="10" name="text-79"/>
           <p:cNvSpPr txBox="1"/>
           <p:nvPr/>
         </p:nvSpPr>
@@ -12019,7 +12154,7 @@
       </p:sp>
       <p:sp>
         <p:nvSpPr>
-          <p:cNvPr id="11" name="step-79"/>
+          <p:cNvPr id="11" name="step-80"/>
           <p:cNvSpPr/>
           <p:nvPr/>
         </p:nvSpPr>
@@ -12030,7 +12165,7 @@
           </a:xfrm>
           <a:prstGeom prst="roundRect">
             <a:avLst>
-              <a:gd name="adj" fmla="val 6061"/>
+              <a:gd name="adj" fmla="val 3788"/>
             </a:avLst>
           </a:prstGeom>
           <a:solidFill>
@@ -12046,7 +12181,7 @@
       </p:sp>
       <p:sp>
         <p:nvSpPr>
-          <p:cNvPr id="12" name="text-80"/>
+          <p:cNvPr id="12" name="text-81"/>
           <p:cNvSpPr txBox="1"/>
           <p:nvPr/>
         </p:nvSpPr>
@@ -12082,7 +12217,7 @@
       </p:sp>
       <p:sp>
         <p:nvSpPr>
-          <p:cNvPr id="13" name="text-81"/>
+          <p:cNvPr id="13" name="text-82"/>
           <p:cNvSpPr txBox="1"/>
           <p:nvPr/>
         </p:nvSpPr>
@@ -12105,20 +12240,20 @@
               <a:buNone/>
             </a:pPr>
             <a:r>
-              <a:rPr lang="en-US" sz="1100" dirty="0">
+              <a:rPr lang="en-US" sz="1050" dirty="0">
                 <a:solidFill>
                   <a:schemeClr val="tx1"/>
                 </a:solidFill>
               </a:rPr>
               <a:t>Employee, contractor, auditor or agent</a:t>
             </a:r>
-            <a:endParaRPr lang="en-US" sz="1100" dirty="0"/>
-          </a:p>
-        </p:txBody>
-      </p:sp>
-      <p:sp>
-        <p:nvSpPr>
-          <p:cNvPr id="14" name="arrow-82"/>
+            <a:endParaRPr lang="en-US" sz="1050" dirty="0"/>
+          </a:p>
+        </p:txBody>
+      </p:sp>
+      <p:sp>
+        <p:nvSpPr>
+          <p:cNvPr id="14" name="arrow-83"/>
           <p:cNvSpPr/>
           <p:nvPr/>
         </p:nvSpPr>
@@ -12142,7 +12277,7 @@
       </p:sp>
       <p:sp>
         <p:nvSpPr>
-          <p:cNvPr id="15" name="step-83"/>
+          <p:cNvPr id="15" name="step-84"/>
           <p:cNvSpPr/>
           <p:nvPr/>
         </p:nvSpPr>
@@ -12153,7 +12288,7 @@
           </a:xfrm>
           <a:prstGeom prst="roundRect">
             <a:avLst>
-              <a:gd name="adj" fmla="val 6061"/>
+              <a:gd name="adj" fmla="val 3788"/>
             </a:avLst>
           </a:prstGeom>
           <a:solidFill>
@@ -12169,7 +12304,7 @@
       </p:sp>
       <p:sp>
         <p:nvSpPr>
-          <p:cNvPr id="16" name="text-84"/>
+          <p:cNvPr id="16" name="text-85"/>
           <p:cNvSpPr txBox="1"/>
           <p:nvPr/>
         </p:nvSpPr>
@@ -12205,7 +12340,7 @@
       </p:sp>
       <p:sp>
         <p:nvSpPr>
-          <p:cNvPr id="17" name="text-85"/>
+          <p:cNvPr id="17" name="text-86"/>
           <p:cNvSpPr txBox="1"/>
           <p:nvPr/>
         </p:nvSpPr>
@@ -12228,20 +12363,20 @@
               <a:buNone/>
             </a:pPr>
             <a:r>
-              <a:rPr lang="en-US" sz="1100" dirty="0">
+              <a:rPr lang="en-US" sz="1050" dirty="0">
                 <a:solidFill>
                   <a:schemeClr val="tx1"/>
                 </a:solidFill>
               </a:rPr>
               <a:t>Resolved server-side; demo personas, SSO in production</a:t>
             </a:r>
-            <a:endParaRPr lang="en-US" sz="1100" dirty="0"/>
-          </a:p>
-        </p:txBody>
-      </p:sp>
-      <p:sp>
-        <p:nvSpPr>
-          <p:cNvPr id="18" name="arrow-86"/>
+            <a:endParaRPr lang="en-US" sz="1050" dirty="0"/>
+          </a:p>
+        </p:txBody>
+      </p:sp>
+      <p:sp>
+        <p:nvSpPr>
+          <p:cNvPr id="18" name="arrow-87"/>
           <p:cNvSpPr/>
           <p:nvPr/>
         </p:nvSpPr>
@@ -12265,7 +12400,7 @@
       </p:sp>
       <p:sp>
         <p:nvSpPr>
-          <p:cNvPr id="19" name="step-87"/>
+          <p:cNvPr id="19" name="step-88"/>
           <p:cNvSpPr/>
           <p:nvPr/>
         </p:nvSpPr>
@@ -12276,7 +12411,7 @@
           </a:xfrm>
           <a:prstGeom prst="roundRect">
             <a:avLst>
-              <a:gd name="adj" fmla="val 6061"/>
+              <a:gd name="adj" fmla="val 3788"/>
             </a:avLst>
           </a:prstGeom>
           <a:solidFill>
@@ -12292,7 +12427,7 @@
       </p:sp>
       <p:sp>
         <p:nvSpPr>
-          <p:cNvPr id="20" name="text-88"/>
+          <p:cNvPr id="20" name="text-89"/>
           <p:cNvSpPr txBox="1"/>
           <p:nvPr/>
         </p:nvSpPr>
@@ -12328,7 +12463,7 @@
       </p:sp>
       <p:sp>
         <p:nvSpPr>
-          <p:cNvPr id="21" name="text-89"/>
+          <p:cNvPr id="21" name="text-90"/>
           <p:cNvSpPr txBox="1"/>
           <p:nvPr/>
         </p:nvSpPr>
@@ -12351,20 +12486,20 @@
               <a:buNone/>
             </a:pPr>
             <a:r>
-              <a:rPr lang="en-US" sz="1100" dirty="0">
+              <a:rPr lang="en-US" sz="1050" dirty="0">
                 <a:solidFill>
                   <a:schemeClr val="tx1"/>
                 </a:solidFill>
               </a:rPr>
               <a:t>Hybrid keyword + vector search across all four sources</a:t>
             </a:r>
-            <a:endParaRPr lang="en-US" sz="1100" dirty="0"/>
-          </a:p>
-        </p:txBody>
-      </p:sp>
-      <p:sp>
-        <p:nvSpPr>
-          <p:cNvPr id="22" name="arrow-90"/>
+            <a:endParaRPr lang="en-US" sz="1050" dirty="0"/>
+          </a:p>
+        </p:txBody>
+      </p:sp>
+      <p:sp>
+        <p:nvSpPr>
+          <p:cNvPr id="22" name="arrow-91"/>
           <p:cNvSpPr/>
           <p:nvPr/>
         </p:nvSpPr>
@@ -12388,7 +12523,7 @@
       </p:sp>
       <p:sp>
         <p:nvSpPr>
-          <p:cNvPr id="23" name="step-91"/>
+          <p:cNvPr id="23" name="step-92"/>
           <p:cNvSpPr/>
           <p:nvPr/>
         </p:nvSpPr>
@@ -12399,11 +12534,11 @@
           </a:xfrm>
           <a:prstGeom prst="roundRect">
             <a:avLst>
-              <a:gd name="adj" fmla="val 6061"/>
+              <a:gd name="adj" fmla="val 3788"/>
             </a:avLst>
           </a:prstGeom>
           <a:solidFill>
-            <a:srgbClr val="E3F5F2"/>
+            <a:srgbClr val="EAF3EA"/>
           </a:solidFill>
           <a:ln w="28575">
             <a:solidFill>
@@ -12415,7 +12550,7 @@
       </p:sp>
       <p:sp>
         <p:nvSpPr>
-          <p:cNvPr id="24" name="text-92"/>
+          <p:cNvPr id="24" name="text-93"/>
           <p:cNvSpPr txBox="1"/>
           <p:nvPr/>
         </p:nvSpPr>
@@ -12451,7 +12586,7 @@
       </p:sp>
       <p:sp>
         <p:nvSpPr>
-          <p:cNvPr id="25" name="text-93"/>
+          <p:cNvPr id="25" name="text-94"/>
           <p:cNvSpPr txBox="1"/>
           <p:nvPr/>
         </p:nvSpPr>
@@ -12474,20 +12609,20 @@
               <a:buNone/>
             </a:pPr>
             <a:r>
-              <a:rPr lang="en-US" sz="1100" dirty="0">
+              <a:rPr lang="en-US" sz="1050" dirty="0">
                 <a:solidFill>
                   <a:schemeClr val="tx1"/>
                 </a:solidFill>
               </a:rPr>
               <a:t>Allow/deny per document; permissions under 5 min old</a:t>
             </a:r>
-            <a:endParaRPr lang="en-US" sz="1100" dirty="0"/>
-          </a:p>
-        </p:txBody>
-      </p:sp>
-      <p:sp>
-        <p:nvSpPr>
-          <p:cNvPr id="26" name="arrow-94"/>
+            <a:endParaRPr lang="en-US" sz="1050" dirty="0"/>
+          </a:p>
+        </p:txBody>
+      </p:sp>
+      <p:sp>
+        <p:nvSpPr>
+          <p:cNvPr id="26" name="arrow-95"/>
           <p:cNvSpPr/>
           <p:nvPr/>
         </p:nvSpPr>
@@ -12511,7 +12646,7 @@
       </p:sp>
       <p:sp>
         <p:nvSpPr>
-          <p:cNvPr id="27" name="step-95"/>
+          <p:cNvPr id="27" name="step-96"/>
           <p:cNvSpPr/>
           <p:nvPr/>
         </p:nvSpPr>
@@ -12522,7 +12657,7 @@
           </a:xfrm>
           <a:prstGeom prst="roundRect">
             <a:avLst>
-              <a:gd name="adj" fmla="val 6061"/>
+              <a:gd name="adj" fmla="val 3788"/>
             </a:avLst>
           </a:prstGeom>
           <a:solidFill>
@@ -12538,7 +12673,7 @@
       </p:sp>
       <p:sp>
         <p:nvSpPr>
-          <p:cNvPr id="28" name="text-96"/>
+          <p:cNvPr id="28" name="text-97"/>
           <p:cNvSpPr txBox="1"/>
           <p:nvPr/>
         </p:nvSpPr>
@@ -12574,7 +12709,7 @@
       </p:sp>
       <p:sp>
         <p:nvSpPr>
-          <p:cNvPr id="29" name="text-97"/>
+          <p:cNvPr id="29" name="text-98"/>
           <p:cNvSpPr txBox="1"/>
           <p:nvPr/>
         </p:nvSpPr>
@@ -12597,20 +12732,20 @@
               <a:buNone/>
             </a:pPr>
             <a:r>
-              <a:rPr lang="en-US" sz="1100" dirty="0">
+              <a:rPr lang="en-US" sz="1050" dirty="0">
                 <a:solidFill>
                   <a:schemeClr val="tx1"/>
                 </a:solidFill>
               </a:rPr>
               <a:t>Live-verify critical docs; screen injection</a:t>
             </a:r>
-            <a:endParaRPr lang="en-US" sz="1100" dirty="0"/>
-          </a:p>
-        </p:txBody>
-      </p:sp>
-      <p:sp>
-        <p:nvSpPr>
-          <p:cNvPr id="30" name="arrow-98"/>
+            <a:endParaRPr lang="en-US" sz="1050" dirty="0"/>
+          </a:p>
+        </p:txBody>
+      </p:sp>
+      <p:sp>
+        <p:nvSpPr>
+          <p:cNvPr id="30" name="arrow-99"/>
           <p:cNvSpPr/>
           <p:nvPr/>
         </p:nvSpPr>
@@ -12634,7 +12769,7 @@
       </p:sp>
       <p:sp>
         <p:nvSpPr>
-          <p:cNvPr id="31" name="step-99"/>
+          <p:cNvPr id="31" name="step-100"/>
           <p:cNvSpPr/>
           <p:nvPr/>
         </p:nvSpPr>
@@ -12645,7 +12780,7 @@
           </a:xfrm>
           <a:prstGeom prst="roundRect">
             <a:avLst>
-              <a:gd name="adj" fmla="val 6061"/>
+              <a:gd name="adj" fmla="val 3788"/>
             </a:avLst>
           </a:prstGeom>
           <a:solidFill>
@@ -12661,7 +12796,7 @@
       </p:sp>
       <p:sp>
         <p:nvSpPr>
-          <p:cNvPr id="32" name="text-100"/>
+          <p:cNvPr id="32" name="text-101"/>
           <p:cNvSpPr txBox="1"/>
           <p:nvPr/>
         </p:nvSpPr>
@@ -12697,7 +12832,7 @@
       </p:sp>
       <p:sp>
         <p:nvSpPr>
-          <p:cNvPr id="33" name="text-101"/>
+          <p:cNvPr id="33" name="text-102"/>
           <p:cNvSpPr txBox="1"/>
           <p:nvPr/>
         </p:nvSpPr>
@@ -12720,20 +12855,20 @@
               <a:buNone/>
             </a:pPr>
             <a:r>
-              <a:rPr lang="en-US" sz="1100" dirty="0">
+              <a:rPr lang="en-US" sz="1050" dirty="0">
                 <a:solidFill>
                   <a:schemeClr val="tx1"/>
                 </a:solidFill>
               </a:rPr>
               <a:t>Tencent Cloud ADP composes from cited spans</a:t>
             </a:r>
-            <a:endParaRPr lang="en-US" sz="1100" dirty="0"/>
-          </a:p>
-        </p:txBody>
-      </p:sp>
-      <p:sp>
-        <p:nvSpPr>
-          <p:cNvPr id="34" name="arrow-102"/>
+            <a:endParaRPr lang="en-US" sz="1050" dirty="0"/>
+          </a:p>
+        </p:txBody>
+      </p:sp>
+      <p:sp>
+        <p:nvSpPr>
+          <p:cNvPr id="34" name="arrow-103"/>
           <p:cNvSpPr/>
           <p:nvPr/>
         </p:nvSpPr>
@@ -12757,7 +12892,7 @@
       </p:sp>
       <p:sp>
         <p:nvSpPr>
-          <p:cNvPr id="35" name="step-103"/>
+          <p:cNvPr id="35" name="step-104"/>
           <p:cNvSpPr/>
           <p:nvPr/>
         </p:nvSpPr>
@@ -12768,7 +12903,7 @@
           </a:xfrm>
           <a:prstGeom prst="roundRect">
             <a:avLst>
-              <a:gd name="adj" fmla="val 6061"/>
+              <a:gd name="adj" fmla="val 3788"/>
             </a:avLst>
           </a:prstGeom>
           <a:solidFill>
@@ -12784,7 +12919,7 @@
       </p:sp>
       <p:sp>
         <p:nvSpPr>
-          <p:cNvPr id="36" name="text-104"/>
+          <p:cNvPr id="36" name="text-105"/>
           <p:cNvSpPr txBox="1"/>
           <p:nvPr/>
         </p:nvSpPr>
@@ -12820,7 +12955,7 @@
       </p:sp>
       <p:sp>
         <p:nvSpPr>
-          <p:cNvPr id="37" name="text-105"/>
+          <p:cNvPr id="37" name="text-106"/>
           <p:cNvSpPr txBox="1"/>
           <p:nvPr/>
         </p:nvSpPr>
@@ -12843,20 +12978,20 @@
               <a:buNone/>
             </a:pPr>
             <a:r>
-              <a:rPr lang="en-US" sz="1100" dirty="0">
+              <a:rPr lang="en-US" sz="1050" dirty="0">
                 <a:solidFill>
                   <a:schemeClr val="tx1"/>
                 </a:solidFill>
               </a:rPr>
-              <a:t>Deterministic check of every claim, numbers included; no LLM judge</a:t>
-            </a:r>
-            <a:endParaRPr lang="en-US" sz="1100" dirty="0"/>
-          </a:p>
-        </p:txBody>
-      </p:sp>
-      <p:sp>
-        <p:nvSpPr>
-          <p:cNvPr id="38" name="arrow-106"/>
+              <a:t>Deterministic check of each claim; no LLM judge</a:t>
+            </a:r>
+            <a:endParaRPr lang="en-US" sz="1050" dirty="0"/>
+          </a:p>
+        </p:txBody>
+      </p:sp>
+      <p:sp>
+        <p:nvSpPr>
+          <p:cNvPr id="38" name="arrow-107"/>
           <p:cNvSpPr/>
           <p:nvPr/>
         </p:nvSpPr>
@@ -12879,7 +13014,7 @@
       </p:sp>
       <p:sp>
         <p:nvSpPr>
-          <p:cNvPr id="39" name="arrow-107"/>
+          <p:cNvPr id="39" name="arrow-108"/>
           <p:cNvSpPr/>
           <p:nvPr/>
         </p:nvSpPr>
@@ -12902,7 +13037,7 @@
       </p:sp>
       <p:sp>
         <p:nvSpPr>
-          <p:cNvPr id="40" name="arrow-108"/>
+          <p:cNvPr id="40" name="arrow-109"/>
           <p:cNvSpPr/>
           <p:nvPr/>
         </p:nvSpPr>
@@ -12926,7 +13061,7 @@
       </p:sp>
       <p:sp>
         <p:nvSpPr>
-          <p:cNvPr id="41" name="text-109"/>
+          <p:cNvPr id="41" name="text-110"/>
           <p:cNvSpPr txBox="1"/>
           <p:nvPr/>
         </p:nvSpPr>
@@ -12962,7 +13097,7 @@
       </p:sp>
       <p:sp>
         <p:nvSpPr>
-          <p:cNvPr id="42" name="arrow-110"/>
+          <p:cNvPr id="42" name="arrow-111"/>
           <p:cNvSpPr/>
           <p:nvPr/>
         </p:nvSpPr>
@@ -12985,7 +13120,7 @@
       </p:sp>
       <p:sp>
         <p:nvSpPr>
-          <p:cNvPr id="43" name="pill-111"/>
+          <p:cNvPr id="43" name="pill-112"/>
           <p:cNvSpPr txBox="1"/>
           <p:nvPr/>
         </p:nvSpPr>
@@ -13012,20 +13147,20 @@
               <a:buNone/>
             </a:pPr>
             <a:r>
-              <a:rPr lang="en-US" sz="950" b="1" dirty="0">
+              <a:rPr lang="en-US" sz="800" b="1" dirty="0">
                 <a:solidFill>
                   <a:schemeClr val="bg1"/>
                 </a:solidFill>
               </a:rPr>
               <a:t>MODEL-CONTEXT BOUNDARY</a:t>
             </a:r>
-            <a:endParaRPr lang="en-US" sz="950" dirty="0"/>
-          </a:p>
-        </p:txBody>
-      </p:sp>
-      <p:sp>
-        <p:nvSpPr>
-          <p:cNvPr id="44" name="denied-callout-112"/>
+            <a:endParaRPr lang="en-US" sz="800" dirty="0"/>
+          </a:p>
+        </p:txBody>
+      </p:sp>
+      <p:sp>
+        <p:nvSpPr>
+          <p:cNvPr id="44" name="denied-callout-113"/>
           <p:cNvSpPr/>
           <p:nvPr/>
         </p:nvSpPr>
@@ -13036,11 +13171,11 @@
           </a:xfrm>
           <a:prstGeom prst="roundRect">
             <a:avLst>
-              <a:gd name="adj" fmla="val 8696"/>
+              <a:gd name="adj" fmla="val 5435"/>
             </a:avLst>
           </a:prstGeom>
           <a:solidFill>
-            <a:srgbClr val="FDECEC"/>
+            <a:srgbClr val="FBECEB"/>
           </a:solidFill>
           <a:ln w="12700">
             <a:solidFill>
@@ -13052,7 +13187,7 @@
       </p:sp>
       <p:pic>
         <p:nvPicPr>
-          <p:cNvPr id="45" name="ban-113" descr="preencoded.png">    </p:cNvPr>
+          <p:cNvPr id="45" name="ban-114" descr="preencoded.png">    </p:cNvPr>
           <p:cNvPicPr>
             <a:picLocks noChangeAspect="1"/>
           </p:cNvPicPr>
@@ -13076,7 +13211,7 @@
       </p:pic>
       <p:sp>
         <p:nvSpPr>
-          <p:cNvPr id="46" name="text-114"/>
+          <p:cNvPr id="46" name="text-115"/>
           <p:cNvSpPr txBox="1"/>
           <p:nvPr/>
         </p:nvSpPr>
@@ -13123,7 +13258,7 @@
       </p:sp>
       <p:sp>
         <p:nvSpPr>
-          <p:cNvPr id="47" name="zone-sources-115"/>
+          <p:cNvPr id="47" name="zone-sources-116"/>
           <p:cNvSpPr/>
           <p:nvPr/>
         </p:nvSpPr>
@@ -13150,7 +13285,7 @@
       </p:sp>
       <p:sp>
         <p:nvSpPr>
-          <p:cNvPr id="48" name="text-116"/>
+          <p:cNvPr id="48" name="text-117"/>
           <p:cNvSpPr txBox="1"/>
           <p:nvPr/>
         </p:nvSpPr>
@@ -13186,7 +13321,7 @@
       </p:sp>
       <p:pic>
         <p:nvPicPr>
-          <p:cNvPr id="49" name="src-icon-117" descr="preencoded.png">    </p:cNvPr>
+          <p:cNvPr id="49" name="src-icon-118" descr="preencoded.png">    </p:cNvPr>
           <p:cNvPicPr>
             <a:picLocks noChangeAspect="1"/>
           </p:cNvPicPr>
@@ -13210,7 +13345,7 @@
       </p:pic>
       <p:sp>
         <p:nvSpPr>
-          <p:cNvPr id="50" name="text-118"/>
+          <p:cNvPr id="50" name="text-119"/>
           <p:cNvSpPr txBox="1"/>
           <p:nvPr/>
         </p:nvSpPr>
@@ -13246,7 +13381,7 @@
       </p:sp>
       <p:pic>
         <p:nvPicPr>
-          <p:cNvPr id="51" name="src-icon-119" descr="preencoded.png">    </p:cNvPr>
+          <p:cNvPr id="51" name="src-icon-120" descr="preencoded.png">    </p:cNvPr>
           <p:cNvPicPr>
             <a:picLocks noChangeAspect="1"/>
           </p:cNvPicPr>
@@ -13270,7 +13405,7 @@
       </p:pic>
       <p:sp>
         <p:nvSpPr>
-          <p:cNvPr id="52" name="text-120"/>
+          <p:cNvPr id="52" name="text-121"/>
           <p:cNvSpPr txBox="1"/>
           <p:nvPr/>
         </p:nvSpPr>
@@ -13306,7 +13441,7 @@
       </p:sp>
       <p:pic>
         <p:nvPicPr>
-          <p:cNvPr id="53" name="src-icon-121" descr="preencoded.png">    </p:cNvPr>
+          <p:cNvPr id="53" name="src-icon-122" descr="preencoded.png">    </p:cNvPr>
           <p:cNvPicPr>
             <a:picLocks noChangeAspect="1"/>
           </p:cNvPicPr>
@@ -13330,7 +13465,7 @@
       </p:pic>
       <p:sp>
         <p:nvSpPr>
-          <p:cNvPr id="54" name="text-122"/>
+          <p:cNvPr id="54" name="text-123"/>
           <p:cNvSpPr txBox="1"/>
           <p:nvPr/>
         </p:nvSpPr>
@@ -13366,7 +13501,7 @@
       </p:sp>
       <p:pic>
         <p:nvPicPr>
-          <p:cNvPr id="55" name="src-icon-123" descr="preencoded.png">    </p:cNvPr>
+          <p:cNvPr id="55" name="src-icon-124" descr="preencoded.png">    </p:cNvPr>
           <p:cNvPicPr>
             <a:picLocks noChangeAspect="1"/>
           </p:cNvPicPr>
@@ -13390,7 +13525,7 @@
       </p:pic>
       <p:sp>
         <p:nvSpPr>
-          <p:cNvPr id="56" name="text-124"/>
+          <p:cNvPr id="56" name="text-125"/>
           <p:cNvSpPr txBox="1"/>
           <p:nvPr/>
         </p:nvSpPr>
@@ -13426,7 +13561,7 @@
       </p:sp>
       <p:sp>
         <p:nvSpPr>
-          <p:cNvPr id="57" name="store-125"/>
+          <p:cNvPr id="57" name="store-126"/>
           <p:cNvSpPr/>
           <p:nvPr/>
         </p:nvSpPr>
@@ -13437,7 +13572,7 @@
           </a:xfrm>
           <a:prstGeom prst="roundRect">
             <a:avLst>
-              <a:gd name="adj" fmla="val 5517"/>
+              <a:gd name="adj" fmla="val 3448"/>
             </a:avLst>
           </a:prstGeom>
           <a:solidFill>
@@ -13453,7 +13588,7 @@
       </p:sp>
       <p:pic>
         <p:nvPicPr>
-          <p:cNvPr id="58" name="store-icon-126" descr="preencoded.png">    </p:cNvPr>
+          <p:cNvPr id="58" name="store-icon-127" descr="preencoded.png">    </p:cNvPr>
           <p:cNvPicPr>
             <a:picLocks noChangeAspect="1"/>
           </p:cNvPicPr>
@@ -13477,7 +13612,7 @@
       </p:pic>
       <p:sp>
         <p:nvSpPr>
-          <p:cNvPr id="59" name="text-127"/>
+          <p:cNvPr id="59" name="text-128"/>
           <p:cNvSpPr txBox="1"/>
           <p:nvPr/>
         </p:nvSpPr>
@@ -13505,7 +13640,7 @@
                   <a:schemeClr val="tx2"/>
                 </a:solidFill>
               </a:rPr>
-              <a:t>Connectors + workers</a:t>
+              <a:t>Sync workers</a:t>
             </a:r>
             <a:endParaRPr lang="en-US" sz="1300" dirty="0"/>
           </a:p>
@@ -13513,7 +13648,7 @@
       </p:sp>
       <p:sp>
         <p:nvSpPr>
-          <p:cNvPr id="60" name="text-128"/>
+          <p:cNvPr id="60" name="text-129"/>
           <p:cNvSpPr txBox="1"/>
           <p:nvPr/>
         </p:nvSpPr>
@@ -13549,7 +13684,7 @@
       </p:sp>
       <p:sp>
         <p:nvSpPr>
-          <p:cNvPr id="61" name="store-129"/>
+          <p:cNvPr id="61" name="store-130"/>
           <p:cNvSpPr/>
           <p:nvPr/>
         </p:nvSpPr>
@@ -13560,7 +13695,7 @@
           </a:xfrm>
           <a:prstGeom prst="roundRect">
             <a:avLst>
-              <a:gd name="adj" fmla="val 5517"/>
+              <a:gd name="adj" fmla="val 3448"/>
             </a:avLst>
           </a:prstGeom>
           <a:solidFill>
@@ -13576,7 +13711,7 @@
       </p:sp>
       <p:pic>
         <p:nvPicPr>
-          <p:cNvPr id="62" name="store-icon-130" descr="preencoded.png">    </p:cNvPr>
+          <p:cNvPr id="62" name="store-icon-131" descr="preencoded.png">    </p:cNvPr>
           <p:cNvPicPr>
             <a:picLocks noChangeAspect="1"/>
           </p:cNvPicPr>
@@ -13600,7 +13735,7 @@
       </p:pic>
       <p:sp>
         <p:nvSpPr>
-          <p:cNvPr id="63" name="text-131"/>
+          <p:cNvPr id="63" name="text-132"/>
           <p:cNvSpPr txBox="1"/>
           <p:nvPr/>
         </p:nvSpPr>
@@ -13636,7 +13771,7 @@
       </p:sp>
       <p:sp>
         <p:nvSpPr>
-          <p:cNvPr id="64" name="text-132"/>
+          <p:cNvPr id="64" name="text-133"/>
           <p:cNvSpPr txBox="1"/>
           <p:nvPr/>
         </p:nvSpPr>
@@ -13672,7 +13807,7 @@
       </p:sp>
       <p:sp>
         <p:nvSpPr>
-          <p:cNvPr id="65" name="store-133"/>
+          <p:cNvPr id="65" name="store-134"/>
           <p:cNvSpPr/>
           <p:nvPr/>
         </p:nvSpPr>
@@ -13683,7 +13818,7 @@
           </a:xfrm>
           <a:prstGeom prst="roundRect">
             <a:avLst>
-              <a:gd name="adj" fmla="val 5517"/>
+              <a:gd name="adj" fmla="val 3448"/>
             </a:avLst>
           </a:prstGeom>
           <a:solidFill>
@@ -13699,7 +13834,7 @@
       </p:sp>
       <p:pic>
         <p:nvPicPr>
-          <p:cNvPr id="66" name="store-icon-134" descr="preencoded.png">    </p:cNvPr>
+          <p:cNvPr id="66" name="store-icon-135" descr="preencoded.png">    </p:cNvPr>
           <p:cNvPicPr>
             <a:picLocks noChangeAspect="1"/>
           </p:cNvPicPr>
@@ -13723,7 +13858,7 @@
       </p:pic>
       <p:sp>
         <p:nvSpPr>
-          <p:cNvPr id="67" name="text-135"/>
+          <p:cNvPr id="67" name="text-136"/>
           <p:cNvSpPr txBox="1"/>
           <p:nvPr/>
         </p:nvSpPr>
@@ -13759,7 +13894,7 @@
       </p:sp>
       <p:sp>
         <p:nvSpPr>
-          <p:cNvPr id="68" name="text-136"/>
+          <p:cNvPr id="68" name="text-137"/>
           <p:cNvSpPr txBox="1"/>
           <p:nvPr/>
         </p:nvSpPr>
@@ -13795,7 +13930,7 @@
       </p:sp>
       <p:sp>
         <p:nvSpPr>
-          <p:cNvPr id="69" name="arrow-137"/>
+          <p:cNvPr id="69" name="arrow-138"/>
           <p:cNvSpPr/>
           <p:nvPr/>
         </p:nvSpPr>
@@ -13819,7 +13954,7 @@
       </p:sp>
       <p:sp>
         <p:nvSpPr>
-          <p:cNvPr id="70" name="arrow-138"/>
+          <p:cNvPr id="70" name="arrow-139"/>
           <p:cNvSpPr/>
           <p:nvPr/>
         </p:nvSpPr>
@@ -13843,7 +13978,7 @@
       </p:sp>
       <p:sp>
         <p:nvSpPr>
-          <p:cNvPr id="71" name="arrow-139"/>
+          <p:cNvPr id="71" name="arrow-140"/>
           <p:cNvSpPr/>
           <p:nvPr/>
         </p:nvSpPr>
@@ -13867,7 +14002,7 @@
       </p:sp>
       <p:sp>
         <p:nvSpPr>
-          <p:cNvPr id="72" name="text-140"/>
+          <p:cNvPr id="72" name="text-141"/>
           <p:cNvSpPr txBox="1"/>
           <p:nvPr/>
         </p:nvSpPr>
@@ -13903,7 +14038,7 @@
       </p:sp>
       <p:sp>
         <p:nvSpPr>
-          <p:cNvPr id="73" name="arrow-141"/>
+          <p:cNvPr id="73" name="arrow-142"/>
           <p:cNvSpPr/>
           <p:nvPr/>
         </p:nvSpPr>
@@ -13927,7 +14062,7 @@
       </p:sp>
       <p:sp>
         <p:nvSpPr>
-          <p:cNvPr id="74" name="text-142"/>
+          <p:cNvPr id="74" name="text-143"/>
           <p:cNvSpPr txBox="1"/>
           <p:nvPr/>
         </p:nvSpPr>
@@ -13963,7 +14098,7 @@
       </p:sp>
       <p:sp>
         <p:nvSpPr>
-          <p:cNvPr id="75" name="arrow-143"/>
+          <p:cNvPr id="75" name="arrow-144"/>
           <p:cNvSpPr/>
           <p:nvPr/>
         </p:nvSpPr>
@@ -13987,7 +14122,7 @@
       </p:sp>
       <p:sp>
         <p:nvSpPr>
-          <p:cNvPr id="76" name="text-144"/>
+          <p:cNvPr id="76" name="text-145"/>
           <p:cNvSpPr txBox="1"/>
           <p:nvPr/>
         </p:nvSpPr>
@@ -14023,7 +14158,7 @@
       </p:sp>
       <p:sp>
         <p:nvSpPr>
-          <p:cNvPr id="77" name="text-145"/>
+          <p:cNvPr id="77" name="text-146"/>
           <p:cNvSpPr txBox="1"/>
           <p:nvPr/>
         </p:nvSpPr>
@@ -14051,7 +14186,7 @@
                   <a:schemeClr val="accent6"/>
                 </a:solidFill>
               </a:rPr>
-              <a:t>Teal path: only authorised evidence.  Red dashed line: nothing denied crosses it.  Dashed boxes: untrusted or external.  Demo uses a synthetic corpus; in production Slack is searched live as the user and never stored.</a:t>
+              <a:t>Green path: authorised evidence only.  Red dashed line: nothing denied crosses it.  Dashed boxes: untrusted or external.  Production Slack is searched live, never stored.</a:t>
             </a:r>
             <a:endParaRPr lang="en-US" sz="950" dirty="0"/>
           </a:p>
@@ -14154,20 +14289,31 @@
               <a:buNone/>
             </a:pPr>
             <a:r>
-              <a:rPr lang="en-US" sz="2800" b="1" dirty="0">
+              <a:rPr lang="en-US" sz="2600" b="1" dirty="0">
                 <a:solidFill>
                   <a:schemeClr val="tx2"/>
                 </a:solidFill>
               </a:rPr>
-              <a:t>Four trust boundaries, each failing closed</a:t>
-            </a:r>
-            <a:endParaRPr lang="en-US" sz="2800" dirty="0"/>
-          </a:p>
-        </p:txBody>
-      </p:sp>
-      <p:sp>
-        <p:nvSpPr>
-          <p:cNvPr id="3" name="tb-row-146"/>
+              <a:t>Four trust boundaries,</a:t>
+            </a:r>
+            <a:pPr algn="l" indent="0" marL="0">
+              <a:buNone/>
+            </a:pPr>
+            <a:r>
+              <a:rPr lang="en-US" sz="2600" b="1" dirty="0">
+                <a:solidFill>
+                  <a:srgbClr val="8C8C8C"/>
+                </a:solidFill>
+              </a:rPr>
+              <a:t> each failing closed</a:t>
+            </a:r>
+            <a:endParaRPr lang="en-US" sz="2600" dirty="0"/>
+          </a:p>
+        </p:txBody>
+      </p:sp>
+      <p:sp>
+        <p:nvSpPr>
+          <p:cNvPr id="3" name="tb-row-147"/>
           <p:cNvSpPr/>
           <p:nvPr/>
         </p:nvSpPr>
@@ -14178,7 +14324,7 @@
           </a:xfrm>
           <a:prstGeom prst="roundRect">
             <a:avLst>
-              <a:gd name="adj" fmla="val 6957"/>
+              <a:gd name="adj" fmla="val 4348"/>
             </a:avLst>
           </a:prstGeom>
           <a:solidFill>
@@ -14189,7 +14335,7 @@
       </p:sp>
       <p:sp>
         <p:nvSpPr>
-          <p:cNvPr id="4" name="num-147"/>
+          <p:cNvPr id="4" name="num-148"/>
           <p:cNvSpPr txBox="1"/>
           <p:nvPr/>
         </p:nvSpPr>
@@ -14202,9 +14348,13 @@
             <a:avLst/>
           </a:prstGeom>
           <a:solidFill>
-            <a:schemeClr val="accent4"/>
+            <a:schemeClr val="bg1"/>
           </a:solidFill>
-          <a:ln/>
+          <a:ln w="12700">
+            <a:solidFill>
+              <a:srgbClr val="D7D7D7"/>
+            </a:solidFill>
+          </a:ln>
         </p:spPr>
         <p:txBody>
           <a:bodyPr wrap="square" lIns="0" tIns="0" rIns="0" bIns="0" rtlCol="0" anchor="ctr"/>
@@ -14214,20 +14364,20 @@
               <a:buNone/>
             </a:pPr>
             <a:r>
-              <a:rPr lang="en-US" sz="1600" b="1" dirty="0">
-                <a:solidFill>
-                  <a:schemeClr val="bg1"/>
-                </a:solidFill>
-              </a:rPr>
-              <a:t>1</a:t>
-            </a:r>
-            <a:endParaRPr lang="en-US" sz="1600" dirty="0"/>
-          </a:p>
-        </p:txBody>
-      </p:sp>
-      <p:sp>
-        <p:nvSpPr>
-          <p:cNvPr id="5" name="text-148"/>
+              <a:rPr lang="en-US" sz="1400" b="1" dirty="0">
+                <a:solidFill>
+                  <a:schemeClr val="tx2"/>
+                </a:solidFill>
+              </a:rPr>
+              <a:t>01</a:t>
+            </a:r>
+            <a:endParaRPr lang="en-US" sz="1400" dirty="0"/>
+          </a:p>
+        </p:txBody>
+      </p:sp>
+      <p:sp>
+        <p:nvSpPr>
+          <p:cNvPr id="5" name="text-149"/>
           <p:cNvSpPr txBox="1"/>
           <p:nvPr/>
         </p:nvSpPr>
@@ -14263,7 +14413,7 @@
       </p:sp>
       <p:sp>
         <p:nvSpPr>
-          <p:cNvPr id="6" name="text-149"/>
+          <p:cNvPr id="6" name="text-150"/>
           <p:cNvSpPr txBox="1"/>
           <p:nvPr/>
         </p:nvSpPr>
@@ -14299,7 +14449,7 @@
       </p:sp>
       <p:sp>
         <p:nvSpPr>
-          <p:cNvPr id="7" name="failclosed-150"/>
+          <p:cNvPr id="7" name="failclosed-151"/>
           <p:cNvSpPr/>
           <p:nvPr/>
         </p:nvSpPr>
@@ -14310,7 +14460,7 @@
           </a:xfrm>
           <a:prstGeom prst="roundRect">
             <a:avLst>
-              <a:gd name="adj" fmla="val 10667"/>
+              <a:gd name="adj" fmla="val 6667"/>
             </a:avLst>
           </a:prstGeom>
           <a:solidFill>
@@ -14326,7 +14476,7 @@
       </p:sp>
       <p:sp>
         <p:nvSpPr>
-          <p:cNvPr id="8" name="text-151"/>
+          <p:cNvPr id="8" name="text-152"/>
           <p:cNvSpPr txBox="1"/>
           <p:nvPr/>
         </p:nvSpPr>
@@ -14362,7 +14512,7 @@
       </p:sp>
       <p:sp>
         <p:nvSpPr>
-          <p:cNvPr id="9" name="tb-row-152"/>
+          <p:cNvPr id="9" name="tb-row-153"/>
           <p:cNvSpPr/>
           <p:nvPr/>
         </p:nvSpPr>
@@ -14373,7 +14523,7 @@
           </a:xfrm>
           <a:prstGeom prst="roundRect">
             <a:avLst>
-              <a:gd name="adj" fmla="val 6957"/>
+              <a:gd name="adj" fmla="val 4348"/>
             </a:avLst>
           </a:prstGeom>
           <a:solidFill>
@@ -14384,7 +14534,7 @@
       </p:sp>
       <p:sp>
         <p:nvSpPr>
-          <p:cNvPr id="10" name="num-153"/>
+          <p:cNvPr id="10" name="num-154"/>
           <p:cNvSpPr txBox="1"/>
           <p:nvPr/>
         </p:nvSpPr>
@@ -14409,20 +14559,20 @@
               <a:buNone/>
             </a:pPr>
             <a:r>
-              <a:rPr lang="en-US" sz="1600" b="1" dirty="0">
+              <a:rPr lang="en-US" sz="1400" b="1" dirty="0">
                 <a:solidFill>
                   <a:schemeClr val="bg1"/>
                 </a:solidFill>
               </a:rPr>
-              <a:t>2</a:t>
-            </a:r>
-            <a:endParaRPr lang="en-US" sz="1600" dirty="0"/>
-          </a:p>
-        </p:txBody>
-      </p:sp>
-      <p:sp>
-        <p:nvSpPr>
-          <p:cNvPr id="11" name="text-154"/>
+              <a:t>02</a:t>
+            </a:r>
+            <a:endParaRPr lang="en-US" sz="1400" dirty="0"/>
+          </a:p>
+        </p:txBody>
+      </p:sp>
+      <p:sp>
+        <p:nvSpPr>
+          <p:cNvPr id="11" name="text-155"/>
           <p:cNvSpPr txBox="1"/>
           <p:nvPr/>
         </p:nvSpPr>
@@ -14458,7 +14608,7 @@
       </p:sp>
       <p:sp>
         <p:nvSpPr>
-          <p:cNvPr id="12" name="text-155"/>
+          <p:cNvPr id="12" name="text-156"/>
           <p:cNvSpPr txBox="1"/>
           <p:nvPr/>
         </p:nvSpPr>
@@ -14494,7 +14644,7 @@
       </p:sp>
       <p:sp>
         <p:nvSpPr>
-          <p:cNvPr id="13" name="failclosed-156"/>
+          <p:cNvPr id="13" name="failclosed-157"/>
           <p:cNvSpPr/>
           <p:nvPr/>
         </p:nvSpPr>
@@ -14505,7 +14655,7 @@
           </a:xfrm>
           <a:prstGeom prst="roundRect">
             <a:avLst>
-              <a:gd name="adj" fmla="val 10667"/>
+              <a:gd name="adj" fmla="val 6667"/>
             </a:avLst>
           </a:prstGeom>
           <a:solidFill>
@@ -14521,7 +14671,7 @@
       </p:sp>
       <p:sp>
         <p:nvSpPr>
-          <p:cNvPr id="14" name="text-157"/>
+          <p:cNvPr id="14" name="text-158"/>
           <p:cNvSpPr txBox="1"/>
           <p:nvPr/>
         </p:nvSpPr>
@@ -14557,7 +14707,7 @@
       </p:sp>
       <p:sp>
         <p:nvSpPr>
-          <p:cNvPr id="15" name="tb-row-158"/>
+          <p:cNvPr id="15" name="tb-row-159"/>
           <p:cNvSpPr/>
           <p:nvPr/>
         </p:nvSpPr>
@@ -14568,7 +14718,7 @@
           </a:xfrm>
           <a:prstGeom prst="roundRect">
             <a:avLst>
-              <a:gd name="adj" fmla="val 6957"/>
+              <a:gd name="adj" fmla="val 4348"/>
             </a:avLst>
           </a:prstGeom>
           <a:solidFill>
@@ -14579,7 +14729,7 @@
       </p:sp>
       <p:sp>
         <p:nvSpPr>
-          <p:cNvPr id="16" name="num-159"/>
+          <p:cNvPr id="16" name="num-160"/>
           <p:cNvSpPr txBox="1"/>
           <p:nvPr/>
         </p:nvSpPr>
@@ -14592,9 +14742,13 @@
             <a:avLst/>
           </a:prstGeom>
           <a:solidFill>
-            <a:schemeClr val="accent2"/>
+            <a:schemeClr val="bg1"/>
           </a:solidFill>
-          <a:ln/>
+          <a:ln w="12700">
+            <a:solidFill>
+              <a:srgbClr val="D7D7D7"/>
+            </a:solidFill>
+          </a:ln>
         </p:spPr>
         <p:txBody>
           <a:bodyPr wrap="square" lIns="0" tIns="0" rIns="0" bIns="0" rtlCol="0" anchor="ctr"/>
@@ -14604,20 +14758,20 @@
               <a:buNone/>
             </a:pPr>
             <a:r>
-              <a:rPr lang="en-US" sz="1600" b="1" dirty="0">
-                <a:solidFill>
-                  <a:schemeClr val="bg1"/>
-                </a:solidFill>
-              </a:rPr>
-              <a:t>3</a:t>
-            </a:r>
-            <a:endParaRPr lang="en-US" sz="1600" dirty="0"/>
-          </a:p>
-        </p:txBody>
-      </p:sp>
-      <p:sp>
-        <p:nvSpPr>
-          <p:cNvPr id="17" name="text-160"/>
+              <a:rPr lang="en-US" sz="1400" b="1" dirty="0">
+                <a:solidFill>
+                  <a:schemeClr val="tx2"/>
+                </a:solidFill>
+              </a:rPr>
+              <a:t>03</a:t>
+            </a:r>
+            <a:endParaRPr lang="en-US" sz="1400" dirty="0"/>
+          </a:p>
+        </p:txBody>
+      </p:sp>
+      <p:sp>
+        <p:nvSpPr>
+          <p:cNvPr id="17" name="text-161"/>
           <p:cNvSpPr txBox="1"/>
           <p:nvPr/>
         </p:nvSpPr>
@@ -14653,7 +14807,7 @@
       </p:sp>
       <p:sp>
         <p:nvSpPr>
-          <p:cNvPr id="18" name="text-161"/>
+          <p:cNvPr id="18" name="text-162"/>
           <p:cNvSpPr txBox="1"/>
           <p:nvPr/>
         </p:nvSpPr>
@@ -14689,7 +14843,7 @@
       </p:sp>
       <p:sp>
         <p:nvSpPr>
-          <p:cNvPr id="19" name="failclosed-162"/>
+          <p:cNvPr id="19" name="failclosed-163"/>
           <p:cNvSpPr/>
           <p:nvPr/>
         </p:nvSpPr>
@@ -14700,7 +14854,7 @@
           </a:xfrm>
           <a:prstGeom prst="roundRect">
             <a:avLst>
-              <a:gd name="adj" fmla="val 10667"/>
+              <a:gd name="adj" fmla="val 6667"/>
             </a:avLst>
           </a:prstGeom>
           <a:solidFill>
@@ -14716,7 +14870,7 @@
       </p:sp>
       <p:sp>
         <p:nvSpPr>
-          <p:cNvPr id="20" name="text-163"/>
+          <p:cNvPr id="20" name="text-164"/>
           <p:cNvSpPr txBox="1"/>
           <p:nvPr/>
         </p:nvSpPr>
@@ -14752,7 +14906,7 @@
       </p:sp>
       <p:sp>
         <p:nvSpPr>
-          <p:cNvPr id="21" name="tb-row-164"/>
+          <p:cNvPr id="21" name="tb-row-165"/>
           <p:cNvSpPr/>
           <p:nvPr/>
         </p:nvSpPr>
@@ -14763,7 +14917,7 @@
           </a:xfrm>
           <a:prstGeom prst="roundRect">
             <a:avLst>
-              <a:gd name="adj" fmla="val 6957"/>
+              <a:gd name="adj" fmla="val 4348"/>
             </a:avLst>
           </a:prstGeom>
           <a:solidFill>
@@ -14774,7 +14928,7 @@
       </p:sp>
       <p:sp>
         <p:nvSpPr>
-          <p:cNvPr id="22" name="num-165"/>
+          <p:cNvPr id="22" name="num-166"/>
           <p:cNvSpPr txBox="1"/>
           <p:nvPr/>
         </p:nvSpPr>
@@ -14787,9 +14941,13 @@
             <a:avLst/>
           </a:prstGeom>
           <a:solidFill>
-            <a:schemeClr val="accent5"/>
+            <a:schemeClr val="bg1"/>
           </a:solidFill>
-          <a:ln/>
+          <a:ln w="12700">
+            <a:solidFill>
+              <a:srgbClr val="D7D7D7"/>
+            </a:solidFill>
+          </a:ln>
         </p:spPr>
         <p:txBody>
           <a:bodyPr wrap="square" lIns="0" tIns="0" rIns="0" bIns="0" rtlCol="0" anchor="ctr"/>
@@ -14799,20 +14957,20 @@
               <a:buNone/>
             </a:pPr>
             <a:r>
-              <a:rPr lang="en-US" sz="1600" b="1" dirty="0">
-                <a:solidFill>
-                  <a:schemeClr val="bg1"/>
-                </a:solidFill>
-              </a:rPr>
-              <a:t>4</a:t>
-            </a:r>
-            <a:endParaRPr lang="en-US" sz="1600" dirty="0"/>
-          </a:p>
-        </p:txBody>
-      </p:sp>
-      <p:sp>
-        <p:nvSpPr>
-          <p:cNvPr id="23" name="text-166"/>
+              <a:rPr lang="en-US" sz="1400" b="1" dirty="0">
+                <a:solidFill>
+                  <a:schemeClr val="tx2"/>
+                </a:solidFill>
+              </a:rPr>
+              <a:t>04</a:t>
+            </a:r>
+            <a:endParaRPr lang="en-US" sz="1400" dirty="0"/>
+          </a:p>
+        </p:txBody>
+      </p:sp>
+      <p:sp>
+        <p:nvSpPr>
+          <p:cNvPr id="23" name="text-167"/>
           <p:cNvSpPr txBox="1"/>
           <p:nvPr/>
         </p:nvSpPr>
@@ -14848,7 +15006,7 @@
       </p:sp>
       <p:sp>
         <p:nvSpPr>
-          <p:cNvPr id="24" name="text-167"/>
+          <p:cNvPr id="24" name="text-168"/>
           <p:cNvSpPr txBox="1"/>
           <p:nvPr/>
         </p:nvSpPr>
@@ -14884,7 +15042,7 @@
       </p:sp>
       <p:sp>
         <p:nvSpPr>
-          <p:cNvPr id="25" name="failclosed-168"/>
+          <p:cNvPr id="25" name="failclosed-169"/>
           <p:cNvSpPr/>
           <p:nvPr/>
         </p:nvSpPr>
@@ -14895,7 +15053,7 @@
           </a:xfrm>
           <a:prstGeom prst="roundRect">
             <a:avLst>
-              <a:gd name="adj" fmla="val 10667"/>
+              <a:gd name="adj" fmla="val 6667"/>
             </a:avLst>
           </a:prstGeom>
           <a:solidFill>
@@ -14911,7 +15069,7 @@
       </p:sp>
       <p:sp>
         <p:nvSpPr>
-          <p:cNvPr id="26" name="text-169"/>
+          <p:cNvPr id="26" name="text-170"/>
           <p:cNvSpPr txBox="1"/>
           <p:nvPr/>
         </p:nvSpPr>
@@ -14947,7 +15105,7 @@
       </p:sp>
       <p:sp>
         <p:nvSpPr>
-          <p:cNvPr id="27" name="text-170"/>
+          <p:cNvPr id="27" name="text-171"/>
           <p:cNvSpPr txBox="1"/>
           <p:nvPr/>
         </p:nvSpPr>
@@ -15078,20 +15236,31 @@
               <a:buNone/>
             </a:pPr>
             <a:r>
-              <a:rPr lang="en-US" sz="2800" b="1" dirty="0">
+              <a:rPr lang="en-US" sz="2600" b="1" dirty="0">
                 <a:solidFill>
                   <a:schemeClr val="tx2"/>
                 </a:solidFill>
               </a:rPr>
-              <a:t>We keep each platform's own permission model instead of flattening it</a:t>
-            </a:r>
-            <a:endParaRPr lang="en-US" sz="2800" dirty="0"/>
-          </a:p>
-        </p:txBody>
-      </p:sp>
-      <p:sp>
-        <p:nvSpPr>
-          <p:cNvPr id="3" name="src-card-171"/>
+              <a:t>Each platform keeps its own permission model,</a:t>
+            </a:r>
+            <a:pPr algn="l" indent="0" marL="0">
+              <a:buNone/>
+            </a:pPr>
+            <a:r>
+              <a:rPr lang="en-US" sz="2600" b="1" dirty="0">
+                <a:solidFill>
+                  <a:srgbClr val="8C8C8C"/>
+                </a:solidFill>
+              </a:rPr>
+              <a:t> never flattened</a:t>
+            </a:r>
+            <a:endParaRPr lang="en-US" sz="2600" dirty="0"/>
+          </a:p>
+        </p:txBody>
+      </p:sp>
+      <p:sp>
+        <p:nvSpPr>
+          <p:cNvPr id="3" name="src-card-172"/>
           <p:cNvSpPr/>
           <p:nvPr/>
         </p:nvSpPr>
@@ -15102,7 +15271,7 @@
           </a:xfrm>
           <a:prstGeom prst="roundRect">
             <a:avLst>
-              <a:gd name="adj" fmla="val 4103"/>
+              <a:gd name="adj" fmla="val 2564"/>
             </a:avLst>
           </a:prstGeom>
           <a:solidFill>
@@ -15110,22 +15279,15 @@
           </a:solidFill>
           <a:ln w="12700">
             <a:solidFill>
-              <a:srgbClr val="CBD5E1"/>
+              <a:srgbClr val="D7D7D7"/>
             </a:solidFill>
             <a:prstDash val="solid"/>
           </a:ln>
-          <a:effectLst>
-            <a:outerShdw sx="100000" sy="100000" kx="0" ky="0" algn="bl" rotWithShape="0" blurRad="76200" dist="25400" dir="5400000">
-              <a:srgbClr val="0F172A">
-                <a:alpha val="12000"/>
-              </a:srgbClr>
-            </a:outerShdw>
-          </a:effectLst>
-        </p:spPr>
-      </p:sp>
-      <p:sp>
-        <p:nvSpPr>
-          <p:cNvPr id="4" name="icon-bg-172"/>
+        </p:spPr>
+      </p:sp>
+      <p:sp>
+        <p:nvSpPr>
+          <p:cNvPr id="4" name="icon-bg-173"/>
           <p:cNvSpPr/>
           <p:nvPr/>
         </p:nvSpPr>
@@ -15145,7 +15307,7 @@
       </p:sp>
       <p:pic>
         <p:nvPicPr>
-          <p:cNvPr id="5" name="icon-173" descr="preencoded.png">    </p:cNvPr>
+          <p:cNvPr id="5" name="icon-174" descr="preencoded.png">    </p:cNvPr>
           <p:cNvPicPr>
             <a:picLocks noChangeAspect="1"/>
           </p:cNvPicPr>
@@ -15169,7 +15331,7 @@
       </p:pic>
       <p:sp>
         <p:nvSpPr>
-          <p:cNvPr id="6" name="text-174"/>
+          <p:cNvPr id="6" name="text-175"/>
           <p:cNvSpPr txBox="1"/>
           <p:nvPr/>
         </p:nvSpPr>
@@ -15205,7 +15367,7 @@
       </p:sp>
       <p:sp>
         <p:nvSpPr>
-          <p:cNvPr id="7" name="text-175"/>
+          <p:cNvPr id="7" name="text-176"/>
           <p:cNvSpPr txBox="1"/>
           <p:nvPr/>
         </p:nvSpPr>
@@ -15241,7 +15403,7 @@
       </p:sp>
       <p:pic>
         <p:nvPicPr>
-          <p:cNvPr id="8" name="check-176" descr="preencoded.png">    </p:cNvPr>
+          <p:cNvPr id="8" name="check-177" descr="preencoded.png">    </p:cNvPr>
           <p:cNvPicPr>
             <a:picLocks noChangeAspect="1"/>
           </p:cNvPicPr>
@@ -15265,7 +15427,7 @@
       </p:pic>
       <p:sp>
         <p:nvSpPr>
-          <p:cNvPr id="9" name="text-177"/>
+          <p:cNvPr id="9" name="text-178"/>
           <p:cNvSpPr txBox="1"/>
           <p:nvPr/>
         </p:nvSpPr>
@@ -15301,7 +15463,7 @@
       </p:sp>
       <p:sp>
         <p:nvSpPr>
-          <p:cNvPr id="10" name="src-card-178"/>
+          <p:cNvPr id="10" name="src-card-179"/>
           <p:cNvSpPr/>
           <p:nvPr/>
         </p:nvSpPr>
@@ -15312,7 +15474,7 @@
           </a:xfrm>
           <a:prstGeom prst="roundRect">
             <a:avLst>
-              <a:gd name="adj" fmla="val 4103"/>
+              <a:gd name="adj" fmla="val 2564"/>
             </a:avLst>
           </a:prstGeom>
           <a:solidFill>
@@ -15320,22 +15482,15 @@
           </a:solidFill>
           <a:ln w="12700">
             <a:solidFill>
-              <a:srgbClr val="CBD5E1"/>
+              <a:srgbClr val="D7D7D7"/>
             </a:solidFill>
             <a:prstDash val="solid"/>
           </a:ln>
-          <a:effectLst>
-            <a:outerShdw sx="100000" sy="100000" kx="0" ky="0" algn="bl" rotWithShape="0" blurRad="76200" dist="25400" dir="5400000">
-              <a:srgbClr val="0F172A">
-                <a:alpha val="12000"/>
-              </a:srgbClr>
-            </a:outerShdw>
-          </a:effectLst>
-        </p:spPr>
-      </p:sp>
-      <p:sp>
-        <p:nvSpPr>
-          <p:cNvPr id="11" name="icon-bg-179"/>
+        </p:spPr>
+      </p:sp>
+      <p:sp>
+        <p:nvSpPr>
+          <p:cNvPr id="11" name="icon-bg-180"/>
           <p:cNvSpPr/>
           <p:nvPr/>
         </p:nvSpPr>
@@ -15355,7 +15510,7 @@
       </p:sp>
       <p:pic>
         <p:nvPicPr>
-          <p:cNvPr id="12" name="icon-180" descr="preencoded.png">    </p:cNvPr>
+          <p:cNvPr id="12" name="icon-181" descr="preencoded.png">    </p:cNvPr>
           <p:cNvPicPr>
             <a:picLocks noChangeAspect="1"/>
           </p:cNvPicPr>
@@ -15379,7 +15534,7 @@
       </p:pic>
       <p:sp>
         <p:nvSpPr>
-          <p:cNvPr id="13" name="text-181"/>
+          <p:cNvPr id="13" name="text-182"/>
           <p:cNvSpPr txBox="1"/>
           <p:nvPr/>
         </p:nvSpPr>
@@ -15415,7 +15570,7 @@
       </p:sp>
       <p:sp>
         <p:nvSpPr>
-          <p:cNvPr id="14" name="text-182"/>
+          <p:cNvPr id="14" name="text-183"/>
           <p:cNvSpPr txBox="1"/>
           <p:nvPr/>
         </p:nvSpPr>
@@ -15451,7 +15606,7 @@
       </p:sp>
       <p:pic>
         <p:nvPicPr>
-          <p:cNvPr id="15" name="check-183" descr="preencoded.png">    </p:cNvPr>
+          <p:cNvPr id="15" name="check-184" descr="preencoded.png">    </p:cNvPr>
           <p:cNvPicPr>
             <a:picLocks noChangeAspect="1"/>
           </p:cNvPicPr>
@@ -15475,7 +15630,7 @@
       </p:pic>
       <p:sp>
         <p:nvSpPr>
-          <p:cNvPr id="16" name="text-184"/>
+          <p:cNvPr id="16" name="text-185"/>
           <p:cNvSpPr txBox="1"/>
           <p:nvPr/>
         </p:nvSpPr>
@@ -15511,7 +15666,7 @@
       </p:sp>
       <p:sp>
         <p:nvSpPr>
-          <p:cNvPr id="17" name="src-card-185"/>
+          <p:cNvPr id="17" name="src-card-186"/>
           <p:cNvSpPr/>
           <p:nvPr/>
         </p:nvSpPr>
@@ -15522,7 +15677,7 @@
           </a:xfrm>
           <a:prstGeom prst="roundRect">
             <a:avLst>
-              <a:gd name="adj" fmla="val 4103"/>
+              <a:gd name="adj" fmla="val 2564"/>
             </a:avLst>
           </a:prstGeom>
           <a:solidFill>
@@ -15530,22 +15685,15 @@
           </a:solidFill>
           <a:ln w="12700">
             <a:solidFill>
-              <a:srgbClr val="CBD5E1"/>
+              <a:srgbClr val="D7D7D7"/>
             </a:solidFill>
             <a:prstDash val="solid"/>
           </a:ln>
-          <a:effectLst>
-            <a:outerShdw sx="100000" sy="100000" kx="0" ky="0" algn="bl" rotWithShape="0" blurRad="76200" dist="25400" dir="5400000">
-              <a:srgbClr val="0F172A">
-                <a:alpha val="12000"/>
-              </a:srgbClr>
-            </a:outerShdw>
-          </a:effectLst>
-        </p:spPr>
-      </p:sp>
-      <p:sp>
-        <p:nvSpPr>
-          <p:cNvPr id="18" name="icon-bg-186"/>
+        </p:spPr>
+      </p:sp>
+      <p:sp>
+        <p:nvSpPr>
+          <p:cNvPr id="18" name="icon-bg-187"/>
           <p:cNvSpPr/>
           <p:nvPr/>
         </p:nvSpPr>
@@ -15565,7 +15713,7 @@
       </p:sp>
       <p:pic>
         <p:nvPicPr>
-          <p:cNvPr id="19" name="icon-187" descr="preencoded.png">    </p:cNvPr>
+          <p:cNvPr id="19" name="icon-188" descr="preencoded.png">    </p:cNvPr>
           <p:cNvPicPr>
             <a:picLocks noChangeAspect="1"/>
           </p:cNvPicPr>
@@ -15589,7 +15737,7 @@
       </p:pic>
       <p:sp>
         <p:nvSpPr>
-          <p:cNvPr id="20" name="text-188"/>
+          <p:cNvPr id="20" name="text-189"/>
           <p:cNvSpPr txBox="1"/>
           <p:nvPr/>
         </p:nvSpPr>
@@ -15625,7 +15773,7 @@
       </p:sp>
       <p:sp>
         <p:nvSpPr>
-          <p:cNvPr id="21" name="text-189"/>
+          <p:cNvPr id="21" name="text-190"/>
           <p:cNvSpPr txBox="1"/>
           <p:nvPr/>
         </p:nvSpPr>
@@ -15653,7 +15801,7 @@
                   <a:schemeClr val="tx1"/>
                 </a:solidFill>
               </a:rPr>
-              <a:t>Channel membership; public channels for full members only. In production, searched live as the user; nothing stored</a:t>
+              <a:t>Channel membership. Production: live search as the user, nothing stored</a:t>
             </a:r>
             <a:endParaRPr lang="en-US" sz="1300" dirty="0"/>
           </a:p>
@@ -15661,7 +15809,7 @@
       </p:sp>
       <p:pic>
         <p:nvPicPr>
-          <p:cNvPr id="22" name="check-190" descr="preencoded.png">    </p:cNvPr>
+          <p:cNvPr id="22" name="check-191" descr="preencoded.png">    </p:cNvPr>
           <p:cNvPicPr>
             <a:picLocks noChangeAspect="1"/>
           </p:cNvPicPr>
@@ -15685,7 +15833,7 @@
       </p:pic>
       <p:sp>
         <p:nvSpPr>
-          <p:cNvPr id="23" name="text-191"/>
+          <p:cNvPr id="23" name="text-192"/>
           <p:cNvSpPr txBox="1"/>
           <p:nvPr/>
         </p:nvSpPr>
@@ -15721,7 +15869,7 @@
       </p:sp>
       <p:sp>
         <p:nvSpPr>
-          <p:cNvPr id="24" name="src-card-192"/>
+          <p:cNvPr id="24" name="src-card-193"/>
           <p:cNvSpPr/>
           <p:nvPr/>
         </p:nvSpPr>
@@ -15732,7 +15880,7 @@
           </a:xfrm>
           <a:prstGeom prst="roundRect">
             <a:avLst>
-              <a:gd name="adj" fmla="val 4103"/>
+              <a:gd name="adj" fmla="val 2564"/>
             </a:avLst>
           </a:prstGeom>
           <a:solidFill>
@@ -15740,22 +15888,15 @@
           </a:solidFill>
           <a:ln w="12700">
             <a:solidFill>
-              <a:srgbClr val="CBD5E1"/>
+              <a:srgbClr val="D7D7D7"/>
             </a:solidFill>
             <a:prstDash val="solid"/>
           </a:ln>
-          <a:effectLst>
-            <a:outerShdw sx="100000" sy="100000" kx="0" ky="0" algn="bl" rotWithShape="0" blurRad="76200" dist="25400" dir="5400000">
-              <a:srgbClr val="0F172A">
-                <a:alpha val="12000"/>
-              </a:srgbClr>
-            </a:outerShdw>
-          </a:effectLst>
-        </p:spPr>
-      </p:sp>
-      <p:sp>
-        <p:nvSpPr>
-          <p:cNvPr id="25" name="icon-bg-193"/>
+        </p:spPr>
+      </p:sp>
+      <p:sp>
+        <p:nvSpPr>
+          <p:cNvPr id="25" name="icon-bg-194"/>
           <p:cNvSpPr/>
           <p:nvPr/>
         </p:nvSpPr>
@@ -15775,7 +15916,7 @@
       </p:sp>
       <p:pic>
         <p:nvPicPr>
-          <p:cNvPr id="26" name="icon-194" descr="preencoded.png">    </p:cNvPr>
+          <p:cNvPr id="26" name="icon-195" descr="preencoded.png">    </p:cNvPr>
           <p:cNvPicPr>
             <a:picLocks noChangeAspect="1"/>
           </p:cNvPicPr>
@@ -15799,7 +15940,7 @@
       </p:pic>
       <p:sp>
         <p:nvSpPr>
-          <p:cNvPr id="27" name="text-195"/>
+          <p:cNvPr id="27" name="text-196"/>
           <p:cNvSpPr txBox="1"/>
           <p:nvPr/>
         </p:nvSpPr>
@@ -15835,7 +15976,7 @@
       </p:sp>
       <p:sp>
         <p:nvSpPr>
-          <p:cNvPr id="28" name="text-196"/>
+          <p:cNvPr id="28" name="text-197"/>
           <p:cNvSpPr txBox="1"/>
           <p:nvPr/>
         </p:nvSpPr>
@@ -15871,7 +16012,7 @@
       </p:sp>
       <p:pic>
         <p:nvPicPr>
-          <p:cNvPr id="29" name="check-197" descr="preencoded.png">    </p:cNvPr>
+          <p:cNvPr id="29" name="check-198" descr="preencoded.png">    </p:cNvPr>
           <p:cNvPicPr>
             <a:picLocks noChangeAspect="1"/>
           </p:cNvPicPr>
@@ -15895,7 +16036,7 @@
       </p:pic>
       <p:sp>
         <p:nvSpPr>
-          <p:cNvPr id="30" name="text-198"/>
+          <p:cNvPr id="30" name="text-199"/>
           <p:cNvSpPr txBox="1"/>
           <p:nvPr/>
         </p:nvSpPr>
@@ -15931,7 +16072,7 @@
       </p:sp>
       <p:sp>
         <p:nvSpPr>
-          <p:cNvPr id="31" name="equation-199"/>
+          <p:cNvPr id="31" name="equation-200"/>
           <p:cNvSpPr/>
           <p:nvPr/>
         </p:nvSpPr>
@@ -15942,7 +16083,7 @@
           </a:xfrm>
           <a:prstGeom prst="roundRect">
             <a:avLst>
-              <a:gd name="adj" fmla="val 8421"/>
+              <a:gd name="adj" fmla="val 5263"/>
             </a:avLst>
           </a:prstGeom>
           <a:solidFill>
@@ -15953,7 +16094,7 @@
       </p:sp>
       <p:sp>
         <p:nvSpPr>
-          <p:cNvPr id="32" name="text-200"/>
+          <p:cNvPr id="32" name="text-201"/>
           <p:cNvSpPr txBox="1"/>
           <p:nvPr/>
         </p:nvSpPr>
@@ -15992,10 +16133,10 @@
             <a:r>
               <a:rPr lang="en-US" sz="1300" dirty="0">
                 <a:solidFill>
-                  <a:srgbClr val="C9D8EE"/>
-                </a:solidFill>
-              </a:rPr>
-              <a:t>A local grant can narrow access but never widen what the source allows. Confidential documents also need the owner, an admin or an active grant.</a:t>
+                  <a:srgbClr val="A6A6A6"/>
+                </a:solidFill>
+              </a:rPr>
+              <a:t>A local grant can narrow access, never widen it. Confidential documents also need the owner, an admin or an active grant.</a:t>
             </a:r>
             <a:endParaRPr lang="en-US" sz="1400" dirty="0"/>
           </a:p>
@@ -16098,20 +16239,31 @@
               <a:buNone/>
             </a:pPr>
             <a:r>
-              <a:rPr lang="en-US" sz="2800" b="1" dirty="0">
+              <a:rPr lang="en-US" sz="2600" b="1" dirty="0">
                 <a:solidFill>
                   <a:schemeClr val="tx2"/>
                 </a:solidFill>
               </a:rPr>
-              <a:t>The access-control demo in three scenes</a:t>
-            </a:r>
-            <a:endParaRPr lang="en-US" sz="2800" dirty="0"/>
-          </a:p>
-        </p:txBody>
-      </p:sp>
-      <p:sp>
-        <p:nvSpPr>
-          <p:cNvPr id="3" name="scene-201"/>
+              <a:t>The access-control demo</a:t>
+            </a:r>
+            <a:pPr algn="l" indent="0" marL="0">
+              <a:buNone/>
+            </a:pPr>
+            <a:r>
+              <a:rPr lang="en-US" sz="2600" b="1" dirty="0">
+                <a:solidFill>
+                  <a:srgbClr val="8C8C8C"/>
+                </a:solidFill>
+              </a:rPr>
+              <a:t> in three scenes</a:t>
+            </a:r>
+            <a:endParaRPr lang="en-US" sz="2600" dirty="0"/>
+          </a:p>
+        </p:txBody>
+      </p:sp>
+      <p:sp>
+        <p:nvSpPr>
+          <p:cNvPr id="3" name="scene-202"/>
           <p:cNvSpPr/>
           <p:nvPr/>
         </p:nvSpPr>
@@ -16122,7 +16274,7 @@
           </a:xfrm>
           <a:prstGeom prst="roundRect">
             <a:avLst>
-              <a:gd name="adj" fmla="val 2078"/>
+              <a:gd name="adj" fmla="val 1299"/>
             </a:avLst>
           </a:prstGeom>
           <a:solidFill>
@@ -16133,7 +16285,7 @@
       </p:sp>
       <p:sp>
         <p:nvSpPr>
-          <p:cNvPr id="4" name="num-202"/>
+          <p:cNvPr id="4" name="num-203"/>
           <p:cNvSpPr txBox="1"/>
           <p:nvPr/>
         </p:nvSpPr>
@@ -16158,20 +16310,20 @@
               <a:buNone/>
             </a:pPr>
             <a:r>
-              <a:rPr lang="en-US" sz="1600" b="1" dirty="0">
+              <a:rPr lang="en-US" sz="1400" b="1" dirty="0">
                 <a:solidFill>
                   <a:schemeClr val="bg1"/>
                 </a:solidFill>
               </a:rPr>
-              <a:t>1</a:t>
-            </a:r>
-            <a:endParaRPr lang="en-US" sz="1600" dirty="0"/>
-          </a:p>
-        </p:txBody>
-      </p:sp>
-      <p:sp>
-        <p:nvSpPr>
-          <p:cNvPr id="5" name="text-203"/>
+              <a:t>01</a:t>
+            </a:r>
+            <a:endParaRPr lang="en-US" sz="1400" dirty="0"/>
+          </a:p>
+        </p:txBody>
+      </p:sp>
+      <p:sp>
+        <p:nvSpPr>
+          <p:cNvPr id="5" name="text-204"/>
           <p:cNvSpPr txBox="1"/>
           <p:nvPr/>
         </p:nvSpPr>
@@ -16207,7 +16359,7 @@
       </p:sp>
       <p:sp>
         <p:nvSpPr>
-          <p:cNvPr id="6" name="icon-bg-204"/>
+          <p:cNvPr id="6" name="icon-bg-205"/>
           <p:cNvSpPr/>
           <p:nvPr/>
         </p:nvSpPr>
@@ -16227,7 +16379,7 @@
       </p:sp>
       <p:pic>
         <p:nvPicPr>
-          <p:cNvPr id="7" name="icon-205" descr="preencoded.png">    </p:cNvPr>
+          <p:cNvPr id="7" name="icon-206" descr="preencoded.png">    </p:cNvPr>
           <p:cNvPicPr>
             <a:picLocks noChangeAspect="1"/>
           </p:cNvPicPr>
@@ -16251,7 +16403,7 @@
       </p:pic>
       <p:sp>
         <p:nvSpPr>
-          <p:cNvPr id="8" name="text-206"/>
+          <p:cNvPr id="8" name="text-207"/>
           <p:cNvSpPr txBox="1"/>
           <p:nvPr/>
         </p:nvSpPr>
@@ -16287,7 +16439,7 @@
       </p:sp>
       <p:sp>
         <p:nvSpPr>
-          <p:cNvPr id="9" name="text-207"/>
+          <p:cNvPr id="9" name="text-208"/>
           <p:cNvSpPr txBox="1"/>
           <p:nvPr/>
         </p:nvSpPr>
@@ -16323,7 +16475,7 @@
       </p:sp>
       <p:sp>
         <p:nvSpPr>
-          <p:cNvPr id="10" name="answer-mock-208"/>
+          <p:cNvPr id="10" name="answer-mock-209"/>
           <p:cNvSpPr/>
           <p:nvPr/>
         </p:nvSpPr>
@@ -16334,7 +16486,7 @@
           </a:xfrm>
           <a:prstGeom prst="roundRect">
             <a:avLst>
-              <a:gd name="adj" fmla="val 5926"/>
+              <a:gd name="adj" fmla="val 3704"/>
             </a:avLst>
           </a:prstGeom>
           <a:solidFill>
@@ -16342,7 +16494,7 @@
           </a:solidFill>
           <a:ln w="12700">
             <a:solidFill>
-              <a:srgbClr val="CBD5E1"/>
+              <a:srgbClr val="D7D7D7"/>
             </a:solidFill>
             <a:prstDash val="solid"/>
           </a:ln>
@@ -16350,7 +16502,7 @@
       </p:sp>
       <p:sp>
         <p:nvSpPr>
-          <p:cNvPr id="11" name="text-209"/>
+          <p:cNvPr id="11" name="text-210"/>
           <p:cNvSpPr txBox="1"/>
           <p:nvPr/>
         </p:nvSpPr>
@@ -16378,7 +16530,7 @@
                   <a:schemeClr val="tx1"/>
                 </a:solidFill>
               </a:rPr>
-              <a:t>SGD 48.6 million, up 18% year on year</a:t>
+              <a:t>Q3 2026 revenue: SGD 48.6 million, up 18% year on year</a:t>
             </a:r>
             <a:endParaRPr lang="en-US" sz="1300" dirty="0"/>
           </a:p>
@@ -16392,7 +16544,7 @@
                   <a:schemeClr val="accent4"/>
                 </a:solidFill>
               </a:rPr>
-              <a:t>[1] Board deck Q3 · Google Drive</a:t>
+              <a:t>[E4] Q3 2026 Board Deck · Google Drive · 8/8 claims supported</a:t>
             </a:r>
             <a:endParaRPr lang="en-US" sz="1300" dirty="0"/>
           </a:p>
@@ -16400,7 +16552,7 @@
       </p:sp>
       <p:sp>
         <p:nvSpPr>
-          <p:cNvPr id="12" name="verdict-210"/>
+          <p:cNvPr id="12" name="verdict-211"/>
           <p:cNvSpPr/>
           <p:nvPr/>
         </p:nvSpPr>
@@ -16411,11 +16563,11 @@
           </a:xfrm>
           <a:prstGeom prst="roundRect">
             <a:avLst>
-              <a:gd name="adj" fmla="val 7619"/>
+              <a:gd name="adj" fmla="val 4762"/>
             </a:avLst>
           </a:prstGeom>
           <a:solidFill>
-            <a:srgbClr val="E3F5F2"/>
+            <a:srgbClr val="EAF3EA"/>
           </a:solidFill>
           <a:ln w="12700">
             <a:solidFill>
@@ -16427,7 +16579,7 @@
       </p:sp>
       <p:sp>
         <p:nvSpPr>
-          <p:cNvPr id="13" name="text-211"/>
+          <p:cNvPr id="13" name="text-212"/>
           <p:cNvSpPr txBox="1"/>
           <p:nvPr/>
         </p:nvSpPr>
@@ -16463,7 +16615,7 @@
       </p:sp>
       <p:sp>
         <p:nvSpPr>
-          <p:cNvPr id="14" name="arrow-212"/>
+          <p:cNvPr id="14" name="arrow-213"/>
           <p:cNvSpPr/>
           <p:nvPr/>
         </p:nvSpPr>
@@ -16487,7 +16639,7 @@
       </p:sp>
       <p:sp>
         <p:nvSpPr>
-          <p:cNvPr id="15" name="scene-213"/>
+          <p:cNvPr id="15" name="scene-214"/>
           <p:cNvSpPr/>
           <p:nvPr/>
         </p:nvSpPr>
@@ -16498,7 +16650,7 @@
           </a:xfrm>
           <a:prstGeom prst="roundRect">
             <a:avLst>
-              <a:gd name="adj" fmla="val 2078"/>
+              <a:gd name="adj" fmla="val 1299"/>
             </a:avLst>
           </a:prstGeom>
           <a:solidFill>
@@ -16509,7 +16661,7 @@
       </p:sp>
       <p:sp>
         <p:nvSpPr>
-          <p:cNvPr id="16" name="num-214"/>
+          <p:cNvPr id="16" name="num-215"/>
           <p:cNvSpPr txBox="1"/>
           <p:nvPr/>
         </p:nvSpPr>
@@ -16517,6 +16669,84 @@
           <a:xfrm>
             <a:off x="4526280" y="1508760"/>
             <a:ext cx="411480" cy="411480"/>
+          </a:xfrm>
+          <a:prstGeom prst="ellipse">
+            <a:avLst/>
+          </a:prstGeom>
+          <a:solidFill>
+            <a:schemeClr val="bg1"/>
+          </a:solidFill>
+          <a:ln w="12700">
+            <a:solidFill>
+              <a:srgbClr val="D7D7D7"/>
+            </a:solidFill>
+          </a:ln>
+        </p:spPr>
+        <p:txBody>
+          <a:bodyPr wrap="square" lIns="0" tIns="0" rIns="0" bIns="0" rtlCol="0" anchor="ctr"/>
+          <a:lstStyle/>
+          <a:p>
+            <a:pPr algn="ctr" indent="0" marL="0">
+              <a:buNone/>
+            </a:pPr>
+            <a:r>
+              <a:rPr lang="en-US" sz="1400" b="1" dirty="0">
+                <a:solidFill>
+                  <a:schemeClr val="tx2"/>
+                </a:solidFill>
+              </a:rPr>
+              <a:t>02</a:t>
+            </a:r>
+            <a:endParaRPr lang="en-US" sz="1400" dirty="0"/>
+          </a:p>
+        </p:txBody>
+      </p:sp>
+      <p:sp>
+        <p:nvSpPr>
+          <p:cNvPr id="17" name="text-216"/>
+          <p:cNvSpPr txBox="1"/>
+          <p:nvPr/>
+        </p:nvSpPr>
+        <p:spPr>
+          <a:xfrm>
+            <a:off x="5074920" y="1481328"/>
+            <a:ext cx="2651760" cy="457200"/>
+          </a:xfrm>
+          <a:prstGeom prst="rect">
+            <a:avLst/>
+          </a:prstGeom>
+          <a:noFill/>
+          <a:ln/>
+        </p:spPr>
+        <p:txBody>
+          <a:bodyPr wrap="square" lIns="0" tIns="0" rIns="0" bIns="0" rtlCol="0" anchor="ctr"/>
+          <a:lstStyle/>
+          <a:p>
+            <a:pPr algn="l" indent="0" marL="0">
+              <a:buNone/>
+            </a:pPr>
+            <a:r>
+              <a:rPr lang="en-US" sz="1800" b="1" dirty="0">
+                <a:solidFill>
+                  <a:schemeClr val="tx2"/>
+                </a:solidFill>
+              </a:rPr>
+              <a:t>Unauthorised contractor</a:t>
+            </a:r>
+            <a:endParaRPr lang="en-US" sz="1800" dirty="0"/>
+          </a:p>
+        </p:txBody>
+      </p:sp>
+      <p:sp>
+        <p:nvSpPr>
+          <p:cNvPr id="18" name="icon-bg-217"/>
+          <p:cNvSpPr/>
+          <p:nvPr/>
+        </p:nvSpPr>
+        <p:spPr>
+          <a:xfrm>
+            <a:off x="4526280" y="2103120"/>
+            <a:ext cx="502920" cy="502920"/>
           </a:xfrm>
           <a:prstGeom prst="ellipse">
             <a:avLst/>
@@ -16526,84 +16756,10 @@
           </a:solidFill>
           <a:ln/>
         </p:spPr>
-        <p:txBody>
-          <a:bodyPr wrap="square" lIns="0" tIns="0" rIns="0" bIns="0" rtlCol="0" anchor="ctr"/>
-          <a:lstStyle/>
-          <a:p>
-            <a:pPr algn="ctr" indent="0" marL="0">
-              <a:buNone/>
-            </a:pPr>
-            <a:r>
-              <a:rPr lang="en-US" sz="1600" b="1" dirty="0">
-                <a:solidFill>
-                  <a:schemeClr val="bg1"/>
-                </a:solidFill>
-              </a:rPr>
-              <a:t>2</a:t>
-            </a:r>
-            <a:endParaRPr lang="en-US" sz="1600" dirty="0"/>
-          </a:p>
-        </p:txBody>
-      </p:sp>
-      <p:sp>
-        <p:nvSpPr>
-          <p:cNvPr id="17" name="text-215"/>
-          <p:cNvSpPr txBox="1"/>
-          <p:nvPr/>
-        </p:nvSpPr>
-        <p:spPr>
-          <a:xfrm>
-            <a:off x="5074920" y="1481328"/>
-            <a:ext cx="2651760" cy="457200"/>
-          </a:xfrm>
-          <a:prstGeom prst="rect">
-            <a:avLst/>
-          </a:prstGeom>
-          <a:noFill/>
-          <a:ln/>
-        </p:spPr>
-        <p:txBody>
-          <a:bodyPr wrap="square" lIns="0" tIns="0" rIns="0" bIns="0" rtlCol="0" anchor="ctr"/>
-          <a:lstStyle/>
-          <a:p>
-            <a:pPr algn="l" indent="0" marL="0">
-              <a:buNone/>
-            </a:pPr>
-            <a:r>
-              <a:rPr lang="en-US" sz="1800" b="1" dirty="0">
-                <a:solidFill>
-                  <a:schemeClr val="tx2"/>
-                </a:solidFill>
-              </a:rPr>
-              <a:t>Unauthorised contractor</a:t>
-            </a:r>
-            <a:endParaRPr lang="en-US" sz="1800" dirty="0"/>
-          </a:p>
-        </p:txBody>
-      </p:sp>
-      <p:sp>
-        <p:nvSpPr>
-          <p:cNvPr id="18" name="icon-bg-216"/>
-          <p:cNvSpPr/>
-          <p:nvPr/>
-        </p:nvSpPr>
-        <p:spPr>
-          <a:xfrm>
-            <a:off x="4526280" y="2103120"/>
-            <a:ext cx="502920" cy="502920"/>
-          </a:xfrm>
-          <a:prstGeom prst="ellipse">
-            <a:avLst/>
-          </a:prstGeom>
-          <a:solidFill>
-            <a:schemeClr val="accent2"/>
-          </a:solidFill>
-          <a:ln/>
-        </p:spPr>
       </p:sp>
       <p:pic>
         <p:nvPicPr>
-          <p:cNvPr id="19" name="icon-217" descr="preencoded.png">    </p:cNvPr>
+          <p:cNvPr id="19" name="icon-218" descr="preencoded.png">    </p:cNvPr>
           <p:cNvPicPr>
             <a:picLocks noChangeAspect="1"/>
           </p:cNvPicPr>
@@ -16627,7 +16783,7 @@
       </p:pic>
       <p:sp>
         <p:nvSpPr>
-          <p:cNvPr id="20" name="text-218"/>
+          <p:cNvPr id="20" name="text-219"/>
           <p:cNvSpPr txBox="1"/>
           <p:nvPr/>
         </p:nvSpPr>
@@ -16663,7 +16819,7 @@
       </p:sp>
       <p:sp>
         <p:nvSpPr>
-          <p:cNvPr id="21" name="text-219"/>
+          <p:cNvPr id="21" name="text-220"/>
           <p:cNvSpPr txBox="1"/>
           <p:nvPr/>
         </p:nvSpPr>
@@ -16699,7 +16855,7 @@
       </p:sp>
       <p:sp>
         <p:nvSpPr>
-          <p:cNvPr id="22" name="answer-mock-220"/>
+          <p:cNvPr id="22" name="answer-mock-221"/>
           <p:cNvSpPr/>
           <p:nvPr/>
         </p:nvSpPr>
@@ -16710,7 +16866,7 @@
           </a:xfrm>
           <a:prstGeom prst="roundRect">
             <a:avLst>
-              <a:gd name="adj" fmla="val 5926"/>
+              <a:gd name="adj" fmla="val 3704"/>
             </a:avLst>
           </a:prstGeom>
           <a:solidFill>
@@ -16718,7 +16874,7 @@
           </a:solidFill>
           <a:ln w="12700">
             <a:solidFill>
-              <a:srgbClr val="CBD5E1"/>
+              <a:srgbClr val="D7D7D7"/>
             </a:solidFill>
             <a:prstDash val="solid"/>
           </a:ln>
@@ -16726,7 +16882,7 @@
       </p:sp>
       <p:sp>
         <p:nvSpPr>
-          <p:cNvPr id="23" name="text-221"/>
+          <p:cNvPr id="23" name="text-222"/>
           <p:cNvSpPr txBox="1"/>
           <p:nvPr/>
         </p:nvSpPr>
@@ -16754,7 +16910,7 @@
                   <a:schemeClr val="tx1"/>
                 </a:solidFill>
               </a:rPr>
-              <a:t>No figures, no title, no hint the deck exists</a:t>
+              <a:t>“There is not enough evidence to answer this question.”</a:t>
             </a:r>
             <a:endParaRPr lang="en-US" sz="1300" dirty="0"/>
           </a:p>
@@ -16768,7 +16924,7 @@
                   <a:schemeClr val="accent6"/>
                 </a:solidFill>
               </a:rPr>
-              <a:t>Opening the deck returns the same 404 as a missing file</a:t>
+              <a:t>11 of 11 candidates denied before the model; opening the deck gives the same 404 as a missing file</a:t>
             </a:r>
             <a:endParaRPr lang="en-US" sz="1300" dirty="0"/>
           </a:p>
@@ -16776,7 +16932,7 @@
       </p:sp>
       <p:sp>
         <p:nvSpPr>
-          <p:cNvPr id="24" name="verdict-222"/>
+          <p:cNvPr id="24" name="verdict-223"/>
           <p:cNvSpPr/>
           <p:nvPr/>
         </p:nvSpPr>
@@ -16787,11 +16943,11 @@
           </a:xfrm>
           <a:prstGeom prst="roundRect">
             <a:avLst>
-              <a:gd name="adj" fmla="val 7619"/>
+              <a:gd name="adj" fmla="val 4762"/>
             </a:avLst>
           </a:prstGeom>
           <a:solidFill>
-            <a:srgbClr val="FDECEC"/>
+            <a:srgbClr val="FBECEB"/>
           </a:solidFill>
           <a:ln w="12700">
             <a:solidFill>
@@ -16803,7 +16959,7 @@
       </p:sp>
       <p:sp>
         <p:nvSpPr>
-          <p:cNvPr id="25" name="text-223"/>
+          <p:cNvPr id="25" name="text-224"/>
           <p:cNvSpPr txBox="1"/>
           <p:nvPr/>
         </p:nvSpPr>
@@ -16839,7 +16995,7 @@
       </p:sp>
       <p:sp>
         <p:nvSpPr>
-          <p:cNvPr id="26" name="arrow-224"/>
+          <p:cNvPr id="26" name="arrow-225"/>
           <p:cNvSpPr/>
           <p:nvPr/>
         </p:nvSpPr>
@@ -16863,7 +17019,7 @@
       </p:sp>
       <p:sp>
         <p:nvSpPr>
-          <p:cNvPr id="27" name="scene-225"/>
+          <p:cNvPr id="27" name="scene-226"/>
           <p:cNvSpPr/>
           <p:nvPr/>
         </p:nvSpPr>
@@ -16874,7 +17030,7 @@
           </a:xfrm>
           <a:prstGeom prst="roundRect">
             <a:avLst>
-              <a:gd name="adj" fmla="val 2078"/>
+              <a:gd name="adj" fmla="val 1299"/>
             </a:avLst>
           </a:prstGeom>
           <a:solidFill>
@@ -16885,7 +17041,7 @@
       </p:sp>
       <p:sp>
         <p:nvSpPr>
-          <p:cNvPr id="28" name="num-226"/>
+          <p:cNvPr id="28" name="num-227"/>
           <p:cNvSpPr txBox="1"/>
           <p:nvPr/>
         </p:nvSpPr>
@@ -16893,6 +17049,84 @@
           <a:xfrm>
             <a:off x="8275320" y="1508760"/>
             <a:ext cx="411480" cy="411480"/>
+          </a:xfrm>
+          <a:prstGeom prst="ellipse">
+            <a:avLst/>
+          </a:prstGeom>
+          <a:solidFill>
+            <a:schemeClr val="bg1"/>
+          </a:solidFill>
+          <a:ln w="12700">
+            <a:solidFill>
+              <a:srgbClr val="D7D7D7"/>
+            </a:solidFill>
+          </a:ln>
+        </p:spPr>
+        <p:txBody>
+          <a:bodyPr wrap="square" lIns="0" tIns="0" rIns="0" bIns="0" rtlCol="0" anchor="ctr"/>
+          <a:lstStyle/>
+          <a:p>
+            <a:pPr algn="ctr" indent="0" marL="0">
+              <a:buNone/>
+            </a:pPr>
+            <a:r>
+              <a:rPr lang="en-US" sz="1400" b="1" dirty="0">
+                <a:solidFill>
+                  <a:schemeClr val="tx2"/>
+                </a:solidFill>
+              </a:rPr>
+              <a:t>03</a:t>
+            </a:r>
+            <a:endParaRPr lang="en-US" sz="1400" dirty="0"/>
+          </a:p>
+        </p:txBody>
+      </p:sp>
+      <p:sp>
+        <p:nvSpPr>
+          <p:cNvPr id="29" name="text-228"/>
+          <p:cNvSpPr txBox="1"/>
+          <p:nvPr/>
+        </p:nvSpPr>
+        <p:spPr>
+          <a:xfrm>
+            <a:off x="8823960" y="1481328"/>
+            <a:ext cx="2651760" cy="457200"/>
+          </a:xfrm>
+          <a:prstGeom prst="rect">
+            <a:avLst/>
+          </a:prstGeom>
+          <a:noFill/>
+          <a:ln/>
+        </p:spPr>
+        <p:txBody>
+          <a:bodyPr wrap="square" lIns="0" tIns="0" rIns="0" bIns="0" rtlCol="0" anchor="ctr"/>
+          <a:lstStyle/>
+          <a:p>
+            <a:pPr algn="l" indent="0" marL="0">
+              <a:buNone/>
+            </a:pPr>
+            <a:r>
+              <a:rPr lang="en-US" sz="1800" b="1" dirty="0">
+                <a:solidFill>
+                  <a:schemeClr val="tx2"/>
+                </a:solidFill>
+              </a:rPr>
+              <a:t>Revoked at the source</a:t>
+            </a:r>
+            <a:endParaRPr lang="en-US" sz="1800" dirty="0"/>
+          </a:p>
+        </p:txBody>
+      </p:sp>
+      <p:sp>
+        <p:nvSpPr>
+          <p:cNvPr id="30" name="icon-bg-229"/>
+          <p:cNvSpPr/>
+          <p:nvPr/>
+        </p:nvSpPr>
+        <p:spPr>
+          <a:xfrm>
+            <a:off x="8275320" y="2103120"/>
+            <a:ext cx="502920" cy="502920"/>
           </a:xfrm>
           <a:prstGeom prst="ellipse">
             <a:avLst/>
@@ -16902,84 +17136,10 @@
           </a:solidFill>
           <a:ln/>
         </p:spPr>
-        <p:txBody>
-          <a:bodyPr wrap="square" lIns="0" tIns="0" rIns="0" bIns="0" rtlCol="0" anchor="ctr"/>
-          <a:lstStyle/>
-          <a:p>
-            <a:pPr algn="ctr" indent="0" marL="0">
-              <a:buNone/>
-            </a:pPr>
-            <a:r>
-              <a:rPr lang="en-US" sz="1600" b="1" dirty="0">
-                <a:solidFill>
-                  <a:schemeClr val="bg1"/>
-                </a:solidFill>
-              </a:rPr>
-              <a:t>3</a:t>
-            </a:r>
-            <a:endParaRPr lang="en-US" sz="1600" dirty="0"/>
-          </a:p>
-        </p:txBody>
-      </p:sp>
-      <p:sp>
-        <p:nvSpPr>
-          <p:cNvPr id="29" name="text-227"/>
-          <p:cNvSpPr txBox="1"/>
-          <p:nvPr/>
-        </p:nvSpPr>
-        <p:spPr>
-          <a:xfrm>
-            <a:off x="8823960" y="1481328"/>
-            <a:ext cx="2651760" cy="457200"/>
-          </a:xfrm>
-          <a:prstGeom prst="rect">
-            <a:avLst/>
-          </a:prstGeom>
-          <a:noFill/>
-          <a:ln/>
-        </p:spPr>
-        <p:txBody>
-          <a:bodyPr wrap="square" lIns="0" tIns="0" rIns="0" bIns="0" rtlCol="0" anchor="ctr"/>
-          <a:lstStyle/>
-          <a:p>
-            <a:pPr algn="l" indent="0" marL="0">
-              <a:buNone/>
-            </a:pPr>
-            <a:r>
-              <a:rPr lang="en-US" sz="1800" b="1" dirty="0">
-                <a:solidFill>
-                  <a:schemeClr val="tx2"/>
-                </a:solidFill>
-              </a:rPr>
-              <a:t>Revoked at the source</a:t>
-            </a:r>
-            <a:endParaRPr lang="en-US" sz="1800" dirty="0"/>
-          </a:p>
-        </p:txBody>
-      </p:sp>
-      <p:sp>
-        <p:nvSpPr>
-          <p:cNvPr id="30" name="icon-bg-228"/>
-          <p:cNvSpPr/>
-          <p:nvPr/>
-        </p:nvSpPr>
-        <p:spPr>
-          <a:xfrm>
-            <a:off x="8275320" y="2103120"/>
-            <a:ext cx="502920" cy="502920"/>
-          </a:xfrm>
-          <a:prstGeom prst="ellipse">
-            <a:avLst/>
-          </a:prstGeom>
-          <a:solidFill>
-            <a:schemeClr val="accent3"/>
-          </a:solidFill>
-          <a:ln/>
-        </p:spPr>
       </p:sp>
       <p:pic>
         <p:nvPicPr>
-          <p:cNvPr id="31" name="icon-229" descr="preencoded.png">    </p:cNvPr>
+          <p:cNvPr id="31" name="icon-230" descr="preencoded.png">    </p:cNvPr>
           <p:cNvPicPr>
             <a:picLocks noChangeAspect="1"/>
           </p:cNvPicPr>
@@ -17003,7 +17163,7 @@
       </p:pic>
       <p:sp>
         <p:nvSpPr>
-          <p:cNvPr id="32" name="text-230"/>
+          <p:cNvPr id="32" name="text-231"/>
           <p:cNvSpPr txBox="1"/>
           <p:nvPr/>
         </p:nvSpPr>
@@ -17039,7 +17199,7 @@
       </p:sp>
       <p:sp>
         <p:nvSpPr>
-          <p:cNvPr id="33" name="text-231"/>
+          <p:cNvPr id="33" name="text-232"/>
           <p:cNvSpPr txBox="1"/>
           <p:nvPr/>
         </p:nvSpPr>
@@ -17075,7 +17235,7 @@
       </p:sp>
       <p:sp>
         <p:nvSpPr>
-          <p:cNvPr id="34" name="answer-mock-232"/>
+          <p:cNvPr id="34" name="answer-mock-233"/>
           <p:cNvSpPr/>
           <p:nvPr/>
         </p:nvSpPr>
@@ -17086,7 +17246,7 @@
           </a:xfrm>
           <a:prstGeom prst="roundRect">
             <a:avLst>
-              <a:gd name="adj" fmla="val 5926"/>
+              <a:gd name="adj" fmla="val 3704"/>
             </a:avLst>
           </a:prstGeom>
           <a:solidFill>
@@ -17094,7 +17254,7 @@
           </a:solidFill>
           <a:ln w="12700">
             <a:solidFill>
-              <a:srgbClr val="CBD5E1"/>
+              <a:srgbClr val="D7D7D7"/>
             </a:solidFill>
             <a:prstDash val="solid"/>
           </a:ln>
@@ -17102,7 +17262,7 @@
       </p:sp>
       <p:sp>
         <p:nvSpPr>
-          <p:cNvPr id="35" name="text-233"/>
+          <p:cNvPr id="35" name="text-234"/>
           <p:cNvSpPr txBox="1"/>
           <p:nvPr/>
         </p:nvSpPr>
@@ -17152,7 +17312,7 @@
       </p:sp>
       <p:sp>
         <p:nvSpPr>
-          <p:cNvPr id="36" name="verdict-234"/>
+          <p:cNvPr id="36" name="verdict-235"/>
           <p:cNvSpPr/>
           <p:nvPr/>
         </p:nvSpPr>
@@ -17163,11 +17323,11 @@
           </a:xfrm>
           <a:prstGeom prst="roundRect">
             <a:avLst>
-              <a:gd name="adj" fmla="val 7619"/>
+              <a:gd name="adj" fmla="val 4762"/>
             </a:avLst>
           </a:prstGeom>
           <a:solidFill>
-            <a:srgbClr val="FDF4E4"/>
+            <a:srgbClr val="FCF3E3"/>
           </a:solidFill>
           <a:ln w="12700">
             <a:solidFill>
@@ -17179,7 +17339,7 @@
       </p:sp>
       <p:sp>
         <p:nvSpPr>
-          <p:cNvPr id="37" name="text-235"/>
+          <p:cNvPr id="37" name="text-236"/>
           <p:cNvSpPr txBox="1"/>
           <p:nvPr/>
         </p:nvSpPr>
@@ -17215,7 +17375,7 @@
       </p:sp>
       <p:sp>
         <p:nvSpPr>
-          <p:cNvPr id="38" name="text-236"/>
+          <p:cNvPr id="38" name="text-237"/>
           <p:cNvSpPr txBox="1"/>
           <p:nvPr/>
         </p:nvSpPr>
@@ -17346,20 +17506,31 @@
               <a:buNone/>
             </a:pPr>
             <a:r>
-              <a:rPr lang="en-US" sz="2800" b="1" dirty="0">
+              <a:rPr lang="en-US" sz="2600" b="1" dirty="0">
                 <a:solidFill>
                   <a:schemeClr val="tx2"/>
                 </a:solidFill>
               </a:rPr>
-              <a:t>All five mandatory scenarios run end to end, and each is a test</a:t>
-            </a:r>
-            <a:endParaRPr lang="en-US" sz="2800" dirty="0"/>
+              <a:t>All five mandatory scenarios run end to end,</a:t>
+            </a:r>
+            <a:pPr algn="l" indent="0" marL="0">
+              <a:buNone/>
+            </a:pPr>
+            <a:r>
+              <a:rPr lang="en-US" sz="2600" b="1" dirty="0">
+                <a:solidFill>
+                  <a:srgbClr val="8C8C8C"/>
+                </a:solidFill>
+              </a:rPr>
+              <a:t> and each is a test</a:t>
+            </a:r>
+            <a:endParaRPr lang="en-US" sz="2600" dirty="0"/>
           </a:p>
         </p:txBody>
       </p:sp>
       <p:graphicFrame>
         <p:nvGraphicFramePr>
-          <p:cNvPr id="9" name="scenario-table-237"/>
+          <p:cNvPr id="9" name="scenario-table-238"/>
           <p:cNvGraphicFramePr>
             <a:graphicFrameLocks noGrp="1"/>
           </p:cNvGraphicFramePr>
@@ -17400,7 +17571,7 @@
                   <a:tcPr marL="91440" marR="91440" marT="54864" marB="54864" anchor="ctr">
                     <a:lnL w="9525" cap="flat" cmpd="sng" algn="ctr">
                       <a:solidFill>
-                        <a:srgbClr val="CBD5E1"/>
+                        <a:srgbClr val="D7D7D7"/>
                       </a:solidFill>
                       <a:prstDash val="solid"/>
                       <a:round/>
@@ -17409,7 +17580,7 @@
                     </a:lnL>
                     <a:lnR w="9525" cap="flat" cmpd="sng" algn="ctr">
                       <a:solidFill>
-                        <a:srgbClr val="CBD5E1"/>
+                        <a:srgbClr val="D7D7D7"/>
                       </a:solidFill>
                       <a:prstDash val="solid"/>
                       <a:round/>
@@ -17418,7 +17589,7 @@
                     </a:lnR>
                     <a:lnT w="9525" cap="flat" cmpd="sng" algn="ctr">
                       <a:solidFill>
-                        <a:srgbClr val="CBD5E1"/>
+                        <a:srgbClr val="D7D7D7"/>
                       </a:solidFill>
                       <a:prstDash val="solid"/>
                       <a:round/>
@@ -17427,7 +17598,7 @@
                     </a:lnT>
                     <a:lnB w="9525" cap="flat" cmpd="sng" algn="ctr">
                       <a:solidFill>
-                        <a:srgbClr val="CBD5E1"/>
+                        <a:srgbClr val="D7D7D7"/>
                       </a:solidFill>
                       <a:prstDash val="solid"/>
                       <a:round/>
@@ -17461,7 +17632,7 @@
                   <a:tcPr marL="91440" marR="91440" marT="54864" marB="54864" anchor="ctr">
                     <a:lnL w="9525" cap="flat" cmpd="sng" algn="ctr">
                       <a:solidFill>
-                        <a:srgbClr val="CBD5E1"/>
+                        <a:srgbClr val="D7D7D7"/>
                       </a:solidFill>
                       <a:prstDash val="solid"/>
                       <a:round/>
@@ -17470,7 +17641,7 @@
                     </a:lnL>
                     <a:lnR w="9525" cap="flat" cmpd="sng" algn="ctr">
                       <a:solidFill>
-                        <a:srgbClr val="CBD5E1"/>
+                        <a:srgbClr val="D7D7D7"/>
                       </a:solidFill>
                       <a:prstDash val="solid"/>
                       <a:round/>
@@ -17479,7 +17650,7 @@
                     </a:lnR>
                     <a:lnT w="9525" cap="flat" cmpd="sng" algn="ctr">
                       <a:solidFill>
-                        <a:srgbClr val="CBD5E1"/>
+                        <a:srgbClr val="D7D7D7"/>
                       </a:solidFill>
                       <a:prstDash val="solid"/>
                       <a:round/>
@@ -17488,7 +17659,7 @@
                     </a:lnT>
                     <a:lnB w="9525" cap="flat" cmpd="sng" algn="ctr">
                       <a:solidFill>
-                        <a:srgbClr val="CBD5E1"/>
+                        <a:srgbClr val="D7D7D7"/>
                       </a:solidFill>
                       <a:prstDash val="solid"/>
                       <a:round/>
@@ -17522,7 +17693,7 @@
                   <a:tcPr marL="91440" marR="91440" marT="54864" marB="54864" anchor="ctr">
                     <a:lnL w="9525" cap="flat" cmpd="sng" algn="ctr">
                       <a:solidFill>
-                        <a:srgbClr val="CBD5E1"/>
+                        <a:srgbClr val="D7D7D7"/>
                       </a:solidFill>
                       <a:prstDash val="solid"/>
                       <a:round/>
@@ -17531,7 +17702,7 @@
                     </a:lnL>
                     <a:lnR w="9525" cap="flat" cmpd="sng" algn="ctr">
                       <a:solidFill>
-                        <a:srgbClr val="CBD5E1"/>
+                        <a:srgbClr val="D7D7D7"/>
                       </a:solidFill>
                       <a:prstDash val="solid"/>
                       <a:round/>
@@ -17540,7 +17711,7 @@
                     </a:lnR>
                     <a:lnT w="9525" cap="flat" cmpd="sng" algn="ctr">
                       <a:solidFill>
-                        <a:srgbClr val="CBD5E1"/>
+                        <a:srgbClr val="D7D7D7"/>
                       </a:solidFill>
                       <a:prstDash val="solid"/>
                       <a:round/>
@@ -17549,7 +17720,7 @@
                     </a:lnT>
                     <a:lnB w="9525" cap="flat" cmpd="sng" algn="ctr">
                       <a:solidFill>
-                        <a:srgbClr val="CBD5E1"/>
+                        <a:srgbClr val="D7D7D7"/>
                       </a:solidFill>
                       <a:prstDash val="solid"/>
                       <a:round/>
@@ -17583,7 +17754,7 @@
                   <a:tcPr marL="91440" marR="91440" marT="54864" marB="54864" anchor="ctr">
                     <a:lnL w="9525" cap="flat" cmpd="sng" algn="ctr">
                       <a:solidFill>
-                        <a:srgbClr val="CBD5E1"/>
+                        <a:srgbClr val="D7D7D7"/>
                       </a:solidFill>
                       <a:prstDash val="solid"/>
                       <a:round/>
@@ -17592,7 +17763,7 @@
                     </a:lnL>
                     <a:lnR w="9525" cap="flat" cmpd="sng" algn="ctr">
                       <a:solidFill>
-                        <a:srgbClr val="CBD5E1"/>
+                        <a:srgbClr val="D7D7D7"/>
                       </a:solidFill>
                       <a:prstDash val="solid"/>
                       <a:round/>
@@ -17601,7 +17772,7 @@
                     </a:lnR>
                     <a:lnT w="9525" cap="flat" cmpd="sng" algn="ctr">
                       <a:solidFill>
-                        <a:srgbClr val="CBD5E1"/>
+                        <a:srgbClr val="D7D7D7"/>
                       </a:solidFill>
                       <a:prstDash val="solid"/>
                       <a:round/>
@@ -17610,7 +17781,7 @@
                     </a:lnT>
                     <a:lnB w="9525" cap="flat" cmpd="sng" algn="ctr">
                       <a:solidFill>
-                        <a:srgbClr val="CBD5E1"/>
+                        <a:srgbClr val="D7D7D7"/>
                       </a:solidFill>
                       <a:prstDash val="solid"/>
                       <a:round/>
@@ -17646,7 +17817,7 @@
                   <a:tcPr marL="91440" marR="91440" marT="54864" marB="54864" anchor="ctr">
                     <a:lnL w="9525" cap="flat" cmpd="sng" algn="ctr">
                       <a:solidFill>
-                        <a:srgbClr val="CBD5E1"/>
+                        <a:srgbClr val="D7D7D7"/>
                       </a:solidFill>
                       <a:prstDash val="solid"/>
                       <a:round/>
@@ -17655,7 +17826,7 @@
                     </a:lnL>
                     <a:lnR w="9525" cap="flat" cmpd="sng" algn="ctr">
                       <a:solidFill>
-                        <a:srgbClr val="CBD5E1"/>
+                        <a:srgbClr val="D7D7D7"/>
                       </a:solidFill>
                       <a:prstDash val="solid"/>
                       <a:round/>
@@ -17664,7 +17835,7 @@
                     </a:lnR>
                     <a:lnT w="9525" cap="flat" cmpd="sng" algn="ctr">
                       <a:solidFill>
-                        <a:srgbClr val="CBD5E1"/>
+                        <a:srgbClr val="D7D7D7"/>
                       </a:solidFill>
                       <a:prstDash val="solid"/>
                       <a:round/>
@@ -17673,7 +17844,7 @@
                     </a:lnT>
                     <a:lnB w="9525" cap="flat" cmpd="sng" algn="ctr">
                       <a:solidFill>
-                        <a:srgbClr val="CBD5E1"/>
+                        <a:srgbClr val="D7D7D7"/>
                       </a:solidFill>
                       <a:prstDash val="solid"/>
                       <a:round/>
@@ -17707,7 +17878,7 @@
                   <a:tcPr marL="91440" marR="91440" marT="54864" marB="54864" anchor="ctr">
                     <a:lnL w="9525" cap="flat" cmpd="sng" algn="ctr">
                       <a:solidFill>
-                        <a:srgbClr val="CBD5E1"/>
+                        <a:srgbClr val="D7D7D7"/>
                       </a:solidFill>
                       <a:prstDash val="solid"/>
                       <a:round/>
@@ -17716,7 +17887,7 @@
                     </a:lnL>
                     <a:lnR w="9525" cap="flat" cmpd="sng" algn="ctr">
                       <a:solidFill>
-                        <a:srgbClr val="CBD5E1"/>
+                        <a:srgbClr val="D7D7D7"/>
                       </a:solidFill>
                       <a:prstDash val="solid"/>
                       <a:round/>
@@ -17725,7 +17896,7 @@
                     </a:lnR>
                     <a:lnT w="9525" cap="flat" cmpd="sng" algn="ctr">
                       <a:solidFill>
-                        <a:srgbClr val="CBD5E1"/>
+                        <a:srgbClr val="D7D7D7"/>
                       </a:solidFill>
                       <a:prstDash val="solid"/>
                       <a:round/>
@@ -17734,7 +17905,7 @@
                     </a:lnT>
                     <a:lnB w="9525" cap="flat" cmpd="sng" algn="ctr">
                       <a:solidFill>
-                        <a:srgbClr val="CBD5E1"/>
+                        <a:srgbClr val="D7D7D7"/>
                       </a:solidFill>
                       <a:prstDash val="solid"/>
                       <a:round/>
@@ -17760,7 +17931,7 @@
                             <a:schemeClr val="tx1"/>
                           </a:solidFill>
                         </a:rPr>
-                        <a:t>John asks about the Rail-B cutover. The facts are spread across email, Jira, Slack and Drive, and one answer cites several of them</a:t>
+                        <a:t>John asks about the Rail-B cutover and gets one answer citing an email, Jira PAY-150, two Slack channels and the Drive vendor list (8/8 claims supported)</a:t>
                       </a:r>
                       <a:endParaRPr lang="en-US" sz="1300" dirty="0"/>
                     </a:p>
@@ -17768,7 +17939,7 @@
                   <a:tcPr marL="91440" marR="91440" marT="54864" marB="54864" anchor="ctr">
                     <a:lnL w="9525" cap="flat" cmpd="sng" algn="ctr">
                       <a:solidFill>
-                        <a:srgbClr val="CBD5E1"/>
+                        <a:srgbClr val="D7D7D7"/>
                       </a:solidFill>
                       <a:prstDash val="solid"/>
                       <a:round/>
@@ -17777,7 +17948,7 @@
                     </a:lnL>
                     <a:lnR w="9525" cap="flat" cmpd="sng" algn="ctr">
                       <a:solidFill>
-                        <a:srgbClr val="CBD5E1"/>
+                        <a:srgbClr val="D7D7D7"/>
                       </a:solidFill>
                       <a:prstDash val="solid"/>
                       <a:round/>
@@ -17786,7 +17957,7 @@
                     </a:lnR>
                     <a:lnT w="9525" cap="flat" cmpd="sng" algn="ctr">
                       <a:solidFill>
-                        <a:srgbClr val="CBD5E1"/>
+                        <a:srgbClr val="D7D7D7"/>
                       </a:solidFill>
                       <a:prstDash val="solid"/>
                       <a:round/>
@@ -17795,7 +17966,7 @@
                     </a:lnT>
                     <a:lnB w="9525" cap="flat" cmpd="sng" algn="ctr">
                       <a:solidFill>
-                        <a:srgbClr val="CBD5E1"/>
+                        <a:srgbClr val="D7D7D7"/>
                       </a:solidFill>
                       <a:prstDash val="solid"/>
                       <a:round/>
@@ -17829,7 +18000,7 @@
                   <a:tcPr marL="91440" marR="91440" marT="54864" marB="54864" anchor="ctr">
                     <a:lnL w="9525" cap="flat" cmpd="sng" algn="ctr">
                       <a:solidFill>
-                        <a:srgbClr val="CBD5E1"/>
+                        <a:srgbClr val="D7D7D7"/>
                       </a:solidFill>
                       <a:prstDash val="solid"/>
                       <a:round/>
@@ -17838,7 +18009,7 @@
                     </a:lnL>
                     <a:lnR w="9525" cap="flat" cmpd="sng" algn="ctr">
                       <a:solidFill>
-                        <a:srgbClr val="CBD5E1"/>
+                        <a:srgbClr val="D7D7D7"/>
                       </a:solidFill>
                       <a:prstDash val="solid"/>
                       <a:round/>
@@ -17847,7 +18018,7 @@
                     </a:lnR>
                     <a:lnT w="9525" cap="flat" cmpd="sng" algn="ctr">
                       <a:solidFill>
-                        <a:srgbClr val="CBD5E1"/>
+                        <a:srgbClr val="D7D7D7"/>
                       </a:solidFill>
                       <a:prstDash val="solid"/>
                       <a:round/>
@@ -17856,7 +18027,7 @@
                     </a:lnT>
                     <a:lnB w="9525" cap="flat" cmpd="sng" algn="ctr">
                       <a:solidFill>
-                        <a:srgbClr val="CBD5E1"/>
+                        <a:srgbClr val="D7D7D7"/>
                       </a:solidFill>
                       <a:prstDash val="solid"/>
                       <a:round/>
@@ -17892,7 +18063,7 @@
                   <a:tcPr marL="91440" marR="91440" marT="54864" marB="54864" anchor="ctr">
                     <a:lnL w="9525" cap="flat" cmpd="sng" algn="ctr">
                       <a:solidFill>
-                        <a:srgbClr val="CBD5E1"/>
+                        <a:srgbClr val="D7D7D7"/>
                       </a:solidFill>
                       <a:prstDash val="solid"/>
                       <a:round/>
@@ -17901,7 +18072,7 @@
                     </a:lnL>
                     <a:lnR w="9525" cap="flat" cmpd="sng" algn="ctr">
                       <a:solidFill>
-                        <a:srgbClr val="CBD5E1"/>
+                        <a:srgbClr val="D7D7D7"/>
                       </a:solidFill>
                       <a:prstDash val="solid"/>
                       <a:round/>
@@ -17910,7 +18081,7 @@
                     </a:lnR>
                     <a:lnT w="9525" cap="flat" cmpd="sng" algn="ctr">
                       <a:solidFill>
-                        <a:srgbClr val="CBD5E1"/>
+                        <a:srgbClr val="D7D7D7"/>
                       </a:solidFill>
                       <a:prstDash val="solid"/>
                       <a:round/>
@@ -17919,7 +18090,7 @@
                     </a:lnT>
                     <a:lnB w="9525" cap="flat" cmpd="sng" algn="ctr">
                       <a:solidFill>
-                        <a:srgbClr val="CBD5E1"/>
+                        <a:srgbClr val="D7D7D7"/>
                       </a:solidFill>
                       <a:prstDash val="solid"/>
                       <a:round/>
@@ -17953,7 +18124,7 @@
                   <a:tcPr marL="91440" marR="91440" marT="54864" marB="54864" anchor="ctr">
                     <a:lnL w="9525" cap="flat" cmpd="sng" algn="ctr">
                       <a:solidFill>
-                        <a:srgbClr val="CBD5E1"/>
+                        <a:srgbClr val="D7D7D7"/>
                       </a:solidFill>
                       <a:prstDash val="solid"/>
                       <a:round/>
@@ -17962,7 +18133,7 @@
                     </a:lnL>
                     <a:lnR w="9525" cap="flat" cmpd="sng" algn="ctr">
                       <a:solidFill>
-                        <a:srgbClr val="CBD5E1"/>
+                        <a:srgbClr val="D7D7D7"/>
                       </a:solidFill>
                       <a:prstDash val="solid"/>
                       <a:round/>
@@ -17971,7 +18142,7 @@
                     </a:lnR>
                     <a:lnT w="9525" cap="flat" cmpd="sng" algn="ctr">
                       <a:solidFill>
-                        <a:srgbClr val="CBD5E1"/>
+                        <a:srgbClr val="D7D7D7"/>
                       </a:solidFill>
                       <a:prstDash val="solid"/>
                       <a:round/>
@@ -17980,7 +18151,7 @@
                     </a:lnT>
                     <a:lnB w="9525" cap="flat" cmpd="sng" algn="ctr">
                       <a:solidFill>
-                        <a:srgbClr val="CBD5E1"/>
+                        <a:srgbClr val="D7D7D7"/>
                       </a:solidFill>
                       <a:prstDash val="solid"/>
                       <a:round/>
@@ -18014,7 +18185,7 @@
                   <a:tcPr marL="91440" marR="91440" marT="54864" marB="54864" anchor="ctr">
                     <a:lnL w="9525" cap="flat" cmpd="sng" algn="ctr">
                       <a:solidFill>
-                        <a:srgbClr val="CBD5E1"/>
+                        <a:srgbClr val="D7D7D7"/>
                       </a:solidFill>
                       <a:prstDash val="solid"/>
                       <a:round/>
@@ -18023,7 +18194,7 @@
                     </a:lnL>
                     <a:lnR w="9525" cap="flat" cmpd="sng" algn="ctr">
                       <a:solidFill>
-                        <a:srgbClr val="CBD5E1"/>
+                        <a:srgbClr val="D7D7D7"/>
                       </a:solidFill>
                       <a:prstDash val="solid"/>
                       <a:round/>
@@ -18032,7 +18203,7 @@
                     </a:lnR>
                     <a:lnT w="9525" cap="flat" cmpd="sng" algn="ctr">
                       <a:solidFill>
-                        <a:srgbClr val="CBD5E1"/>
+                        <a:srgbClr val="D7D7D7"/>
                       </a:solidFill>
                       <a:prstDash val="solid"/>
                       <a:round/>
@@ -18041,7 +18212,7 @@
                     </a:lnT>
                     <a:lnB w="9525" cap="flat" cmpd="sng" algn="ctr">
                       <a:solidFill>
-                        <a:srgbClr val="CBD5E1"/>
+                        <a:srgbClr val="D7D7D7"/>
                       </a:solidFill>
                       <a:prstDash val="solid"/>
                       <a:round/>
@@ -18075,7 +18246,7 @@
                   <a:tcPr marL="91440" marR="91440" marT="54864" marB="54864" anchor="ctr">
                     <a:lnL w="9525" cap="flat" cmpd="sng" algn="ctr">
                       <a:solidFill>
-                        <a:srgbClr val="CBD5E1"/>
+                        <a:srgbClr val="D7D7D7"/>
                       </a:solidFill>
                       <a:prstDash val="solid"/>
                       <a:round/>
@@ -18084,7 +18255,7 @@
                     </a:lnL>
                     <a:lnR w="9525" cap="flat" cmpd="sng" algn="ctr">
                       <a:solidFill>
-                        <a:srgbClr val="CBD5E1"/>
+                        <a:srgbClr val="D7D7D7"/>
                       </a:solidFill>
                       <a:prstDash val="solid"/>
                       <a:round/>
@@ -18093,7 +18264,7 @@
                     </a:lnR>
                     <a:lnT w="9525" cap="flat" cmpd="sng" algn="ctr">
                       <a:solidFill>
-                        <a:srgbClr val="CBD5E1"/>
+                        <a:srgbClr val="D7D7D7"/>
                       </a:solidFill>
                       <a:prstDash val="solid"/>
                       <a:round/>
@@ -18102,7 +18273,7 @@
                     </a:lnT>
                     <a:lnB w="9525" cap="flat" cmpd="sng" algn="ctr">
                       <a:solidFill>
-                        <a:srgbClr val="CBD5E1"/>
+                        <a:srgbClr val="D7D7D7"/>
                       </a:solidFill>
                       <a:prstDash val="solid"/>
                       <a:round/>
@@ -18138,7 +18309,7 @@
                   <a:tcPr marL="91440" marR="91440" marT="54864" marB="54864" anchor="ctr">
                     <a:lnL w="9525" cap="flat" cmpd="sng" algn="ctr">
                       <a:solidFill>
-                        <a:srgbClr val="CBD5E1"/>
+                        <a:srgbClr val="D7D7D7"/>
                       </a:solidFill>
                       <a:prstDash val="solid"/>
                       <a:round/>
@@ -18147,7 +18318,7 @@
                     </a:lnL>
                     <a:lnR w="9525" cap="flat" cmpd="sng" algn="ctr">
                       <a:solidFill>
-                        <a:srgbClr val="CBD5E1"/>
+                        <a:srgbClr val="D7D7D7"/>
                       </a:solidFill>
                       <a:prstDash val="solid"/>
                       <a:round/>
@@ -18156,7 +18327,7 @@
                     </a:lnR>
                     <a:lnT w="9525" cap="flat" cmpd="sng" algn="ctr">
                       <a:solidFill>
-                        <a:srgbClr val="CBD5E1"/>
+                        <a:srgbClr val="D7D7D7"/>
                       </a:solidFill>
                       <a:prstDash val="solid"/>
                       <a:round/>
@@ -18165,7 +18336,7 @@
                     </a:lnT>
                     <a:lnB w="9525" cap="flat" cmpd="sng" algn="ctr">
                       <a:solidFill>
-                        <a:srgbClr val="CBD5E1"/>
+                        <a:srgbClr val="D7D7D7"/>
                       </a:solidFill>
                       <a:prstDash val="solid"/>
                       <a:round/>
@@ -18199,7 +18370,7 @@
                   <a:tcPr marL="91440" marR="91440" marT="54864" marB="54864" anchor="ctr">
                     <a:lnL w="9525" cap="flat" cmpd="sng" algn="ctr">
                       <a:solidFill>
-                        <a:srgbClr val="CBD5E1"/>
+                        <a:srgbClr val="D7D7D7"/>
                       </a:solidFill>
                       <a:prstDash val="solid"/>
                       <a:round/>
@@ -18208,7 +18379,7 @@
                     </a:lnL>
                     <a:lnR w="9525" cap="flat" cmpd="sng" algn="ctr">
                       <a:solidFill>
-                        <a:srgbClr val="CBD5E1"/>
+                        <a:srgbClr val="D7D7D7"/>
                       </a:solidFill>
                       <a:prstDash val="solid"/>
                       <a:round/>
@@ -18217,7 +18388,7 @@
                     </a:lnR>
                     <a:lnT w="9525" cap="flat" cmpd="sng" algn="ctr">
                       <a:solidFill>
-                        <a:srgbClr val="CBD5E1"/>
+                        <a:srgbClr val="D7D7D7"/>
                       </a:solidFill>
                       <a:prstDash val="solid"/>
                       <a:round/>
@@ -18226,7 +18397,7 @@
                     </a:lnT>
                     <a:lnB w="9525" cap="flat" cmpd="sng" algn="ctr">
                       <a:solidFill>
-                        <a:srgbClr val="CBD5E1"/>
+                        <a:srgbClr val="D7D7D7"/>
                       </a:solidFill>
                       <a:prstDash val="solid"/>
                       <a:round/>
@@ -18260,7 +18431,7 @@
                   <a:tcPr marL="91440" marR="91440" marT="54864" marB="54864" anchor="ctr">
                     <a:lnL w="9525" cap="flat" cmpd="sng" algn="ctr">
                       <a:solidFill>
-                        <a:srgbClr val="CBD5E1"/>
+                        <a:srgbClr val="D7D7D7"/>
                       </a:solidFill>
                       <a:prstDash val="solid"/>
                       <a:round/>
@@ -18269,7 +18440,7 @@
                     </a:lnL>
                     <a:lnR w="9525" cap="flat" cmpd="sng" algn="ctr">
                       <a:solidFill>
-                        <a:srgbClr val="CBD5E1"/>
+                        <a:srgbClr val="D7D7D7"/>
                       </a:solidFill>
                       <a:prstDash val="solid"/>
                       <a:round/>
@@ -18278,7 +18449,7 @@
                     </a:lnR>
                     <a:lnT w="9525" cap="flat" cmpd="sng" algn="ctr">
                       <a:solidFill>
-                        <a:srgbClr val="CBD5E1"/>
+                        <a:srgbClr val="D7D7D7"/>
                       </a:solidFill>
                       <a:prstDash val="solid"/>
                       <a:round/>
@@ -18287,7 +18458,7 @@
                     </a:lnT>
                     <a:lnB w="9525" cap="flat" cmpd="sng" algn="ctr">
                       <a:solidFill>
-                        <a:srgbClr val="CBD5E1"/>
+                        <a:srgbClr val="D7D7D7"/>
                       </a:solidFill>
                       <a:prstDash val="solid"/>
                       <a:round/>
@@ -18321,7 +18492,7 @@
                   <a:tcPr marL="91440" marR="91440" marT="54864" marB="54864" anchor="ctr">
                     <a:lnL w="9525" cap="flat" cmpd="sng" algn="ctr">
                       <a:solidFill>
-                        <a:srgbClr val="CBD5E1"/>
+                        <a:srgbClr val="D7D7D7"/>
                       </a:solidFill>
                       <a:prstDash val="solid"/>
                       <a:round/>
@@ -18330,7 +18501,7 @@
                     </a:lnL>
                     <a:lnR w="9525" cap="flat" cmpd="sng" algn="ctr">
                       <a:solidFill>
-                        <a:srgbClr val="CBD5E1"/>
+                        <a:srgbClr val="D7D7D7"/>
                       </a:solidFill>
                       <a:prstDash val="solid"/>
                       <a:round/>
@@ -18339,7 +18510,7 @@
                     </a:lnR>
                     <a:lnT w="9525" cap="flat" cmpd="sng" algn="ctr">
                       <a:solidFill>
-                        <a:srgbClr val="CBD5E1"/>
+                        <a:srgbClr val="D7D7D7"/>
                       </a:solidFill>
                       <a:prstDash val="solid"/>
                       <a:round/>
@@ -18348,7 +18519,7 @@
                     </a:lnT>
                     <a:lnB w="9525" cap="flat" cmpd="sng" algn="ctr">
                       <a:solidFill>
-                        <a:srgbClr val="CBD5E1"/>
+                        <a:srgbClr val="D7D7D7"/>
                       </a:solidFill>
                       <a:prstDash val="solid"/>
                       <a:round/>
@@ -18384,7 +18555,7 @@
                   <a:tcPr marL="91440" marR="91440" marT="54864" marB="54864" anchor="ctr">
                     <a:lnL w="9525" cap="flat" cmpd="sng" algn="ctr">
                       <a:solidFill>
-                        <a:srgbClr val="CBD5E1"/>
+                        <a:srgbClr val="D7D7D7"/>
                       </a:solidFill>
                       <a:prstDash val="solid"/>
                       <a:round/>
@@ -18393,7 +18564,7 @@
                     </a:lnL>
                     <a:lnR w="9525" cap="flat" cmpd="sng" algn="ctr">
                       <a:solidFill>
-                        <a:srgbClr val="CBD5E1"/>
+                        <a:srgbClr val="D7D7D7"/>
                       </a:solidFill>
                       <a:prstDash val="solid"/>
                       <a:round/>
@@ -18402,7 +18573,7 @@
                     </a:lnR>
                     <a:lnT w="9525" cap="flat" cmpd="sng" algn="ctr">
                       <a:solidFill>
-                        <a:srgbClr val="CBD5E1"/>
+                        <a:srgbClr val="D7D7D7"/>
                       </a:solidFill>
                       <a:prstDash val="solid"/>
                       <a:round/>
@@ -18411,7 +18582,7 @@
                     </a:lnT>
                     <a:lnB w="9525" cap="flat" cmpd="sng" algn="ctr">
                       <a:solidFill>
-                        <a:srgbClr val="CBD5E1"/>
+                        <a:srgbClr val="D7D7D7"/>
                       </a:solidFill>
                       <a:prstDash val="solid"/>
                       <a:round/>
@@ -18445,7 +18616,7 @@
                   <a:tcPr marL="91440" marR="91440" marT="54864" marB="54864" anchor="ctr">
                     <a:lnL w="9525" cap="flat" cmpd="sng" algn="ctr">
                       <a:solidFill>
-                        <a:srgbClr val="CBD5E1"/>
+                        <a:srgbClr val="D7D7D7"/>
                       </a:solidFill>
                       <a:prstDash val="solid"/>
                       <a:round/>
@@ -18454,7 +18625,7 @@
                     </a:lnL>
                     <a:lnR w="9525" cap="flat" cmpd="sng" algn="ctr">
                       <a:solidFill>
-                        <a:srgbClr val="CBD5E1"/>
+                        <a:srgbClr val="D7D7D7"/>
                       </a:solidFill>
                       <a:prstDash val="solid"/>
                       <a:round/>
@@ -18463,7 +18634,7 @@
                     </a:lnR>
                     <a:lnT w="9525" cap="flat" cmpd="sng" algn="ctr">
                       <a:solidFill>
-                        <a:srgbClr val="CBD5E1"/>
+                        <a:srgbClr val="D7D7D7"/>
                       </a:solidFill>
                       <a:prstDash val="solid"/>
                       <a:round/>
@@ -18472,7 +18643,7 @@
                     </a:lnT>
                     <a:lnB w="9525" cap="flat" cmpd="sng" algn="ctr">
                       <a:solidFill>
-                        <a:srgbClr val="CBD5E1"/>
+                        <a:srgbClr val="D7D7D7"/>
                       </a:solidFill>
                       <a:prstDash val="solid"/>
                       <a:round/>
@@ -18506,7 +18677,7 @@
                   <a:tcPr marL="91440" marR="91440" marT="54864" marB="54864" anchor="ctr">
                     <a:lnL w="9525" cap="flat" cmpd="sng" algn="ctr">
                       <a:solidFill>
-                        <a:srgbClr val="CBD5E1"/>
+                        <a:srgbClr val="D7D7D7"/>
                       </a:solidFill>
                       <a:prstDash val="solid"/>
                       <a:round/>
@@ -18515,7 +18686,7 @@
                     </a:lnL>
                     <a:lnR w="9525" cap="flat" cmpd="sng" algn="ctr">
                       <a:solidFill>
-                        <a:srgbClr val="CBD5E1"/>
+                        <a:srgbClr val="D7D7D7"/>
                       </a:solidFill>
                       <a:prstDash val="solid"/>
                       <a:round/>
@@ -18524,7 +18695,7 @@
                     </a:lnR>
                     <a:lnT w="9525" cap="flat" cmpd="sng" algn="ctr">
                       <a:solidFill>
-                        <a:srgbClr val="CBD5E1"/>
+                        <a:srgbClr val="D7D7D7"/>
                       </a:solidFill>
                       <a:prstDash val="solid"/>
                       <a:round/>
@@ -18533,7 +18704,7 @@
                     </a:lnT>
                     <a:lnB w="9525" cap="flat" cmpd="sng" algn="ctr">
                       <a:solidFill>
-                        <a:srgbClr val="CBD5E1"/>
+                        <a:srgbClr val="D7D7D7"/>
                       </a:solidFill>
                       <a:prstDash val="solid"/>
                       <a:round/>
@@ -18567,7 +18738,7 @@
                   <a:tcPr marL="91440" marR="91440" marT="54864" marB="54864" anchor="ctr">
                     <a:lnL w="9525" cap="flat" cmpd="sng" algn="ctr">
                       <a:solidFill>
-                        <a:srgbClr val="CBD5E1"/>
+                        <a:srgbClr val="D7D7D7"/>
                       </a:solidFill>
                       <a:prstDash val="solid"/>
                       <a:round/>
@@ -18576,7 +18747,7 @@
                     </a:lnL>
                     <a:lnR w="9525" cap="flat" cmpd="sng" algn="ctr">
                       <a:solidFill>
-                        <a:srgbClr val="CBD5E1"/>
+                        <a:srgbClr val="D7D7D7"/>
                       </a:solidFill>
                       <a:prstDash val="solid"/>
                       <a:round/>
@@ -18585,7 +18756,7 @@
                     </a:lnR>
                     <a:lnT w="9525" cap="flat" cmpd="sng" algn="ctr">
                       <a:solidFill>
-                        <a:srgbClr val="CBD5E1"/>
+                        <a:srgbClr val="D7D7D7"/>
                       </a:solidFill>
                       <a:prstDash val="solid"/>
                       <a:round/>
@@ -18594,7 +18765,7 @@
                     </a:lnT>
                     <a:lnB w="9525" cap="flat" cmpd="sng" algn="ctr">
                       <a:solidFill>
-                        <a:srgbClr val="CBD5E1"/>
+                        <a:srgbClr val="D7D7D7"/>
                       </a:solidFill>
                       <a:prstDash val="solid"/>
                       <a:round/>
@@ -18630,7 +18801,7 @@
                   <a:tcPr marL="91440" marR="91440" marT="54864" marB="54864" anchor="ctr">
                     <a:lnL w="9525" cap="flat" cmpd="sng" algn="ctr">
                       <a:solidFill>
-                        <a:srgbClr val="CBD5E1"/>
+                        <a:srgbClr val="D7D7D7"/>
                       </a:solidFill>
                       <a:prstDash val="solid"/>
                       <a:round/>
@@ -18639,7 +18810,7 @@
                     </a:lnL>
                     <a:lnR w="9525" cap="flat" cmpd="sng" algn="ctr">
                       <a:solidFill>
-                        <a:srgbClr val="CBD5E1"/>
+                        <a:srgbClr val="D7D7D7"/>
                       </a:solidFill>
                       <a:prstDash val="solid"/>
                       <a:round/>
@@ -18648,7 +18819,7 @@
                     </a:lnR>
                     <a:lnT w="9525" cap="flat" cmpd="sng" algn="ctr">
                       <a:solidFill>
-                        <a:srgbClr val="CBD5E1"/>
+                        <a:srgbClr val="D7D7D7"/>
                       </a:solidFill>
                       <a:prstDash val="solid"/>
                       <a:round/>
@@ -18657,7 +18828,7 @@
                     </a:lnT>
                     <a:lnB w="9525" cap="flat" cmpd="sng" algn="ctr">
                       <a:solidFill>
-                        <a:srgbClr val="CBD5E1"/>
+                        <a:srgbClr val="D7D7D7"/>
                       </a:solidFill>
                       <a:prstDash val="solid"/>
                       <a:round/>
@@ -18691,7 +18862,7 @@
                   <a:tcPr marL="91440" marR="91440" marT="54864" marB="54864" anchor="ctr">
                     <a:lnL w="9525" cap="flat" cmpd="sng" algn="ctr">
                       <a:solidFill>
-                        <a:srgbClr val="CBD5E1"/>
+                        <a:srgbClr val="D7D7D7"/>
                       </a:solidFill>
                       <a:prstDash val="solid"/>
                       <a:round/>
@@ -18700,7 +18871,7 @@
                     </a:lnL>
                     <a:lnR w="9525" cap="flat" cmpd="sng" algn="ctr">
                       <a:solidFill>
-                        <a:srgbClr val="CBD5E1"/>
+                        <a:srgbClr val="D7D7D7"/>
                       </a:solidFill>
                       <a:prstDash val="solid"/>
                       <a:round/>
@@ -18709,7 +18880,7 @@
                     </a:lnR>
                     <a:lnT w="9525" cap="flat" cmpd="sng" algn="ctr">
                       <a:solidFill>
-                        <a:srgbClr val="CBD5E1"/>
+                        <a:srgbClr val="D7D7D7"/>
                       </a:solidFill>
                       <a:prstDash val="solid"/>
                       <a:round/>
@@ -18718,7 +18889,7 @@
                     </a:lnT>
                     <a:lnB w="9525" cap="flat" cmpd="sng" algn="ctr">
                       <a:solidFill>
-                        <a:srgbClr val="CBD5E1"/>
+                        <a:srgbClr val="D7D7D7"/>
                       </a:solidFill>
                       <a:prstDash val="solid"/>
                       <a:round/>
@@ -18752,7 +18923,7 @@
                   <a:tcPr marL="91440" marR="91440" marT="54864" marB="54864" anchor="ctr">
                     <a:lnL w="9525" cap="flat" cmpd="sng" algn="ctr">
                       <a:solidFill>
-                        <a:srgbClr val="CBD5E1"/>
+                        <a:srgbClr val="D7D7D7"/>
                       </a:solidFill>
                       <a:prstDash val="solid"/>
                       <a:round/>
@@ -18761,7 +18932,7 @@
                     </a:lnL>
                     <a:lnR w="9525" cap="flat" cmpd="sng" algn="ctr">
                       <a:solidFill>
-                        <a:srgbClr val="CBD5E1"/>
+                        <a:srgbClr val="D7D7D7"/>
                       </a:solidFill>
                       <a:prstDash val="solid"/>
                       <a:round/>
@@ -18770,7 +18941,7 @@
                     </a:lnR>
                     <a:lnT w="9525" cap="flat" cmpd="sng" algn="ctr">
                       <a:solidFill>
-                        <a:srgbClr val="CBD5E1"/>
+                        <a:srgbClr val="D7D7D7"/>
                       </a:solidFill>
                       <a:prstDash val="solid"/>
                       <a:round/>
@@ -18779,7 +18950,7 @@
                     </a:lnT>
                     <a:lnB w="9525" cap="flat" cmpd="sng" algn="ctr">
                       <a:solidFill>
-                        <a:srgbClr val="CBD5E1"/>
+                        <a:srgbClr val="D7D7D7"/>
                       </a:solidFill>
                       <a:prstDash val="solid"/>
                       <a:round/>
@@ -18813,7 +18984,7 @@
                   <a:tcPr marL="91440" marR="91440" marT="54864" marB="54864" anchor="ctr">
                     <a:lnL w="9525" cap="flat" cmpd="sng" algn="ctr">
                       <a:solidFill>
-                        <a:srgbClr val="CBD5E1"/>
+                        <a:srgbClr val="D7D7D7"/>
                       </a:solidFill>
                       <a:prstDash val="solid"/>
                       <a:round/>
@@ -18822,7 +18993,7 @@
                     </a:lnL>
                     <a:lnR w="9525" cap="flat" cmpd="sng" algn="ctr">
                       <a:solidFill>
-                        <a:srgbClr val="CBD5E1"/>
+                        <a:srgbClr val="D7D7D7"/>
                       </a:solidFill>
                       <a:prstDash val="solid"/>
                       <a:round/>
@@ -18831,7 +19002,7 @@
                     </a:lnR>
                     <a:lnT w="9525" cap="flat" cmpd="sng" algn="ctr">
                       <a:solidFill>
-                        <a:srgbClr val="CBD5E1"/>
+                        <a:srgbClr val="D7D7D7"/>
                       </a:solidFill>
                       <a:prstDash val="solid"/>
                       <a:round/>
@@ -18840,7 +19011,7 @@
                     </a:lnT>
                     <a:lnB w="9525" cap="flat" cmpd="sng" algn="ctr">
                       <a:solidFill>
-                        <a:srgbClr val="CBD5E1"/>
+                        <a:srgbClr val="D7D7D7"/>
                       </a:solidFill>
                       <a:prstDash val="solid"/>
                       <a:round/>
@@ -18859,7 +19030,7 @@
       </p:graphicFrame>
       <p:sp>
         <p:nvSpPr>
-          <p:cNvPr id="4" name="text-238"/>
+          <p:cNvPr id="4" name="text-239"/>
           <p:cNvSpPr txBox="1"/>
           <p:nvPr/>
         </p:nvSpPr>
@@ -18990,20 +19161,31 @@
               <a:buNone/>
             </a:pPr>
             <a:r>
-              <a:rPr lang="en-US" sz="2800" b="1" dirty="0">
+              <a:rPr lang="en-US" sz="2600" b="1" dirty="0">
                 <a:solidFill>
                   <a:schemeClr val="tx2"/>
                 </a:solidFill>
               </a:rPr>
-              <a:t>Every answer ships with its own receipts</a:t>
-            </a:r>
-            <a:endParaRPr lang="en-US" sz="2800" dirty="0"/>
-          </a:p>
-        </p:txBody>
-      </p:sp>
-      <p:sp>
-        <p:nvSpPr>
-          <p:cNvPr id="3" name="answer-card-239"/>
+              <a:t>Every answer ships</a:t>
+            </a:r>
+            <a:pPr algn="l" indent="0" marL="0">
+              <a:buNone/>
+            </a:pPr>
+            <a:r>
+              <a:rPr lang="en-US" sz="2600" b="1" dirty="0">
+                <a:solidFill>
+                  <a:srgbClr val="8C8C8C"/>
+                </a:solidFill>
+              </a:rPr>
+              <a:t> with its own receipts</a:t>
+            </a:r>
+            <a:endParaRPr lang="en-US" sz="2600" dirty="0"/>
+          </a:p>
+        </p:txBody>
+      </p:sp>
+      <p:sp>
+        <p:nvSpPr>
+          <p:cNvPr id="3" name="answer-card-240"/>
           <p:cNvSpPr/>
           <p:nvPr/>
         </p:nvSpPr>
@@ -19014,7 +19196,7 @@
           </a:xfrm>
           <a:prstGeom prst="roundRect">
             <a:avLst>
-              <a:gd name="adj" fmla="val 1538"/>
+              <a:gd name="adj" fmla="val 962"/>
             </a:avLst>
           </a:prstGeom>
           <a:solidFill>
@@ -19022,29 +19204,22 @@
           </a:solidFill>
           <a:ln w="12700">
             <a:solidFill>
-              <a:srgbClr val="CBD5E1"/>
+              <a:srgbClr val="D7D7D7"/>
             </a:solidFill>
             <a:prstDash val="solid"/>
           </a:ln>
-          <a:effectLst>
-            <a:outerShdw sx="100000" sy="100000" kx="0" ky="0" algn="bl" rotWithShape="0" blurRad="76200" dist="25400" dir="5400000">
-              <a:srgbClr val="0F172A">
-                <a:alpha val="12000"/>
-              </a:srgbClr>
-            </a:outerShdw>
-          </a:effectLst>
-        </p:spPr>
-      </p:sp>
-      <p:sp>
-        <p:nvSpPr>
-          <p:cNvPr id="4" name="text-240"/>
+        </p:spPr>
+      </p:sp>
+      <p:sp>
+        <p:nvSpPr>
+          <p:cNvPr id="4" name="text-241"/>
           <p:cNvSpPr txBox="1"/>
           <p:nvPr/>
         </p:nvSpPr>
         <p:spPr>
           <a:xfrm>
-            <a:off x="822960" y="1554480"/>
-            <a:ext cx="4846320" cy="365760"/>
+            <a:off x="822960" y="1536192"/>
+            <a:ext cx="4846320" cy="320040"/>
           </a:xfrm>
           <a:prstGeom prst="rect">
             <a:avLst/>
@@ -19060,12 +19235,81 @@
               <a:buNone/>
             </a:pPr>
             <a:r>
-              <a:rPr lang="en-US" sz="1400" i="1" dirty="0">
+              <a:rPr lang="en-US" sz="1200" i="1" dirty="0">
                 <a:solidFill>
                   <a:schemeClr val="accent6"/>
                 </a:solidFill>
               </a:rPr>
-              <a:t>“What were the Q3 board deck revenue figures?”</a:t>
+              <a:t>“What were the Q3 board deck revenue figures?”  ·  John Tan</a:t>
+            </a:r>
+            <a:endParaRPr lang="en-US" sz="1200" dirty="0"/>
+          </a:p>
+        </p:txBody>
+      </p:sp>
+      <p:sp>
+        <p:nvSpPr>
+          <p:cNvPr id="5" name="text-242"/>
+          <p:cNvSpPr txBox="1"/>
+          <p:nvPr/>
+        </p:nvSpPr>
+        <p:spPr>
+          <a:xfrm>
+            <a:off x="822960" y="1901952"/>
+            <a:ext cx="4846320" cy="960120"/>
+          </a:xfrm>
+          <a:prstGeom prst="rect">
+            <a:avLst/>
+          </a:prstGeom>
+          <a:noFill/>
+          <a:ln/>
+        </p:spPr>
+        <p:txBody>
+          <a:bodyPr wrap="square" lIns="0" tIns="0" rIns="0" bIns="0" rtlCol="0" anchor="t"/>
+          <a:lstStyle/>
+          <a:p>
+            <a:pPr algn="l" indent="0" marL="0">
+              <a:buNone/>
+            </a:pPr>
+            <a:r>
+              <a:rPr lang="en-US" sz="1400" dirty="0">
+                <a:solidFill>
+                  <a:schemeClr val="tx1"/>
+                </a:solidFill>
+              </a:rPr>
+              <a:t>Q3 2026 revenue: SGD 48.6 million, up 18% year on year (Q3 2025: SGD 41.2 million). </a:t>
+            </a:r>
+            <a:pPr algn="l" indent="0" marL="0">
+              <a:buNone/>
+            </a:pPr>
+            <a:r>
+              <a:rPr lang="en-US" sz="1400" b="1" dirty="0">
+                <a:solidFill>
+                  <a:schemeClr val="accent1"/>
+                </a:solidFill>
+              </a:rPr>
+              <a:t>[E4]</a:t>
+            </a:r>
+            <a:pPr algn="l" indent="0" marL="0">
+              <a:buNone/>
+            </a:pPr>
+            <a:r>
+              <a:rPr lang="en-US" sz="1400" dirty="0">
+                <a:solidFill>
+                  <a:schemeClr val="tx1"/>
+                </a:solidFill>
+              </a:rPr>
+              <a:t> Q4 2026 revenue guidance: SGD 50 to 52 million. </a:t>
+            </a:r>
+            <a:pPr algn="l" indent="0" marL="0">
+              <a:buNone/>
+            </a:pPr>
+            <a:r>
+              <a:rPr lang="en-US" sz="1400" b="1" dirty="0">
+                <a:solidFill>
+                  <a:schemeClr val="accent1"/>
+                </a:solidFill>
+              </a:rPr>
+              <a:t>[E1]</a:t>
             </a:r>
             <a:endParaRPr lang="en-US" sz="1400" dirty="0"/>
           </a:p>
@@ -19073,98 +19317,112 @@
       </p:sp>
       <p:sp>
         <p:nvSpPr>
-          <p:cNvPr id="5" name="text-241"/>
-          <p:cNvSpPr txBox="1"/>
-          <p:nvPr/>
-        </p:nvSpPr>
-        <p:spPr>
-          <a:xfrm>
-            <a:off x="822960" y="2011680"/>
-            <a:ext cx="4846320" cy="868680"/>
-          </a:xfrm>
-          <a:prstGeom prst="rect">
-            <a:avLst/>
-          </a:prstGeom>
-          <a:noFill/>
-          <a:ln/>
-        </p:spPr>
-        <p:txBody>
-          <a:bodyPr wrap="square" lIns="0" tIns="0" rIns="0" bIns="0" rtlCol="0" anchor="t"/>
-          <a:lstStyle/>
-          <a:p>
-            <a:pPr algn="l" indent="0" marL="0">
-              <a:buNone/>
-            </a:pPr>
-            <a:r>
-              <a:rPr lang="en-US" sz="1600" dirty="0">
-                <a:solidFill>
-                  <a:schemeClr val="tx1"/>
-                </a:solidFill>
-              </a:rPr>
-              <a:t>Q3 2026 revenue was SGD 48.6 million, up 18% year on year </a:t>
-            </a:r>
-            <a:pPr algn="l" indent="0" marL="0">
-              <a:buNone/>
-            </a:pPr>
-            <a:r>
-              <a:rPr lang="en-US" sz="1600" b="1" dirty="0">
-                <a:solidFill>
-                  <a:schemeClr val="accent4"/>
-                </a:solidFill>
-              </a:rPr>
-              <a:t>[1]</a:t>
-            </a:r>
-            <a:pPr algn="l" indent="0" marL="0">
-              <a:buNone/>
-            </a:pPr>
-            <a:r>
-              <a:rPr lang="en-US" sz="1600" dirty="0">
-                <a:solidFill>
-                  <a:schemeClr val="tx1"/>
-                </a:solidFill>
-              </a:rPr>
-              <a:t>. Q4 guidance is SGD 50 to 52 million </a:t>
-            </a:r>
-            <a:pPr algn="l" indent="0" marL="0">
-              <a:buNone/>
-            </a:pPr>
-            <a:r>
-              <a:rPr lang="en-US" sz="1600" b="1" dirty="0">
-                <a:solidFill>
-                  <a:schemeClr val="accent4"/>
-                </a:solidFill>
-              </a:rPr>
-              <a:t>[1]</a:t>
-            </a:r>
-            <a:pPr algn="l" indent="0" marL="0">
-              <a:buNone/>
-            </a:pPr>
-            <a:r>
-              <a:rPr lang="en-US" sz="1600" dirty="0">
-                <a:solidFill>
-                  <a:schemeClr val="tx1"/>
-                </a:solidFill>
-              </a:rPr>
-              <a:t>.</a:t>
-            </a:r>
-            <a:endParaRPr lang="en-US" sz="1600" dirty="0"/>
-          </a:p>
-        </p:txBody>
-      </p:sp>
-      <p:sp>
-        <p:nvSpPr>
-          <p:cNvPr id="6" name="receipt-line-242"/>
+          <p:cNvPr id="6" name="coverage-tile-243"/>
           <p:cNvSpPr/>
           <p:nvPr/>
         </p:nvSpPr>
         <p:spPr>
           <a:xfrm>
-            <a:off x="822960" y="3017520"/>
-            <a:ext cx="4846320" cy="365760"/>
+            <a:off x="822960" y="2971800"/>
+            <a:ext cx="1463040" cy="1143000"/>
           </a:xfrm>
           <a:prstGeom prst="roundRect">
             <a:avLst>
-              <a:gd name="adj" fmla="val 12500"/>
+              <a:gd name="adj" fmla="val 4000"/>
+            </a:avLst>
+          </a:prstGeom>
+          <a:solidFill>
+            <a:srgbClr val="549F58"/>
+          </a:solidFill>
+          <a:ln/>
+        </p:spPr>
+      </p:sp>
+      <p:sp>
+        <p:nvSpPr>
+          <p:cNvPr id="7" name="text-244"/>
+          <p:cNvSpPr txBox="1"/>
+          <p:nvPr/>
+        </p:nvSpPr>
+        <p:spPr>
+          <a:xfrm>
+            <a:off x="932688" y="3035808"/>
+            <a:ext cx="1280160" cy="548640"/>
+          </a:xfrm>
+          <a:prstGeom prst="rect">
+            <a:avLst/>
+          </a:prstGeom>
+          <a:noFill/>
+          <a:ln/>
+        </p:spPr>
+        <p:txBody>
+          <a:bodyPr wrap="square" lIns="0" tIns="0" rIns="0" bIns="0" rtlCol="0" anchor="t"/>
+          <a:lstStyle/>
+          <a:p>
+            <a:pPr algn="l" indent="0" marL="0">
+              <a:buNone/>
+            </a:pPr>
+            <a:r>
+              <a:rPr lang="en-US" sz="3000" b="1" dirty="0">
+                <a:solidFill>
+                  <a:schemeClr val="bg1"/>
+                </a:solidFill>
+              </a:rPr>
+              <a:t>100%</a:t>
+            </a:r>
+            <a:endParaRPr lang="en-US" sz="3000" dirty="0"/>
+          </a:p>
+        </p:txBody>
+      </p:sp>
+      <p:sp>
+        <p:nvSpPr>
+          <p:cNvPr id="8" name="text-245"/>
+          <p:cNvSpPr txBox="1"/>
+          <p:nvPr/>
+        </p:nvSpPr>
+        <p:spPr>
+          <a:xfrm>
+            <a:off x="932688" y="3749040"/>
+            <a:ext cx="1280160" cy="274320"/>
+          </a:xfrm>
+          <a:prstGeom prst="rect">
+            <a:avLst/>
+          </a:prstGeom>
+          <a:noFill/>
+          <a:ln/>
+        </p:spPr>
+        <p:txBody>
+          <a:bodyPr wrap="square" lIns="0" tIns="0" rIns="0" bIns="0" rtlCol="0" anchor="t"/>
+          <a:lstStyle/>
+          <a:p>
+            <a:pPr algn="l" indent="0" marL="0">
+              <a:buNone/>
+            </a:pPr>
+            <a:r>
+              <a:rPr lang="en-US" sz="1000" dirty="0">
+                <a:solidFill>
+                  <a:schemeClr val="bg1"/>
+                </a:solidFill>
+              </a:rPr>
+              <a:t>Claim coverage</a:t>
+            </a:r>
+            <a:endParaRPr lang="en-US" sz="1000" dirty="0"/>
+          </a:p>
+        </p:txBody>
+      </p:sp>
+      <p:sp>
+        <p:nvSpPr>
+          <p:cNvPr id="9" name="stat-tile-246"/>
+          <p:cNvSpPr/>
+          <p:nvPr/>
+        </p:nvSpPr>
+        <p:spPr>
+          <a:xfrm>
+            <a:off x="2377440" y="2971800"/>
+            <a:ext cx="1024128" cy="1143000"/>
+          </a:xfrm>
+          <a:prstGeom prst="roundRect">
+            <a:avLst>
+              <a:gd name="adj" fmla="val 4464"/>
             </a:avLst>
           </a:prstGeom>
           <a:solidFill>
@@ -19175,14 +19433,14 @@
       </p:sp>
       <p:sp>
         <p:nvSpPr>
-          <p:cNvPr id="7" name="text-243"/>
+          <p:cNvPr id="10" name="text-247"/>
           <p:cNvSpPr txBox="1"/>
           <p:nvPr/>
         </p:nvSpPr>
         <p:spPr>
           <a:xfrm>
-            <a:off x="960120" y="3017520"/>
-            <a:ext cx="4663440" cy="365760"/>
+            <a:off x="2487168" y="3035808"/>
+            <a:ext cx="822960" cy="548640"/>
           </a:xfrm>
           <a:prstGeom prst="rect">
             <a:avLst/>
@@ -19191,38 +19449,74 @@
           <a:ln/>
         </p:spPr>
         <p:txBody>
-          <a:bodyPr wrap="square" lIns="0" tIns="0" rIns="0" bIns="0" rtlCol="0" anchor="ctr"/>
+          <a:bodyPr wrap="square" lIns="0" tIns="0" rIns="0" bIns="0" rtlCol="0" anchor="t"/>
           <a:lstStyle/>
           <a:p>
             <a:pPr algn="l" indent="0" marL="0">
               <a:buNone/>
             </a:pPr>
             <a:r>
-              <a:rPr lang="en-US" sz="1200" b="1" dirty="0">
-                <a:solidFill>
-                  <a:schemeClr val="accent4"/>
-                </a:solidFill>
-              </a:rPr>
-              <a:t>[1]  Board deck Q3 · Google Drive · supported</a:t>
-            </a:r>
-            <a:endParaRPr lang="en-US" sz="1200" dirty="0"/>
-          </a:p>
-        </p:txBody>
-      </p:sp>
-      <p:sp>
-        <p:nvSpPr>
-          <p:cNvPr id="8" name="receipt-line-244"/>
+              <a:rPr lang="en-US" sz="2600" b="1" dirty="0">
+                <a:solidFill>
+                  <a:schemeClr val="tx2"/>
+                </a:solidFill>
+              </a:rPr>
+              <a:t>8</a:t>
+            </a:r>
+            <a:endParaRPr lang="en-US" sz="2600" dirty="0"/>
+          </a:p>
+        </p:txBody>
+      </p:sp>
+      <p:sp>
+        <p:nvSpPr>
+          <p:cNvPr id="11" name="text-248"/>
+          <p:cNvSpPr txBox="1"/>
+          <p:nvPr/>
+        </p:nvSpPr>
+        <p:spPr>
+          <a:xfrm>
+            <a:off x="2487168" y="3749040"/>
+            <a:ext cx="868680" cy="274320"/>
+          </a:xfrm>
+          <a:prstGeom prst="rect">
+            <a:avLst/>
+          </a:prstGeom>
+          <a:noFill/>
+          <a:ln/>
+        </p:spPr>
+        <p:txBody>
+          <a:bodyPr wrap="square" lIns="0" tIns="0" rIns="0" bIns="0" rtlCol="0" anchor="t"/>
+          <a:lstStyle/>
+          <a:p>
+            <a:pPr algn="l" indent="0" marL="0">
+              <a:buNone/>
+            </a:pPr>
+            <a:r>
+              <a:rPr lang="en-US" sz="1000" dirty="0">
+                <a:solidFill>
+                  <a:schemeClr val="accent6"/>
+                </a:solidFill>
+              </a:rPr>
+              <a:t>claims</a:t>
+            </a:r>
+            <a:endParaRPr lang="en-US" sz="1000" dirty="0"/>
+          </a:p>
+        </p:txBody>
+      </p:sp>
+      <p:sp>
+        <p:nvSpPr>
+          <p:cNvPr id="12" name="stat-tile-249"/>
           <p:cNvSpPr/>
           <p:nvPr/>
         </p:nvSpPr>
         <p:spPr>
           <a:xfrm>
-            <a:off x="822960" y="3474720"/>
-            <a:ext cx="4846320" cy="365760"/>
+            <a:off x="3493008" y="2971800"/>
+            <a:ext cx="1024128" cy="1143000"/>
           </a:xfrm>
           <a:prstGeom prst="roundRect">
             <a:avLst>
-              <a:gd name="adj" fmla="val 12500"/>
+              <a:gd name="adj" fmla="val 4464"/>
             </a:avLst>
           </a:prstGeom>
           <a:solidFill>
@@ -19233,14 +19527,14 @@
       </p:sp>
       <p:sp>
         <p:nvSpPr>
-          <p:cNvPr id="9" name="text-245"/>
+          <p:cNvPr id="13" name="text-250"/>
           <p:cNvSpPr txBox="1"/>
           <p:nvPr/>
         </p:nvSpPr>
         <p:spPr>
           <a:xfrm>
-            <a:off x="960120" y="3474720"/>
-            <a:ext cx="4663440" cy="365760"/>
+            <a:off x="3602736" y="3035808"/>
+            <a:ext cx="822960" cy="548640"/>
           </a:xfrm>
           <a:prstGeom prst="rect">
             <a:avLst/>
@@ -19249,38 +19543,74 @@
           <a:ln/>
         </p:spPr>
         <p:txBody>
-          <a:bodyPr wrap="square" lIns="0" tIns="0" rIns="0" bIns="0" rtlCol="0" anchor="ctr"/>
+          <a:bodyPr wrap="square" lIns="0" tIns="0" rIns="0" bIns="0" rtlCol="0" anchor="t"/>
           <a:lstStyle/>
           <a:p>
             <a:pPr algn="l" indent="0" marL="0">
               <a:buNone/>
             </a:pPr>
             <a:r>
-              <a:rPr lang="en-US" sz="1200" b="1" dirty="0">
-                <a:solidFill>
-                  <a:schemeClr val="accent3"/>
-                </a:solidFill>
-              </a:rPr>
-              <a:t>Freshness: fresh · verified at source</a:t>
-            </a:r>
-            <a:endParaRPr lang="en-US" sz="1200" dirty="0"/>
-          </a:p>
-        </p:txBody>
-      </p:sp>
-      <p:sp>
-        <p:nvSpPr>
-          <p:cNvPr id="10" name="receipt-line-246"/>
+              <a:rPr lang="en-US" sz="2600" b="1" dirty="0">
+                <a:solidFill>
+                  <a:schemeClr val="tx2"/>
+                </a:solidFill>
+              </a:rPr>
+              <a:t>8</a:t>
+            </a:r>
+            <a:endParaRPr lang="en-US" sz="2600" dirty="0"/>
+          </a:p>
+        </p:txBody>
+      </p:sp>
+      <p:sp>
+        <p:nvSpPr>
+          <p:cNvPr id="14" name="text-251"/>
+          <p:cNvSpPr txBox="1"/>
+          <p:nvPr/>
+        </p:nvSpPr>
+        <p:spPr>
+          <a:xfrm>
+            <a:off x="3602736" y="3749040"/>
+            <a:ext cx="868680" cy="274320"/>
+          </a:xfrm>
+          <a:prstGeom prst="rect">
+            <a:avLst/>
+          </a:prstGeom>
+          <a:noFill/>
+          <a:ln/>
+        </p:spPr>
+        <p:txBody>
+          <a:bodyPr wrap="square" lIns="0" tIns="0" rIns="0" bIns="0" rtlCol="0" anchor="t"/>
+          <a:lstStyle/>
+          <a:p>
+            <a:pPr algn="l" indent="0" marL="0">
+              <a:buNone/>
+            </a:pPr>
+            <a:r>
+              <a:rPr lang="en-US" sz="1000" dirty="0">
+                <a:solidFill>
+                  <a:schemeClr val="accent6"/>
+                </a:solidFill>
+              </a:rPr>
+              <a:t>supported</a:t>
+            </a:r>
+            <a:endParaRPr lang="en-US" sz="1000" dirty="0"/>
+          </a:p>
+        </p:txBody>
+      </p:sp>
+      <p:sp>
+        <p:nvSpPr>
+          <p:cNvPr id="15" name="stat-tile-252"/>
           <p:cNvSpPr/>
           <p:nvPr/>
         </p:nvSpPr>
         <p:spPr>
           <a:xfrm>
-            <a:off x="822960" y="3931920"/>
-            <a:ext cx="4846320" cy="365760"/>
+            <a:off x="4608576" y="2971800"/>
+            <a:ext cx="1024128" cy="1143000"/>
           </a:xfrm>
           <a:prstGeom prst="roundRect">
             <a:avLst>
-              <a:gd name="adj" fmla="val 12500"/>
+              <a:gd name="adj" fmla="val 4464"/>
             </a:avLst>
           </a:prstGeom>
           <a:solidFill>
@@ -19291,14 +19621,14 @@
       </p:sp>
       <p:sp>
         <p:nvSpPr>
-          <p:cNvPr id="11" name="text-247"/>
+          <p:cNvPr id="16" name="text-253"/>
           <p:cNvSpPr txBox="1"/>
           <p:nvPr/>
         </p:nvSpPr>
         <p:spPr>
           <a:xfrm>
-            <a:off x="960120" y="3931920"/>
-            <a:ext cx="4663440" cy="365760"/>
+            <a:off x="4718304" y="3035808"/>
+            <a:ext cx="822960" cy="548640"/>
           </a:xfrm>
           <a:prstGeom prst="rect">
             <a:avLst/>
@@ -19307,56 +19637,97 @@
           <a:ln/>
         </p:spPr>
         <p:txBody>
-          <a:bodyPr wrap="square" lIns="0" tIns="0" rIns="0" bIns="0" rtlCol="0" anchor="ctr"/>
+          <a:bodyPr wrap="square" lIns="0" tIns="0" rIns="0" bIns="0" rtlCol="0" anchor="t"/>
           <a:lstStyle/>
           <a:p>
             <a:pPr algn="l" indent="0" marL="0">
               <a:buNone/>
             </a:pPr>
             <a:r>
-              <a:rPr lang="en-US" sz="1200" b="1" dirty="0">
-                <a:solidFill>
-                  <a:schemeClr val="accent1"/>
-                </a:solidFill>
-              </a:rPr>
-              <a:t>Grounded: 2/2 claims supported</a:t>
-            </a:r>
-            <a:endParaRPr lang="en-US" sz="1200" dirty="0"/>
-          </a:p>
-        </p:txBody>
-      </p:sp>
-      <p:sp>
-        <p:nvSpPr>
-          <p:cNvPr id="12" name="receipt-line-248"/>
+              <a:rPr lang="en-US" sz="2600" b="1" dirty="0">
+                <a:solidFill>
+                  <a:schemeClr val="accent2"/>
+                </a:solidFill>
+              </a:rPr>
+              <a:t>2</a:t>
+            </a:r>
+            <a:endParaRPr lang="en-US" sz="2600" dirty="0"/>
+          </a:p>
+        </p:txBody>
+      </p:sp>
+      <p:sp>
+        <p:nvSpPr>
+          <p:cNvPr id="17" name="text-254"/>
+          <p:cNvSpPr txBox="1"/>
+          <p:nvPr/>
+        </p:nvSpPr>
+        <p:spPr>
+          <a:xfrm>
+            <a:off x="4718304" y="3749040"/>
+            <a:ext cx="868680" cy="274320"/>
+          </a:xfrm>
+          <a:prstGeom prst="rect">
+            <a:avLst/>
+          </a:prstGeom>
+          <a:noFill/>
+          <a:ln/>
+        </p:spPr>
+        <p:txBody>
+          <a:bodyPr wrap="square" lIns="0" tIns="0" rIns="0" bIns="0" rtlCol="0" anchor="t"/>
+          <a:lstStyle/>
+          <a:p>
+            <a:pPr algn="l" indent="0" marL="0">
+              <a:buNone/>
+            </a:pPr>
+            <a:r>
+              <a:rPr lang="en-US" sz="1000" dirty="0">
+                <a:solidFill>
+                  <a:schemeClr val="accent6"/>
+                </a:solidFill>
+              </a:rPr>
+              <a:t>injection flags</a:t>
+            </a:r>
+            <a:endParaRPr lang="en-US" sz="1000" dirty="0"/>
+          </a:p>
+        </p:txBody>
+      </p:sp>
+      <p:sp>
+        <p:nvSpPr>
+          <p:cNvPr id="18" name="receipt-line-255"/>
           <p:cNvSpPr/>
           <p:nvPr/>
         </p:nvSpPr>
         <p:spPr>
           <a:xfrm>
-            <a:off x="822960" y="4389120"/>
-            <a:ext cx="4846320" cy="365760"/>
+            <a:off x="822960" y="4279392"/>
+            <a:ext cx="4846320" cy="310896"/>
           </a:xfrm>
           <a:prstGeom prst="roundRect">
             <a:avLst>
-              <a:gd name="adj" fmla="val 12500"/>
+              <a:gd name="adj" fmla="val 50000"/>
             </a:avLst>
           </a:prstGeom>
           <a:solidFill>
-            <a:schemeClr val="bg2"/>
+            <a:schemeClr val="bg1"/>
           </a:solidFill>
-          <a:ln/>
-        </p:spPr>
-      </p:sp>
-      <p:sp>
-        <p:nvSpPr>
-          <p:cNvPr id="13" name="text-249"/>
+          <a:ln w="12700">
+            <a:solidFill>
+              <a:srgbClr val="D7D7D7"/>
+            </a:solidFill>
+            <a:prstDash val="solid"/>
+          </a:ln>
+        </p:spPr>
+      </p:sp>
+      <p:sp>
+        <p:nvSpPr>
+          <p:cNvPr id="19" name="text-256"/>
           <p:cNvSpPr txBox="1"/>
           <p:nvPr/>
         </p:nvSpPr>
         <p:spPr>
           <a:xfrm>
-            <a:off x="960120" y="4389120"/>
-            <a:ext cx="4663440" cy="365760"/>
+            <a:off x="987552" y="4279392"/>
+            <a:ext cx="4572000" cy="310896"/>
           </a:xfrm>
           <a:prstGeom prst="rect">
             <a:avLst/>
@@ -19372,49 +19743,54 @@
               <a:buNone/>
             </a:pPr>
             <a:r>
-              <a:rPr lang="en-US" sz="1200" b="1" dirty="0">
-                <a:solidFill>
-                  <a:schemeClr val="accent1"/>
-                </a:solidFill>
-              </a:rPr>
-              <a:t>Access: allowed count only, no denials shown</a:t>
-            </a:r>
-            <a:endParaRPr lang="en-US" sz="1200" dirty="0"/>
-          </a:p>
-        </p:txBody>
-      </p:sp>
-      <p:sp>
-        <p:nvSpPr>
-          <p:cNvPr id="14" name="receipt-line-250"/>
+              <a:rPr lang="en-US" sz="1100" b="1" dirty="0">
+                <a:solidFill>
+                  <a:schemeClr val="tx2"/>
+                </a:solidFill>
+              </a:rPr>
+              <a:t>[E4]  Q3 2026 Board Deck · Google Drive · supported</a:t>
+            </a:r>
+            <a:endParaRPr lang="en-US" sz="1100" dirty="0"/>
+          </a:p>
+        </p:txBody>
+      </p:sp>
+      <p:sp>
+        <p:nvSpPr>
+          <p:cNvPr id="20" name="receipt-line-257"/>
           <p:cNvSpPr/>
           <p:nvPr/>
         </p:nvSpPr>
         <p:spPr>
           <a:xfrm>
-            <a:off x="822960" y="4846320"/>
-            <a:ext cx="4846320" cy="365760"/>
+            <a:off x="822960" y="4663440"/>
+            <a:ext cx="4846320" cy="310896"/>
           </a:xfrm>
           <a:prstGeom prst="roundRect">
             <a:avLst>
-              <a:gd name="adj" fmla="val 12500"/>
+              <a:gd name="adj" fmla="val 50000"/>
             </a:avLst>
           </a:prstGeom>
           <a:solidFill>
-            <a:schemeClr val="bg2"/>
+            <a:schemeClr val="bg1"/>
           </a:solidFill>
-          <a:ln/>
-        </p:spPr>
-      </p:sp>
-      <p:sp>
-        <p:nvSpPr>
-          <p:cNvPr id="15" name="text-251"/>
+          <a:ln w="12700">
+            <a:solidFill>
+              <a:srgbClr val="D7D7D7"/>
+            </a:solidFill>
+            <a:prstDash val="solid"/>
+          </a:ln>
+        </p:spPr>
+      </p:sp>
+      <p:sp>
+        <p:nvSpPr>
+          <p:cNvPr id="21" name="text-258"/>
           <p:cNvSpPr txBox="1"/>
           <p:nvPr/>
         </p:nvSpPr>
         <p:spPr>
           <a:xfrm>
-            <a:off x="960120" y="4846320"/>
-            <a:ext cx="4663440" cy="365760"/>
+            <a:off x="987552" y="4663440"/>
+            <a:ext cx="4572000" cy="310896"/>
           </a:xfrm>
           <a:prstGeom prst="rect">
             <a:avLst/>
@@ -19430,27 +19806,54 @@
               <a:buNone/>
             </a:pPr>
             <a:r>
-              <a:rPr lang="en-US" sz="1200" b="1" dirty="0">
-                <a:solidFill>
-                  <a:schemeClr val="accent5"/>
-                </a:solidFill>
-              </a:rPr>
-              <a:t>Audit event a3f9…  ·  chain verified  ·  answer by reveal only</a:t>
-            </a:r>
-            <a:endParaRPr lang="en-US" sz="1200" dirty="0"/>
-          </a:p>
-        </p:txBody>
-      </p:sp>
-      <p:sp>
-        <p:nvSpPr>
-          <p:cNvPr id="16" name="text-252"/>
+              <a:rPr lang="en-US" sz="1100" b="1" dirty="0">
+                <a:solidFill>
+                  <a:schemeClr val="accent3"/>
+                </a:solidFill>
+              </a:rPr>
+              <a:t>Freshness: mixed · stale failover runbook omitted</a:t>
+            </a:r>
+            <a:endParaRPr lang="en-US" sz="1100" dirty="0"/>
+          </a:p>
+        </p:txBody>
+      </p:sp>
+      <p:sp>
+        <p:nvSpPr>
+          <p:cNvPr id="22" name="receipt-line-259"/>
+          <p:cNvSpPr/>
+          <p:nvPr/>
+        </p:nvSpPr>
+        <p:spPr>
+          <a:xfrm>
+            <a:off x="822960" y="5047488"/>
+            <a:ext cx="4846320" cy="310896"/>
+          </a:xfrm>
+          <a:prstGeom prst="roundRect">
+            <a:avLst>
+              <a:gd name="adj" fmla="val 50000"/>
+            </a:avLst>
+          </a:prstGeom>
+          <a:solidFill>
+            <a:schemeClr val="bg1"/>
+          </a:solidFill>
+          <a:ln w="12700">
+            <a:solidFill>
+              <a:srgbClr val="D7D7D7"/>
+            </a:solidFill>
+            <a:prstDash val="solid"/>
+          </a:ln>
+        </p:spPr>
+      </p:sp>
+      <p:sp>
+        <p:nvSpPr>
+          <p:cNvPr id="23" name="text-260"/>
           <p:cNvSpPr txBox="1"/>
           <p:nvPr/>
         </p:nvSpPr>
         <p:spPr>
           <a:xfrm>
-            <a:off x="822960" y="5669280"/>
-            <a:ext cx="4846320" cy="274320"/>
+            <a:off x="987552" y="5047488"/>
+            <a:ext cx="4572000" cy="310896"/>
           </a:xfrm>
           <a:prstGeom prst="rect">
             <a:avLst/>
@@ -19459,6 +19862,105 @@
           <a:ln/>
         </p:spPr>
         <p:txBody>
+          <a:bodyPr wrap="square" lIns="0" tIns="0" rIns="0" bIns="0" rtlCol="0" anchor="ctr"/>
+          <a:lstStyle/>
+          <a:p>
+            <a:pPr algn="l" indent="0" marL="0">
+              <a:buNone/>
+            </a:pPr>
+            <a:r>
+              <a:rPr lang="en-US" sz="1100" b="1" dirty="0">
+                <a:solidFill>
+                  <a:schemeClr val="accent1"/>
+                </a:solidFill>
+              </a:rPr>
+              <a:t>Access: 11 documents allowed · policy ac-v2</a:t>
+            </a:r>
+            <a:endParaRPr lang="en-US" sz="1100" dirty="0"/>
+          </a:p>
+        </p:txBody>
+      </p:sp>
+      <p:sp>
+        <p:nvSpPr>
+          <p:cNvPr id="24" name="receipt-line-261"/>
+          <p:cNvSpPr/>
+          <p:nvPr/>
+        </p:nvSpPr>
+        <p:spPr>
+          <a:xfrm>
+            <a:off x="822960" y="5431536"/>
+            <a:ext cx="4846320" cy="310896"/>
+          </a:xfrm>
+          <a:prstGeom prst="roundRect">
+            <a:avLst>
+              <a:gd name="adj" fmla="val 50000"/>
+            </a:avLst>
+          </a:prstGeom>
+          <a:solidFill>
+            <a:schemeClr val="bg1"/>
+          </a:solidFill>
+          <a:ln w="12700">
+            <a:solidFill>
+              <a:srgbClr val="D7D7D7"/>
+            </a:solidFill>
+            <a:prstDash val="solid"/>
+          </a:ln>
+        </p:spPr>
+      </p:sp>
+      <p:sp>
+        <p:nvSpPr>
+          <p:cNvPr id="25" name="text-262"/>
+          <p:cNvSpPr txBox="1"/>
+          <p:nvPr/>
+        </p:nvSpPr>
+        <p:spPr>
+          <a:xfrm>
+            <a:off x="987552" y="5431536"/>
+            <a:ext cx="4572000" cy="310896"/>
+          </a:xfrm>
+          <a:prstGeom prst="rect">
+            <a:avLst/>
+          </a:prstGeom>
+          <a:noFill/>
+          <a:ln/>
+        </p:spPr>
+        <p:txBody>
+          <a:bodyPr wrap="square" lIns="0" tIns="0" rIns="0" bIns="0" rtlCol="0" anchor="ctr"/>
+          <a:lstStyle/>
+          <a:p>
+            <a:pPr algn="l" indent="0" marL="0">
+              <a:buNone/>
+            </a:pPr>
+            <a:r>
+              <a:rPr lang="en-US" sz="1100" b="1" dirty="0">
+                <a:solidFill>
+                  <a:schemeClr val="tx2"/>
+                </a:solidFill>
+              </a:rPr>
+              <a:t>Audit #f40c83b6 · hash chain verified</a:t>
+            </a:r>
+            <a:endParaRPr lang="en-US" sz="1100" dirty="0"/>
+          </a:p>
+        </p:txBody>
+      </p:sp>
+      <p:sp>
+        <p:nvSpPr>
+          <p:cNvPr id="26" name="text-263"/>
+          <p:cNvSpPr txBox="1"/>
+          <p:nvPr/>
+        </p:nvSpPr>
+        <p:spPr>
+          <a:xfrm>
+            <a:off x="822960" y="5833872"/>
+            <a:ext cx="4846320" cy="237744"/>
+          </a:xfrm>
+          <a:prstGeom prst="rect">
+            <a:avLst/>
+          </a:prstGeom>
+          <a:noFill/>
+          <a:ln/>
+        </p:spPr>
+        <p:txBody>
           <a:bodyPr wrap="square" lIns="0" tIns="0" rIns="0" bIns="0" rtlCol="0" anchor="t"/>
           <a:lstStyle/>
           <a:p>
@@ -19466,20 +19968,20 @@
               <a:buNone/>
             </a:pPr>
             <a:r>
-              <a:rPr lang="en-US" sz="1000" i="1" dirty="0">
+              <a:rPr lang="en-US" sz="950" i="1" dirty="0">
                 <a:solidFill>
                   <a:schemeClr val="accent6"/>
                 </a:solidFill>
               </a:rPr>
-              <a:t>Illustrative layout; values from the synthetic demo corpus.</a:t>
-            </a:r>
-            <a:endParaRPr lang="en-US" sz="1000" dirty="0"/>
-          </a:p>
-        </p:txBody>
-      </p:sp>
-      <p:sp>
-        <p:nvSpPr>
-          <p:cNvPr id="17" name="num-253"/>
+              <a:t>Real output on main (demo corpus, mock model), 16 Oct 2026.</a:t>
+            </a:r>
+            <a:endParaRPr lang="en-US" sz="950" dirty="0"/>
+          </a:p>
+        </p:txBody>
+      </p:sp>
+      <p:sp>
+        <p:nvSpPr>
+          <p:cNvPr id="27" name="num-264"/>
           <p:cNvSpPr txBox="1"/>
           <p:nvPr/>
         </p:nvSpPr>
@@ -19492,9 +19994,13 @@
             <a:avLst/>
           </a:prstGeom>
           <a:solidFill>
-            <a:schemeClr val="accent4"/>
+            <a:schemeClr val="bg1"/>
           </a:solidFill>
-          <a:ln/>
+          <a:ln w="12700">
+            <a:solidFill>
+              <a:srgbClr val="D7D7D7"/>
+            </a:solidFill>
+          </a:ln>
         </p:spPr>
         <p:txBody>
           <a:bodyPr wrap="square" lIns="0" tIns="0" rIns="0" bIns="0" rtlCol="0" anchor="ctr"/>
@@ -19504,20 +20010,20 @@
               <a:buNone/>
             </a:pPr>
             <a:r>
-              <a:rPr lang="en-US" sz="1600" b="1" dirty="0">
-                <a:solidFill>
-                  <a:schemeClr val="bg1"/>
-                </a:solidFill>
-              </a:rPr>
-              <a:t>1</a:t>
-            </a:r>
-            <a:endParaRPr lang="en-US" sz="1600" dirty="0"/>
-          </a:p>
-        </p:txBody>
-      </p:sp>
-      <p:sp>
-        <p:nvSpPr>
-          <p:cNvPr id="18" name="text-254"/>
+              <a:rPr lang="en-US" sz="1400" b="1" dirty="0">
+                <a:solidFill>
+                  <a:schemeClr val="tx2"/>
+                </a:solidFill>
+              </a:rPr>
+              <a:t>01</a:t>
+            </a:r>
+            <a:endParaRPr lang="en-US" sz="1400" dirty="0"/>
+          </a:p>
+        </p:txBody>
+      </p:sp>
+      <p:sp>
+        <p:nvSpPr>
+          <p:cNvPr id="28" name="text-265"/>
           <p:cNvSpPr txBox="1"/>
           <p:nvPr/>
         </p:nvSpPr>
@@ -19553,7 +20059,7 @@
       </p:sp>
       <p:sp>
         <p:nvSpPr>
-          <p:cNvPr id="19" name="text-255"/>
+          <p:cNvPr id="29" name="text-266"/>
           <p:cNvSpPr txBox="1"/>
           <p:nvPr/>
         </p:nvSpPr>
@@ -19589,7 +20095,7 @@
       </p:sp>
       <p:sp>
         <p:nvSpPr>
-          <p:cNvPr id="20" name="num-256"/>
+          <p:cNvPr id="30" name="num-267"/>
           <p:cNvSpPr txBox="1"/>
           <p:nvPr/>
         </p:nvSpPr>
@@ -19602,9 +20108,13 @@
             <a:avLst/>
           </a:prstGeom>
           <a:solidFill>
-            <a:schemeClr val="accent3"/>
+            <a:schemeClr val="bg1"/>
           </a:solidFill>
-          <a:ln/>
+          <a:ln w="12700">
+            <a:solidFill>
+              <a:srgbClr val="D7D7D7"/>
+            </a:solidFill>
+          </a:ln>
         </p:spPr>
         <p:txBody>
           <a:bodyPr wrap="square" lIns="0" tIns="0" rIns="0" bIns="0" rtlCol="0" anchor="ctr"/>
@@ -19614,20 +20124,20 @@
               <a:buNone/>
             </a:pPr>
             <a:r>
-              <a:rPr lang="en-US" sz="1600" b="1" dirty="0">
-                <a:solidFill>
-                  <a:schemeClr val="bg1"/>
-                </a:solidFill>
-              </a:rPr>
-              <a:t>2</a:t>
-            </a:r>
-            <a:endParaRPr lang="en-US" sz="1600" dirty="0"/>
-          </a:p>
-        </p:txBody>
-      </p:sp>
-      <p:sp>
-        <p:nvSpPr>
-          <p:cNvPr id="21" name="text-257"/>
+              <a:rPr lang="en-US" sz="1400" b="1" dirty="0">
+                <a:solidFill>
+                  <a:schemeClr val="tx2"/>
+                </a:solidFill>
+              </a:rPr>
+              <a:t>02</a:t>
+            </a:r>
+            <a:endParaRPr lang="en-US" sz="1400" dirty="0"/>
+          </a:p>
+        </p:txBody>
+      </p:sp>
+      <p:sp>
+        <p:nvSpPr>
+          <p:cNvPr id="31" name="text-268"/>
           <p:cNvSpPr txBox="1"/>
           <p:nvPr/>
         </p:nvSpPr>
@@ -19663,7 +20173,7 @@
       </p:sp>
       <p:sp>
         <p:nvSpPr>
-          <p:cNvPr id="22" name="text-258"/>
+          <p:cNvPr id="32" name="text-269"/>
           <p:cNvSpPr txBox="1"/>
           <p:nvPr/>
         </p:nvSpPr>
@@ -19699,7 +20209,7 @@
       </p:sp>
       <p:sp>
         <p:nvSpPr>
-          <p:cNvPr id="23" name="num-259"/>
+          <p:cNvPr id="33" name="num-270"/>
           <p:cNvSpPr txBox="1"/>
           <p:nvPr/>
         </p:nvSpPr>
@@ -19724,20 +20234,20 @@
               <a:buNone/>
             </a:pPr>
             <a:r>
-              <a:rPr lang="en-US" sz="1600" b="1" dirty="0">
+              <a:rPr lang="en-US" sz="1400" b="1" dirty="0">
                 <a:solidFill>
                   <a:schemeClr val="bg1"/>
                 </a:solidFill>
               </a:rPr>
-              <a:t>3</a:t>
-            </a:r>
-            <a:endParaRPr lang="en-US" sz="1600" dirty="0"/>
-          </a:p>
-        </p:txBody>
-      </p:sp>
-      <p:sp>
-        <p:nvSpPr>
-          <p:cNvPr id="24" name="text-260"/>
+              <a:t>03</a:t>
+            </a:r>
+            <a:endParaRPr lang="en-US" sz="1400" dirty="0"/>
+          </a:p>
+        </p:txBody>
+      </p:sp>
+      <p:sp>
+        <p:nvSpPr>
+          <p:cNvPr id="34" name="text-271"/>
           <p:cNvSpPr txBox="1"/>
           <p:nvPr/>
         </p:nvSpPr>
@@ -19773,7 +20283,7 @@
       </p:sp>
       <p:sp>
         <p:nvSpPr>
-          <p:cNvPr id="25" name="text-261"/>
+          <p:cNvPr id="35" name="text-272"/>
           <p:cNvSpPr txBox="1"/>
           <p:nvPr/>
         </p:nvSpPr>
@@ -19809,7 +20319,7 @@
       </p:sp>
       <p:sp>
         <p:nvSpPr>
-          <p:cNvPr id="26" name="num-262"/>
+          <p:cNvPr id="36" name="num-273"/>
           <p:cNvSpPr txBox="1"/>
           <p:nvPr/>
         </p:nvSpPr>
@@ -19834,20 +20344,20 @@
               <a:buNone/>
             </a:pPr>
             <a:r>
-              <a:rPr lang="en-US" sz="1600" b="1" dirty="0">
+              <a:rPr lang="en-US" sz="1400" b="1" dirty="0">
                 <a:solidFill>
                   <a:schemeClr val="bg1"/>
                 </a:solidFill>
               </a:rPr>
-              <a:t>4</a:t>
-            </a:r>
-            <a:endParaRPr lang="en-US" sz="1600" dirty="0"/>
-          </a:p>
-        </p:txBody>
-      </p:sp>
-      <p:sp>
-        <p:nvSpPr>
-          <p:cNvPr id="27" name="text-263"/>
+              <a:t>04</a:t>
+            </a:r>
+            <a:endParaRPr lang="en-US" sz="1400" dirty="0"/>
+          </a:p>
+        </p:txBody>
+      </p:sp>
+      <p:sp>
+        <p:nvSpPr>
+          <p:cNvPr id="37" name="text-274"/>
           <p:cNvSpPr txBox="1"/>
           <p:nvPr/>
         </p:nvSpPr>
@@ -19883,7 +20393,7 @@
       </p:sp>
       <p:sp>
         <p:nvSpPr>
-          <p:cNvPr id="28" name="text-264"/>
+          <p:cNvPr id="38" name="text-275"/>
           <p:cNvSpPr txBox="1"/>
           <p:nvPr/>
         </p:nvSpPr>
@@ -19919,7 +20429,7 @@
       </p:sp>
       <p:sp>
         <p:nvSpPr>
-          <p:cNvPr id="29" name="num-265"/>
+          <p:cNvPr id="39" name="num-276"/>
           <p:cNvSpPr txBox="1"/>
           <p:nvPr/>
         </p:nvSpPr>
@@ -19932,9 +20442,13 @@
             <a:avLst/>
           </a:prstGeom>
           <a:solidFill>
-            <a:schemeClr val="accent5"/>
+            <a:schemeClr val="bg1"/>
           </a:solidFill>
-          <a:ln/>
+          <a:ln w="12700">
+            <a:solidFill>
+              <a:srgbClr val="D7D7D7"/>
+            </a:solidFill>
+          </a:ln>
         </p:spPr>
         <p:txBody>
           <a:bodyPr wrap="square" lIns="0" tIns="0" rIns="0" bIns="0" rtlCol="0" anchor="ctr"/>
@@ -19944,20 +20458,20 @@
               <a:buNone/>
             </a:pPr>
             <a:r>
-              <a:rPr lang="en-US" sz="1600" b="1" dirty="0">
-                <a:solidFill>
-                  <a:schemeClr val="bg1"/>
-                </a:solidFill>
-              </a:rPr>
-              <a:t>5</a:t>
-            </a:r>
-            <a:endParaRPr lang="en-US" sz="1600" dirty="0"/>
-          </a:p>
-        </p:txBody>
-      </p:sp>
-      <p:sp>
-        <p:nvSpPr>
-          <p:cNvPr id="30" name="text-266"/>
+              <a:rPr lang="en-US" sz="1400" b="1" dirty="0">
+                <a:solidFill>
+                  <a:schemeClr val="tx2"/>
+                </a:solidFill>
+              </a:rPr>
+              <a:t>05</a:t>
+            </a:r>
+            <a:endParaRPr lang="en-US" sz="1400" dirty="0"/>
+          </a:p>
+        </p:txBody>
+      </p:sp>
+      <p:sp>
+        <p:nvSpPr>
+          <p:cNvPr id="40" name="text-277"/>
           <p:cNvSpPr txBox="1"/>
           <p:nvPr/>
         </p:nvSpPr>
@@ -19993,7 +20507,7 @@
       </p:sp>
       <p:sp>
         <p:nvSpPr>
-          <p:cNvPr id="31" name="text-267"/>
+          <p:cNvPr id="41" name="text-278"/>
           <p:cNvSpPr txBox="1"/>
           <p:nvPr/>
         </p:nvSpPr>
@@ -20085,45 +20599,45 @@
   <a:themeElements>
     <a:clrScheme name="Brain Sauce">
       <a:dk1>
-        <a:srgbClr val="0F172A"/>
+        <a:srgbClr val="1D1D1D"/>
       </a:dk1>
       <a:lt1>
         <a:srgbClr val="FFFFFF"/>
       </a:lt1>
       <a:dk2>
-        <a:srgbClr val="0B2545"/>
+        <a:srgbClr val="1D1D1D"/>
       </a:dk2>
       <a:lt2>
-        <a:srgbClr val="EEF3F8"/>
+        <a:srgbClr val="F5F5F5"/>
       </a:lt2>
       <a:accent1>
-        <a:srgbClr val="0E9F8E"/>
+        <a:srgbClr val="3F8243"/>
       </a:accent1>
       <a:accent2>
-        <a:srgbClr val="E5484D"/>
+        <a:srgbClr val="D9433B"/>
       </a:accent2>
       <a:accent3>
-        <a:srgbClr val="E9A23B"/>
+        <a:srgbClr val="C77A0A"/>
       </a:accent3>
       <a:accent4>
-        <a:srgbClr val="2F6FDB"/>
+        <a:srgbClr val="8C8C8C"/>
       </a:accent4>
       <a:accent5>
-        <a:srgbClr val="7C5CD6"/>
+        <a:srgbClr val="666666"/>
       </a:accent5>
       <a:accent6>
-        <a:srgbClr val="64748B"/>
+        <a:srgbClr val="737373"/>
       </a:accent6>
       <a:hlink>
-        <a:srgbClr val="2F6FDB"/>
+        <a:srgbClr val="8C8C8C"/>
       </a:hlink>
       <a:folHlink>
-        <a:srgbClr val="7C5CD6"/>
+        <a:srgbClr val="666666"/>
       </a:folHlink>
     </a:clrScheme>
     <a:fontScheme name="Brain Sauce">
       <a:majorFont>
-        <a:latin typeface="Calibri"/>
+        <a:latin typeface="Arial"/>
         <a:ea typeface=""/>
         <a:cs typeface=""/>
         <a:font script="Jpan" typeface="游ゴシック Light"/>
@@ -20175,7 +20689,7 @@
         <a:font script="Tfng" typeface="Ebrima"/>
       </a:majorFont>
       <a:minorFont>
-        <a:latin typeface="Calibri"/>
+        <a:latin typeface="Arial"/>
         <a:ea typeface=""/>
         <a:cs typeface=""/>
         <a:font script="Jpan" typeface="游ゴシック"/>

--- a/docs/presentations/internal-brain-architecture.pptx
+++ b/docs/presentations/internal-brain-architecture.pptx
@@ -8381,7 +8381,7 @@
                   <a:schemeClr val="accent1"/>
                 </a:solidFill>
               </a:rPr>
-              <a:t>676</a:t>
+              <a:t>686</a:t>
             </a:r>
             <a:endParaRPr lang="en-US" sz="4800" dirty="0"/>
           </a:p>

--- a/docs/presentations/internal-brain-architecture.pptx
+++ b/docs/presentations/internal-brain-architecture.pptx
@@ -121,21 +121,21 @@
   <p:extLst>
     <p:ext uri="{521415D9-36F7-43E2-AB2F-B90AF26B5E84}">
       <p14:sectionLst xmlns:p14="http://schemas.microsoft.com/office/powerpoint/2010/main">
-        <p14:section name="Story" id="{5de7c23d-48f0-3475-b68b-5804ee0f4823}">
+        <p14:section name="Story" id="{5b1323e2-dcd9-ca38-0a1c-8e5d1d5d5bdc}">
           <p14:sldIdLst>
             <p14:sldId id="256"/>
             <p14:sldId id="257"/>
             <p14:sldId id="258"/>
           </p14:sldIdLst>
         </p14:section>
-        <p14:section name="Architecture" id="{b569bb20-0b5d-39a4-0cb7-3cda96482380}">
+        <p14:section name="Architecture" id="{0f5a86be-fa76-5dbb-1672-9a541ddefd30}">
           <p14:sldIdLst>
             <p14:sldId id="259"/>
             <p14:sldId id="260"/>
             <p14:sldId id="261"/>
           </p14:sldIdLst>
         </p14:section>
-        <p14:section name="Proof" id="{fb6a4728-f364-47bc-8cd3-2dba567240c0}">
+        <p14:section name="Proof" id="{0715fa98-1f7e-39ad-9fcd-9f35f66c502a}">
           <p14:sldIdLst>
             <p14:sldId id="262"/>
             <p14:sldId id="263"/>
@@ -147,7 +147,7 @@
             <p14:sldId id="269"/>
           </p14:sldIdLst>
         </p14:section>
-        <p14:section name="Internal" id="{284762e1-6fd3-8c74-30b2-1519280a7324}">
+        <p14:section name="Internal" id="{bdede4d3-efe0-3b02-e967-58f958420ed0}">
           <p14:sldIdLst>
             <p14:sldId id="270"/>
           </p14:sldIdLst>
@@ -17304,7 +17304,7 @@
                   <a:schemeClr val="accent6"/>
                 </a:solidFill>
               </a:rPr>
-              <a:t>The saved answer is withheld too</a:t>
+              <a:t>Saved answer withheld; John's line leaves the access map</a:t>
             </a:r>
             <a:endParaRPr lang="en-US" sz="1300" dirty="0"/>
           </a:p>
@@ -17403,7 +17403,7 @@
                   <a:schemeClr val="accent6"/>
                 </a:solidFill>
               </a:rPr>
-              <a:t>Synthetic company and figures. Each scene is an automated test: test_ask_pipeline.py, test_permission_freshness.py and test_query_history_access.py.</a:t>
+              <a:t>Synthetic company and figures. Each scene is an automated test: test_ask_pipeline.py, test_permission_freshness.py, test_query_history_access.py and test_access_map.py.</a:t>
             </a:r>
             <a:endParaRPr lang="en-US" sz="1000" dirty="0"/>
           </a:p>

--- a/docs/presentations/internal-brain-architecture.pptx
+++ b/docs/presentations/internal-brain-architecture.pptx
@@ -121,21 +121,21 @@
   <p:extLst>
     <p:ext uri="{521415D9-36F7-43E2-AB2F-B90AF26B5E84}">
       <p14:sectionLst xmlns:p14="http://schemas.microsoft.com/office/powerpoint/2010/main">
-        <p14:section name="Story" id="{5b1323e2-dcd9-ca38-0a1c-8e5d1d5d5bdc}">
+        <p14:section name="Story" id="{ffffb220-cea4-52ae-2db6-75eefb886614}">
           <p14:sldIdLst>
             <p14:sldId id="256"/>
             <p14:sldId id="257"/>
             <p14:sldId id="258"/>
           </p14:sldIdLst>
         </p14:section>
-        <p14:section name="Architecture" id="{0f5a86be-fa76-5dbb-1672-9a541ddefd30}">
+        <p14:section name="Architecture" id="{9b6a9bae-2323-d218-088d-8ea58e8e3655}">
           <p14:sldIdLst>
             <p14:sldId id="259"/>
             <p14:sldId id="260"/>
             <p14:sldId id="261"/>
           </p14:sldIdLst>
         </p14:section>
-        <p14:section name="Proof" id="{0715fa98-1f7e-39ad-9fcd-9f35f66c502a}">
+        <p14:section name="Proof" id="{ff282f4d-9bc5-1743-2c94-a42cf8a87c81}">
           <p14:sldIdLst>
             <p14:sldId id="262"/>
             <p14:sldId id="263"/>
@@ -147,7 +147,7 @@
             <p14:sldId id="269"/>
           </p14:sldIdLst>
         </p14:section>
-        <p14:section name="Internal" id="{bdede4d3-efe0-3b02-e967-58f958420ed0}">
+        <p14:section name="Internal" id="{15df06e8-9ec6-a85b-b7f7-7a235962da75}">
           <p14:sldIdLst>
             <p14:sldId id="270"/>
           </p14:sldIdLst>
@@ -8381,7 +8381,7 @@
                   <a:schemeClr val="accent1"/>
                 </a:solidFill>
               </a:rPr>
-              <a:t>676</a:t>
+              <a:t>683</a:t>
             </a:r>
             <a:endParaRPr lang="en-US" sz="4800" dirty="0"/>
           </a:p>

--- a/docs/presentations/internal-brain-architecture.pptx
+++ b/docs/presentations/internal-brain-architecture.pptx
@@ -8381,7 +8381,7 @@
                   <a:schemeClr val="accent1"/>
                 </a:solidFill>
               </a:rPr>
-              <a:t>686</a:t>
+              <a:t>711</a:t>
             </a:r>
             <a:endParaRPr lang="en-US" sz="4800" dirty="0"/>
           </a:p>
